--- a/report/CS221_slide.pptx
+++ b/report/CS221_slide.pptx
@@ -4711,7 +4711,7 @@
     <p:bg>
       <p:bgPr>
         <a:solidFill>
-          <a:srgbClr val="FAFAF9"/>
+          <a:srgbClr val="0B1220"/>
         </a:solidFill>
         <a:effectLst/>
       </p:bgPr>
@@ -4732,13 +4732,13 @@
         <p:spPr>
           <a:xfrm>
             <a:off x="0" y="0"/>
-            <a:ext cx="310896" cy="6858000"/>
+            <a:ext cx="384048" cy="6858000"/>
           </a:xfrm>
           <a:prstGeom prst="rect">
             <a:avLst/>
           </a:prstGeom>
           <a:solidFill>
-            <a:srgbClr val="CCFBF1"/>
+            <a:srgbClr val="164E4A"/>
           </a:solidFill>
           <a:ln>
             <a:noFill/>
@@ -4797,7 +4797,7 @@
             <a:r>
               <a:rPr sz="4000" b="1" i="0">
                 <a:solidFill>
-                  <a:srgbClr val="0F172A"/>
+                  <a:srgbClr val="F2F6FB"/>
                 </a:solidFill>
                 <a:latin typeface="Calibri Light"/>
               </a:rPr>
@@ -4822,7 +4822,7 @@
             <a:avLst/>
           </a:prstGeom>
           <a:solidFill>
-            <a:srgbClr val="0D9488"/>
+            <a:srgbClr val="2DD4BF"/>
           </a:solidFill>
           <a:ln>
             <a:noFill/>
@@ -4876,7 +4876,7 @@
             <a:r>
               <a:rPr sz="1700" b="0" i="0">
                 <a:solidFill>
-                  <a:srgbClr val="0F766E"/>
+                  <a:srgbClr val="5EEAD4"/>
                 </a:solidFill>
                 <a:latin typeface="Calibri"/>
               </a:rPr>
@@ -4915,7 +4915,7 @@
             <a:r>
               <a:rPr sz="1150" b="0" i="0">
                 <a:solidFill>
-                  <a:srgbClr val="64748B"/>
+                  <a:srgbClr val="93A6C0"/>
                 </a:solidFill>
                 <a:latin typeface="Calibri"/>
               </a:rPr>
@@ -4931,7 +4931,7 @@
             <a:r>
               <a:rPr sz="1150" b="0" i="0">
                 <a:solidFill>
-                  <a:srgbClr val="64748B"/>
+                  <a:srgbClr val="93A6C0"/>
                 </a:solidFill>
                 <a:latin typeface="Calibri"/>
               </a:rPr>
@@ -4947,7 +4947,7 @@
             <a:r>
               <a:rPr sz="1150" b="0" i="0">
                 <a:solidFill>
-                  <a:srgbClr val="64748B"/>
+                  <a:srgbClr val="93A6C0"/>
                 </a:solidFill>
                 <a:latin typeface="Calibri"/>
               </a:rPr>
@@ -4963,7 +4963,7 @@
             <a:r>
               <a:rPr sz="1150" b="0" i="0">
                 <a:solidFill>
-                  <a:srgbClr val="64748B"/>
+                  <a:srgbClr val="93A6C0"/>
                 </a:solidFill>
                 <a:latin typeface="Calibri"/>
               </a:rPr>
@@ -5002,7 +5002,7 @@
             <a:r>
               <a:rPr sz="1150" b="0" i="0">
                 <a:solidFill>
-                  <a:srgbClr val="64748B"/>
+                  <a:srgbClr val="93A6C0"/>
                 </a:solidFill>
                 <a:latin typeface="Calibri"/>
               </a:rPr>
@@ -5018,7 +5018,7 @@
             <a:r>
               <a:rPr sz="1150" b="0" i="0">
                 <a:solidFill>
-                  <a:srgbClr val="64748B"/>
+                  <a:srgbClr val="93A6C0"/>
                 </a:solidFill>
                 <a:latin typeface="Calibri"/>
               </a:rPr>
@@ -5034,7 +5034,7 @@
             <a:r>
               <a:rPr sz="1150" b="0" i="0">
                 <a:solidFill>
-                  <a:srgbClr val="64748B"/>
+                  <a:srgbClr val="93A6C0"/>
                 </a:solidFill>
                 <a:latin typeface="Calibri"/>
               </a:rPr>
@@ -5057,7 +5057,7 @@
     <p:bg>
       <p:bgPr>
         <a:solidFill>
-          <a:srgbClr val="FAFAF9"/>
+          <a:srgbClr val="0B1220"/>
         </a:solidFill>
         <a:effectLst/>
       </p:bgPr>
@@ -5094,7 +5094,7 @@
             <a:r>
               <a:rPr sz="1050" b="1" i="0" spc="120">
                 <a:solidFill>
-                  <a:srgbClr val="0D9488"/>
+                  <a:srgbClr val="2DD4BF"/>
                 </a:solidFill>
                 <a:latin typeface="Calibri"/>
               </a:rPr>
@@ -5133,7 +5133,7 @@
             <a:r>
               <a:rPr sz="2900" b="1" i="0">
                 <a:solidFill>
-                  <a:srgbClr val="0F172A"/>
+                  <a:srgbClr val="F2F6FB"/>
                 </a:solidFill>
                 <a:latin typeface="Calibri Light"/>
               </a:rPr>
@@ -5157,7 +5157,7 @@
             <a:avLst/>
           </a:prstGeom>
           <a:solidFill>
-            <a:srgbClr val="0D9488"/>
+            <a:srgbClr val="2DD4BF"/>
           </a:solidFill>
           <a:ln>
             <a:noFill/>
@@ -5212,7 +5212,7 @@
             <a:r>
               <a:rPr sz="1100" b="0" i="0">
                 <a:solidFill>
-                  <a:srgbClr val="94A3B8"/>
+                  <a:srgbClr val="55688A"/>
                 </a:solidFill>
                 <a:latin typeface="Calibri"/>
               </a:rPr>
@@ -5231,7 +5231,7 @@
         </p:nvGraphicFramePr>
         <p:xfrm>
           <a:off x="731520" y="1901952"/>
-          <a:ext cx="6035040" cy="1682496"/>
+          <a:ext cx="5120640" cy="2084832"/>
         </p:xfrm>
         <a:graphic>
           <a:graphicData uri="http://schemas.openxmlformats.org/drawingml/2006/table">
@@ -5240,12 +5240,12 @@
                 <a:tableStyleId>{2D5ABB26-0587-4C30-8999-92F81FD0307C}</a:tableStyleId>
               </a:tblPr>
               <a:tblGrid>
-                <a:gridCol w="2194560"/>
-                <a:gridCol w="1463040"/>
-                <a:gridCol w="1188720"/>
-                <a:gridCol w="1188720"/>
+                <a:gridCol w="2011680"/>
+                <a:gridCol w="1143000"/>
+                <a:gridCol w="1005840"/>
+                <a:gridCol w="960120"/>
               </a:tblGrid>
-              <a:tr h="448056">
+              <a:tr h="548640">
                 <a:tc>
                   <a:txBody>
                     <a:bodyPr wrap="square"/>
@@ -5253,9 +5253,9 @@
                     <a:p>
                       <a:pPr algn="l"/>
                       <a:r>
-                        <a:rPr sz="1350" b="1" i="0">
-                          <a:solidFill>
-                            <a:srgbClr val="0F766E"/>
+                        <a:rPr sz="1450" b="1" i="0">
+                          <a:solidFill>
+                            <a:srgbClr val="5EEAD4"/>
                           </a:solidFill>
                           <a:latin typeface="Calibri"/>
                         </a:rPr>
@@ -5265,7 +5265,7 @@
                   </a:txBody>
                   <a:tcPr anchor="ctr" marL="100584" marR="100584" marT="36576" marB="36576">
                     <a:solidFill>
-                      <a:srgbClr val="F0FDFA"/>
+                      <a:srgbClr val="12303A"/>
                     </a:solidFill>
                   </a:tcPr>
                 </a:tc>
@@ -5276,9 +5276,9 @@
                     <a:p>
                       <a:pPr algn="r"/>
                       <a:r>
-                        <a:rPr sz="1350" b="1" i="0">
-                          <a:solidFill>
-                            <a:srgbClr val="0F766E"/>
+                        <a:rPr sz="1450" b="1" i="0">
+                          <a:solidFill>
+                            <a:srgbClr val="5EEAD4"/>
                           </a:solidFill>
                           <a:latin typeface="Calibri"/>
                         </a:rPr>
@@ -5288,7 +5288,7 @@
                   </a:txBody>
                   <a:tcPr anchor="ctr" marL="100584" marR="100584" marT="36576" marB="36576">
                     <a:solidFill>
-                      <a:srgbClr val="F0FDFA"/>
+                      <a:srgbClr val="12303A"/>
                     </a:solidFill>
                   </a:tcPr>
                 </a:tc>
@@ -5299,9 +5299,9 @@
                     <a:p>
                       <a:pPr algn="r"/>
                       <a:r>
-                        <a:rPr sz="1350" b="1" i="0">
-                          <a:solidFill>
-                            <a:srgbClr val="0F766E"/>
+                        <a:rPr sz="1450" b="1" i="0">
+                          <a:solidFill>
+                            <a:srgbClr val="5EEAD4"/>
                           </a:solidFill>
                           <a:latin typeface="Calibri"/>
                         </a:rPr>
@@ -5311,7 +5311,7 @@
                   </a:txBody>
                   <a:tcPr anchor="ctr" marL="100584" marR="100584" marT="36576" marB="36576">
                     <a:solidFill>
-                      <a:srgbClr val="F0FDFA"/>
+                      <a:srgbClr val="12303A"/>
                     </a:solidFill>
                   </a:tcPr>
                 </a:tc>
@@ -5322,9 +5322,9 @@
                     <a:p>
                       <a:pPr algn="r"/>
                       <a:r>
-                        <a:rPr sz="1350" b="1" i="0">
-                          <a:solidFill>
-                            <a:srgbClr val="0F766E"/>
+                        <a:rPr sz="1450" b="1" i="0">
+                          <a:solidFill>
+                            <a:srgbClr val="5EEAD4"/>
                           </a:solidFill>
                           <a:latin typeface="Calibri"/>
                         </a:rPr>
@@ -5334,12 +5334,12 @@
                   </a:txBody>
                   <a:tcPr anchor="ctr" marL="100584" marR="100584" marT="36576" marB="36576">
                     <a:solidFill>
-                      <a:srgbClr val="F0FDFA"/>
+                      <a:srgbClr val="12303A"/>
                     </a:solidFill>
                   </a:tcPr>
                 </a:tc>
               </a:tr>
-              <a:tr h="411480">
+              <a:tr h="512064">
                 <a:tc>
                   <a:txBody>
                     <a:bodyPr wrap="square"/>
@@ -5347,9 +5347,9 @@
                     <a:p>
                       <a:pPr algn="l"/>
                       <a:r>
-                        <a:rPr sz="1350" b="0" i="0">
-                          <a:solidFill>
-                            <a:srgbClr val="334155"/>
+                        <a:rPr sz="1450" b="0" i="0">
+                          <a:solidFill>
+                            <a:srgbClr val="C5D2E4"/>
                           </a:solidFill>
                           <a:latin typeface="Calibri"/>
                         </a:rPr>
@@ -5359,7 +5359,7 @@
                   </a:txBody>
                   <a:tcPr anchor="ctr" marL="100584" marR="100584" marT="36576" marB="36576">
                     <a:solidFill>
-                      <a:srgbClr val="FFFFFF"/>
+                      <a:srgbClr val="0E1929"/>
                     </a:solidFill>
                   </a:tcPr>
                 </a:tc>
@@ -5370,9 +5370,9 @@
                     <a:p>
                       <a:pPr algn="r"/>
                       <a:r>
-                        <a:rPr sz="1350" b="0" i="0">
-                          <a:solidFill>
-                            <a:srgbClr val="334155"/>
+                        <a:rPr sz="1450" b="0" i="0">
+                          <a:solidFill>
+                            <a:srgbClr val="C5D2E4"/>
                           </a:solidFill>
                           <a:latin typeface="Calibri"/>
                         </a:rPr>
@@ -5382,7 +5382,7 @@
                   </a:txBody>
                   <a:tcPr anchor="ctr" marL="100584" marR="100584" marT="36576" marB="36576">
                     <a:solidFill>
-                      <a:srgbClr val="FFFFFF"/>
+                      <a:srgbClr val="0E1929"/>
                     </a:solidFill>
                   </a:tcPr>
                 </a:tc>
@@ -5393,9 +5393,9 @@
                     <a:p>
                       <a:pPr algn="r"/>
                       <a:r>
-                        <a:rPr sz="1350" b="0" i="0">
-                          <a:solidFill>
-                            <a:srgbClr val="334155"/>
+                        <a:rPr sz="1450" b="0" i="0">
+                          <a:solidFill>
+                            <a:srgbClr val="C5D2E4"/>
                           </a:solidFill>
                           <a:latin typeface="Calibri"/>
                         </a:rPr>
@@ -5405,7 +5405,7 @@
                   </a:txBody>
                   <a:tcPr anchor="ctr" marL="100584" marR="100584" marT="36576" marB="36576">
                     <a:solidFill>
-                      <a:srgbClr val="FFFFFF"/>
+                      <a:srgbClr val="0E1929"/>
                     </a:solidFill>
                   </a:tcPr>
                 </a:tc>
@@ -5416,9 +5416,9 @@
                     <a:p>
                       <a:pPr algn="r"/>
                       <a:r>
-                        <a:rPr sz="1350" b="0" i="0">
-                          <a:solidFill>
-                            <a:srgbClr val="334155"/>
+                        <a:rPr sz="1450" b="0" i="0">
+                          <a:solidFill>
+                            <a:srgbClr val="C5D2E4"/>
                           </a:solidFill>
                           <a:latin typeface="Calibri"/>
                         </a:rPr>
@@ -5428,12 +5428,12 @@
                   </a:txBody>
                   <a:tcPr anchor="ctr" marL="100584" marR="100584" marT="36576" marB="36576">
                     <a:solidFill>
-                      <a:srgbClr val="FFFFFF"/>
+                      <a:srgbClr val="0E1929"/>
                     </a:solidFill>
                   </a:tcPr>
                 </a:tc>
               </a:tr>
-              <a:tr h="411480">
+              <a:tr h="512064">
                 <a:tc>
                   <a:txBody>
                     <a:bodyPr wrap="square"/>
@@ -5441,9 +5441,9 @@
                     <a:p>
                       <a:pPr algn="l"/>
                       <a:r>
-                        <a:rPr sz="1350" b="1" i="0">
-                          <a:solidFill>
-                            <a:srgbClr val="0F172A"/>
+                        <a:rPr sz="1450" b="1" i="0">
+                          <a:solidFill>
+                            <a:srgbClr val="F2F6FB"/>
                           </a:solidFill>
                           <a:latin typeface="Calibri"/>
                         </a:rPr>
@@ -5453,7 +5453,7 @@
                   </a:txBody>
                   <a:tcPr anchor="ctr" marL="100584" marR="100584" marT="36576" marB="36576">
                     <a:solidFill>
-                      <a:srgbClr val="F0FDFA"/>
+                      <a:srgbClr val="12303A"/>
                     </a:solidFill>
                   </a:tcPr>
                 </a:tc>
@@ -5464,9 +5464,9 @@
                     <a:p>
                       <a:pPr algn="r"/>
                       <a:r>
-                        <a:rPr sz="1350" b="1" i="0">
-                          <a:solidFill>
-                            <a:srgbClr val="0F172A"/>
+                        <a:rPr sz="1450" b="1" i="0">
+                          <a:solidFill>
+                            <a:srgbClr val="F2F6FB"/>
                           </a:solidFill>
                           <a:latin typeface="Calibri"/>
                         </a:rPr>
@@ -5476,7 +5476,7 @@
                   </a:txBody>
                   <a:tcPr anchor="ctr" marL="100584" marR="100584" marT="36576" marB="36576">
                     <a:solidFill>
-                      <a:srgbClr val="F0FDFA"/>
+                      <a:srgbClr val="12303A"/>
                     </a:solidFill>
                   </a:tcPr>
                 </a:tc>
@@ -5487,9 +5487,9 @@
                     <a:p>
                       <a:pPr algn="r"/>
                       <a:r>
-                        <a:rPr sz="1350" b="1" i="0">
-                          <a:solidFill>
-                            <a:srgbClr val="0F172A"/>
+                        <a:rPr sz="1450" b="1" i="0">
+                          <a:solidFill>
+                            <a:srgbClr val="F2F6FB"/>
                           </a:solidFill>
                           <a:latin typeface="Calibri"/>
                         </a:rPr>
@@ -5499,7 +5499,7 @@
                   </a:txBody>
                   <a:tcPr anchor="ctr" marL="100584" marR="100584" marT="36576" marB="36576">
                     <a:solidFill>
-                      <a:srgbClr val="F0FDFA"/>
+                      <a:srgbClr val="12303A"/>
                     </a:solidFill>
                   </a:tcPr>
                 </a:tc>
@@ -5510,9 +5510,9 @@
                     <a:p>
                       <a:pPr algn="r"/>
                       <a:r>
-                        <a:rPr sz="1350" b="1" i="0">
-                          <a:solidFill>
-                            <a:srgbClr val="0F172A"/>
+                        <a:rPr sz="1450" b="1" i="0">
+                          <a:solidFill>
+                            <a:srgbClr val="F2F6FB"/>
                           </a:solidFill>
                           <a:latin typeface="Calibri"/>
                         </a:rPr>
@@ -5522,12 +5522,12 @@
                   </a:txBody>
                   <a:tcPr anchor="ctr" marL="100584" marR="100584" marT="36576" marB="36576">
                     <a:solidFill>
-                      <a:srgbClr val="F0FDFA"/>
+                      <a:srgbClr val="12303A"/>
                     </a:solidFill>
                   </a:tcPr>
                 </a:tc>
               </a:tr>
-              <a:tr h="411480">
+              <a:tr h="512064">
                 <a:tc>
                   <a:txBody>
                     <a:bodyPr wrap="square"/>
@@ -5535,9 +5535,9 @@
                     <a:p>
                       <a:pPr algn="l"/>
                       <a:r>
-                        <a:rPr sz="1350" b="0" i="0">
-                          <a:solidFill>
-                            <a:srgbClr val="334155"/>
+                        <a:rPr sz="1450" b="0" i="0">
+                          <a:solidFill>
+                            <a:srgbClr val="C5D2E4"/>
                           </a:solidFill>
                           <a:latin typeface="Calibri"/>
                         </a:rPr>
@@ -5547,7 +5547,7 @@
                   </a:txBody>
                   <a:tcPr anchor="ctr" marL="100584" marR="100584" marT="36576" marB="36576">
                     <a:solidFill>
-                      <a:srgbClr val="FFFFFF"/>
+                      <a:srgbClr val="0E1929"/>
                     </a:solidFill>
                   </a:tcPr>
                 </a:tc>
@@ -5558,9 +5558,9 @@
                     <a:p>
                       <a:pPr algn="r"/>
                       <a:r>
-                        <a:rPr sz="1350" b="0" i="0">
-                          <a:solidFill>
-                            <a:srgbClr val="334155"/>
+                        <a:rPr sz="1450" b="0" i="0">
+                          <a:solidFill>
+                            <a:srgbClr val="C5D2E4"/>
                           </a:solidFill>
                           <a:latin typeface="Calibri"/>
                         </a:rPr>
@@ -5570,7 +5570,7 @@
                   </a:txBody>
                   <a:tcPr anchor="ctr" marL="100584" marR="100584" marT="36576" marB="36576">
                     <a:solidFill>
-                      <a:srgbClr val="FFFFFF"/>
+                      <a:srgbClr val="0E1929"/>
                     </a:solidFill>
                   </a:tcPr>
                 </a:tc>
@@ -5581,9 +5581,9 @@
                     <a:p>
                       <a:pPr algn="r"/>
                       <a:r>
-                        <a:rPr sz="1350" b="0" i="0">
-                          <a:solidFill>
-                            <a:srgbClr val="334155"/>
+                        <a:rPr sz="1450" b="0" i="0">
+                          <a:solidFill>
+                            <a:srgbClr val="C5D2E4"/>
                           </a:solidFill>
                           <a:latin typeface="Calibri"/>
                         </a:rPr>
@@ -5593,7 +5593,7 @@
                   </a:txBody>
                   <a:tcPr anchor="ctr" marL="100584" marR="100584" marT="36576" marB="36576">
                     <a:solidFill>
-                      <a:srgbClr val="FFFFFF"/>
+                      <a:srgbClr val="0E1929"/>
                     </a:solidFill>
                   </a:tcPr>
                 </a:tc>
@@ -5604,9 +5604,9 @@
                     <a:p>
                       <a:pPr algn="r"/>
                       <a:r>
-                        <a:rPr sz="1350" b="0" i="0">
-                          <a:solidFill>
-                            <a:srgbClr val="334155"/>
+                        <a:rPr sz="1450" b="0" i="0">
+                          <a:solidFill>
+                            <a:srgbClr val="C5D2E4"/>
                           </a:solidFill>
                           <a:latin typeface="Calibri"/>
                         </a:rPr>
@@ -5616,7 +5616,7 @@
                   </a:txBody>
                   <a:tcPr anchor="ctr" marL="100584" marR="100584" marT="36576" marB="36576">
                     <a:solidFill>
-                      <a:srgbClr val="FFFFFF"/>
+                      <a:srgbClr val="0E1929"/>
                     </a:solidFill>
                   </a:tcPr>
                 </a:tc>
@@ -5627,7 +5627,7 @@
       </p:graphicFrame>
       <p:pic>
         <p:nvPicPr>
-          <p:cNvPr id="7" name="Picture 6" descr="confusion_matrix_normalized.png"/>
+          <p:cNvPr id="7" name="Picture 6" descr="confusion_dark.png"/>
           <p:cNvPicPr>
             <a:picLocks noChangeAspect="1"/>
           </p:cNvPicPr>
@@ -5641,17 +5641,12 @@
         </p:blipFill>
         <p:spPr>
           <a:xfrm>
-            <a:off x="7178040" y="1828800"/>
-            <a:ext cx="4206240" cy="3574653"/>
+            <a:off x="6108192" y="1810512"/>
+            <a:ext cx="5257800" cy="4423092"/>
           </a:xfrm>
           <a:prstGeom prst="rect">
             <a:avLst/>
           </a:prstGeom>
-          <a:ln w="9525">
-            <a:solidFill>
-              <a:srgbClr val="E2E8F0"/>
-            </a:solidFill>
-          </a:ln>
         </p:spPr>
       </p:pic>
       <p:sp>
@@ -5662,8 +5657,8 @@
         </p:nvSpPr>
         <p:spPr>
           <a:xfrm>
-            <a:off x="731520" y="3794760"/>
-            <a:ext cx="6035040" cy="2423159"/>
+            <a:off x="731520" y="4133087"/>
+            <a:ext cx="5440680" cy="2084832"/>
           </a:xfrm>
           <a:prstGeom prst="rect">
             <a:avLst/>
@@ -5681,18 +5676,18 @@
                 <a:spcPct val="118000"/>
               </a:lnSpc>
               <a:spcAft>
-                <a:spcPts val="1300"/>
+                <a:spcPts val="1600"/>
               </a:spcAft>
               <a:buClr>
-                <a:srgbClr val="0D9488"/>
+                <a:srgbClr val="2DD4BF"/>
               </a:buClr>
               <a:buFont typeface="Arial"/>
               <a:buChar char="•"/>
             </a:pPr>
             <a:r>
-              <a:rPr sz="1450" b="0" i="0">
-                <a:solidFill>
-                  <a:srgbClr val="334155"/>
+              <a:rPr sz="1500" b="0" i="0">
+                <a:solidFill>
+                  <a:srgbClr val="C5D2E4"/>
                 </a:solidFill>
                 <a:latin typeface="Calibri"/>
               </a:rPr>
@@ -5705,18 +5700,18 @@
                 <a:spcPct val="118000"/>
               </a:lnSpc>
               <a:spcAft>
-                <a:spcPts val="1300"/>
+                <a:spcPts val="1600"/>
               </a:spcAft>
               <a:buClr>
-                <a:srgbClr val="0D9488"/>
+                <a:srgbClr val="2DD4BF"/>
               </a:buClr>
               <a:buFont typeface="Arial"/>
               <a:buChar char="•"/>
             </a:pPr>
             <a:r>
-              <a:rPr sz="1450" b="0" i="0">
-                <a:solidFill>
-                  <a:srgbClr val="334155"/>
+              <a:rPr sz="1500" b="0" i="0">
+                <a:solidFill>
+                  <a:srgbClr val="C5D2E4"/>
                 </a:solidFill>
                 <a:latin typeface="Calibri"/>
               </a:rPr>
@@ -5729,18 +5724,18 @@
                 <a:spcPct val="118000"/>
               </a:lnSpc>
               <a:spcAft>
-                <a:spcPts val="1300"/>
+                <a:spcPts val="1600"/>
               </a:spcAft>
               <a:buClr>
-                <a:srgbClr val="0D9488"/>
+                <a:srgbClr val="2DD4BF"/>
               </a:buClr>
               <a:buFont typeface="Arial"/>
               <a:buChar char="•"/>
             </a:pPr>
             <a:r>
-              <a:rPr sz="1450" b="0" i="0">
-                <a:solidFill>
-                  <a:srgbClr val="334155"/>
+              <a:rPr sz="1500" b="0" i="0">
+                <a:solidFill>
+                  <a:srgbClr val="C5D2E4"/>
                 </a:solidFill>
                 <a:latin typeface="Calibri"/>
               </a:rPr>
@@ -5763,7 +5758,7 @@
     <p:bg>
       <p:bgPr>
         <a:solidFill>
-          <a:srgbClr val="FAFAF9"/>
+          <a:srgbClr val="0B1220"/>
         </a:solidFill>
         <a:effectLst/>
       </p:bgPr>
@@ -5800,7 +5795,7 @@
             <a:r>
               <a:rPr sz="1050" b="1" i="0" spc="120">
                 <a:solidFill>
-                  <a:srgbClr val="0D9488"/>
+                  <a:srgbClr val="2DD4BF"/>
                 </a:solidFill>
                 <a:latin typeface="Calibri"/>
               </a:rPr>
@@ -5839,7 +5834,7 @@
             <a:r>
               <a:rPr sz="2900" b="1" i="0">
                 <a:solidFill>
-                  <a:srgbClr val="0F172A"/>
+                  <a:srgbClr val="F2F6FB"/>
                 </a:solidFill>
                 <a:latin typeface="Calibri Light"/>
               </a:rPr>
@@ -5863,7 +5858,7 @@
             <a:avLst/>
           </a:prstGeom>
           <a:solidFill>
-            <a:srgbClr val="0D9488"/>
+            <a:srgbClr val="2DD4BF"/>
           </a:solidFill>
           <a:ln>
             <a:noFill/>
@@ -5918,7 +5913,7 @@
             <a:r>
               <a:rPr sz="1100" b="0" i="0">
                 <a:solidFill>
-                  <a:srgbClr val="94A3B8"/>
+                  <a:srgbClr val="55688A"/>
                 </a:solidFill>
                 <a:latin typeface="Calibri"/>
               </a:rPr>
@@ -5963,7 +5958,7 @@
                       <a:r>
                         <a:rPr sz="1300" b="1" i="0">
                           <a:solidFill>
-                            <a:srgbClr val="0F766E"/>
+                            <a:srgbClr val="5EEAD4"/>
                           </a:solidFill>
                           <a:latin typeface="Calibri"/>
                         </a:rPr>
@@ -5973,7 +5968,7 @@
                   </a:txBody>
                   <a:tcPr anchor="ctr" marL="100584" marR="100584" marT="36576" marB="36576">
                     <a:solidFill>
-                      <a:srgbClr val="F0FDFA"/>
+                      <a:srgbClr val="12303A"/>
                     </a:solidFill>
                   </a:tcPr>
                 </a:tc>
@@ -5986,7 +5981,7 @@
                       <a:r>
                         <a:rPr sz="1300" b="1" i="0">
                           <a:solidFill>
-                            <a:srgbClr val="0F766E"/>
+                            <a:srgbClr val="5EEAD4"/>
                           </a:solidFill>
                           <a:latin typeface="Calibri"/>
                         </a:rPr>
@@ -5996,7 +5991,7 @@
                   </a:txBody>
                   <a:tcPr anchor="ctr" marL="100584" marR="100584" marT="36576" marB="36576">
                     <a:solidFill>
-                      <a:srgbClr val="F0FDFA"/>
+                      <a:srgbClr val="12303A"/>
                     </a:solidFill>
                   </a:tcPr>
                 </a:tc>
@@ -6009,7 +6004,7 @@
                       <a:r>
                         <a:rPr sz="1300" b="1" i="0">
                           <a:solidFill>
-                            <a:srgbClr val="0F766E"/>
+                            <a:srgbClr val="5EEAD4"/>
                           </a:solidFill>
                           <a:latin typeface="Calibri"/>
                         </a:rPr>
@@ -6019,7 +6014,7 @@
                   </a:txBody>
                   <a:tcPr anchor="ctr" marL="100584" marR="100584" marT="36576" marB="36576">
                     <a:solidFill>
-                      <a:srgbClr val="F0FDFA"/>
+                      <a:srgbClr val="12303A"/>
                     </a:solidFill>
                   </a:tcPr>
                 </a:tc>
@@ -6032,7 +6027,7 @@
                       <a:r>
                         <a:rPr sz="1300" b="1" i="0">
                           <a:solidFill>
-                            <a:srgbClr val="0F766E"/>
+                            <a:srgbClr val="5EEAD4"/>
                           </a:solidFill>
                           <a:latin typeface="Calibri"/>
                         </a:rPr>
@@ -6042,7 +6037,7 @@
                   </a:txBody>
                   <a:tcPr anchor="ctr" marL="100584" marR="100584" marT="36576" marB="36576">
                     <a:solidFill>
-                      <a:srgbClr val="F0FDFA"/>
+                      <a:srgbClr val="12303A"/>
                     </a:solidFill>
                   </a:tcPr>
                 </a:tc>
@@ -6055,7 +6050,7 @@
                       <a:r>
                         <a:rPr sz="1300" b="1" i="0">
                           <a:solidFill>
-                            <a:srgbClr val="0F766E"/>
+                            <a:srgbClr val="5EEAD4"/>
                           </a:solidFill>
                           <a:latin typeface="Calibri"/>
                         </a:rPr>
@@ -6065,7 +6060,7 @@
                   </a:txBody>
                   <a:tcPr anchor="ctr" marL="100584" marR="100584" marT="36576" marB="36576">
                     <a:solidFill>
-                      <a:srgbClr val="F0FDFA"/>
+                      <a:srgbClr val="12303A"/>
                     </a:solidFill>
                   </a:tcPr>
                 </a:tc>
@@ -6078,7 +6073,7 @@
                       <a:r>
                         <a:rPr sz="1300" b="1" i="0">
                           <a:solidFill>
-                            <a:srgbClr val="0F766E"/>
+                            <a:srgbClr val="5EEAD4"/>
                           </a:solidFill>
                           <a:latin typeface="Calibri"/>
                         </a:rPr>
@@ -6088,7 +6083,7 @@
                   </a:txBody>
                   <a:tcPr anchor="ctr" marL="100584" marR="100584" marT="36576" marB="36576">
                     <a:solidFill>
-                      <a:srgbClr val="F0FDFA"/>
+                      <a:srgbClr val="12303A"/>
                     </a:solidFill>
                   </a:tcPr>
                 </a:tc>
@@ -6103,7 +6098,7 @@
                       <a:r>
                         <a:rPr sz="1300" b="0" i="0">
                           <a:solidFill>
-                            <a:srgbClr val="334155"/>
+                            <a:srgbClr val="C5D2E4"/>
                           </a:solidFill>
                           <a:latin typeface="Calibri"/>
                         </a:rPr>
@@ -6113,7 +6108,7 @@
                   </a:txBody>
                   <a:tcPr anchor="ctr" marL="100584" marR="100584" marT="36576" marB="36576">
                     <a:solidFill>
-                      <a:srgbClr val="FFFFFF"/>
+                      <a:srgbClr val="0E1929"/>
                     </a:solidFill>
                   </a:tcPr>
                 </a:tc>
@@ -6126,7 +6121,7 @@
                       <a:r>
                         <a:rPr sz="1300" b="0" i="0">
                           <a:solidFill>
-                            <a:srgbClr val="334155"/>
+                            <a:srgbClr val="C5D2E4"/>
                           </a:solidFill>
                           <a:latin typeface="Calibri"/>
                         </a:rPr>
@@ -6136,7 +6131,7 @@
                   </a:txBody>
                   <a:tcPr anchor="ctr" marL="100584" marR="100584" marT="36576" marB="36576">
                     <a:solidFill>
-                      <a:srgbClr val="FFFFFF"/>
+                      <a:srgbClr val="0E1929"/>
                     </a:solidFill>
                   </a:tcPr>
                 </a:tc>
@@ -6149,7 +6144,7 @@
                       <a:r>
                         <a:rPr sz="1300" b="0" i="0">
                           <a:solidFill>
-                            <a:srgbClr val="334155"/>
+                            <a:srgbClr val="C5D2E4"/>
                           </a:solidFill>
                           <a:latin typeface="Calibri"/>
                         </a:rPr>
@@ -6159,7 +6154,7 @@
                   </a:txBody>
                   <a:tcPr anchor="ctr" marL="100584" marR="100584" marT="36576" marB="36576">
                     <a:solidFill>
-                      <a:srgbClr val="FFFFFF"/>
+                      <a:srgbClr val="0E1929"/>
                     </a:solidFill>
                   </a:tcPr>
                 </a:tc>
@@ -6172,7 +6167,7 @@
                       <a:r>
                         <a:rPr sz="1300" b="0" i="0">
                           <a:solidFill>
-                            <a:srgbClr val="334155"/>
+                            <a:srgbClr val="C5D2E4"/>
                           </a:solidFill>
                           <a:latin typeface="Calibri"/>
                         </a:rPr>
@@ -6182,7 +6177,7 @@
                   </a:txBody>
                   <a:tcPr anchor="ctr" marL="100584" marR="100584" marT="36576" marB="36576">
                     <a:solidFill>
-                      <a:srgbClr val="FFFFFF"/>
+                      <a:srgbClr val="0E1929"/>
                     </a:solidFill>
                   </a:tcPr>
                 </a:tc>
@@ -6195,7 +6190,7 @@
                       <a:r>
                         <a:rPr sz="1300" b="0" i="0">
                           <a:solidFill>
-                            <a:srgbClr val="334155"/>
+                            <a:srgbClr val="C5D2E4"/>
                           </a:solidFill>
                           <a:latin typeface="Calibri"/>
                         </a:rPr>
@@ -6205,7 +6200,7 @@
                   </a:txBody>
                   <a:tcPr anchor="ctr" marL="100584" marR="100584" marT="36576" marB="36576">
                     <a:solidFill>
-                      <a:srgbClr val="FFFFFF"/>
+                      <a:srgbClr val="0E1929"/>
                     </a:solidFill>
                   </a:tcPr>
                 </a:tc>
@@ -6218,7 +6213,7 @@
                       <a:r>
                         <a:rPr sz="1300" b="0" i="0">
                           <a:solidFill>
-                            <a:srgbClr val="334155"/>
+                            <a:srgbClr val="C5D2E4"/>
                           </a:solidFill>
                           <a:latin typeface="Calibri"/>
                         </a:rPr>
@@ -6228,7 +6223,7 @@
                   </a:txBody>
                   <a:tcPr anchor="ctr" marL="100584" marR="100584" marT="36576" marB="36576">
                     <a:solidFill>
-                      <a:srgbClr val="FFFFFF"/>
+                      <a:srgbClr val="0E1929"/>
                     </a:solidFill>
                   </a:tcPr>
                 </a:tc>
@@ -6243,7 +6238,7 @@
                       <a:r>
                         <a:rPr sz="1300" b="0" i="0">
                           <a:solidFill>
-                            <a:srgbClr val="334155"/>
+                            <a:srgbClr val="C5D2E4"/>
                           </a:solidFill>
                           <a:latin typeface="Calibri"/>
                         </a:rPr>
@@ -6253,7 +6248,7 @@
                   </a:txBody>
                   <a:tcPr anchor="ctr" marL="100584" marR="100584" marT="36576" marB="36576">
                     <a:solidFill>
-                      <a:srgbClr val="F8FAFC"/>
+                      <a:srgbClr val="121E30"/>
                     </a:solidFill>
                   </a:tcPr>
                 </a:tc>
@@ -6266,7 +6261,7 @@
                       <a:r>
                         <a:rPr sz="1300" b="0" i="0">
                           <a:solidFill>
-                            <a:srgbClr val="334155"/>
+                            <a:srgbClr val="C5D2E4"/>
                           </a:solidFill>
                           <a:latin typeface="Calibri"/>
                         </a:rPr>
@@ -6276,7 +6271,7 @@
                   </a:txBody>
                   <a:tcPr anchor="ctr" marL="100584" marR="100584" marT="36576" marB="36576">
                     <a:solidFill>
-                      <a:srgbClr val="F8FAFC"/>
+                      <a:srgbClr val="121E30"/>
                     </a:solidFill>
                   </a:tcPr>
                 </a:tc>
@@ -6289,7 +6284,7 @@
                       <a:r>
                         <a:rPr sz="1300" b="0" i="0">
                           <a:solidFill>
-                            <a:srgbClr val="334155"/>
+                            <a:srgbClr val="C5D2E4"/>
                           </a:solidFill>
                           <a:latin typeface="Calibri"/>
                         </a:rPr>
@@ -6299,7 +6294,7 @@
                   </a:txBody>
                   <a:tcPr anchor="ctr" marL="100584" marR="100584" marT="36576" marB="36576">
                     <a:solidFill>
-                      <a:srgbClr val="F8FAFC"/>
+                      <a:srgbClr val="121E30"/>
                     </a:solidFill>
                   </a:tcPr>
                 </a:tc>
@@ -6312,7 +6307,7 @@
                       <a:r>
                         <a:rPr sz="1300" b="0" i="0">
                           <a:solidFill>
-                            <a:srgbClr val="334155"/>
+                            <a:srgbClr val="C5D2E4"/>
                           </a:solidFill>
                           <a:latin typeface="Calibri"/>
                         </a:rPr>
@@ -6322,7 +6317,7 @@
                   </a:txBody>
                   <a:tcPr anchor="ctr" marL="100584" marR="100584" marT="36576" marB="36576">
                     <a:solidFill>
-                      <a:srgbClr val="F8FAFC"/>
+                      <a:srgbClr val="121E30"/>
                     </a:solidFill>
                   </a:tcPr>
                 </a:tc>
@@ -6335,7 +6330,7 @@
                       <a:r>
                         <a:rPr sz="1300" b="0" i="0">
                           <a:solidFill>
-                            <a:srgbClr val="334155"/>
+                            <a:srgbClr val="C5D2E4"/>
                           </a:solidFill>
                           <a:latin typeface="Calibri"/>
                         </a:rPr>
@@ -6345,7 +6340,7 @@
                   </a:txBody>
                   <a:tcPr anchor="ctr" marL="100584" marR="100584" marT="36576" marB="36576">
                     <a:solidFill>
-                      <a:srgbClr val="F8FAFC"/>
+                      <a:srgbClr val="121E30"/>
                     </a:solidFill>
                   </a:tcPr>
                 </a:tc>
@@ -6358,7 +6353,7 @@
                       <a:r>
                         <a:rPr sz="1300" b="0" i="0">
                           <a:solidFill>
-                            <a:srgbClr val="334155"/>
+                            <a:srgbClr val="C5D2E4"/>
                           </a:solidFill>
                           <a:latin typeface="Calibri"/>
                         </a:rPr>
@@ -6368,7 +6363,7 @@
                   </a:txBody>
                   <a:tcPr anchor="ctr" marL="100584" marR="100584" marT="36576" marB="36576">
                     <a:solidFill>
-                      <a:srgbClr val="F8FAFC"/>
+                      <a:srgbClr val="121E30"/>
                     </a:solidFill>
                   </a:tcPr>
                 </a:tc>
@@ -6383,7 +6378,7 @@
                       <a:r>
                         <a:rPr sz="1300" b="1" i="0">
                           <a:solidFill>
-                            <a:srgbClr val="0F172A"/>
+                            <a:srgbClr val="F2F6FB"/>
                           </a:solidFill>
                           <a:latin typeface="Calibri"/>
                         </a:rPr>
@@ -6393,7 +6388,7 @@
                   </a:txBody>
                   <a:tcPr anchor="ctr" marL="100584" marR="100584" marT="36576" marB="36576">
                     <a:solidFill>
-                      <a:srgbClr val="F0FDFA"/>
+                      <a:srgbClr val="12303A"/>
                     </a:solidFill>
                   </a:tcPr>
                 </a:tc>
@@ -6406,7 +6401,7 @@
                       <a:r>
                         <a:rPr sz="1300" b="1" i="0">
                           <a:solidFill>
-                            <a:srgbClr val="0F172A"/>
+                            <a:srgbClr val="F2F6FB"/>
                           </a:solidFill>
                           <a:latin typeface="Calibri"/>
                         </a:rPr>
@@ -6416,7 +6411,7 @@
                   </a:txBody>
                   <a:tcPr anchor="ctr" marL="100584" marR="100584" marT="36576" marB="36576">
                     <a:solidFill>
-                      <a:srgbClr val="F0FDFA"/>
+                      <a:srgbClr val="12303A"/>
                     </a:solidFill>
                   </a:tcPr>
                 </a:tc>
@@ -6429,7 +6424,7 @@
                       <a:r>
                         <a:rPr sz="1300" b="1" i="0">
                           <a:solidFill>
-                            <a:srgbClr val="0F172A"/>
+                            <a:srgbClr val="F2F6FB"/>
                           </a:solidFill>
                           <a:latin typeface="Calibri"/>
                         </a:rPr>
@@ -6439,7 +6434,7 @@
                   </a:txBody>
                   <a:tcPr anchor="ctr" marL="100584" marR="100584" marT="36576" marB="36576">
                     <a:solidFill>
-                      <a:srgbClr val="F0FDFA"/>
+                      <a:srgbClr val="12303A"/>
                     </a:solidFill>
                   </a:tcPr>
                 </a:tc>
@@ -6452,7 +6447,7 @@
                       <a:r>
                         <a:rPr sz="1300" b="1" i="0">
                           <a:solidFill>
-                            <a:srgbClr val="0F172A"/>
+                            <a:srgbClr val="F2F6FB"/>
                           </a:solidFill>
                           <a:latin typeface="Calibri"/>
                         </a:rPr>
@@ -6462,7 +6457,7 @@
                   </a:txBody>
                   <a:tcPr anchor="ctr" marL="100584" marR="100584" marT="36576" marB="36576">
                     <a:solidFill>
-                      <a:srgbClr val="F0FDFA"/>
+                      <a:srgbClr val="12303A"/>
                     </a:solidFill>
                   </a:tcPr>
                 </a:tc>
@@ -6475,7 +6470,7 @@
                       <a:r>
                         <a:rPr sz="1300" b="1" i="0">
                           <a:solidFill>
-                            <a:srgbClr val="0F172A"/>
+                            <a:srgbClr val="F2F6FB"/>
                           </a:solidFill>
                           <a:latin typeface="Calibri"/>
                         </a:rPr>
@@ -6485,7 +6480,7 @@
                   </a:txBody>
                   <a:tcPr anchor="ctr" marL="100584" marR="100584" marT="36576" marB="36576">
                     <a:solidFill>
-                      <a:srgbClr val="F0FDFA"/>
+                      <a:srgbClr val="12303A"/>
                     </a:solidFill>
                   </a:tcPr>
                 </a:tc>
@@ -6498,7 +6493,7 @@
                       <a:r>
                         <a:rPr sz="1300" b="1" i="0">
                           <a:solidFill>
-                            <a:srgbClr val="0F172A"/>
+                            <a:srgbClr val="F2F6FB"/>
                           </a:solidFill>
                           <a:latin typeface="Calibri"/>
                         </a:rPr>
@@ -6508,7 +6503,7 @@
                   </a:txBody>
                   <a:tcPr anchor="ctr" marL="100584" marR="100584" marT="36576" marB="36576">
                     <a:solidFill>
-                      <a:srgbClr val="F0FDFA"/>
+                      <a:srgbClr val="12303A"/>
                     </a:solidFill>
                   </a:tcPr>
                 </a:tc>
@@ -6523,7 +6518,7 @@
                       <a:r>
                         <a:rPr sz="1300" b="0" i="0">
                           <a:solidFill>
-                            <a:srgbClr val="334155"/>
+                            <a:srgbClr val="C5D2E4"/>
                           </a:solidFill>
                           <a:latin typeface="Calibri"/>
                         </a:rPr>
@@ -6533,7 +6528,7 @@
                   </a:txBody>
                   <a:tcPr anchor="ctr" marL="100584" marR="100584" marT="36576" marB="36576">
                     <a:solidFill>
-                      <a:srgbClr val="F8FAFC"/>
+                      <a:srgbClr val="121E30"/>
                     </a:solidFill>
                   </a:tcPr>
                 </a:tc>
@@ -6546,7 +6541,7 @@
                       <a:r>
                         <a:rPr sz="1300" b="0" i="0">
                           <a:solidFill>
-                            <a:srgbClr val="334155"/>
+                            <a:srgbClr val="C5D2E4"/>
                           </a:solidFill>
                           <a:latin typeface="Calibri"/>
                         </a:rPr>
@@ -6556,7 +6551,7 @@
                   </a:txBody>
                   <a:tcPr anchor="ctr" marL="100584" marR="100584" marT="36576" marB="36576">
                     <a:solidFill>
-                      <a:srgbClr val="F8FAFC"/>
+                      <a:srgbClr val="121E30"/>
                     </a:solidFill>
                   </a:tcPr>
                 </a:tc>
@@ -6569,7 +6564,7 @@
                       <a:r>
                         <a:rPr sz="1300" b="0" i="0">
                           <a:solidFill>
-                            <a:srgbClr val="334155"/>
+                            <a:srgbClr val="C5D2E4"/>
                           </a:solidFill>
                           <a:latin typeface="Calibri"/>
                         </a:rPr>
@@ -6579,7 +6574,7 @@
                   </a:txBody>
                   <a:tcPr anchor="ctr" marL="100584" marR="100584" marT="36576" marB="36576">
                     <a:solidFill>
-                      <a:srgbClr val="F8FAFC"/>
+                      <a:srgbClr val="121E30"/>
                     </a:solidFill>
                   </a:tcPr>
                 </a:tc>
@@ -6592,7 +6587,7 @@
                       <a:r>
                         <a:rPr sz="1300" b="0" i="0">
                           <a:solidFill>
-                            <a:srgbClr val="334155"/>
+                            <a:srgbClr val="C5D2E4"/>
                           </a:solidFill>
                           <a:latin typeface="Calibri"/>
                         </a:rPr>
@@ -6602,7 +6597,7 @@
                   </a:txBody>
                   <a:tcPr anchor="ctr" marL="100584" marR="100584" marT="36576" marB="36576">
                     <a:solidFill>
-                      <a:srgbClr val="F8FAFC"/>
+                      <a:srgbClr val="121E30"/>
                     </a:solidFill>
                   </a:tcPr>
                 </a:tc>
@@ -6615,7 +6610,7 @@
                       <a:r>
                         <a:rPr sz="1300" b="0" i="0">
                           <a:solidFill>
-                            <a:srgbClr val="334155"/>
+                            <a:srgbClr val="C5D2E4"/>
                           </a:solidFill>
                           <a:latin typeface="Calibri"/>
                         </a:rPr>
@@ -6625,7 +6620,7 @@
                   </a:txBody>
                   <a:tcPr anchor="ctr" marL="100584" marR="100584" marT="36576" marB="36576">
                     <a:solidFill>
-                      <a:srgbClr val="F8FAFC"/>
+                      <a:srgbClr val="121E30"/>
                     </a:solidFill>
                   </a:tcPr>
                 </a:tc>
@@ -6638,7 +6633,7 @@
                       <a:r>
                         <a:rPr sz="1300" b="0" i="0">
                           <a:solidFill>
-                            <a:srgbClr val="334155"/>
+                            <a:srgbClr val="C5D2E4"/>
                           </a:solidFill>
                           <a:latin typeface="Calibri"/>
                         </a:rPr>
@@ -6648,7 +6643,7 @@
                   </a:txBody>
                   <a:tcPr anchor="ctr" marL="100584" marR="100584" marT="36576" marB="36576">
                     <a:solidFill>
-                      <a:srgbClr val="F8FAFC"/>
+                      <a:srgbClr val="121E30"/>
                     </a:solidFill>
                   </a:tcPr>
                 </a:tc>
@@ -6663,7 +6658,7 @@
                       <a:r>
                         <a:rPr sz="1300" b="0" i="0">
                           <a:solidFill>
-                            <a:srgbClr val="334155"/>
+                            <a:srgbClr val="C5D2E4"/>
                           </a:solidFill>
                           <a:latin typeface="Calibri"/>
                         </a:rPr>
@@ -6673,7 +6668,7 @@
                   </a:txBody>
                   <a:tcPr anchor="ctr" marL="100584" marR="100584" marT="36576" marB="36576">
                     <a:solidFill>
-                      <a:srgbClr val="FFFFFF"/>
+                      <a:srgbClr val="0E1929"/>
                     </a:solidFill>
                   </a:tcPr>
                 </a:tc>
@@ -6686,7 +6681,7 @@
                       <a:r>
                         <a:rPr sz="1300" b="0" i="0">
                           <a:solidFill>
-                            <a:srgbClr val="334155"/>
+                            <a:srgbClr val="C5D2E4"/>
                           </a:solidFill>
                           <a:latin typeface="Calibri"/>
                         </a:rPr>
@@ -6696,7 +6691,7 @@
                   </a:txBody>
                   <a:tcPr anchor="ctr" marL="100584" marR="100584" marT="36576" marB="36576">
                     <a:solidFill>
-                      <a:srgbClr val="FFFFFF"/>
+                      <a:srgbClr val="0E1929"/>
                     </a:solidFill>
                   </a:tcPr>
                 </a:tc>
@@ -6709,7 +6704,7 @@
                       <a:r>
                         <a:rPr sz="1300" b="0" i="0">
                           <a:solidFill>
-                            <a:srgbClr val="334155"/>
+                            <a:srgbClr val="C5D2E4"/>
                           </a:solidFill>
                           <a:latin typeface="Calibri"/>
                         </a:rPr>
@@ -6719,7 +6714,7 @@
                   </a:txBody>
                   <a:tcPr anchor="ctr" marL="100584" marR="100584" marT="36576" marB="36576">
                     <a:solidFill>
-                      <a:srgbClr val="FFFFFF"/>
+                      <a:srgbClr val="0E1929"/>
                     </a:solidFill>
                   </a:tcPr>
                 </a:tc>
@@ -6732,7 +6727,7 @@
                       <a:r>
                         <a:rPr sz="1300" b="0" i="0">
                           <a:solidFill>
-                            <a:srgbClr val="334155"/>
+                            <a:srgbClr val="C5D2E4"/>
                           </a:solidFill>
                           <a:latin typeface="Calibri"/>
                         </a:rPr>
@@ -6742,7 +6737,7 @@
                   </a:txBody>
                   <a:tcPr anchor="ctr" marL="100584" marR="100584" marT="36576" marB="36576">
                     <a:solidFill>
-                      <a:srgbClr val="FFFFFF"/>
+                      <a:srgbClr val="0E1929"/>
                     </a:solidFill>
                   </a:tcPr>
                 </a:tc>
@@ -6755,7 +6750,7 @@
                       <a:r>
                         <a:rPr sz="1300" b="0" i="0">
                           <a:solidFill>
-                            <a:srgbClr val="334155"/>
+                            <a:srgbClr val="C5D2E4"/>
                           </a:solidFill>
                           <a:latin typeface="Calibri"/>
                         </a:rPr>
@@ -6765,7 +6760,7 @@
                   </a:txBody>
                   <a:tcPr anchor="ctr" marL="100584" marR="100584" marT="36576" marB="36576">
                     <a:solidFill>
-                      <a:srgbClr val="FFFFFF"/>
+                      <a:srgbClr val="0E1929"/>
                     </a:solidFill>
                   </a:tcPr>
                 </a:tc>
@@ -6778,7 +6773,7 @@
                       <a:r>
                         <a:rPr sz="1300" b="0" i="0">
                           <a:solidFill>
-                            <a:srgbClr val="334155"/>
+                            <a:srgbClr val="C5D2E4"/>
                           </a:solidFill>
                           <a:latin typeface="Calibri"/>
                         </a:rPr>
@@ -6788,7 +6783,7 @@
                   </a:txBody>
                   <a:tcPr anchor="ctr" marL="100584" marR="100584" marT="36576" marB="36576">
                     <a:solidFill>
-                      <a:srgbClr val="FFFFFF"/>
+                      <a:srgbClr val="0E1929"/>
                     </a:solidFill>
                   </a:tcPr>
                 </a:tc>
@@ -6827,7 +6822,7 @@
                 <a:spcPts val="1400"/>
               </a:spcAft>
               <a:buClr>
-                <a:srgbClr val="0D9488"/>
+                <a:srgbClr val="2DD4BF"/>
               </a:buClr>
               <a:buFont typeface="Arial"/>
               <a:buChar char="•"/>
@@ -6835,7 +6830,7 @@
             <a:r>
               <a:rPr sz="1550" b="0" i="0">
                 <a:solidFill>
-                  <a:srgbClr val="334155"/>
+                  <a:srgbClr val="C5D2E4"/>
                 </a:solidFill>
                 <a:latin typeface="Calibri"/>
               </a:rPr>
@@ -6851,7 +6846,7 @@
                 <a:spcPts val="1400"/>
               </a:spcAft>
               <a:buClr>
-                <a:srgbClr val="0D9488"/>
+                <a:srgbClr val="2DD4BF"/>
               </a:buClr>
               <a:buFont typeface="Arial"/>
               <a:buChar char="•"/>
@@ -6859,7 +6854,7 @@
             <a:r>
               <a:rPr sz="1550" b="0" i="0">
                 <a:solidFill>
-                  <a:srgbClr val="334155"/>
+                  <a:srgbClr val="C5D2E4"/>
                 </a:solidFill>
                 <a:latin typeface="Calibri"/>
               </a:rPr>
@@ -6875,7 +6870,7 @@
                 <a:spcPts val="1400"/>
               </a:spcAft>
               <a:buClr>
-                <a:srgbClr val="0D9488"/>
+                <a:srgbClr val="2DD4BF"/>
               </a:buClr>
               <a:buFont typeface="Arial"/>
               <a:buChar char="•"/>
@@ -6883,7 +6878,7 @@
             <a:r>
               <a:rPr sz="1550" b="0" i="0">
                 <a:solidFill>
-                  <a:srgbClr val="334155"/>
+                  <a:srgbClr val="C5D2E4"/>
                 </a:solidFill>
                 <a:latin typeface="Calibri"/>
               </a:rPr>
@@ -6906,7 +6901,7 @@
     <p:bg>
       <p:bgPr>
         <a:solidFill>
-          <a:srgbClr val="FAFAF9"/>
+          <a:srgbClr val="0B1220"/>
         </a:solidFill>
         <a:effectLst/>
       </p:bgPr>
@@ -6943,7 +6938,7 @@
             <a:r>
               <a:rPr sz="1050" b="1" i="0" spc="120">
                 <a:solidFill>
-                  <a:srgbClr val="0D9488"/>
+                  <a:srgbClr val="2DD4BF"/>
                 </a:solidFill>
                 <a:latin typeface="Calibri"/>
               </a:rPr>
@@ -6982,7 +6977,7 @@
             <a:r>
               <a:rPr sz="2900" b="1" i="0">
                 <a:solidFill>
-                  <a:srgbClr val="0F172A"/>
+                  <a:srgbClr val="F2F6FB"/>
                 </a:solidFill>
                 <a:latin typeface="Calibri Light"/>
               </a:rPr>
@@ -7006,7 +7001,7 @@
             <a:avLst/>
           </a:prstGeom>
           <a:solidFill>
-            <a:srgbClr val="0D9488"/>
+            <a:srgbClr val="2DD4BF"/>
           </a:solidFill>
           <a:ln>
             <a:noFill/>
@@ -7061,7 +7056,7 @@
             <a:r>
               <a:rPr sz="1100" b="0" i="0">
                 <a:solidFill>
-                  <a:srgbClr val="94A3B8"/>
+                  <a:srgbClr val="55688A"/>
                 </a:solidFill>
                 <a:latin typeface="Calibri"/>
               </a:rPr>
@@ -7086,15 +7081,15 @@
         </p:blipFill>
         <p:spPr>
           <a:xfrm>
-            <a:off x="6629400" y="1965960"/>
-            <a:ext cx="4846320" cy="3028950"/>
+            <a:off x="5577840" y="1847088"/>
+            <a:ext cx="5879592" cy="3674745"/>
           </a:xfrm>
           <a:prstGeom prst="rect">
             <a:avLst/>
           </a:prstGeom>
           <a:ln w="9525">
             <a:solidFill>
-              <a:srgbClr val="E2E8F0"/>
+              <a:srgbClr val="253750"/>
             </a:solidFill>
           </a:ln>
         </p:spPr>
@@ -7107,8 +7102,8 @@
         </p:nvSpPr>
         <p:spPr>
           <a:xfrm>
-            <a:off x="731520" y="1965960"/>
-            <a:ext cx="5577840" cy="4251959"/>
+            <a:off x="731520" y="1901952"/>
+            <a:ext cx="4617720" cy="4315968"/>
           </a:xfrm>
           <a:prstGeom prst="rect">
             <a:avLst/>
@@ -7129,24 +7124,24 @@
                 <a:spcPts val="2000"/>
               </a:spcAft>
               <a:buClr>
-                <a:srgbClr val="0D9488"/>
+                <a:srgbClr val="2DD4BF"/>
               </a:buClr>
               <a:buFont typeface="Arial"/>
               <a:buChar char="•"/>
             </a:pPr>
             <a:r>
-              <a:rPr sz="1650" b="1" i="0">
-                <a:solidFill>
-                  <a:srgbClr val="0F172A"/>
+              <a:rPr sz="1600" b="1" i="0">
+                <a:solidFill>
+                  <a:srgbClr val="F2F6FB"/>
                 </a:solidFill>
                 <a:latin typeface="Calibri"/>
               </a:rPr>
               <a:t>Ba nguồn: </a:t>
             </a:r>
             <a:r>
-              <a:rPr sz="1650" b="0" i="0">
-                <a:solidFill>
-                  <a:srgbClr val="334155"/>
+              <a:rPr sz="1600" b="0" i="0">
+                <a:solidFill>
+                  <a:srgbClr val="C5D2E4"/>
                 </a:solidFill>
                 <a:latin typeface="Calibri"/>
               </a:rPr>
@@ -7162,24 +7157,24 @@
                 <a:spcPts val="2000"/>
               </a:spcAft>
               <a:buClr>
-                <a:srgbClr val="0D9488"/>
+                <a:srgbClr val="2DD4BF"/>
               </a:buClr>
               <a:buFont typeface="Arial"/>
               <a:buChar char="•"/>
             </a:pPr>
             <a:r>
-              <a:rPr sz="1650" b="1" i="0">
-                <a:solidFill>
-                  <a:srgbClr val="0F172A"/>
+              <a:rPr sz="1600" b="1" i="0">
+                <a:solidFill>
+                  <a:srgbClr val="F2F6FB"/>
                 </a:solidFill>
                 <a:latin typeface="Calibri"/>
               </a:rPr>
               <a:t>Năm tab: </a:t>
             </a:r>
             <a:r>
-              <a:rPr sz="1650" b="0" i="0">
-                <a:solidFill>
-                  <a:srgbClr val="334155"/>
+              <a:rPr sz="1600" b="0" i="0">
+                <a:solidFill>
+                  <a:srgbClr val="C5D2E4"/>
                 </a:solidFill>
                 <a:latin typeface="Calibri"/>
               </a:rPr>
@@ -7195,15 +7190,15 @@
                 <a:spcPts val="2000"/>
               </a:spcAft>
               <a:buClr>
-                <a:srgbClr val="0D9488"/>
+                <a:srgbClr val="2DD4BF"/>
               </a:buClr>
               <a:buFont typeface="Arial"/>
               <a:buChar char="•"/>
             </a:pPr>
             <a:r>
-              <a:rPr sz="1650" b="0" i="0">
-                <a:solidFill>
-                  <a:srgbClr val="334155"/>
+              <a:rPr sz="1600" b="0" i="0">
+                <a:solidFill>
+                  <a:srgbClr val="C5D2E4"/>
                 </a:solidFill>
                 <a:latin typeface="Calibri"/>
               </a:rPr>
@@ -7219,15 +7214,15 @@
                 <a:spcPts val="2000"/>
               </a:spcAft>
               <a:buClr>
-                <a:srgbClr val="0D9488"/>
+                <a:srgbClr val="2DD4BF"/>
               </a:buClr>
               <a:buFont typeface="Arial"/>
               <a:buChar char="•"/>
             </a:pPr>
             <a:r>
-              <a:rPr sz="1650" b="0" i="0">
-                <a:solidFill>
-                  <a:srgbClr val="334155"/>
+              <a:rPr sz="1600" b="0" i="0">
+                <a:solidFill>
+                  <a:srgbClr val="C5D2E4"/>
                 </a:solidFill>
                 <a:latin typeface="Calibri"/>
               </a:rPr>
@@ -7250,7 +7245,7 @@
     <p:bg>
       <p:bgPr>
         <a:solidFill>
-          <a:srgbClr val="FAFAF9"/>
+          <a:srgbClr val="0B1220"/>
         </a:solidFill>
         <a:effectLst/>
       </p:bgPr>
@@ -7287,7 +7282,7 @@
             <a:r>
               <a:rPr sz="1050" b="1" i="0" spc="120">
                 <a:solidFill>
-                  <a:srgbClr val="0D9488"/>
+                  <a:srgbClr val="2DD4BF"/>
                 </a:solidFill>
                 <a:latin typeface="Calibri"/>
               </a:rPr>
@@ -7326,7 +7321,7 @@
             <a:r>
               <a:rPr sz="2900" b="1" i="0">
                 <a:solidFill>
-                  <a:srgbClr val="0F172A"/>
+                  <a:srgbClr val="F2F6FB"/>
                 </a:solidFill>
                 <a:latin typeface="Calibri Light"/>
               </a:rPr>
@@ -7350,7 +7345,7 @@
             <a:avLst/>
           </a:prstGeom>
           <a:solidFill>
-            <a:srgbClr val="0D9488"/>
+            <a:srgbClr val="2DD4BF"/>
           </a:solidFill>
           <a:ln>
             <a:noFill/>
@@ -7405,7 +7400,7 @@
             <a:r>
               <a:rPr sz="1100" b="0" i="0">
                 <a:solidFill>
-                  <a:srgbClr val="94A3B8"/>
+                  <a:srgbClr val="55688A"/>
                 </a:solidFill>
                 <a:latin typeface="Calibri"/>
               </a:rPr>
@@ -7424,7 +7419,7 @@
         </p:nvGraphicFramePr>
         <p:xfrm>
           <a:off x="731520" y="1810512"/>
-          <a:ext cx="7223760" cy="3163824"/>
+          <a:ext cx="7223760" cy="4151376"/>
         </p:xfrm>
         <a:graphic>
           <a:graphicData uri="http://schemas.openxmlformats.org/drawingml/2006/table">
@@ -7439,7 +7434,7 @@
                 <a:gridCol w="1097280"/>
                 <a:gridCol w="1005840"/>
               </a:tblGrid>
-              <a:tr h="384048">
+              <a:tr h="493776">
                 <a:tc>
                   <a:txBody>
                     <a:bodyPr wrap="square"/>
@@ -7447,9 +7442,9 @@
                     <a:p>
                       <a:pPr algn="l"/>
                       <a:r>
-                        <a:rPr sz="1250" b="1" i="0">
-                          <a:solidFill>
-                            <a:srgbClr val="0F766E"/>
+                        <a:rPr sz="1400" b="1" i="0">
+                          <a:solidFill>
+                            <a:srgbClr val="5EEAD4"/>
                           </a:solidFill>
                           <a:latin typeface="Calibri"/>
                         </a:rPr>
@@ -7459,7 +7454,7 @@
                   </a:txBody>
                   <a:tcPr anchor="ctr" marL="100584" marR="100584" marT="36576" marB="36576">
                     <a:solidFill>
-                      <a:srgbClr val="F0FDFA"/>
+                      <a:srgbClr val="12303A"/>
                     </a:solidFill>
                   </a:tcPr>
                 </a:tc>
@@ -7470,9 +7465,9 @@
                     <a:p>
                       <a:pPr algn="r"/>
                       <a:r>
-                        <a:rPr sz="1250" b="1" i="0">
-                          <a:solidFill>
-                            <a:srgbClr val="0F766E"/>
+                        <a:rPr sz="1400" b="1" i="0">
+                          <a:solidFill>
+                            <a:srgbClr val="5EEAD4"/>
                           </a:solidFill>
                           <a:latin typeface="Calibri"/>
                         </a:rPr>
@@ -7482,7 +7477,7 @@
                   </a:txBody>
                   <a:tcPr anchor="ctr" marL="100584" marR="100584" marT="36576" marB="36576">
                     <a:solidFill>
-                      <a:srgbClr val="F0FDFA"/>
+                      <a:srgbClr val="12303A"/>
                     </a:solidFill>
                   </a:tcPr>
                 </a:tc>
@@ -7493,9 +7488,9 @@
                     <a:p>
                       <a:pPr algn="r"/>
                       <a:r>
-                        <a:rPr sz="1250" b="1" i="0">
-                          <a:solidFill>
-                            <a:srgbClr val="0F766E"/>
+                        <a:rPr sz="1400" b="1" i="0">
+                          <a:solidFill>
+                            <a:srgbClr val="5EEAD4"/>
                           </a:solidFill>
                           <a:latin typeface="Calibri"/>
                         </a:rPr>
@@ -7505,7 +7500,7 @@
                   </a:txBody>
                   <a:tcPr anchor="ctr" marL="100584" marR="100584" marT="36576" marB="36576">
                     <a:solidFill>
-                      <a:srgbClr val="F0FDFA"/>
+                      <a:srgbClr val="12303A"/>
                     </a:solidFill>
                   </a:tcPr>
                 </a:tc>
@@ -7516,9 +7511,9 @@
                     <a:p>
                       <a:pPr algn="r"/>
                       <a:r>
-                        <a:rPr sz="1250" b="1" i="0">
-                          <a:solidFill>
-                            <a:srgbClr val="0F766E"/>
+                        <a:rPr sz="1400" b="1" i="0">
+                          <a:solidFill>
+                            <a:srgbClr val="5EEAD4"/>
                           </a:solidFill>
                           <a:latin typeface="Calibri"/>
                         </a:rPr>
@@ -7528,7 +7523,7 @@
                   </a:txBody>
                   <a:tcPr anchor="ctr" marL="100584" marR="100584" marT="36576" marB="36576">
                     <a:solidFill>
-                      <a:srgbClr val="F0FDFA"/>
+                      <a:srgbClr val="12303A"/>
                     </a:solidFill>
                   </a:tcPr>
                 </a:tc>
@@ -7539,9 +7534,9 @@
                     <a:p>
                       <a:pPr algn="r"/>
                       <a:r>
-                        <a:rPr sz="1250" b="1" i="0">
-                          <a:solidFill>
-                            <a:srgbClr val="0F766E"/>
+                        <a:rPr sz="1400" b="1" i="0">
+                          <a:solidFill>
+                            <a:srgbClr val="5EEAD4"/>
                           </a:solidFill>
                           <a:latin typeface="Calibri"/>
                         </a:rPr>
@@ -7551,12 +7546,12 @@
                   </a:txBody>
                   <a:tcPr anchor="ctr" marL="100584" marR="100584" marT="36576" marB="36576">
                     <a:solidFill>
-                      <a:srgbClr val="F0FDFA"/>
+                      <a:srgbClr val="12303A"/>
                     </a:solidFill>
                   </a:tcPr>
                 </a:tc>
               </a:tr>
-              <a:tr h="347472">
+              <a:tr h="457200">
                 <a:tc>
                   <a:txBody>
                     <a:bodyPr wrap="square"/>
@@ -7564,9 +7559,9 @@
                     <a:p>
                       <a:pPr algn="l"/>
                       <a:r>
-                        <a:rPr sz="1250" b="0" i="0">
-                          <a:solidFill>
-                            <a:srgbClr val="334155"/>
+                        <a:rPr sz="1400" b="0" i="0">
+                          <a:solidFill>
+                            <a:srgbClr val="C5D2E4"/>
                           </a:solidFill>
                           <a:latin typeface="Calibri"/>
                         </a:rPr>
@@ -7576,7 +7571,7 @@
                   </a:txBody>
                   <a:tcPr anchor="ctr" marL="100584" marR="100584" marT="36576" marB="36576">
                     <a:solidFill>
-                      <a:srgbClr val="FFFFFF"/>
+                      <a:srgbClr val="0E1929"/>
                     </a:solidFill>
                   </a:tcPr>
                 </a:tc>
@@ -7587,9 +7582,9 @@
                     <a:p>
                       <a:pPr algn="r"/>
                       <a:r>
-                        <a:rPr sz="1250" b="0" i="0">
-                          <a:solidFill>
-                            <a:srgbClr val="334155"/>
+                        <a:rPr sz="1400" b="0" i="0">
+                          <a:solidFill>
+                            <a:srgbClr val="C5D2E4"/>
                           </a:solidFill>
                           <a:latin typeface="Calibri"/>
                         </a:rPr>
@@ -7599,7 +7594,7 @@
                   </a:txBody>
                   <a:tcPr anchor="ctr" marL="100584" marR="100584" marT="36576" marB="36576">
                     <a:solidFill>
-                      <a:srgbClr val="FFFFFF"/>
+                      <a:srgbClr val="0E1929"/>
                     </a:solidFill>
                   </a:tcPr>
                 </a:tc>
@@ -7610,9 +7605,9 @@
                     <a:p>
                       <a:pPr algn="r"/>
                       <a:r>
-                        <a:rPr sz="1250" b="0" i="0">
-                          <a:solidFill>
-                            <a:srgbClr val="334155"/>
+                        <a:rPr sz="1400" b="0" i="0">
+                          <a:solidFill>
+                            <a:srgbClr val="C5D2E4"/>
                           </a:solidFill>
                           <a:latin typeface="Calibri"/>
                         </a:rPr>
@@ -7622,7 +7617,7 @@
                   </a:txBody>
                   <a:tcPr anchor="ctr" marL="100584" marR="100584" marT="36576" marB="36576">
                     <a:solidFill>
-                      <a:srgbClr val="FFFFFF"/>
+                      <a:srgbClr val="0E1929"/>
                     </a:solidFill>
                   </a:tcPr>
                 </a:tc>
@@ -7633,9 +7628,9 @@
                     <a:p>
                       <a:pPr algn="r"/>
                       <a:r>
-                        <a:rPr sz="1250" b="0" i="0">
-                          <a:solidFill>
-                            <a:srgbClr val="334155"/>
+                        <a:rPr sz="1400" b="0" i="0">
+                          <a:solidFill>
+                            <a:srgbClr val="C5D2E4"/>
                           </a:solidFill>
                           <a:latin typeface="Calibri"/>
                         </a:rPr>
@@ -7645,7 +7640,7 @@
                   </a:txBody>
                   <a:tcPr anchor="ctr" marL="100584" marR="100584" marT="36576" marB="36576">
                     <a:solidFill>
-                      <a:srgbClr val="FFFFFF"/>
+                      <a:srgbClr val="0E1929"/>
                     </a:solidFill>
                   </a:tcPr>
                 </a:tc>
@@ -7656,9 +7651,9 @@
                     <a:p>
                       <a:pPr algn="r"/>
                       <a:r>
-                        <a:rPr sz="1250" b="0" i="0">
-                          <a:solidFill>
-                            <a:srgbClr val="334155"/>
+                        <a:rPr sz="1400" b="0" i="0">
+                          <a:solidFill>
+                            <a:srgbClr val="C5D2E4"/>
                           </a:solidFill>
                           <a:latin typeface="Calibri"/>
                         </a:rPr>
@@ -7668,12 +7663,12 @@
                   </a:txBody>
                   <a:tcPr anchor="ctr" marL="100584" marR="100584" marT="36576" marB="36576">
                     <a:solidFill>
-                      <a:srgbClr val="FFFFFF"/>
+                      <a:srgbClr val="0E1929"/>
                     </a:solidFill>
                   </a:tcPr>
                 </a:tc>
               </a:tr>
-              <a:tr h="347472">
+              <a:tr h="457200">
                 <a:tc>
                   <a:txBody>
                     <a:bodyPr wrap="square"/>
@@ -7681,9 +7676,9 @@
                     <a:p>
                       <a:pPr algn="l"/>
                       <a:r>
-                        <a:rPr sz="1250" b="0" i="0">
-                          <a:solidFill>
-                            <a:srgbClr val="334155"/>
+                        <a:rPr sz="1400" b="0" i="0">
+                          <a:solidFill>
+                            <a:srgbClr val="C5D2E4"/>
                           </a:solidFill>
                           <a:latin typeface="Calibri"/>
                         </a:rPr>
@@ -7693,7 +7688,7 @@
                   </a:txBody>
                   <a:tcPr anchor="ctr" marL="100584" marR="100584" marT="36576" marB="36576">
                     <a:solidFill>
-                      <a:srgbClr val="F8FAFC"/>
+                      <a:srgbClr val="121E30"/>
                     </a:solidFill>
                   </a:tcPr>
                 </a:tc>
@@ -7704,9 +7699,9 @@
                     <a:p>
                       <a:pPr algn="r"/>
                       <a:r>
-                        <a:rPr sz="1250" b="0" i="0">
-                          <a:solidFill>
-                            <a:srgbClr val="334155"/>
+                        <a:rPr sz="1400" b="0" i="0">
+                          <a:solidFill>
+                            <a:srgbClr val="C5D2E4"/>
                           </a:solidFill>
                           <a:latin typeface="Calibri"/>
                         </a:rPr>
@@ -7716,7 +7711,7 @@
                   </a:txBody>
                   <a:tcPr anchor="ctr" marL="100584" marR="100584" marT="36576" marB="36576">
                     <a:solidFill>
-                      <a:srgbClr val="F8FAFC"/>
+                      <a:srgbClr val="121E30"/>
                     </a:solidFill>
                   </a:tcPr>
                 </a:tc>
@@ -7727,9 +7722,9 @@
                     <a:p>
                       <a:pPr algn="r"/>
                       <a:r>
-                        <a:rPr sz="1250" b="0" i="0">
-                          <a:solidFill>
-                            <a:srgbClr val="334155"/>
+                        <a:rPr sz="1400" b="0" i="0">
+                          <a:solidFill>
+                            <a:srgbClr val="C5D2E4"/>
                           </a:solidFill>
                           <a:latin typeface="Calibri"/>
                         </a:rPr>
@@ -7739,7 +7734,7 @@
                   </a:txBody>
                   <a:tcPr anchor="ctr" marL="100584" marR="100584" marT="36576" marB="36576">
                     <a:solidFill>
-                      <a:srgbClr val="F8FAFC"/>
+                      <a:srgbClr val="121E30"/>
                     </a:solidFill>
                   </a:tcPr>
                 </a:tc>
@@ -7750,9 +7745,9 @@
                     <a:p>
                       <a:pPr algn="r"/>
                       <a:r>
-                        <a:rPr sz="1250" b="0" i="0">
-                          <a:solidFill>
-                            <a:srgbClr val="334155"/>
+                        <a:rPr sz="1400" b="0" i="0">
+                          <a:solidFill>
+                            <a:srgbClr val="C5D2E4"/>
                           </a:solidFill>
                           <a:latin typeface="Calibri"/>
                         </a:rPr>
@@ -7762,7 +7757,7 @@
                   </a:txBody>
                   <a:tcPr anchor="ctr" marL="100584" marR="100584" marT="36576" marB="36576">
                     <a:solidFill>
-                      <a:srgbClr val="F8FAFC"/>
+                      <a:srgbClr val="121E30"/>
                     </a:solidFill>
                   </a:tcPr>
                 </a:tc>
@@ -7773,9 +7768,9 @@
                     <a:p>
                       <a:pPr algn="r"/>
                       <a:r>
-                        <a:rPr sz="1250" b="0" i="0">
-                          <a:solidFill>
-                            <a:srgbClr val="334155"/>
+                        <a:rPr sz="1400" b="0" i="0">
+                          <a:solidFill>
+                            <a:srgbClr val="C5D2E4"/>
                           </a:solidFill>
                           <a:latin typeface="Calibri"/>
                         </a:rPr>
@@ -7785,12 +7780,12 @@
                   </a:txBody>
                   <a:tcPr anchor="ctr" marL="100584" marR="100584" marT="36576" marB="36576">
                     <a:solidFill>
-                      <a:srgbClr val="F8FAFC"/>
+                      <a:srgbClr val="121E30"/>
                     </a:solidFill>
                   </a:tcPr>
                 </a:tc>
               </a:tr>
-              <a:tr h="347472">
+              <a:tr h="457200">
                 <a:tc>
                   <a:txBody>
                     <a:bodyPr wrap="square"/>
@@ -7798,9 +7793,9 @@
                     <a:p>
                       <a:pPr algn="l"/>
                       <a:r>
-                        <a:rPr sz="1250" b="0" i="0">
-                          <a:solidFill>
-                            <a:srgbClr val="334155"/>
+                        <a:rPr sz="1400" b="0" i="0">
+                          <a:solidFill>
+                            <a:srgbClr val="C5D2E4"/>
                           </a:solidFill>
                           <a:latin typeface="Calibri"/>
                         </a:rPr>
@@ -7810,7 +7805,7 @@
                   </a:txBody>
                   <a:tcPr anchor="ctr" marL="100584" marR="100584" marT="36576" marB="36576">
                     <a:solidFill>
-                      <a:srgbClr val="FFFFFF"/>
+                      <a:srgbClr val="0E1929"/>
                     </a:solidFill>
                   </a:tcPr>
                 </a:tc>
@@ -7821,9 +7816,9 @@
                     <a:p>
                       <a:pPr algn="r"/>
                       <a:r>
-                        <a:rPr sz="1250" b="0" i="0">
-                          <a:solidFill>
-                            <a:srgbClr val="334155"/>
+                        <a:rPr sz="1400" b="0" i="0">
+                          <a:solidFill>
+                            <a:srgbClr val="C5D2E4"/>
                           </a:solidFill>
                           <a:latin typeface="Calibri"/>
                         </a:rPr>
@@ -7833,7 +7828,7 @@
                   </a:txBody>
                   <a:tcPr anchor="ctr" marL="100584" marR="100584" marT="36576" marB="36576">
                     <a:solidFill>
-                      <a:srgbClr val="FFFFFF"/>
+                      <a:srgbClr val="0E1929"/>
                     </a:solidFill>
                   </a:tcPr>
                 </a:tc>
@@ -7844,9 +7839,9 @@
                     <a:p>
                       <a:pPr algn="r"/>
                       <a:r>
-                        <a:rPr sz="1250" b="0" i="0">
-                          <a:solidFill>
-                            <a:srgbClr val="334155"/>
+                        <a:rPr sz="1400" b="0" i="0">
+                          <a:solidFill>
+                            <a:srgbClr val="C5D2E4"/>
                           </a:solidFill>
                           <a:latin typeface="Calibri"/>
                         </a:rPr>
@@ -7856,7 +7851,7 @@
                   </a:txBody>
                   <a:tcPr anchor="ctr" marL="100584" marR="100584" marT="36576" marB="36576">
                     <a:solidFill>
-                      <a:srgbClr val="FFFFFF"/>
+                      <a:srgbClr val="0E1929"/>
                     </a:solidFill>
                   </a:tcPr>
                 </a:tc>
@@ -7867,9 +7862,9 @@
                     <a:p>
                       <a:pPr algn="r"/>
                       <a:r>
-                        <a:rPr sz="1250" b="0" i="0">
-                          <a:solidFill>
-                            <a:srgbClr val="334155"/>
+                        <a:rPr sz="1400" b="0" i="0">
+                          <a:solidFill>
+                            <a:srgbClr val="C5D2E4"/>
                           </a:solidFill>
                           <a:latin typeface="Calibri"/>
                         </a:rPr>
@@ -7879,7 +7874,7 @@
                   </a:txBody>
                   <a:tcPr anchor="ctr" marL="100584" marR="100584" marT="36576" marB="36576">
                     <a:solidFill>
-                      <a:srgbClr val="FFFFFF"/>
+                      <a:srgbClr val="0E1929"/>
                     </a:solidFill>
                   </a:tcPr>
                 </a:tc>
@@ -7890,9 +7885,9 @@
                     <a:p>
                       <a:pPr algn="r"/>
                       <a:r>
-                        <a:rPr sz="1250" b="0" i="0">
-                          <a:solidFill>
-                            <a:srgbClr val="334155"/>
+                        <a:rPr sz="1400" b="0" i="0">
+                          <a:solidFill>
+                            <a:srgbClr val="C5D2E4"/>
                           </a:solidFill>
                           <a:latin typeface="Calibri"/>
                         </a:rPr>
@@ -7902,12 +7897,12 @@
                   </a:txBody>
                   <a:tcPr anchor="ctr" marL="100584" marR="100584" marT="36576" marB="36576">
                     <a:solidFill>
-                      <a:srgbClr val="FFFFFF"/>
+                      <a:srgbClr val="0E1929"/>
                     </a:solidFill>
                   </a:tcPr>
                 </a:tc>
               </a:tr>
-              <a:tr h="347472">
+              <a:tr h="457200">
                 <a:tc>
                   <a:txBody>
                     <a:bodyPr wrap="square"/>
@@ -7915,9 +7910,9 @@
                     <a:p>
                       <a:pPr algn="l"/>
                       <a:r>
-                        <a:rPr sz="1250" b="0" i="0">
-                          <a:solidFill>
-                            <a:srgbClr val="334155"/>
+                        <a:rPr sz="1400" b="0" i="0">
+                          <a:solidFill>
+                            <a:srgbClr val="C5D2E4"/>
                           </a:solidFill>
                           <a:latin typeface="Calibri"/>
                         </a:rPr>
@@ -7927,7 +7922,7 @@
                   </a:txBody>
                   <a:tcPr anchor="ctr" marL="100584" marR="100584" marT="36576" marB="36576">
                     <a:solidFill>
-                      <a:srgbClr val="F8FAFC"/>
+                      <a:srgbClr val="121E30"/>
                     </a:solidFill>
                   </a:tcPr>
                 </a:tc>
@@ -7938,9 +7933,9 @@
                     <a:p>
                       <a:pPr algn="r"/>
                       <a:r>
-                        <a:rPr sz="1250" b="0" i="0">
-                          <a:solidFill>
-                            <a:srgbClr val="334155"/>
+                        <a:rPr sz="1400" b="0" i="0">
+                          <a:solidFill>
+                            <a:srgbClr val="C5D2E4"/>
                           </a:solidFill>
                           <a:latin typeface="Calibri"/>
                         </a:rPr>
@@ -7950,7 +7945,7 @@
                   </a:txBody>
                   <a:tcPr anchor="ctr" marL="100584" marR="100584" marT="36576" marB="36576">
                     <a:solidFill>
-                      <a:srgbClr val="F8FAFC"/>
+                      <a:srgbClr val="121E30"/>
                     </a:solidFill>
                   </a:tcPr>
                 </a:tc>
@@ -7961,9 +7956,9 @@
                     <a:p>
                       <a:pPr algn="r"/>
                       <a:r>
-                        <a:rPr sz="1250" b="0" i="0">
-                          <a:solidFill>
-                            <a:srgbClr val="334155"/>
+                        <a:rPr sz="1400" b="0" i="0">
+                          <a:solidFill>
+                            <a:srgbClr val="C5D2E4"/>
                           </a:solidFill>
                           <a:latin typeface="Calibri"/>
                         </a:rPr>
@@ -7973,7 +7968,7 @@
                   </a:txBody>
                   <a:tcPr anchor="ctr" marL="100584" marR="100584" marT="36576" marB="36576">
                     <a:solidFill>
-                      <a:srgbClr val="F8FAFC"/>
+                      <a:srgbClr val="121E30"/>
                     </a:solidFill>
                   </a:tcPr>
                 </a:tc>
@@ -7984,9 +7979,9 @@
                     <a:p>
                       <a:pPr algn="r"/>
                       <a:r>
-                        <a:rPr sz="1250" b="0" i="0">
-                          <a:solidFill>
-                            <a:srgbClr val="334155"/>
+                        <a:rPr sz="1400" b="0" i="0">
+                          <a:solidFill>
+                            <a:srgbClr val="C5D2E4"/>
                           </a:solidFill>
                           <a:latin typeface="Calibri"/>
                         </a:rPr>
@@ -7996,7 +7991,7 @@
                   </a:txBody>
                   <a:tcPr anchor="ctr" marL="100584" marR="100584" marT="36576" marB="36576">
                     <a:solidFill>
-                      <a:srgbClr val="F8FAFC"/>
+                      <a:srgbClr val="121E30"/>
                     </a:solidFill>
                   </a:tcPr>
                 </a:tc>
@@ -8007,9 +8002,9 @@
                     <a:p>
                       <a:pPr algn="r"/>
                       <a:r>
-                        <a:rPr sz="1250" b="0" i="0">
-                          <a:solidFill>
-                            <a:srgbClr val="334155"/>
+                        <a:rPr sz="1400" b="0" i="0">
+                          <a:solidFill>
+                            <a:srgbClr val="C5D2E4"/>
                           </a:solidFill>
                           <a:latin typeface="Calibri"/>
                         </a:rPr>
@@ -8019,12 +8014,12 @@
                   </a:txBody>
                   <a:tcPr anchor="ctr" marL="100584" marR="100584" marT="36576" marB="36576">
                     <a:solidFill>
-                      <a:srgbClr val="F8FAFC"/>
+                      <a:srgbClr val="121E30"/>
                     </a:solidFill>
                   </a:tcPr>
                 </a:tc>
               </a:tr>
-              <a:tr h="347472">
+              <a:tr h="457200">
                 <a:tc>
                   <a:txBody>
                     <a:bodyPr wrap="square"/>
@@ -8032,9 +8027,9 @@
                     <a:p>
                       <a:pPr algn="l"/>
                       <a:r>
-                        <a:rPr sz="1250" b="0" i="0">
-                          <a:solidFill>
-                            <a:srgbClr val="334155"/>
+                        <a:rPr sz="1400" b="0" i="0">
+                          <a:solidFill>
+                            <a:srgbClr val="C5D2E4"/>
                           </a:solidFill>
                           <a:latin typeface="Calibri"/>
                         </a:rPr>
@@ -8044,7 +8039,7 @@
                   </a:txBody>
                   <a:tcPr anchor="ctr" marL="100584" marR="100584" marT="36576" marB="36576">
                     <a:solidFill>
-                      <a:srgbClr val="FFFFFF"/>
+                      <a:srgbClr val="0E1929"/>
                     </a:solidFill>
                   </a:tcPr>
                 </a:tc>
@@ -8055,9 +8050,9 @@
                     <a:p>
                       <a:pPr algn="r"/>
                       <a:r>
-                        <a:rPr sz="1250" b="0" i="0">
-                          <a:solidFill>
-                            <a:srgbClr val="334155"/>
+                        <a:rPr sz="1400" b="0" i="0">
+                          <a:solidFill>
+                            <a:srgbClr val="C5D2E4"/>
                           </a:solidFill>
                           <a:latin typeface="Calibri"/>
                         </a:rPr>
@@ -8067,7 +8062,7 @@
                   </a:txBody>
                   <a:tcPr anchor="ctr" marL="100584" marR="100584" marT="36576" marB="36576">
                     <a:solidFill>
-                      <a:srgbClr val="FFFFFF"/>
+                      <a:srgbClr val="0E1929"/>
                     </a:solidFill>
                   </a:tcPr>
                 </a:tc>
@@ -8078,9 +8073,9 @@
                     <a:p>
                       <a:pPr algn="r"/>
                       <a:r>
-                        <a:rPr sz="1250" b="0" i="0">
-                          <a:solidFill>
-                            <a:srgbClr val="334155"/>
+                        <a:rPr sz="1400" b="0" i="0">
+                          <a:solidFill>
+                            <a:srgbClr val="C5D2E4"/>
                           </a:solidFill>
                           <a:latin typeface="Calibri"/>
                         </a:rPr>
@@ -8090,7 +8085,7 @@
                   </a:txBody>
                   <a:tcPr anchor="ctr" marL="100584" marR="100584" marT="36576" marB="36576">
                     <a:solidFill>
-                      <a:srgbClr val="FFFFFF"/>
+                      <a:srgbClr val="0E1929"/>
                     </a:solidFill>
                   </a:tcPr>
                 </a:tc>
@@ -8101,9 +8096,9 @@
                     <a:p>
                       <a:pPr algn="r"/>
                       <a:r>
-                        <a:rPr sz="1250" b="0" i="0">
-                          <a:solidFill>
-                            <a:srgbClr val="334155"/>
+                        <a:rPr sz="1400" b="0" i="0">
+                          <a:solidFill>
+                            <a:srgbClr val="C5D2E4"/>
                           </a:solidFill>
                           <a:latin typeface="Calibri"/>
                         </a:rPr>
@@ -8113,7 +8108,7 @@
                   </a:txBody>
                   <a:tcPr anchor="ctr" marL="100584" marR="100584" marT="36576" marB="36576">
                     <a:solidFill>
-                      <a:srgbClr val="FFFFFF"/>
+                      <a:srgbClr val="0E1929"/>
                     </a:solidFill>
                   </a:tcPr>
                 </a:tc>
@@ -8124,9 +8119,9 @@
                     <a:p>
                       <a:pPr algn="r"/>
                       <a:r>
-                        <a:rPr sz="1250" b="0" i="0">
-                          <a:solidFill>
-                            <a:srgbClr val="334155"/>
+                        <a:rPr sz="1400" b="0" i="0">
+                          <a:solidFill>
+                            <a:srgbClr val="C5D2E4"/>
                           </a:solidFill>
                           <a:latin typeface="Calibri"/>
                         </a:rPr>
@@ -8136,12 +8131,12 @@
                   </a:txBody>
                   <a:tcPr anchor="ctr" marL="100584" marR="100584" marT="36576" marB="36576">
                     <a:solidFill>
-                      <a:srgbClr val="FFFFFF"/>
+                      <a:srgbClr val="0E1929"/>
                     </a:solidFill>
                   </a:tcPr>
                 </a:tc>
               </a:tr>
-              <a:tr h="347472">
+              <a:tr h="457200">
                 <a:tc>
                   <a:txBody>
                     <a:bodyPr wrap="square"/>
@@ -8149,9 +8144,9 @@
                     <a:p>
                       <a:pPr algn="l"/>
                       <a:r>
-                        <a:rPr sz="1250" b="0" i="0">
-                          <a:solidFill>
-                            <a:srgbClr val="334155"/>
+                        <a:rPr sz="1400" b="0" i="0">
+                          <a:solidFill>
+                            <a:srgbClr val="C5D2E4"/>
                           </a:solidFill>
                           <a:latin typeface="Calibri"/>
                         </a:rPr>
@@ -8161,7 +8156,7 @@
                   </a:txBody>
                   <a:tcPr anchor="ctr" marL="100584" marR="100584" marT="36576" marB="36576">
                     <a:solidFill>
-                      <a:srgbClr val="F8FAFC"/>
+                      <a:srgbClr val="121E30"/>
                     </a:solidFill>
                   </a:tcPr>
                 </a:tc>
@@ -8172,9 +8167,9 @@
                     <a:p>
                       <a:pPr algn="r"/>
                       <a:r>
-                        <a:rPr sz="1250" b="0" i="0">
-                          <a:solidFill>
-                            <a:srgbClr val="334155"/>
+                        <a:rPr sz="1400" b="0" i="0">
+                          <a:solidFill>
+                            <a:srgbClr val="C5D2E4"/>
                           </a:solidFill>
                           <a:latin typeface="Calibri"/>
                         </a:rPr>
@@ -8184,7 +8179,7 @@
                   </a:txBody>
                   <a:tcPr anchor="ctr" marL="100584" marR="100584" marT="36576" marB="36576">
                     <a:solidFill>
-                      <a:srgbClr val="F8FAFC"/>
+                      <a:srgbClr val="121E30"/>
                     </a:solidFill>
                   </a:tcPr>
                 </a:tc>
@@ -8195,9 +8190,9 @@
                     <a:p>
                       <a:pPr algn="r"/>
                       <a:r>
-                        <a:rPr sz="1250" b="0" i="0">
-                          <a:solidFill>
-                            <a:srgbClr val="334155"/>
+                        <a:rPr sz="1400" b="0" i="0">
+                          <a:solidFill>
+                            <a:srgbClr val="C5D2E4"/>
                           </a:solidFill>
                           <a:latin typeface="Calibri"/>
                         </a:rPr>
@@ -8207,7 +8202,7 @@
                   </a:txBody>
                   <a:tcPr anchor="ctr" marL="100584" marR="100584" marT="36576" marB="36576">
                     <a:solidFill>
-                      <a:srgbClr val="F8FAFC"/>
+                      <a:srgbClr val="121E30"/>
                     </a:solidFill>
                   </a:tcPr>
                 </a:tc>
@@ -8218,9 +8213,9 @@
                     <a:p>
                       <a:pPr algn="r"/>
                       <a:r>
-                        <a:rPr sz="1250" b="0" i="0">
-                          <a:solidFill>
-                            <a:srgbClr val="334155"/>
+                        <a:rPr sz="1400" b="0" i="0">
+                          <a:solidFill>
+                            <a:srgbClr val="C5D2E4"/>
                           </a:solidFill>
                           <a:latin typeface="Calibri"/>
                         </a:rPr>
@@ -8230,7 +8225,7 @@
                   </a:txBody>
                   <a:tcPr anchor="ctr" marL="100584" marR="100584" marT="36576" marB="36576">
                     <a:solidFill>
-                      <a:srgbClr val="F8FAFC"/>
+                      <a:srgbClr val="121E30"/>
                     </a:solidFill>
                   </a:tcPr>
                 </a:tc>
@@ -8241,9 +8236,9 @@
                     <a:p>
                       <a:pPr algn="r"/>
                       <a:r>
-                        <a:rPr sz="1250" b="0" i="0">
-                          <a:solidFill>
-                            <a:srgbClr val="334155"/>
+                        <a:rPr sz="1400" b="0" i="0">
+                          <a:solidFill>
+                            <a:srgbClr val="C5D2E4"/>
                           </a:solidFill>
                           <a:latin typeface="Calibri"/>
                         </a:rPr>
@@ -8253,12 +8248,12 @@
                   </a:txBody>
                   <a:tcPr anchor="ctr" marL="100584" marR="100584" marT="36576" marB="36576">
                     <a:solidFill>
-                      <a:srgbClr val="F8FAFC"/>
+                      <a:srgbClr val="121E30"/>
                     </a:solidFill>
                   </a:tcPr>
                 </a:tc>
               </a:tr>
-              <a:tr h="347472">
+              <a:tr h="457200">
                 <a:tc>
                   <a:txBody>
                     <a:bodyPr wrap="square"/>
@@ -8266,9 +8261,9 @@
                     <a:p>
                       <a:pPr algn="l"/>
                       <a:r>
-                        <a:rPr sz="1250" b="0" i="0">
-                          <a:solidFill>
-                            <a:srgbClr val="334155"/>
+                        <a:rPr sz="1400" b="0" i="0">
+                          <a:solidFill>
+                            <a:srgbClr val="C5D2E4"/>
                           </a:solidFill>
                           <a:latin typeface="Calibri"/>
                         </a:rPr>
@@ -8278,7 +8273,7 @@
                   </a:txBody>
                   <a:tcPr anchor="ctr" marL="100584" marR="100584" marT="36576" marB="36576">
                     <a:solidFill>
-                      <a:srgbClr val="FFFFFF"/>
+                      <a:srgbClr val="0E1929"/>
                     </a:solidFill>
                   </a:tcPr>
                 </a:tc>
@@ -8289,9 +8284,9 @@
                     <a:p>
                       <a:pPr algn="r"/>
                       <a:r>
-                        <a:rPr sz="1250" b="0" i="0">
-                          <a:solidFill>
-                            <a:srgbClr val="334155"/>
+                        <a:rPr sz="1400" b="0" i="0">
+                          <a:solidFill>
+                            <a:srgbClr val="C5D2E4"/>
                           </a:solidFill>
                           <a:latin typeface="Calibri"/>
                         </a:rPr>
@@ -8301,7 +8296,7 @@
                   </a:txBody>
                   <a:tcPr anchor="ctr" marL="100584" marR="100584" marT="36576" marB="36576">
                     <a:solidFill>
-                      <a:srgbClr val="FFFFFF"/>
+                      <a:srgbClr val="0E1929"/>
                     </a:solidFill>
                   </a:tcPr>
                 </a:tc>
@@ -8312,9 +8307,9 @@
                     <a:p>
                       <a:pPr algn="r"/>
                       <a:r>
-                        <a:rPr sz="1250" b="0" i="0">
-                          <a:solidFill>
-                            <a:srgbClr val="334155"/>
+                        <a:rPr sz="1400" b="0" i="0">
+                          <a:solidFill>
+                            <a:srgbClr val="C5D2E4"/>
                           </a:solidFill>
                           <a:latin typeface="Calibri"/>
                         </a:rPr>
@@ -8324,7 +8319,7 @@
                   </a:txBody>
                   <a:tcPr anchor="ctr" marL="100584" marR="100584" marT="36576" marB="36576">
                     <a:solidFill>
-                      <a:srgbClr val="FFFFFF"/>
+                      <a:srgbClr val="0E1929"/>
                     </a:solidFill>
                   </a:tcPr>
                 </a:tc>
@@ -8335,9 +8330,9 @@
                     <a:p>
                       <a:pPr algn="r"/>
                       <a:r>
-                        <a:rPr sz="1250" b="0" i="0">
-                          <a:solidFill>
-                            <a:srgbClr val="334155"/>
+                        <a:rPr sz="1400" b="0" i="0">
+                          <a:solidFill>
+                            <a:srgbClr val="C5D2E4"/>
                           </a:solidFill>
                           <a:latin typeface="Calibri"/>
                         </a:rPr>
@@ -8347,7 +8342,7 @@
                   </a:txBody>
                   <a:tcPr anchor="ctr" marL="100584" marR="100584" marT="36576" marB="36576">
                     <a:solidFill>
-                      <a:srgbClr val="FFFFFF"/>
+                      <a:srgbClr val="0E1929"/>
                     </a:solidFill>
                   </a:tcPr>
                 </a:tc>
@@ -8358,9 +8353,9 @@
                     <a:p>
                       <a:pPr algn="r"/>
                       <a:r>
-                        <a:rPr sz="1250" b="0" i="0">
-                          <a:solidFill>
-                            <a:srgbClr val="334155"/>
+                        <a:rPr sz="1400" b="0" i="0">
+                          <a:solidFill>
+                            <a:srgbClr val="C5D2E4"/>
                           </a:solidFill>
                           <a:latin typeface="Calibri"/>
                         </a:rPr>
@@ -8370,12 +8365,12 @@
                   </a:txBody>
                   <a:tcPr anchor="ctr" marL="100584" marR="100584" marT="36576" marB="36576">
                     <a:solidFill>
-                      <a:srgbClr val="FFFFFF"/>
+                      <a:srgbClr val="0E1929"/>
                     </a:solidFill>
                   </a:tcPr>
                 </a:tc>
               </a:tr>
-              <a:tr h="347472">
+              <a:tr h="457200">
                 <a:tc>
                   <a:txBody>
                     <a:bodyPr wrap="square"/>
@@ -8383,9 +8378,9 @@
                     <a:p>
                       <a:pPr algn="l"/>
                       <a:r>
-                        <a:rPr sz="1250" b="0" i="0">
-                          <a:solidFill>
-                            <a:srgbClr val="334155"/>
+                        <a:rPr sz="1400" b="0" i="0">
+                          <a:solidFill>
+                            <a:srgbClr val="C5D2E4"/>
                           </a:solidFill>
                           <a:latin typeface="Calibri"/>
                         </a:rPr>
@@ -8395,7 +8390,7 @@
                   </a:txBody>
                   <a:tcPr anchor="ctr" marL="100584" marR="100584" marT="36576" marB="36576">
                     <a:solidFill>
-                      <a:srgbClr val="F8FAFC"/>
+                      <a:srgbClr val="121E30"/>
                     </a:solidFill>
                   </a:tcPr>
                 </a:tc>
@@ -8406,9 +8401,9 @@
                     <a:p>
                       <a:pPr algn="r"/>
                       <a:r>
-                        <a:rPr sz="1250" b="0" i="0">
-                          <a:solidFill>
-                            <a:srgbClr val="334155"/>
+                        <a:rPr sz="1400" b="0" i="0">
+                          <a:solidFill>
+                            <a:srgbClr val="C5D2E4"/>
                           </a:solidFill>
                           <a:latin typeface="Calibri"/>
                         </a:rPr>
@@ -8418,7 +8413,7 @@
                   </a:txBody>
                   <a:tcPr anchor="ctr" marL="100584" marR="100584" marT="36576" marB="36576">
                     <a:solidFill>
-                      <a:srgbClr val="F8FAFC"/>
+                      <a:srgbClr val="121E30"/>
                     </a:solidFill>
                   </a:tcPr>
                 </a:tc>
@@ -8429,9 +8424,9 @@
                     <a:p>
                       <a:pPr algn="r"/>
                       <a:r>
-                        <a:rPr sz="1250" b="0" i="0">
-                          <a:solidFill>
-                            <a:srgbClr val="334155"/>
+                        <a:rPr sz="1400" b="0" i="0">
+                          <a:solidFill>
+                            <a:srgbClr val="C5D2E4"/>
                           </a:solidFill>
                           <a:latin typeface="Calibri"/>
                         </a:rPr>
@@ -8441,7 +8436,7 @@
                   </a:txBody>
                   <a:tcPr anchor="ctr" marL="100584" marR="100584" marT="36576" marB="36576">
                     <a:solidFill>
-                      <a:srgbClr val="F8FAFC"/>
+                      <a:srgbClr val="121E30"/>
                     </a:solidFill>
                   </a:tcPr>
                 </a:tc>
@@ -8452,9 +8447,9 @@
                     <a:p>
                       <a:pPr algn="r"/>
                       <a:r>
-                        <a:rPr sz="1250" b="0" i="0">
-                          <a:solidFill>
-                            <a:srgbClr val="334155"/>
+                        <a:rPr sz="1400" b="0" i="0">
+                          <a:solidFill>
+                            <a:srgbClr val="C5D2E4"/>
                           </a:solidFill>
                           <a:latin typeface="Calibri"/>
                         </a:rPr>
@@ -8464,7 +8459,7 @@
                   </a:txBody>
                   <a:tcPr anchor="ctr" marL="100584" marR="100584" marT="36576" marB="36576">
                     <a:solidFill>
-                      <a:srgbClr val="F8FAFC"/>
+                      <a:srgbClr val="121E30"/>
                     </a:solidFill>
                   </a:tcPr>
                 </a:tc>
@@ -8475,9 +8470,9 @@
                     <a:p>
                       <a:pPr algn="r"/>
                       <a:r>
-                        <a:rPr sz="1250" b="0" i="0">
-                          <a:solidFill>
-                            <a:srgbClr val="334155"/>
+                        <a:rPr sz="1400" b="0" i="0">
+                          <a:solidFill>
+                            <a:srgbClr val="C5D2E4"/>
                           </a:solidFill>
                           <a:latin typeface="Calibri"/>
                         </a:rPr>
@@ -8487,7 +8482,7 @@
                   </a:txBody>
                   <a:tcPr anchor="ctr" marL="100584" marR="100584" marT="36576" marB="36576">
                     <a:solidFill>
-                      <a:srgbClr val="F8FAFC"/>
+                      <a:srgbClr val="121E30"/>
                     </a:solidFill>
                   </a:tcPr>
                 </a:tc>
@@ -8523,18 +8518,18 @@
                 <a:spcPct val="118000"/>
               </a:lnSpc>
               <a:spcAft>
-                <a:spcPts val="1600"/>
+                <a:spcPts val="1800"/>
               </a:spcAft>
               <a:buClr>
-                <a:srgbClr val="0D9488"/>
+                <a:srgbClr val="2DD4BF"/>
               </a:buClr>
               <a:buFont typeface="Arial"/>
               <a:buChar char="•"/>
             </a:pPr>
             <a:r>
-              <a:rPr sz="1400" b="0" i="0">
-                <a:solidFill>
-                  <a:srgbClr val="334155"/>
+              <a:rPr sz="1550" b="0" i="0">
+                <a:solidFill>
+                  <a:srgbClr val="C5D2E4"/>
                 </a:solidFill>
                 <a:latin typeface="Calibri"/>
               </a:rPr>
@@ -8547,18 +8542,18 @@
                 <a:spcPct val="118000"/>
               </a:lnSpc>
               <a:spcAft>
-                <a:spcPts val="1600"/>
+                <a:spcPts val="1800"/>
               </a:spcAft>
               <a:buClr>
-                <a:srgbClr val="0D9488"/>
+                <a:srgbClr val="2DD4BF"/>
               </a:buClr>
               <a:buFont typeface="Arial"/>
               <a:buChar char="•"/>
             </a:pPr>
             <a:r>
-              <a:rPr sz="1400" b="0" i="0">
-                <a:solidFill>
-                  <a:srgbClr val="334155"/>
+              <a:rPr sz="1550" b="0" i="0">
+                <a:solidFill>
+                  <a:srgbClr val="C5D2E4"/>
                 </a:solidFill>
                 <a:latin typeface="Calibri"/>
               </a:rPr>
@@ -8571,18 +8566,18 @@
                 <a:spcPct val="118000"/>
               </a:lnSpc>
               <a:spcAft>
-                <a:spcPts val="1600"/>
+                <a:spcPts val="1800"/>
               </a:spcAft>
               <a:buClr>
-                <a:srgbClr val="0D9488"/>
+                <a:srgbClr val="2DD4BF"/>
               </a:buClr>
               <a:buFont typeface="Arial"/>
               <a:buChar char="•"/>
             </a:pPr>
             <a:r>
-              <a:rPr sz="1400" b="0" i="0">
-                <a:solidFill>
-                  <a:srgbClr val="334155"/>
+              <a:rPr sz="1550" b="0" i="0">
+                <a:solidFill>
+                  <a:srgbClr val="C5D2E4"/>
                 </a:solidFill>
                 <a:latin typeface="Calibri"/>
               </a:rPr>
@@ -8605,7 +8600,7 @@
     <p:bg>
       <p:bgPr>
         <a:solidFill>
-          <a:srgbClr val="FAFAF9"/>
+          <a:srgbClr val="0B1220"/>
         </a:solidFill>
         <a:effectLst/>
       </p:bgPr>
@@ -8642,7 +8637,7 @@
             <a:r>
               <a:rPr sz="1050" b="1" i="0" spc="120">
                 <a:solidFill>
-                  <a:srgbClr val="0D9488"/>
+                  <a:srgbClr val="2DD4BF"/>
                 </a:solidFill>
                 <a:latin typeface="Calibri"/>
               </a:rPr>
@@ -8681,7 +8676,7 @@
             <a:r>
               <a:rPr sz="2900" b="1" i="0">
                 <a:solidFill>
-                  <a:srgbClr val="0F172A"/>
+                  <a:srgbClr val="F2F6FB"/>
                 </a:solidFill>
                 <a:latin typeface="Calibri Light"/>
               </a:rPr>
@@ -8705,7 +8700,7 @@
             <a:avLst/>
           </a:prstGeom>
           <a:solidFill>
-            <a:srgbClr val="0D9488"/>
+            <a:srgbClr val="2DD4BF"/>
           </a:solidFill>
           <a:ln>
             <a:noFill/>
@@ -8760,7 +8755,7 @@
             <a:r>
               <a:rPr sz="1100" b="0" i="0">
                 <a:solidFill>
-                  <a:srgbClr val="94A3B8"/>
+                  <a:srgbClr val="55688A"/>
                 </a:solidFill>
                 <a:latin typeface="Calibri"/>
               </a:rPr>
@@ -8799,7 +8794,7 @@
                 <a:spcPts val="2200"/>
               </a:spcAft>
               <a:buClr>
-                <a:srgbClr val="0D9488"/>
+                <a:srgbClr val="2DD4BF"/>
               </a:buClr>
               <a:buFont typeface="Arial"/>
               <a:buChar char="•"/>
@@ -8807,7 +8802,7 @@
             <a:r>
               <a:rPr sz="1750" b="0" i="0">
                 <a:solidFill>
-                  <a:srgbClr val="334155"/>
+                  <a:srgbClr val="C5D2E4"/>
                 </a:solidFill>
                 <a:latin typeface="Calibri"/>
               </a:rPr>
@@ -8823,7 +8818,7 @@
                 <a:spcPts val="2200"/>
               </a:spcAft>
               <a:buClr>
-                <a:srgbClr val="0D9488"/>
+                <a:srgbClr val="2DD4BF"/>
               </a:buClr>
               <a:buFont typeface="Arial"/>
               <a:buChar char="•"/>
@@ -8831,7 +8826,7 @@
             <a:r>
               <a:rPr sz="1750" b="0" i="0">
                 <a:solidFill>
-                  <a:srgbClr val="334155"/>
+                  <a:srgbClr val="C5D2E4"/>
                 </a:solidFill>
                 <a:latin typeface="Calibri"/>
               </a:rPr>
@@ -8847,7 +8842,7 @@
                 <a:spcPts val="2200"/>
               </a:spcAft>
               <a:buClr>
-                <a:srgbClr val="0D9488"/>
+                <a:srgbClr val="2DD4BF"/>
               </a:buClr>
               <a:buFont typeface="Arial"/>
               <a:buChar char="•"/>
@@ -8855,7 +8850,7 @@
             <a:r>
               <a:rPr sz="1750" b="0" i="0">
                 <a:solidFill>
-                  <a:srgbClr val="334155"/>
+                  <a:srgbClr val="C5D2E4"/>
                 </a:solidFill>
                 <a:latin typeface="Calibri"/>
               </a:rPr>
@@ -8871,7 +8866,7 @@
                 <a:spcPts val="2200"/>
               </a:spcAft>
               <a:buClr>
-                <a:srgbClr val="0D9488"/>
+                <a:srgbClr val="2DD4BF"/>
               </a:buClr>
               <a:buFont typeface="Arial"/>
               <a:buChar char="•"/>
@@ -8879,7 +8874,7 @@
             <a:r>
               <a:rPr sz="1750" b="1" i="0">
                 <a:solidFill>
-                  <a:srgbClr val="0F172A"/>
+                  <a:srgbClr val="F2F6FB"/>
                 </a:solidFill>
                 <a:latin typeface="Calibri"/>
               </a:rPr>
@@ -8888,7 +8883,7 @@
             <a:r>
               <a:rPr sz="1750" b="0" i="0">
                 <a:solidFill>
-                  <a:srgbClr val="334155"/>
+                  <a:srgbClr val="C5D2E4"/>
                 </a:solidFill>
                 <a:latin typeface="Calibri"/>
               </a:rPr>
@@ -8922,7 +8917,7 @@
             <a:r>
               <a:rPr sz="1700" b="1" i="0">
                 <a:solidFill>
-                  <a:srgbClr val="0F766E"/>
+                  <a:srgbClr val="5EEAD4"/>
                 </a:solidFill>
                 <a:latin typeface="Calibri Light"/>
               </a:rPr>
@@ -8945,7 +8940,7 @@
     <p:bg>
       <p:bgPr>
         <a:solidFill>
-          <a:srgbClr val="FAFAF9"/>
+          <a:srgbClr val="0B1220"/>
         </a:solidFill>
         <a:effectLst/>
       </p:bgPr>
@@ -8983,7 +8978,7 @@
             <a:r>
               <a:rPr sz="1100" b="0" i="0">
                 <a:solidFill>
-                  <a:srgbClr val="94A3B8"/>
+                  <a:srgbClr val="55688A"/>
                 </a:solidFill>
                 <a:latin typeface="Calibri"/>
               </a:rPr>
@@ -9017,7 +9012,7 @@
             <a:r>
               <a:rPr sz="3600" b="1" i="0">
                 <a:solidFill>
-                  <a:srgbClr val="0F172A"/>
+                  <a:srgbClr val="F2F6FB"/>
                 </a:solidFill>
                 <a:latin typeface="Calibri Light"/>
               </a:rPr>
@@ -9041,7 +9036,7 @@
             <a:avLst/>
           </a:prstGeom>
           <a:solidFill>
-            <a:srgbClr val="0D9488"/>
+            <a:srgbClr val="2DD4BF"/>
           </a:solidFill>
           <a:ln>
             <a:noFill/>
@@ -9100,7 +9095,7 @@
             <a:r>
               <a:rPr sz="1600" b="0" i="0">
                 <a:solidFill>
-                  <a:srgbClr val="334155"/>
+                  <a:srgbClr val="C5D2E4"/>
                 </a:solidFill>
                 <a:latin typeface="Calibri"/>
               </a:rPr>
@@ -9116,7 +9111,7 @@
             <a:r>
               <a:rPr sz="1400" b="0" i="0">
                 <a:solidFill>
-                  <a:srgbClr val="64748B"/>
+                  <a:srgbClr val="93A6C0"/>
                 </a:solidFill>
                 <a:latin typeface="Calibri"/>
               </a:rPr>
@@ -9151,7 +9146,7 @@
             <a:r>
               <a:rPr sz="1100" b="0" i="0">
                 <a:solidFill>
-                  <a:srgbClr val="94A3B8"/>
+                  <a:srgbClr val="55688A"/>
                 </a:solidFill>
                 <a:latin typeface="Calibri"/>
               </a:rPr>
@@ -9174,7 +9169,7 @@
     <p:bg>
       <p:bgPr>
         <a:solidFill>
-          <a:srgbClr val="FAFAF9"/>
+          <a:srgbClr val="0B1220"/>
         </a:solidFill>
         <a:effectLst/>
       </p:bgPr>
@@ -9211,7 +9206,7 @@
             <a:r>
               <a:rPr sz="1050" b="1" i="0" spc="120">
                 <a:solidFill>
-                  <a:srgbClr val="0D9488"/>
+                  <a:srgbClr val="2DD4BF"/>
                 </a:solidFill>
                 <a:latin typeface="Calibri"/>
               </a:rPr>
@@ -9250,7 +9245,7 @@
             <a:r>
               <a:rPr sz="2900" b="1" i="0">
                 <a:solidFill>
-                  <a:srgbClr val="0F172A"/>
+                  <a:srgbClr val="F2F6FB"/>
                 </a:solidFill>
                 <a:latin typeface="Calibri Light"/>
               </a:rPr>
@@ -9274,7 +9269,7 @@
             <a:avLst/>
           </a:prstGeom>
           <a:solidFill>
-            <a:srgbClr val="0D9488"/>
+            <a:srgbClr val="2DD4BF"/>
           </a:solidFill>
           <a:ln>
             <a:noFill/>
@@ -9329,7 +9324,7 @@
             <a:r>
               <a:rPr sz="1100" b="0" i="0">
                 <a:solidFill>
-                  <a:srgbClr val="94A3B8"/>
+                  <a:srgbClr val="55688A"/>
                 </a:solidFill>
                 <a:latin typeface="Calibri"/>
               </a:rPr>
@@ -9371,7 +9366,7 @@
             <a:r>
               <a:rPr sz="1400" b="1" i="0">
                 <a:solidFill>
-                  <a:srgbClr val="0D9488"/>
+                  <a:srgbClr val="2DD4BF"/>
                 </a:solidFill>
                 <a:latin typeface="Calibri"/>
               </a:rPr>
@@ -9380,7 +9375,7 @@
             <a:r>
               <a:rPr sz="1400" b="0" i="0">
                 <a:solidFill>
-                  <a:srgbClr val="334155"/>
+                  <a:srgbClr val="C5D2E4"/>
                 </a:solidFill>
                 <a:latin typeface="Calibri"/>
               </a:rPr>
@@ -9399,7 +9394,7 @@
             <a:r>
               <a:rPr sz="1400" b="1" i="0">
                 <a:solidFill>
-                  <a:srgbClr val="0D9488"/>
+                  <a:srgbClr val="2DD4BF"/>
                 </a:solidFill>
                 <a:latin typeface="Calibri"/>
               </a:rPr>
@@ -9408,7 +9403,7 @@
             <a:r>
               <a:rPr sz="1400" b="0" i="0">
                 <a:solidFill>
-                  <a:srgbClr val="334155"/>
+                  <a:srgbClr val="C5D2E4"/>
                 </a:solidFill>
                 <a:latin typeface="Calibri"/>
               </a:rPr>
@@ -9427,7 +9422,7 @@
             <a:r>
               <a:rPr sz="1400" b="1" i="0">
                 <a:solidFill>
-                  <a:srgbClr val="0D9488"/>
+                  <a:srgbClr val="2DD4BF"/>
                 </a:solidFill>
                 <a:latin typeface="Calibri"/>
               </a:rPr>
@@ -9436,7 +9431,7 @@
             <a:r>
               <a:rPr sz="1400" b="0" i="0">
                 <a:solidFill>
-                  <a:srgbClr val="334155"/>
+                  <a:srgbClr val="C5D2E4"/>
                 </a:solidFill>
                 <a:latin typeface="Calibri"/>
               </a:rPr>
@@ -9455,7 +9450,7 @@
             <a:r>
               <a:rPr sz="1400" b="1" i="0">
                 <a:solidFill>
-                  <a:srgbClr val="0D9488"/>
+                  <a:srgbClr val="2DD4BF"/>
                 </a:solidFill>
                 <a:latin typeface="Calibri"/>
               </a:rPr>
@@ -9464,7 +9459,7 @@
             <a:r>
               <a:rPr sz="1400" b="0" i="0">
                 <a:solidFill>
-                  <a:srgbClr val="334155"/>
+                  <a:srgbClr val="C5D2E4"/>
                 </a:solidFill>
                 <a:latin typeface="Calibri"/>
               </a:rPr>
@@ -9483,7 +9478,7 @@
             <a:r>
               <a:rPr sz="1400" b="1" i="0">
                 <a:solidFill>
-                  <a:srgbClr val="0D9488"/>
+                  <a:srgbClr val="2DD4BF"/>
                 </a:solidFill>
                 <a:latin typeface="Calibri"/>
               </a:rPr>
@@ -9492,7 +9487,7 @@
             <a:r>
               <a:rPr sz="1400" b="0" i="0">
                 <a:solidFill>
-                  <a:srgbClr val="334155"/>
+                  <a:srgbClr val="C5D2E4"/>
                 </a:solidFill>
                 <a:latin typeface="Calibri"/>
               </a:rPr>
@@ -9511,7 +9506,7 @@
             <a:r>
               <a:rPr sz="1400" b="1" i="0">
                 <a:solidFill>
-                  <a:srgbClr val="0D9488"/>
+                  <a:srgbClr val="2DD4BF"/>
                 </a:solidFill>
                 <a:latin typeface="Calibri"/>
               </a:rPr>
@@ -9520,7 +9515,7 @@
             <a:r>
               <a:rPr sz="1400" b="0" i="0">
                 <a:solidFill>
-                  <a:srgbClr val="334155"/>
+                  <a:srgbClr val="C5D2E4"/>
                 </a:solidFill>
                 <a:latin typeface="Calibri"/>
               </a:rPr>
@@ -9539,7 +9534,7 @@
             <a:r>
               <a:rPr sz="1400" b="1" i="0">
                 <a:solidFill>
-                  <a:srgbClr val="0D9488"/>
+                  <a:srgbClr val="2DD4BF"/>
                 </a:solidFill>
                 <a:latin typeface="Calibri"/>
               </a:rPr>
@@ -9548,7 +9543,7 @@
             <a:r>
               <a:rPr sz="1400" b="0" i="0">
                 <a:solidFill>
-                  <a:srgbClr val="334155"/>
+                  <a:srgbClr val="C5D2E4"/>
                 </a:solidFill>
                 <a:latin typeface="Calibri"/>
               </a:rPr>
@@ -9567,7 +9562,7 @@
             <a:r>
               <a:rPr sz="1400" b="1" i="0">
                 <a:solidFill>
-                  <a:srgbClr val="0D9488"/>
+                  <a:srgbClr val="2DD4BF"/>
                 </a:solidFill>
                 <a:latin typeface="Calibri"/>
               </a:rPr>
@@ -9576,7 +9571,7 @@
             <a:r>
               <a:rPr sz="1400" b="0" i="0">
                 <a:solidFill>
-                  <a:srgbClr val="334155"/>
+                  <a:srgbClr val="C5D2E4"/>
                 </a:solidFill>
                 <a:latin typeface="Calibri"/>
               </a:rPr>
@@ -9599,7 +9594,7 @@
     <p:bg>
       <p:bgPr>
         <a:solidFill>
-          <a:srgbClr val="FAFAF9"/>
+          <a:srgbClr val="0B1220"/>
         </a:solidFill>
         <a:effectLst/>
       </p:bgPr>
@@ -9636,7 +9631,7 @@
             <a:r>
               <a:rPr sz="1050" b="1" i="0" spc="120">
                 <a:solidFill>
-                  <a:srgbClr val="0D9488"/>
+                  <a:srgbClr val="2DD4BF"/>
                 </a:solidFill>
                 <a:latin typeface="Calibri"/>
               </a:rPr>
@@ -9675,7 +9670,7 @@
             <a:r>
               <a:rPr sz="2900" b="1" i="0">
                 <a:solidFill>
-                  <a:srgbClr val="0F172A"/>
+                  <a:srgbClr val="F2F6FB"/>
                 </a:solidFill>
                 <a:latin typeface="Calibri Light"/>
               </a:rPr>
@@ -9699,7 +9694,7 @@
             <a:avLst/>
           </a:prstGeom>
           <a:solidFill>
-            <a:srgbClr val="0D9488"/>
+            <a:srgbClr val="2DD4BF"/>
           </a:solidFill>
           <a:ln>
             <a:noFill/>
@@ -9754,7 +9749,7 @@
             <a:r>
               <a:rPr sz="1100" b="0" i="0">
                 <a:solidFill>
-                  <a:srgbClr val="94A3B8"/>
+                  <a:srgbClr val="55688A"/>
                 </a:solidFill>
                 <a:latin typeface="Calibri"/>
               </a:rPr>
@@ -9788,7 +9783,7 @@
             <a:r>
               <a:rPr sz="1450" b="0" i="1">
                 <a:solidFill>
-                  <a:srgbClr val="0F766E"/>
+                  <a:srgbClr val="5EEAD4"/>
                 </a:solidFill>
                 <a:latin typeface="Calibri"/>
               </a:rPr>
@@ -9833,7 +9828,7 @@
                       <a:r>
                         <a:rPr sz="1350" b="1" i="0">
                           <a:solidFill>
-                            <a:srgbClr val="0F766E"/>
+                            <a:srgbClr val="5EEAD4"/>
                           </a:solidFill>
                           <a:latin typeface="Calibri"/>
                         </a:rPr>
@@ -9843,7 +9838,7 @@
                   </a:txBody>
                   <a:tcPr anchor="ctr" marL="100584" marR="100584" marT="36576" marB="36576">
                     <a:solidFill>
-                      <a:srgbClr val="F0FDFA"/>
+                      <a:srgbClr val="12303A"/>
                     </a:solidFill>
                   </a:tcPr>
                 </a:tc>
@@ -9856,7 +9851,7 @@
                       <a:r>
                         <a:rPr sz="1350" b="1" i="0">
                           <a:solidFill>
-                            <a:srgbClr val="0F766E"/>
+                            <a:srgbClr val="5EEAD4"/>
                           </a:solidFill>
                           <a:latin typeface="Calibri"/>
                         </a:rPr>
@@ -9866,7 +9861,7 @@
                   </a:txBody>
                   <a:tcPr anchor="ctr" marL="100584" marR="100584" marT="36576" marB="36576">
                     <a:solidFill>
-                      <a:srgbClr val="F0FDFA"/>
+                      <a:srgbClr val="12303A"/>
                     </a:solidFill>
                   </a:tcPr>
                 </a:tc>
@@ -9879,7 +9874,7 @@
                       <a:r>
                         <a:rPr sz="1350" b="1" i="0">
                           <a:solidFill>
-                            <a:srgbClr val="0F766E"/>
+                            <a:srgbClr val="5EEAD4"/>
                           </a:solidFill>
                           <a:latin typeface="Calibri"/>
                         </a:rPr>
@@ -9889,7 +9884,7 @@
                   </a:txBody>
                   <a:tcPr anchor="ctr" marL="100584" marR="100584" marT="36576" marB="36576">
                     <a:solidFill>
-                      <a:srgbClr val="F0FDFA"/>
+                      <a:srgbClr val="12303A"/>
                     </a:solidFill>
                   </a:tcPr>
                 </a:tc>
@@ -9902,7 +9897,7 @@
                       <a:r>
                         <a:rPr sz="1350" b="1" i="0">
                           <a:solidFill>
-                            <a:srgbClr val="0F766E"/>
+                            <a:srgbClr val="5EEAD4"/>
                           </a:solidFill>
                           <a:latin typeface="Calibri"/>
                         </a:rPr>
@@ -9912,7 +9907,7 @@
                   </a:txBody>
                   <a:tcPr anchor="ctr" marL="100584" marR="100584" marT="36576" marB="36576">
                     <a:solidFill>
-                      <a:srgbClr val="F0FDFA"/>
+                      <a:srgbClr val="12303A"/>
                     </a:solidFill>
                   </a:tcPr>
                 </a:tc>
@@ -9925,7 +9920,7 @@
                       <a:r>
                         <a:rPr sz="1350" b="1" i="0">
                           <a:solidFill>
-                            <a:srgbClr val="0F766E"/>
+                            <a:srgbClr val="5EEAD4"/>
                           </a:solidFill>
                           <a:latin typeface="Calibri"/>
                         </a:rPr>
@@ -9935,7 +9930,7 @@
                   </a:txBody>
                   <a:tcPr anchor="ctr" marL="100584" marR="100584" marT="36576" marB="36576">
                     <a:solidFill>
-                      <a:srgbClr val="F0FDFA"/>
+                      <a:srgbClr val="12303A"/>
                     </a:solidFill>
                   </a:tcPr>
                 </a:tc>
@@ -9948,7 +9943,7 @@
                       <a:r>
                         <a:rPr sz="1350" b="1" i="0">
                           <a:solidFill>
-                            <a:srgbClr val="0F766E"/>
+                            <a:srgbClr val="5EEAD4"/>
                           </a:solidFill>
                           <a:latin typeface="Calibri"/>
                         </a:rPr>
@@ -9958,7 +9953,7 @@
                   </a:txBody>
                   <a:tcPr anchor="ctr" marL="100584" marR="100584" marT="36576" marB="36576">
                     <a:solidFill>
-                      <a:srgbClr val="F0FDFA"/>
+                      <a:srgbClr val="12303A"/>
                     </a:solidFill>
                   </a:tcPr>
                 </a:tc>
@@ -9973,7 +9968,7 @@
                       <a:r>
                         <a:rPr sz="1350" b="0" i="0">
                           <a:solidFill>
-                            <a:srgbClr val="334155"/>
+                            <a:srgbClr val="C5D2E4"/>
                           </a:solidFill>
                           <a:latin typeface="Calibri"/>
                         </a:rPr>
@@ -9983,7 +9978,7 @@
                   </a:txBody>
                   <a:tcPr anchor="ctr" marL="100584" marR="100584" marT="36576" marB="36576">
                     <a:solidFill>
-                      <a:srgbClr val="FFFFFF"/>
+                      <a:srgbClr val="0E1929"/>
                     </a:solidFill>
                   </a:tcPr>
                 </a:tc>
@@ -9996,7 +9991,7 @@
                       <a:r>
                         <a:rPr sz="1350" b="0" i="0">
                           <a:solidFill>
-                            <a:srgbClr val="334155"/>
+                            <a:srgbClr val="C5D2E4"/>
                           </a:solidFill>
                           <a:latin typeface="Calibri"/>
                         </a:rPr>
@@ -10006,7 +10001,7 @@
                   </a:txBody>
                   <a:tcPr anchor="ctr" marL="100584" marR="100584" marT="36576" marB="36576">
                     <a:solidFill>
-                      <a:srgbClr val="FFFFFF"/>
+                      <a:srgbClr val="0E1929"/>
                     </a:solidFill>
                   </a:tcPr>
                 </a:tc>
@@ -10019,7 +10014,7 @@
                       <a:r>
                         <a:rPr sz="1350" b="0" i="0">
                           <a:solidFill>
-                            <a:srgbClr val="334155"/>
+                            <a:srgbClr val="C5D2E4"/>
                           </a:solidFill>
                           <a:latin typeface="Calibri"/>
                         </a:rPr>
@@ -10029,7 +10024,7 @@
                   </a:txBody>
                   <a:tcPr anchor="ctr" marL="100584" marR="100584" marT="36576" marB="36576">
                     <a:solidFill>
-                      <a:srgbClr val="FFFFFF"/>
+                      <a:srgbClr val="0E1929"/>
                     </a:solidFill>
                   </a:tcPr>
                 </a:tc>
@@ -10042,7 +10037,7 @@
                       <a:r>
                         <a:rPr sz="1350" b="0" i="0">
                           <a:solidFill>
-                            <a:srgbClr val="334155"/>
+                            <a:srgbClr val="C5D2E4"/>
                           </a:solidFill>
                           <a:latin typeface="Calibri"/>
                         </a:rPr>
@@ -10052,7 +10047,7 @@
                   </a:txBody>
                   <a:tcPr anchor="ctr" marL="100584" marR="100584" marT="36576" marB="36576">
                     <a:solidFill>
-                      <a:srgbClr val="FFFFFF"/>
+                      <a:srgbClr val="0E1929"/>
                     </a:solidFill>
                   </a:tcPr>
                 </a:tc>
@@ -10065,7 +10060,7 @@
                       <a:r>
                         <a:rPr sz="1350" b="0" i="0">
                           <a:solidFill>
-                            <a:srgbClr val="334155"/>
+                            <a:srgbClr val="C5D2E4"/>
                           </a:solidFill>
                           <a:latin typeface="Calibri"/>
                         </a:rPr>
@@ -10075,7 +10070,7 @@
                   </a:txBody>
                   <a:tcPr anchor="ctr" marL="100584" marR="100584" marT="36576" marB="36576">
                     <a:solidFill>
-                      <a:srgbClr val="FFFFFF"/>
+                      <a:srgbClr val="0E1929"/>
                     </a:solidFill>
                   </a:tcPr>
                 </a:tc>
@@ -10088,7 +10083,7 @@
                       <a:r>
                         <a:rPr sz="1350" b="0" i="0">
                           <a:solidFill>
-                            <a:srgbClr val="334155"/>
+                            <a:srgbClr val="C5D2E4"/>
                           </a:solidFill>
                           <a:latin typeface="Calibri"/>
                         </a:rPr>
@@ -10098,7 +10093,7 @@
                   </a:txBody>
                   <a:tcPr anchor="ctr" marL="100584" marR="100584" marT="36576" marB="36576">
                     <a:solidFill>
-                      <a:srgbClr val="FFFFFF"/>
+                      <a:srgbClr val="0E1929"/>
                     </a:solidFill>
                   </a:tcPr>
                 </a:tc>
@@ -10113,7 +10108,7 @@
                       <a:r>
                         <a:rPr sz="1350" b="0" i="0">
                           <a:solidFill>
-                            <a:srgbClr val="334155"/>
+                            <a:srgbClr val="C5D2E4"/>
                           </a:solidFill>
                           <a:latin typeface="Calibri"/>
                         </a:rPr>
@@ -10123,7 +10118,7 @@
                   </a:txBody>
                   <a:tcPr anchor="ctr" marL="100584" marR="100584" marT="36576" marB="36576">
                     <a:solidFill>
-                      <a:srgbClr val="F8FAFC"/>
+                      <a:srgbClr val="121E30"/>
                     </a:solidFill>
                   </a:tcPr>
                 </a:tc>
@@ -10136,7 +10131,7 @@
                       <a:r>
                         <a:rPr sz="1350" b="0" i="0">
                           <a:solidFill>
-                            <a:srgbClr val="334155"/>
+                            <a:srgbClr val="C5D2E4"/>
                           </a:solidFill>
                           <a:latin typeface="Calibri"/>
                         </a:rPr>
@@ -10146,7 +10141,7 @@
                   </a:txBody>
                   <a:tcPr anchor="ctr" marL="100584" marR="100584" marT="36576" marB="36576">
                     <a:solidFill>
-                      <a:srgbClr val="F8FAFC"/>
+                      <a:srgbClr val="121E30"/>
                     </a:solidFill>
                   </a:tcPr>
                 </a:tc>
@@ -10159,7 +10154,7 @@
                       <a:r>
                         <a:rPr sz="1350" b="0" i="0">
                           <a:solidFill>
-                            <a:srgbClr val="334155"/>
+                            <a:srgbClr val="C5D2E4"/>
                           </a:solidFill>
                           <a:latin typeface="Calibri"/>
                         </a:rPr>
@@ -10169,7 +10164,7 @@
                   </a:txBody>
                   <a:tcPr anchor="ctr" marL="100584" marR="100584" marT="36576" marB="36576">
                     <a:solidFill>
-                      <a:srgbClr val="F8FAFC"/>
+                      <a:srgbClr val="121E30"/>
                     </a:solidFill>
                   </a:tcPr>
                 </a:tc>
@@ -10182,7 +10177,7 @@
                       <a:r>
                         <a:rPr sz="1350" b="0" i="0">
                           <a:solidFill>
-                            <a:srgbClr val="334155"/>
+                            <a:srgbClr val="C5D2E4"/>
                           </a:solidFill>
                           <a:latin typeface="Calibri"/>
                         </a:rPr>
@@ -10192,7 +10187,7 @@
                   </a:txBody>
                   <a:tcPr anchor="ctr" marL="100584" marR="100584" marT="36576" marB="36576">
                     <a:solidFill>
-                      <a:srgbClr val="F8FAFC"/>
+                      <a:srgbClr val="121E30"/>
                     </a:solidFill>
                   </a:tcPr>
                 </a:tc>
@@ -10205,7 +10200,7 @@
                       <a:r>
                         <a:rPr sz="1350" b="0" i="0">
                           <a:solidFill>
-                            <a:srgbClr val="334155"/>
+                            <a:srgbClr val="C5D2E4"/>
                           </a:solidFill>
                           <a:latin typeface="Calibri"/>
                         </a:rPr>
@@ -10215,7 +10210,7 @@
                   </a:txBody>
                   <a:tcPr anchor="ctr" marL="100584" marR="100584" marT="36576" marB="36576">
                     <a:solidFill>
-                      <a:srgbClr val="F8FAFC"/>
+                      <a:srgbClr val="121E30"/>
                     </a:solidFill>
                   </a:tcPr>
                 </a:tc>
@@ -10228,7 +10223,7 @@
                       <a:r>
                         <a:rPr sz="1350" b="0" i="0">
                           <a:solidFill>
-                            <a:srgbClr val="334155"/>
+                            <a:srgbClr val="C5D2E4"/>
                           </a:solidFill>
                           <a:latin typeface="Calibri"/>
                         </a:rPr>
@@ -10238,7 +10233,7 @@
                   </a:txBody>
                   <a:tcPr anchor="ctr" marL="100584" marR="100584" marT="36576" marB="36576">
                     <a:solidFill>
-                      <a:srgbClr val="F8FAFC"/>
+                      <a:srgbClr val="121E30"/>
                     </a:solidFill>
                   </a:tcPr>
                 </a:tc>
@@ -10253,7 +10248,7 @@
                       <a:r>
                         <a:rPr sz="1350" b="0" i="0">
                           <a:solidFill>
-                            <a:srgbClr val="334155"/>
+                            <a:srgbClr val="C5D2E4"/>
                           </a:solidFill>
                           <a:latin typeface="Calibri"/>
                         </a:rPr>
@@ -10263,7 +10258,7 @@
                   </a:txBody>
                   <a:tcPr anchor="ctr" marL="100584" marR="100584" marT="36576" marB="36576">
                     <a:solidFill>
-                      <a:srgbClr val="FFFFFF"/>
+                      <a:srgbClr val="0E1929"/>
                     </a:solidFill>
                   </a:tcPr>
                 </a:tc>
@@ -10276,7 +10271,7 @@
                       <a:r>
                         <a:rPr sz="1350" b="0" i="0">
                           <a:solidFill>
-                            <a:srgbClr val="334155"/>
+                            <a:srgbClr val="C5D2E4"/>
                           </a:solidFill>
                           <a:latin typeface="Calibri"/>
                         </a:rPr>
@@ -10286,7 +10281,7 @@
                   </a:txBody>
                   <a:tcPr anchor="ctr" marL="100584" marR="100584" marT="36576" marB="36576">
                     <a:solidFill>
-                      <a:srgbClr val="FFFFFF"/>
+                      <a:srgbClr val="0E1929"/>
                     </a:solidFill>
                   </a:tcPr>
                 </a:tc>
@@ -10299,7 +10294,7 @@
                       <a:r>
                         <a:rPr sz="1350" b="0" i="0">
                           <a:solidFill>
-                            <a:srgbClr val="334155"/>
+                            <a:srgbClr val="C5D2E4"/>
                           </a:solidFill>
                           <a:latin typeface="Calibri"/>
                         </a:rPr>
@@ -10309,7 +10304,7 @@
                   </a:txBody>
                   <a:tcPr anchor="ctr" marL="100584" marR="100584" marT="36576" marB="36576">
                     <a:solidFill>
-                      <a:srgbClr val="FFFFFF"/>
+                      <a:srgbClr val="0E1929"/>
                     </a:solidFill>
                   </a:tcPr>
                 </a:tc>
@@ -10322,7 +10317,7 @@
                       <a:r>
                         <a:rPr sz="1350" b="0" i="0">
                           <a:solidFill>
-                            <a:srgbClr val="334155"/>
+                            <a:srgbClr val="C5D2E4"/>
                           </a:solidFill>
                           <a:latin typeface="Calibri"/>
                         </a:rPr>
@@ -10332,7 +10327,7 @@
                   </a:txBody>
                   <a:tcPr anchor="ctr" marL="100584" marR="100584" marT="36576" marB="36576">
                     <a:solidFill>
-                      <a:srgbClr val="FFFFFF"/>
+                      <a:srgbClr val="0E1929"/>
                     </a:solidFill>
                   </a:tcPr>
                 </a:tc>
@@ -10345,7 +10340,7 @@
                       <a:r>
                         <a:rPr sz="1350" b="0" i="0">
                           <a:solidFill>
-                            <a:srgbClr val="334155"/>
+                            <a:srgbClr val="C5D2E4"/>
                           </a:solidFill>
                           <a:latin typeface="Calibri"/>
                         </a:rPr>
@@ -10355,7 +10350,7 @@
                   </a:txBody>
                   <a:tcPr anchor="ctr" marL="100584" marR="100584" marT="36576" marB="36576">
                     <a:solidFill>
-                      <a:srgbClr val="FFFFFF"/>
+                      <a:srgbClr val="0E1929"/>
                     </a:solidFill>
                   </a:tcPr>
                 </a:tc>
@@ -10368,7 +10363,7 @@
                       <a:r>
                         <a:rPr sz="1350" b="0" i="0">
                           <a:solidFill>
-                            <a:srgbClr val="334155"/>
+                            <a:srgbClr val="C5D2E4"/>
                           </a:solidFill>
                           <a:latin typeface="Calibri"/>
                         </a:rPr>
@@ -10378,7 +10373,7 @@
                   </a:txBody>
                   <a:tcPr anchor="ctr" marL="100584" marR="100584" marT="36576" marB="36576">
                     <a:solidFill>
-                      <a:srgbClr val="FFFFFF"/>
+                      <a:srgbClr val="0E1929"/>
                     </a:solidFill>
                   </a:tcPr>
                 </a:tc>
@@ -10393,7 +10388,7 @@
                       <a:r>
                         <a:rPr sz="1350" b="1" i="0">
                           <a:solidFill>
-                            <a:srgbClr val="0F172A"/>
+                            <a:srgbClr val="F2F6FB"/>
                           </a:solidFill>
                           <a:latin typeface="Calibri"/>
                         </a:rPr>
@@ -10403,7 +10398,7 @@
                   </a:txBody>
                   <a:tcPr anchor="ctr" marL="100584" marR="100584" marT="36576" marB="36576">
                     <a:solidFill>
-                      <a:srgbClr val="F0FDFA"/>
+                      <a:srgbClr val="12303A"/>
                     </a:solidFill>
                   </a:tcPr>
                 </a:tc>
@@ -10416,7 +10411,7 @@
                       <a:r>
                         <a:rPr sz="1350" b="1" i="0">
                           <a:solidFill>
-                            <a:srgbClr val="0F172A"/>
+                            <a:srgbClr val="F2F6FB"/>
                           </a:solidFill>
                           <a:latin typeface="Calibri"/>
                         </a:rPr>
@@ -10426,7 +10421,7 @@
                   </a:txBody>
                   <a:tcPr anchor="ctr" marL="100584" marR="100584" marT="36576" marB="36576">
                     <a:solidFill>
-                      <a:srgbClr val="F0FDFA"/>
+                      <a:srgbClr val="12303A"/>
                     </a:solidFill>
                   </a:tcPr>
                 </a:tc>
@@ -10439,7 +10434,7 @@
                       <a:r>
                         <a:rPr sz="1350" b="1" i="0">
                           <a:solidFill>
-                            <a:srgbClr val="0F172A"/>
+                            <a:srgbClr val="F2F6FB"/>
                           </a:solidFill>
                           <a:latin typeface="Calibri"/>
                         </a:rPr>
@@ -10449,7 +10444,7 @@
                   </a:txBody>
                   <a:tcPr anchor="ctr" marL="100584" marR="100584" marT="36576" marB="36576">
                     <a:solidFill>
-                      <a:srgbClr val="F0FDFA"/>
+                      <a:srgbClr val="12303A"/>
                     </a:solidFill>
                   </a:tcPr>
                 </a:tc>
@@ -10462,7 +10457,7 @@
                       <a:r>
                         <a:rPr sz="1350" b="1" i="0">
                           <a:solidFill>
-                            <a:srgbClr val="0F172A"/>
+                            <a:srgbClr val="F2F6FB"/>
                           </a:solidFill>
                           <a:latin typeface="Calibri"/>
                         </a:rPr>
@@ -10472,7 +10467,7 @@
                   </a:txBody>
                   <a:tcPr anchor="ctr" marL="100584" marR="100584" marT="36576" marB="36576">
                     <a:solidFill>
-                      <a:srgbClr val="F0FDFA"/>
+                      <a:srgbClr val="12303A"/>
                     </a:solidFill>
                   </a:tcPr>
                 </a:tc>
@@ -10485,7 +10480,7 @@
                       <a:r>
                         <a:rPr sz="1350" b="1" i="0">
                           <a:solidFill>
-                            <a:srgbClr val="0F172A"/>
+                            <a:srgbClr val="F2F6FB"/>
                           </a:solidFill>
                           <a:latin typeface="Calibri"/>
                         </a:rPr>
@@ -10495,7 +10490,7 @@
                   </a:txBody>
                   <a:tcPr anchor="ctr" marL="100584" marR="100584" marT="36576" marB="36576">
                     <a:solidFill>
-                      <a:srgbClr val="F0FDFA"/>
+                      <a:srgbClr val="12303A"/>
                     </a:solidFill>
                   </a:tcPr>
                 </a:tc>
@@ -10508,7 +10503,7 @@
                       <a:r>
                         <a:rPr sz="1350" b="1" i="0">
                           <a:solidFill>
-                            <a:srgbClr val="0F172A"/>
+                            <a:srgbClr val="F2F6FB"/>
                           </a:solidFill>
                           <a:latin typeface="Calibri"/>
                         </a:rPr>
@@ -10518,7 +10513,7 @@
                   </a:txBody>
                   <a:tcPr anchor="ctr" marL="100584" marR="100584" marT="36576" marB="36576">
                     <a:solidFill>
-                      <a:srgbClr val="F0FDFA"/>
+                      <a:srgbClr val="12303A"/>
                     </a:solidFill>
                   </a:tcPr>
                 </a:tc>
@@ -10557,7 +10552,7 @@
                 <a:spcPts val="1300"/>
               </a:spcAft>
               <a:buClr>
-                <a:srgbClr val="0D9488"/>
+                <a:srgbClr val="2DD4BF"/>
               </a:buClr>
               <a:buFont typeface="Arial"/>
               <a:buChar char="•"/>
@@ -10565,7 +10560,7 @@
             <a:r>
               <a:rPr sz="1500" b="0" i="0">
                 <a:solidFill>
-                  <a:srgbClr val="334155"/>
+                  <a:srgbClr val="C5D2E4"/>
                 </a:solidFill>
                 <a:latin typeface="Calibri"/>
               </a:rPr>
@@ -10581,7 +10576,7 @@
                 <a:spcPts val="1300"/>
               </a:spcAft>
               <a:buClr>
-                <a:srgbClr val="0D9488"/>
+                <a:srgbClr val="2DD4BF"/>
               </a:buClr>
               <a:buFont typeface="Arial"/>
               <a:buChar char="•"/>
@@ -10589,7 +10584,7 @@
             <a:r>
               <a:rPr sz="1500" b="0" i="0">
                 <a:solidFill>
-                  <a:srgbClr val="334155"/>
+                  <a:srgbClr val="C5D2E4"/>
                 </a:solidFill>
                 <a:latin typeface="Calibri"/>
               </a:rPr>
@@ -10605,7 +10600,7 @@
                 <a:spcPts val="1300"/>
               </a:spcAft>
               <a:buClr>
-                <a:srgbClr val="0D9488"/>
+                <a:srgbClr val="2DD4BF"/>
               </a:buClr>
               <a:buFont typeface="Arial"/>
               <a:buChar char="•"/>
@@ -10613,7 +10608,7 @@
             <a:r>
               <a:rPr sz="1500" b="0" i="0">
                 <a:solidFill>
-                  <a:srgbClr val="334155"/>
+                  <a:srgbClr val="C5D2E4"/>
                 </a:solidFill>
                 <a:latin typeface="Calibri"/>
               </a:rPr>
@@ -10636,7 +10631,7 @@
     <p:bg>
       <p:bgPr>
         <a:solidFill>
-          <a:srgbClr val="FAFAF9"/>
+          <a:srgbClr val="0B1220"/>
         </a:solidFill>
         <a:effectLst/>
       </p:bgPr>
@@ -10673,7 +10668,7 @@
             <a:r>
               <a:rPr sz="1050" b="1" i="0" spc="120">
                 <a:solidFill>
-                  <a:srgbClr val="0D9488"/>
+                  <a:srgbClr val="2DD4BF"/>
                 </a:solidFill>
                 <a:latin typeface="Calibri"/>
               </a:rPr>
@@ -10712,7 +10707,7 @@
             <a:r>
               <a:rPr sz="2800" b="1" i="0">
                 <a:solidFill>
-                  <a:srgbClr val="0F172A"/>
+                  <a:srgbClr val="F2F6FB"/>
                 </a:solidFill>
                 <a:latin typeface="Calibri Light"/>
               </a:rPr>
@@ -10736,7 +10731,7 @@
             <a:avLst/>
           </a:prstGeom>
           <a:solidFill>
-            <a:srgbClr val="0D9488"/>
+            <a:srgbClr val="2DD4BF"/>
           </a:solidFill>
           <a:ln>
             <a:noFill/>
@@ -10791,7 +10786,7 @@
             <a:r>
               <a:rPr sz="1100" b="0" i="0">
                 <a:solidFill>
-                  <a:srgbClr val="94A3B8"/>
+                  <a:srgbClr val="55688A"/>
                 </a:solidFill>
                 <a:latin typeface="Calibri"/>
               </a:rPr>
@@ -10830,7 +10825,7 @@
                 <a:spcPts val="2000"/>
               </a:spcAft>
               <a:buClr>
-                <a:srgbClr val="0D9488"/>
+                <a:srgbClr val="2DD4BF"/>
               </a:buClr>
               <a:buFont typeface="Arial"/>
               <a:buChar char="•"/>
@@ -10838,7 +10833,7 @@
             <a:r>
               <a:rPr sz="1650" b="0" i="0">
                 <a:solidFill>
-                  <a:srgbClr val="334155"/>
+                  <a:srgbClr val="C5D2E4"/>
                 </a:solidFill>
                 <a:latin typeface="Calibri"/>
               </a:rPr>
@@ -10847,7 +10842,7 @@
             <a:r>
               <a:rPr sz="1650" b="0" i="1">
                 <a:solidFill>
-                  <a:srgbClr val="E11D48"/>
+                  <a:srgbClr val="FB7185"/>
                 </a:solidFill>
                 <a:latin typeface="Calibri"/>
               </a:rPr>
@@ -10856,7 +10851,7 @@
             <a:r>
               <a:rPr sz="1650" b="0" i="0">
                 <a:solidFill>
-                  <a:srgbClr val="334155"/>
+                  <a:srgbClr val="C5D2E4"/>
                 </a:solidFill>
                 <a:latin typeface="Calibri"/>
               </a:rPr>
@@ -10865,7 +10860,7 @@
             <a:r>
               <a:rPr sz="1650" b="0" i="1">
                 <a:solidFill>
-                  <a:srgbClr val="E11D48"/>
+                  <a:srgbClr val="FB7185"/>
                 </a:solidFill>
                 <a:latin typeface="Calibri"/>
               </a:rPr>
@@ -10874,7 +10869,7 @@
             <a:r>
               <a:rPr sz="1650" b="0" i="0">
                 <a:solidFill>
-                  <a:srgbClr val="334155"/>
+                  <a:srgbClr val="C5D2E4"/>
                 </a:solidFill>
                 <a:latin typeface="Calibri"/>
               </a:rPr>
@@ -10883,7 +10878,7 @@
             <a:r>
               <a:rPr sz="1650" b="0" i="1">
                 <a:solidFill>
-                  <a:srgbClr val="E11D48"/>
+                  <a:srgbClr val="FB7185"/>
                 </a:solidFill>
                 <a:latin typeface="Calibri"/>
               </a:rPr>
@@ -10892,7 +10887,7 @@
             <a:r>
               <a:rPr sz="1650" b="0" i="0">
                 <a:solidFill>
-                  <a:srgbClr val="334155"/>
+                  <a:srgbClr val="C5D2E4"/>
                 </a:solidFill>
                 <a:latin typeface="Calibri"/>
               </a:rPr>
@@ -10901,7 +10896,7 @@
             <a:r>
               <a:rPr sz="1650" b="0" i="1">
                 <a:solidFill>
-                  <a:srgbClr val="E11D48"/>
+                  <a:srgbClr val="FB7185"/>
                 </a:solidFill>
                 <a:latin typeface="Calibri"/>
               </a:rPr>
@@ -10917,7 +10912,7 @@
                 <a:spcPts val="2000"/>
               </a:spcAft>
               <a:buClr>
-                <a:srgbClr val="0D9488"/>
+                <a:srgbClr val="2DD4BF"/>
               </a:buClr>
               <a:buFont typeface="Arial"/>
               <a:buChar char="•"/>
@@ -10925,7 +10920,7 @@
             <a:r>
               <a:rPr sz="1650" b="0" i="0">
                 <a:solidFill>
-                  <a:srgbClr val="334155"/>
+                  <a:srgbClr val="C5D2E4"/>
                 </a:solidFill>
                 <a:latin typeface="Calibri"/>
               </a:rPr>
@@ -10941,7 +10936,7 @@
                 <a:spcPts val="2000"/>
               </a:spcAft>
               <a:buClr>
-                <a:srgbClr val="0D9488"/>
+                <a:srgbClr val="2DD4BF"/>
               </a:buClr>
               <a:buFont typeface="Arial"/>
               <a:buChar char="•"/>
@@ -10949,7 +10944,7 @@
             <a:r>
               <a:rPr sz="1650" b="0" i="0">
                 <a:solidFill>
-                  <a:srgbClr val="334155"/>
+                  <a:srgbClr val="C5D2E4"/>
                 </a:solidFill>
                 <a:latin typeface="Calibri"/>
               </a:rPr>
@@ -10965,7 +10960,7 @@
                 <a:spcPts val="2000"/>
               </a:spcAft>
               <a:buClr>
-                <a:srgbClr val="0D9488"/>
+                <a:srgbClr val="2DD4BF"/>
               </a:buClr>
               <a:buFont typeface="Arial"/>
               <a:buChar char="•"/>
@@ -10973,7 +10968,7 @@
             <a:r>
               <a:rPr sz="1650" b="0" i="0">
                 <a:solidFill>
-                  <a:srgbClr val="334155"/>
+                  <a:srgbClr val="C5D2E4"/>
                 </a:solidFill>
                 <a:latin typeface="Calibri"/>
               </a:rPr>
@@ -10996,7 +10991,7 @@
     <p:bg>
       <p:bgPr>
         <a:solidFill>
-          <a:srgbClr val="FAFAF9"/>
+          <a:srgbClr val="0B1220"/>
         </a:solidFill>
         <a:effectLst/>
       </p:bgPr>
@@ -11033,7 +11028,7 @@
             <a:r>
               <a:rPr sz="1050" b="1" i="0" spc="120">
                 <a:solidFill>
-                  <a:srgbClr val="0D9488"/>
+                  <a:srgbClr val="2DD4BF"/>
                 </a:solidFill>
                 <a:latin typeface="Calibri"/>
               </a:rPr>
@@ -11072,7 +11067,7 @@
             <a:r>
               <a:rPr sz="2900" b="1" i="0">
                 <a:solidFill>
-                  <a:srgbClr val="0F172A"/>
+                  <a:srgbClr val="F2F6FB"/>
                 </a:solidFill>
                 <a:latin typeface="Calibri Light"/>
               </a:rPr>
@@ -11096,7 +11091,7 @@
             <a:avLst/>
           </a:prstGeom>
           <a:solidFill>
-            <a:srgbClr val="0D9488"/>
+            <a:srgbClr val="2DD4BF"/>
           </a:solidFill>
           <a:ln>
             <a:noFill/>
@@ -11151,7 +11146,7 @@
             <a:r>
               <a:rPr sz="1100" b="0" i="0">
                 <a:solidFill>
-                  <a:srgbClr val="94A3B8"/>
+                  <a:srgbClr val="55688A"/>
                 </a:solidFill>
                 <a:latin typeface="Calibri"/>
               </a:rPr>
@@ -11190,7 +11185,7 @@
                 <a:spcPts val="2200"/>
               </a:spcAft>
               <a:buClr>
-                <a:srgbClr val="0D9488"/>
+                <a:srgbClr val="2DD4BF"/>
               </a:buClr>
               <a:buFont typeface="Arial"/>
               <a:buChar char="•"/>
@@ -11198,7 +11193,7 @@
             <a:r>
               <a:rPr sz="1800" b="1" i="0">
                 <a:solidFill>
-                  <a:srgbClr val="0F172A"/>
+                  <a:srgbClr val="F2F6FB"/>
                 </a:solidFill>
                 <a:latin typeface="Calibri"/>
               </a:rPr>
@@ -11207,7 +11202,7 @@
             <a:r>
               <a:rPr sz="1800" b="0" i="0">
                 <a:solidFill>
-                  <a:srgbClr val="334155"/>
+                  <a:srgbClr val="C5D2E4"/>
                 </a:solidFill>
                 <a:latin typeface="Calibri"/>
               </a:rPr>
@@ -11223,7 +11218,7 @@
                 <a:spcPts val="2200"/>
               </a:spcAft>
               <a:buClr>
-                <a:srgbClr val="0D9488"/>
+                <a:srgbClr val="2DD4BF"/>
               </a:buClr>
               <a:buFont typeface="Arial"/>
               <a:buChar char="•"/>
@@ -11231,7 +11226,7 @@
             <a:r>
               <a:rPr sz="1800" b="1" i="0">
                 <a:solidFill>
-                  <a:srgbClr val="0F172A"/>
+                  <a:srgbClr val="F2F6FB"/>
                 </a:solidFill>
                 <a:latin typeface="Calibri"/>
               </a:rPr>
@@ -11240,7 +11235,7 @@
             <a:r>
               <a:rPr sz="1800" b="0" i="0">
                 <a:solidFill>
-                  <a:srgbClr val="334155"/>
+                  <a:srgbClr val="C5D2E4"/>
                 </a:solidFill>
                 <a:latin typeface="Calibri"/>
               </a:rPr>
@@ -11256,7 +11251,7 @@
                 <a:spcPts val="2200"/>
               </a:spcAft>
               <a:buClr>
-                <a:srgbClr val="0D9488"/>
+                <a:srgbClr val="2DD4BF"/>
               </a:buClr>
               <a:buFont typeface="Arial"/>
               <a:buChar char="•"/>
@@ -11264,7 +11259,7 @@
             <a:r>
               <a:rPr sz="1800" b="1" i="0">
                 <a:solidFill>
-                  <a:srgbClr val="0F172A"/>
+                  <a:srgbClr val="F2F6FB"/>
                 </a:solidFill>
                 <a:latin typeface="Calibri"/>
               </a:rPr>
@@ -11273,7 +11268,7 @@
             <a:r>
               <a:rPr sz="1800" b="0" i="0">
                 <a:solidFill>
-                  <a:srgbClr val="334155"/>
+                  <a:srgbClr val="C5D2E4"/>
                 </a:solidFill>
                 <a:latin typeface="Calibri"/>
               </a:rPr>
@@ -11289,7 +11284,7 @@
                 <a:spcPts val="2200"/>
               </a:spcAft>
               <a:buClr>
-                <a:srgbClr val="0D9488"/>
+                <a:srgbClr val="2DD4BF"/>
               </a:buClr>
               <a:buFont typeface="Arial"/>
               <a:buChar char="•"/>
@@ -11297,7 +11292,7 @@
             <a:r>
               <a:rPr sz="1800" b="1" i="0">
                 <a:solidFill>
-                  <a:srgbClr val="0F172A"/>
+                  <a:srgbClr val="F2F6FB"/>
                 </a:solidFill>
                 <a:latin typeface="Calibri"/>
               </a:rPr>
@@ -11306,7 +11301,7 @@
             <a:r>
               <a:rPr sz="1800" b="0" i="0">
                 <a:solidFill>
-                  <a:srgbClr val="334155"/>
+                  <a:srgbClr val="C5D2E4"/>
                 </a:solidFill>
                 <a:latin typeface="Calibri"/>
               </a:rPr>
@@ -11322,7 +11317,7 @@
                 <a:spcPts val="2200"/>
               </a:spcAft>
               <a:buClr>
-                <a:srgbClr val="0D9488"/>
+                <a:srgbClr val="2DD4BF"/>
               </a:buClr>
               <a:buFont typeface="Arial"/>
               <a:buChar char="•"/>
@@ -11330,7 +11325,7 @@
             <a:r>
               <a:rPr sz="1800" b="0" i="0">
                 <a:solidFill>
-                  <a:srgbClr val="334155"/>
+                  <a:srgbClr val="C5D2E4"/>
                 </a:solidFill>
                 <a:latin typeface="Calibri"/>
               </a:rPr>
@@ -11353,7 +11348,7 @@
     <p:bg>
       <p:bgPr>
         <a:solidFill>
-          <a:srgbClr val="FAFAF9"/>
+          <a:srgbClr val="0B1220"/>
         </a:solidFill>
         <a:effectLst/>
       </p:bgPr>
@@ -11365,6 +11360,91 @@
         <p:nvPr/>
       </p:nvGrpSpPr>
       <p:grpSpPr/>
+      <p:pic>
+        <p:nvPicPr>
+          <p:cNvPr id="2" name="Picture 1" descr="pipeline_dark.png"/>
+          <p:cNvPicPr>
+            <a:picLocks noChangeAspect="1"/>
+          </p:cNvPicPr>
+          <p:nvPr/>
+        </p:nvPicPr>
+        <p:blipFill>
+          <a:blip r:embed="rId2"/>
+          <a:stretch>
+            <a:fillRect/>
+          </a:stretch>
+        </p:blipFill>
+        <p:spPr>
+          <a:xfrm>
+            <a:off x="0" y="0"/>
+            <a:ext cx="12191695" cy="6858000"/>
+          </a:xfrm>
+          <a:prstGeom prst="rect">
+            <a:avLst/>
+          </a:prstGeom>
+        </p:spPr>
+      </p:pic>
+      <p:sp>
+        <p:nvSpPr>
+          <p:cNvPr id="3" name="TextBox 2"/>
+          <p:cNvSpPr txBox="1"/>
+          <p:nvPr/>
+        </p:nvSpPr>
+        <p:spPr>
+          <a:xfrm>
+            <a:off x="10545775" y="6291072"/>
+            <a:ext cx="914400" cy="274320"/>
+          </a:xfrm>
+          <a:prstGeom prst="rect">
+            <a:avLst/>
+          </a:prstGeom>
+          <a:noFill/>
+        </p:spPr>
+        <p:txBody>
+          <a:bodyPr wrap="square" lIns="0" rIns="0" tIns="0" bIns="0">
+            <a:spAutoFit/>
+          </a:bodyPr>
+          <a:lstStyle/>
+          <a:p>
+            <a:pPr algn="r"/>
+            <a:r>
+              <a:rPr sz="1100" b="0" i="0">
+                <a:solidFill>
+                  <a:srgbClr val="55688A"/>
+                </a:solidFill>
+                <a:latin typeface="Calibri"/>
+              </a:rPr>
+              <a:t>3</a:t>
+            </a:r>
+          </a:p>
+        </p:txBody>
+      </p:sp>
+    </p:spTree>
+  </p:cSld>
+  <p:clrMapOvr>
+    <a:masterClrMapping/>
+  </p:clrMapOvr>
+</p:sld>
+</file>
+
+<file path=ppt/slides/slide4.xml><?xml version="1.0" encoding="utf-8"?>
+<p:sld xmlns:a="http://schemas.openxmlformats.org/drawingml/2006/main" xmlns:p="http://schemas.openxmlformats.org/presentationml/2006/main" xmlns:r="http://schemas.openxmlformats.org/officeDocument/2006/relationships">
+  <p:cSld>
+    <p:bg>
+      <p:bgPr>
+        <a:solidFill>
+          <a:srgbClr val="0B1220"/>
+        </a:solidFill>
+        <a:effectLst/>
+      </p:bgPr>
+    </p:bg>
+    <p:spTree>
+      <p:nvGrpSpPr>
+        <p:cNvPr id="1" name=""/>
+        <p:cNvGrpSpPr/>
+        <p:nvPr/>
+      </p:nvGrpSpPr>
+      <p:grpSpPr/>
       <p:sp>
         <p:nvSpPr>
           <p:cNvPr id="2" name="TextBox 1"/>
@@ -11390,11 +11470,11 @@
             <a:r>
               <a:rPr sz="1050" b="1" i="0" spc="120">
                 <a:solidFill>
-                  <a:srgbClr val="0D9488"/>
+                  <a:srgbClr val="2DD4BF"/>
                 </a:solidFill>
                 <a:latin typeface="Calibri"/>
               </a:rPr>
-              <a:t>TỔNG QUAN</a:t>
+              <a:t>BƯỚC 1 · DỮ LIỆU</a:t>
             </a:r>
           </a:p>
         </p:txBody>
@@ -11429,11 +11509,11 @@
             <a:r>
               <a:rPr sz="2900" b="1" i="0">
                 <a:solidFill>
-                  <a:srgbClr val="0F172A"/>
+                  <a:srgbClr val="F2F6FB"/>
                 </a:solidFill>
                 <a:latin typeface="Calibri Light"/>
               </a:rPr>
-              <a:t>Pipeline năm bước theo bài giảng, mỗi bước một module</a:t>
+              <a:t>20.000 bình luận có nhãn về một chương trình</a:t>
             </a:r>
           </a:p>
         </p:txBody>
@@ -11453,7 +11533,7 @@
             <a:avLst/>
           </a:prstGeom>
           <a:solidFill>
-            <a:srgbClr val="0D9488"/>
+            <a:srgbClr val="2DD4BF"/>
           </a:solidFill>
           <a:ln>
             <a:noFill/>
@@ -11508,39 +11588,397 @@
             <a:r>
               <a:rPr sz="1100" b="0" i="0">
                 <a:solidFill>
-                  <a:srgbClr val="94A3B8"/>
+                  <a:srgbClr val="55688A"/>
                 </a:solidFill>
                 <a:latin typeface="Calibri"/>
               </a:rPr>
-              <a:t>3</a:t>
-            </a:r>
-          </a:p>
-        </p:txBody>
-      </p:sp>
-      <p:pic>
-        <p:nvPicPr>
-          <p:cNvPr id="6" name="Picture 5" descr="pipeline.png"/>
-          <p:cNvPicPr>
-            <a:picLocks noChangeAspect="1"/>
-          </p:cNvPicPr>
+              <a:t>4</a:t>
+            </a:r>
+          </a:p>
+        </p:txBody>
+      </p:sp>
+      <p:graphicFrame>
+        <p:nvGraphicFramePr>
+          <p:cNvPr id="6" name="Table 5"/>
+          <p:cNvGraphicFramePr>
+            <a:graphicFrameLocks noGrp="1"/>
+          </p:cNvGraphicFramePr>
           <p:nvPr/>
-        </p:nvPicPr>
-        <p:blipFill>
-          <a:blip r:embed="rId2"/>
-          <a:stretch>
-            <a:fillRect/>
-          </a:stretch>
-        </p:blipFill>
-        <p:spPr>
-          <a:xfrm>
-            <a:off x="2642616" y="1755648"/>
-            <a:ext cx="6908800" cy="3886200"/>
-          </a:xfrm>
-          <a:prstGeom prst="rect">
-            <a:avLst/>
-          </a:prstGeom>
-        </p:spPr>
-      </p:pic>
+        </p:nvGraphicFramePr>
+        <p:xfrm>
+          <a:off x="731520" y="1874519"/>
+          <a:ext cx="5029200" cy="2779776"/>
+        </p:xfrm>
+        <a:graphic>
+          <a:graphicData uri="http://schemas.openxmlformats.org/drawingml/2006/table">
+            <a:tbl>
+              <a:tblPr>
+                <a:tableStyleId>{2D5ABB26-0587-4C30-8999-92F81FD0307C}</a:tableStyleId>
+              </a:tblPr>
+              <a:tblGrid>
+                <a:gridCol w="2286000"/>
+                <a:gridCol w="1371600"/>
+                <a:gridCol w="1371600"/>
+              </a:tblGrid>
+              <a:tr h="585216">
+                <a:tc>
+                  <a:txBody>
+                    <a:bodyPr wrap="square"/>
+                    <a:lstStyle/>
+                    <a:p>
+                      <a:pPr algn="l"/>
+                      <a:r>
+                        <a:rPr sz="1500" b="1" i="0">
+                          <a:solidFill>
+                            <a:srgbClr val="5EEAD4"/>
+                          </a:solidFill>
+                          <a:latin typeface="Calibri"/>
+                        </a:rPr>
+                        <a:t>Nhãn</a:t>
+                      </a:r>
+                    </a:p>
+                  </a:txBody>
+                  <a:tcPr anchor="ctr" marL="100584" marR="100584" marT="36576" marB="36576">
+                    <a:solidFill>
+                      <a:srgbClr val="12303A"/>
+                    </a:solidFill>
+                  </a:tcPr>
+                </a:tc>
+                <a:tc>
+                  <a:txBody>
+                    <a:bodyPr wrap="square"/>
+                    <a:lstStyle/>
+                    <a:p>
+                      <a:pPr algn="r"/>
+                      <a:r>
+                        <a:rPr sz="1500" b="1" i="0">
+                          <a:solidFill>
+                            <a:srgbClr val="5EEAD4"/>
+                          </a:solidFill>
+                          <a:latin typeface="Calibri"/>
+                        </a:rPr>
+                        <a:t>Số dòng</a:t>
+                      </a:r>
+                    </a:p>
+                  </a:txBody>
+                  <a:tcPr anchor="ctr" marL="100584" marR="100584" marT="36576" marB="36576">
+                    <a:solidFill>
+                      <a:srgbClr val="12303A"/>
+                    </a:solidFill>
+                  </a:tcPr>
+                </a:tc>
+                <a:tc>
+                  <a:txBody>
+                    <a:bodyPr wrap="square"/>
+                    <a:lstStyle/>
+                    <a:p>
+                      <a:pPr algn="r"/>
+                      <a:r>
+                        <a:rPr sz="1500" b="1" i="0">
+                          <a:solidFill>
+                            <a:srgbClr val="5EEAD4"/>
+                          </a:solidFill>
+                          <a:latin typeface="Calibri"/>
+                        </a:rPr>
+                        <a:t>Tỉ lệ</a:t>
+                      </a:r>
+                    </a:p>
+                  </a:txBody>
+                  <a:tcPr anchor="ctr" marL="100584" marR="100584" marT="36576" marB="36576">
+                    <a:solidFill>
+                      <a:srgbClr val="12303A"/>
+                    </a:solidFill>
+                  </a:tcPr>
+                </a:tc>
+              </a:tr>
+              <a:tr h="548640">
+                <a:tc>
+                  <a:txBody>
+                    <a:bodyPr wrap="square"/>
+                    <a:lstStyle/>
+                    <a:p>
+                      <a:pPr algn="l"/>
+                      <a:r>
+                        <a:rPr sz="1500" b="0" i="0">
+                          <a:solidFill>
+                            <a:srgbClr val="C5D2E4"/>
+                          </a:solidFill>
+                          <a:latin typeface="Calibri"/>
+                        </a:rPr>
+                        <a:t>Tiêu cực (0)</a:t>
+                      </a:r>
+                    </a:p>
+                  </a:txBody>
+                  <a:tcPr anchor="ctr" marL="100584" marR="100584" marT="36576" marB="36576">
+                    <a:solidFill>
+                      <a:srgbClr val="0E1929"/>
+                    </a:solidFill>
+                  </a:tcPr>
+                </a:tc>
+                <a:tc>
+                  <a:txBody>
+                    <a:bodyPr wrap="square"/>
+                    <a:lstStyle/>
+                    <a:p>
+                      <a:pPr algn="r"/>
+                      <a:r>
+                        <a:rPr sz="1500" b="0" i="0">
+                          <a:solidFill>
+                            <a:srgbClr val="C5D2E4"/>
+                          </a:solidFill>
+                          <a:latin typeface="Calibri"/>
+                        </a:rPr>
+                        <a:t>7.000</a:t>
+                      </a:r>
+                    </a:p>
+                  </a:txBody>
+                  <a:tcPr anchor="ctr" marL="100584" marR="100584" marT="36576" marB="36576">
+                    <a:solidFill>
+                      <a:srgbClr val="0E1929"/>
+                    </a:solidFill>
+                  </a:tcPr>
+                </a:tc>
+                <a:tc>
+                  <a:txBody>
+                    <a:bodyPr wrap="square"/>
+                    <a:lstStyle/>
+                    <a:p>
+                      <a:pPr algn="r"/>
+                      <a:r>
+                        <a:rPr sz="1500" b="0" i="0">
+                          <a:solidFill>
+                            <a:srgbClr val="C5D2E4"/>
+                          </a:solidFill>
+                          <a:latin typeface="Calibri"/>
+                        </a:rPr>
+                        <a:t>35,0%</a:t>
+                      </a:r>
+                    </a:p>
+                  </a:txBody>
+                  <a:tcPr anchor="ctr" marL="100584" marR="100584" marT="36576" marB="36576">
+                    <a:solidFill>
+                      <a:srgbClr val="0E1929"/>
+                    </a:solidFill>
+                  </a:tcPr>
+                </a:tc>
+              </a:tr>
+              <a:tr h="548640">
+                <a:tc>
+                  <a:txBody>
+                    <a:bodyPr wrap="square"/>
+                    <a:lstStyle/>
+                    <a:p>
+                      <a:pPr algn="l"/>
+                      <a:r>
+                        <a:rPr sz="1500" b="0" i="0">
+                          <a:solidFill>
+                            <a:srgbClr val="C5D2E4"/>
+                          </a:solidFill>
+                          <a:latin typeface="Calibri"/>
+                        </a:rPr>
+                        <a:t>Trung tính (1)</a:t>
+                      </a:r>
+                    </a:p>
+                  </a:txBody>
+                  <a:tcPr anchor="ctr" marL="100584" marR="100584" marT="36576" marB="36576">
+                    <a:solidFill>
+                      <a:srgbClr val="121E30"/>
+                    </a:solidFill>
+                  </a:tcPr>
+                </a:tc>
+                <a:tc>
+                  <a:txBody>
+                    <a:bodyPr wrap="square"/>
+                    <a:lstStyle/>
+                    <a:p>
+                      <a:pPr algn="r"/>
+                      <a:r>
+                        <a:rPr sz="1500" b="0" i="0">
+                          <a:solidFill>
+                            <a:srgbClr val="C5D2E4"/>
+                          </a:solidFill>
+                          <a:latin typeface="Calibri"/>
+                        </a:rPr>
+                        <a:t>3.409</a:t>
+                      </a:r>
+                    </a:p>
+                  </a:txBody>
+                  <a:tcPr anchor="ctr" marL="100584" marR="100584" marT="36576" marB="36576">
+                    <a:solidFill>
+                      <a:srgbClr val="121E30"/>
+                    </a:solidFill>
+                  </a:tcPr>
+                </a:tc>
+                <a:tc>
+                  <a:txBody>
+                    <a:bodyPr wrap="square"/>
+                    <a:lstStyle/>
+                    <a:p>
+                      <a:pPr algn="r"/>
+                      <a:r>
+                        <a:rPr sz="1500" b="0" i="0">
+                          <a:solidFill>
+                            <a:srgbClr val="C5D2E4"/>
+                          </a:solidFill>
+                          <a:latin typeface="Calibri"/>
+                        </a:rPr>
+                        <a:t>17,0%</a:t>
+                      </a:r>
+                    </a:p>
+                  </a:txBody>
+                  <a:tcPr anchor="ctr" marL="100584" marR="100584" marT="36576" marB="36576">
+                    <a:solidFill>
+                      <a:srgbClr val="121E30"/>
+                    </a:solidFill>
+                  </a:tcPr>
+                </a:tc>
+              </a:tr>
+              <a:tr h="548640">
+                <a:tc>
+                  <a:txBody>
+                    <a:bodyPr wrap="square"/>
+                    <a:lstStyle/>
+                    <a:p>
+                      <a:pPr algn="l"/>
+                      <a:r>
+                        <a:rPr sz="1500" b="0" i="0">
+                          <a:solidFill>
+                            <a:srgbClr val="C5D2E4"/>
+                          </a:solidFill>
+                          <a:latin typeface="Calibri"/>
+                        </a:rPr>
+                        <a:t>Tích cực (2)</a:t>
+                      </a:r>
+                    </a:p>
+                  </a:txBody>
+                  <a:tcPr anchor="ctr" marL="100584" marR="100584" marT="36576" marB="36576">
+                    <a:solidFill>
+                      <a:srgbClr val="0E1929"/>
+                    </a:solidFill>
+                  </a:tcPr>
+                </a:tc>
+                <a:tc>
+                  <a:txBody>
+                    <a:bodyPr wrap="square"/>
+                    <a:lstStyle/>
+                    <a:p>
+                      <a:pPr algn="r"/>
+                      <a:r>
+                        <a:rPr sz="1500" b="0" i="0">
+                          <a:solidFill>
+                            <a:srgbClr val="C5D2E4"/>
+                          </a:solidFill>
+                          <a:latin typeface="Calibri"/>
+                        </a:rPr>
+                        <a:t>9.591</a:t>
+                      </a:r>
+                    </a:p>
+                  </a:txBody>
+                  <a:tcPr anchor="ctr" marL="100584" marR="100584" marT="36576" marB="36576">
+                    <a:solidFill>
+                      <a:srgbClr val="0E1929"/>
+                    </a:solidFill>
+                  </a:tcPr>
+                </a:tc>
+                <a:tc>
+                  <a:txBody>
+                    <a:bodyPr wrap="square"/>
+                    <a:lstStyle/>
+                    <a:p>
+                      <a:pPr algn="r"/>
+                      <a:r>
+                        <a:rPr sz="1500" b="0" i="0">
+                          <a:solidFill>
+                            <a:srgbClr val="C5D2E4"/>
+                          </a:solidFill>
+                          <a:latin typeface="Calibri"/>
+                        </a:rPr>
+                        <a:t>48,0%</a:t>
+                      </a:r>
+                    </a:p>
+                  </a:txBody>
+                  <a:tcPr anchor="ctr" marL="100584" marR="100584" marT="36576" marB="36576">
+                    <a:solidFill>
+                      <a:srgbClr val="0E1929"/>
+                    </a:solidFill>
+                  </a:tcPr>
+                </a:tc>
+              </a:tr>
+              <a:tr h="548640">
+                <a:tc>
+                  <a:txBody>
+                    <a:bodyPr wrap="square"/>
+                    <a:lstStyle/>
+                    <a:p>
+                      <a:pPr algn="l"/>
+                      <a:r>
+                        <a:rPr sz="1500" b="0" i="0">
+                          <a:solidFill>
+                            <a:srgbClr val="C5D2E4"/>
+                          </a:solidFill>
+                          <a:latin typeface="Calibri"/>
+                        </a:rPr>
+                        <a:t>Tổng, sau tiền xử lý</a:t>
+                      </a:r>
+                    </a:p>
+                  </a:txBody>
+                  <a:tcPr anchor="ctr" marL="100584" marR="100584" marT="36576" marB="36576">
+                    <a:solidFill>
+                      <a:srgbClr val="121E30"/>
+                    </a:solidFill>
+                  </a:tcPr>
+                </a:tc>
+                <a:tc>
+                  <a:txBody>
+                    <a:bodyPr wrap="square"/>
+                    <a:lstStyle/>
+                    <a:p>
+                      <a:pPr algn="r"/>
+                      <a:r>
+                        <a:rPr sz="1500" b="0" i="0">
+                          <a:solidFill>
+                            <a:srgbClr val="C5D2E4"/>
+                          </a:solidFill>
+                          <a:latin typeface="Calibri"/>
+                        </a:rPr>
+                        <a:t>19.997</a:t>
+                      </a:r>
+                    </a:p>
+                  </a:txBody>
+                  <a:tcPr anchor="ctr" marL="100584" marR="100584" marT="36576" marB="36576">
+                    <a:solidFill>
+                      <a:srgbClr val="121E30"/>
+                    </a:solidFill>
+                  </a:tcPr>
+                </a:tc>
+                <a:tc>
+                  <a:txBody>
+                    <a:bodyPr wrap="square"/>
+                    <a:lstStyle/>
+                    <a:p>
+                      <a:pPr algn="r"/>
+                      <a:r>
+                        <a:rPr sz="1500" b="0" i="0">
+                          <a:solidFill>
+                            <a:srgbClr val="C5D2E4"/>
+                          </a:solidFill>
+                          <a:latin typeface="Calibri"/>
+                        </a:rPr>
+                        <a:t>3 dòng rỗng</a:t>
+                      </a:r>
+                    </a:p>
+                  </a:txBody>
+                  <a:tcPr anchor="ctr" marL="100584" marR="100584" marT="36576" marB="36576">
+                    <a:solidFill>
+                      <a:srgbClr val="121E30"/>
+                    </a:solidFill>
+                  </a:tcPr>
+                </a:tc>
+              </a:tr>
+            </a:tbl>
+          </a:graphicData>
+        </a:graphic>
+      </p:graphicFrame>
       <p:sp>
         <p:nvSpPr>
           <p:cNvPr id="7" name="TextBox 6"/>
@@ -11549,8 +11987,8 @@
         </p:nvSpPr>
         <p:spPr>
           <a:xfrm>
-            <a:off x="731520" y="5806440"/>
-            <a:ext cx="10728655" cy="457200"/>
+            <a:off x="6263640" y="1874519"/>
+            <a:ext cx="5212080" cy="4343400"/>
           </a:xfrm>
           <a:prstGeom prst="rect">
             <a:avLst/>
@@ -11563,19 +12001,99 @@
           </a:bodyPr>
           <a:lstStyle/>
           <a:p>
-            <a:pPr algn="ctr">
+            <a:pPr marL="219456" indent="-219456">
               <a:lnSpc>
-                <a:spcPct val="115000"/>
+                <a:spcPct val="118000"/>
               </a:lnSpc>
+              <a:spcAft>
+                <a:spcPts val="2000"/>
+              </a:spcAft>
+              <a:buClr>
+                <a:srgbClr val="2DD4BF"/>
+              </a:buClr>
+              <a:buFont typeface="Arial"/>
+              <a:buChar char="•"/>
             </a:pPr>
             <a:r>
-              <a:rPr sz="1150" b="0" i="0">
-                <a:solidFill>
-                  <a:srgbClr val="64748B"/>
+              <a:rPr sz="1750" b="0" i="0">
+                <a:solidFill>
+                  <a:srgbClr val="C5D2E4"/>
                 </a:solidFill>
                 <a:latin typeface="Calibri"/>
               </a:rPr>
-              <a:t>Thu thập (src/crawler.py, ba nguồn dữ liệu) · tiền xử lý (src/preprocess.py) · biểu diễn (TF-IDF và vector câu) · thuật toán (LinearSVC, BERTopic trong src/topic_pipeline.py) · đánh giá (results/, experiments/)</a:t>
+              <a:t>Gói ATSH-NLP-20k, dự án ATSH-ABSA (Phạm Xuân Vĩnh Hà, UIT); bình luận về Anh Trai Say Hi mùa 1, tập 1 đến 14</a:t>
+            </a:r>
+          </a:p>
+          <a:p>
+            <a:pPr marL="219456" indent="-219456">
+              <a:lnSpc>
+                <a:spcPct val="118000"/>
+              </a:lnSpc>
+              <a:spcAft>
+                <a:spcPts val="2000"/>
+              </a:spcAft>
+              <a:buClr>
+                <a:srgbClr val="2DD4BF"/>
+              </a:buClr>
+              <a:buFont typeface="Arial"/>
+              <a:buChar char="•"/>
+            </a:pPr>
+            <a:r>
+              <a:rPr sz="1750" b="0" i="0">
+                <a:solidFill>
+                  <a:srgbClr val="C5D2E4"/>
+                </a:solidFill>
+                <a:latin typeface="Calibri"/>
+              </a:rPr>
+              <a:t>Nhãn silver do mô hình ngôn ngữ lớn gán theo đối tượng và khía cạnh rồi gộp; chưa kiểm tay, trung tính nhiễu nhất</a:t>
+            </a:r>
+          </a:p>
+          <a:p>
+            <a:pPr marL="219456" indent="-219456">
+              <a:lnSpc>
+                <a:spcPct val="118000"/>
+              </a:lnSpc>
+              <a:spcAft>
+                <a:spcPts val="2000"/>
+              </a:spcAft>
+              <a:buClr>
+                <a:srgbClr val="2DD4BF"/>
+              </a:buClr>
+              <a:buFont typeface="Arial"/>
+              <a:buChar char="•"/>
+            </a:pPr>
+            <a:r>
+              <a:rPr sz="1750" b="0" i="0">
+                <a:solidFill>
+                  <a:srgbClr val="C5D2E4"/>
+                </a:solidFill>
+                <a:latin typeface="Calibri"/>
+              </a:rPr>
+              <a:t>Tác giả lấy mẫu lại từ dữ liệu gốc khoảng 88% tích cực; tỉ lệ nhãn không phải tỉ lệ thật trên YouTube</a:t>
+            </a:r>
+          </a:p>
+          <a:p>
+            <a:pPr marL="219456" indent="-219456">
+              <a:lnSpc>
+                <a:spcPct val="118000"/>
+              </a:lnSpc>
+              <a:spcAft>
+                <a:spcPts val="2000"/>
+              </a:spcAft>
+              <a:buClr>
+                <a:srgbClr val="2DD4BF"/>
+              </a:buClr>
+              <a:buFont typeface="Arial"/>
+              <a:buChar char="•"/>
+            </a:pPr>
+            <a:r>
+              <a:rPr sz="1750" b="0" i="0">
+                <a:solidFill>
+                  <a:srgbClr val="C5D2E4"/>
+                </a:solidFill>
+                <a:latin typeface="Calibri"/>
+              </a:rPr>
+              <a:t>Một chương trình duy nhất; chỉ dùng cho học tập, không công bố lại</a:t>
             </a:r>
           </a:p>
         </p:txBody>
@@ -11588,13 +12106,13 @@
 </p:sld>
 </file>
 
-<file path=ppt/slides/slide4.xml><?xml version="1.0" encoding="utf-8"?>
+<file path=ppt/slides/slide5.xml><?xml version="1.0" encoding="utf-8"?>
 <p:sld xmlns:a="http://schemas.openxmlformats.org/drawingml/2006/main" xmlns:p="http://schemas.openxmlformats.org/presentationml/2006/main" xmlns:r="http://schemas.openxmlformats.org/officeDocument/2006/relationships">
   <p:cSld>
     <p:bg>
       <p:bgPr>
         <a:solidFill>
-          <a:srgbClr val="FAFAF9"/>
+          <a:srgbClr val="0B1220"/>
         </a:solidFill>
         <a:effectLst/>
       </p:bgPr>
@@ -11631,11 +12149,11 @@
             <a:r>
               <a:rPr sz="1050" b="1" i="0" spc="120">
                 <a:solidFill>
-                  <a:srgbClr val="0D9488"/>
+                  <a:srgbClr val="2DD4BF"/>
                 </a:solidFill>
                 <a:latin typeface="Calibri"/>
               </a:rPr>
-              <a:t>BƯỚC 1 · DỮ LIỆU</a:t>
+              <a:t>BƯỚC 2 · TIỀN XỬ LÝ</a:t>
             </a:r>
           </a:p>
         </p:txBody>
@@ -11670,11 +12188,11 @@
             <a:r>
               <a:rPr sz="2900" b="1" i="0">
                 <a:solidFill>
-                  <a:srgbClr val="0F172A"/>
+                  <a:srgbClr val="F2F6FB"/>
                 </a:solidFill>
                 <a:latin typeface="Calibri Light"/>
               </a:rPr>
-              <a:t>20.000 bình luận có nhãn về một chương trình</a:t>
+              <a:t>Tách từ trước, hạ chữ thường sau</a:t>
             </a:r>
           </a:p>
         </p:txBody>
@@ -11694,7 +12212,7 @@
             <a:avLst/>
           </a:prstGeom>
           <a:solidFill>
-            <a:srgbClr val="0D9488"/>
+            <a:srgbClr val="2DD4BF"/>
           </a:solidFill>
           <a:ln>
             <a:noFill/>
@@ -11749,407 +12267,25 @@
             <a:r>
               <a:rPr sz="1100" b="0" i="0">
                 <a:solidFill>
-                  <a:srgbClr val="94A3B8"/>
+                  <a:srgbClr val="55688A"/>
                 </a:solidFill>
                 <a:latin typeface="Calibri"/>
               </a:rPr>
-              <a:t>4</a:t>
-            </a:r>
-          </a:p>
-        </p:txBody>
-      </p:sp>
-      <p:graphicFrame>
-        <p:nvGraphicFramePr>
-          <p:cNvPr id="6" name="Table 5"/>
-          <p:cNvGraphicFramePr>
-            <a:graphicFrameLocks noGrp="1"/>
-          </p:cNvGraphicFramePr>
-          <p:nvPr/>
-        </p:nvGraphicFramePr>
-        <p:xfrm>
-          <a:off x="731520" y="1874519"/>
-          <a:ext cx="5029200" cy="2139696"/>
-        </p:xfrm>
-        <a:graphic>
-          <a:graphicData uri="http://schemas.openxmlformats.org/drawingml/2006/table">
-            <a:tbl>
-              <a:tblPr>
-                <a:tableStyleId>{2D5ABB26-0587-4C30-8999-92F81FD0307C}</a:tableStyleId>
-              </a:tblPr>
-              <a:tblGrid>
-                <a:gridCol w="2286000"/>
-                <a:gridCol w="1371600"/>
-                <a:gridCol w="1371600"/>
-              </a:tblGrid>
-              <a:tr h="457200">
-                <a:tc>
-                  <a:txBody>
-                    <a:bodyPr wrap="square"/>
-                    <a:lstStyle/>
-                    <a:p>
-                      <a:pPr algn="l"/>
-                      <a:r>
-                        <a:rPr sz="1350" b="1" i="0">
-                          <a:solidFill>
-                            <a:srgbClr val="0F766E"/>
-                          </a:solidFill>
-                          <a:latin typeface="Calibri"/>
-                        </a:rPr>
-                        <a:t>Nhãn</a:t>
-                      </a:r>
-                    </a:p>
-                  </a:txBody>
-                  <a:tcPr anchor="ctr" marL="100584" marR="100584" marT="36576" marB="36576">
-                    <a:solidFill>
-                      <a:srgbClr val="F0FDFA"/>
-                    </a:solidFill>
-                  </a:tcPr>
-                </a:tc>
-                <a:tc>
-                  <a:txBody>
-                    <a:bodyPr wrap="square"/>
-                    <a:lstStyle/>
-                    <a:p>
-                      <a:pPr algn="r"/>
-                      <a:r>
-                        <a:rPr sz="1350" b="1" i="0">
-                          <a:solidFill>
-                            <a:srgbClr val="0F766E"/>
-                          </a:solidFill>
-                          <a:latin typeface="Calibri"/>
-                        </a:rPr>
-                        <a:t>Số dòng</a:t>
-                      </a:r>
-                    </a:p>
-                  </a:txBody>
-                  <a:tcPr anchor="ctr" marL="100584" marR="100584" marT="36576" marB="36576">
-                    <a:solidFill>
-                      <a:srgbClr val="F0FDFA"/>
-                    </a:solidFill>
-                  </a:tcPr>
-                </a:tc>
-                <a:tc>
-                  <a:txBody>
-                    <a:bodyPr wrap="square"/>
-                    <a:lstStyle/>
-                    <a:p>
-                      <a:pPr algn="r"/>
-                      <a:r>
-                        <a:rPr sz="1350" b="1" i="0">
-                          <a:solidFill>
-                            <a:srgbClr val="0F766E"/>
-                          </a:solidFill>
-                          <a:latin typeface="Calibri"/>
-                        </a:rPr>
-                        <a:t>Tỉ lệ</a:t>
-                      </a:r>
-                    </a:p>
-                  </a:txBody>
-                  <a:tcPr anchor="ctr" marL="100584" marR="100584" marT="36576" marB="36576">
-                    <a:solidFill>
-                      <a:srgbClr val="F0FDFA"/>
-                    </a:solidFill>
-                  </a:tcPr>
-                </a:tc>
-              </a:tr>
-              <a:tr h="420624">
-                <a:tc>
-                  <a:txBody>
-                    <a:bodyPr wrap="square"/>
-                    <a:lstStyle/>
-                    <a:p>
-                      <a:pPr algn="l"/>
-                      <a:r>
-                        <a:rPr sz="1350" b="0" i="0">
-                          <a:solidFill>
-                            <a:srgbClr val="334155"/>
-                          </a:solidFill>
-                          <a:latin typeface="Calibri"/>
-                        </a:rPr>
-                        <a:t>Tiêu cực (0)</a:t>
-                      </a:r>
-                    </a:p>
-                  </a:txBody>
-                  <a:tcPr anchor="ctr" marL="100584" marR="100584" marT="36576" marB="36576">
-                    <a:solidFill>
-                      <a:srgbClr val="FFFFFF"/>
-                    </a:solidFill>
-                  </a:tcPr>
-                </a:tc>
-                <a:tc>
-                  <a:txBody>
-                    <a:bodyPr wrap="square"/>
-                    <a:lstStyle/>
-                    <a:p>
-                      <a:pPr algn="r"/>
-                      <a:r>
-                        <a:rPr sz="1350" b="0" i="0">
-                          <a:solidFill>
-                            <a:srgbClr val="334155"/>
-                          </a:solidFill>
-                          <a:latin typeface="Calibri"/>
-                        </a:rPr>
-                        <a:t>7.000</a:t>
-                      </a:r>
-                    </a:p>
-                  </a:txBody>
-                  <a:tcPr anchor="ctr" marL="100584" marR="100584" marT="36576" marB="36576">
-                    <a:solidFill>
-                      <a:srgbClr val="FFFFFF"/>
-                    </a:solidFill>
-                  </a:tcPr>
-                </a:tc>
-                <a:tc>
-                  <a:txBody>
-                    <a:bodyPr wrap="square"/>
-                    <a:lstStyle/>
-                    <a:p>
-                      <a:pPr algn="r"/>
-                      <a:r>
-                        <a:rPr sz="1350" b="0" i="0">
-                          <a:solidFill>
-                            <a:srgbClr val="334155"/>
-                          </a:solidFill>
-                          <a:latin typeface="Calibri"/>
-                        </a:rPr>
-                        <a:t>35,0%</a:t>
-                      </a:r>
-                    </a:p>
-                  </a:txBody>
-                  <a:tcPr anchor="ctr" marL="100584" marR="100584" marT="36576" marB="36576">
-                    <a:solidFill>
-                      <a:srgbClr val="FFFFFF"/>
-                    </a:solidFill>
-                  </a:tcPr>
-                </a:tc>
-              </a:tr>
-              <a:tr h="420624">
-                <a:tc>
-                  <a:txBody>
-                    <a:bodyPr wrap="square"/>
-                    <a:lstStyle/>
-                    <a:p>
-                      <a:pPr algn="l"/>
-                      <a:r>
-                        <a:rPr sz="1350" b="0" i="0">
-                          <a:solidFill>
-                            <a:srgbClr val="334155"/>
-                          </a:solidFill>
-                          <a:latin typeface="Calibri"/>
-                        </a:rPr>
-                        <a:t>Trung tính (1)</a:t>
-                      </a:r>
-                    </a:p>
-                  </a:txBody>
-                  <a:tcPr anchor="ctr" marL="100584" marR="100584" marT="36576" marB="36576">
-                    <a:solidFill>
-                      <a:srgbClr val="F8FAFC"/>
-                    </a:solidFill>
-                  </a:tcPr>
-                </a:tc>
-                <a:tc>
-                  <a:txBody>
-                    <a:bodyPr wrap="square"/>
-                    <a:lstStyle/>
-                    <a:p>
-                      <a:pPr algn="r"/>
-                      <a:r>
-                        <a:rPr sz="1350" b="0" i="0">
-                          <a:solidFill>
-                            <a:srgbClr val="334155"/>
-                          </a:solidFill>
-                          <a:latin typeface="Calibri"/>
-                        </a:rPr>
-                        <a:t>3.409</a:t>
-                      </a:r>
-                    </a:p>
-                  </a:txBody>
-                  <a:tcPr anchor="ctr" marL="100584" marR="100584" marT="36576" marB="36576">
-                    <a:solidFill>
-                      <a:srgbClr val="F8FAFC"/>
-                    </a:solidFill>
-                  </a:tcPr>
-                </a:tc>
-                <a:tc>
-                  <a:txBody>
-                    <a:bodyPr wrap="square"/>
-                    <a:lstStyle/>
-                    <a:p>
-                      <a:pPr algn="r"/>
-                      <a:r>
-                        <a:rPr sz="1350" b="0" i="0">
-                          <a:solidFill>
-                            <a:srgbClr val="334155"/>
-                          </a:solidFill>
-                          <a:latin typeface="Calibri"/>
-                        </a:rPr>
-                        <a:t>17,0%</a:t>
-                      </a:r>
-                    </a:p>
-                  </a:txBody>
-                  <a:tcPr anchor="ctr" marL="100584" marR="100584" marT="36576" marB="36576">
-                    <a:solidFill>
-                      <a:srgbClr val="F8FAFC"/>
-                    </a:solidFill>
-                  </a:tcPr>
-                </a:tc>
-              </a:tr>
-              <a:tr h="420624">
-                <a:tc>
-                  <a:txBody>
-                    <a:bodyPr wrap="square"/>
-                    <a:lstStyle/>
-                    <a:p>
-                      <a:pPr algn="l"/>
-                      <a:r>
-                        <a:rPr sz="1350" b="0" i="0">
-                          <a:solidFill>
-                            <a:srgbClr val="334155"/>
-                          </a:solidFill>
-                          <a:latin typeface="Calibri"/>
-                        </a:rPr>
-                        <a:t>Tích cực (2)</a:t>
-                      </a:r>
-                    </a:p>
-                  </a:txBody>
-                  <a:tcPr anchor="ctr" marL="100584" marR="100584" marT="36576" marB="36576">
-                    <a:solidFill>
-                      <a:srgbClr val="FFFFFF"/>
-                    </a:solidFill>
-                  </a:tcPr>
-                </a:tc>
-                <a:tc>
-                  <a:txBody>
-                    <a:bodyPr wrap="square"/>
-                    <a:lstStyle/>
-                    <a:p>
-                      <a:pPr algn="r"/>
-                      <a:r>
-                        <a:rPr sz="1350" b="0" i="0">
-                          <a:solidFill>
-                            <a:srgbClr val="334155"/>
-                          </a:solidFill>
-                          <a:latin typeface="Calibri"/>
-                        </a:rPr>
-                        <a:t>9.591</a:t>
-                      </a:r>
-                    </a:p>
-                  </a:txBody>
-                  <a:tcPr anchor="ctr" marL="100584" marR="100584" marT="36576" marB="36576">
-                    <a:solidFill>
-                      <a:srgbClr val="FFFFFF"/>
-                    </a:solidFill>
-                  </a:tcPr>
-                </a:tc>
-                <a:tc>
-                  <a:txBody>
-                    <a:bodyPr wrap="square"/>
-                    <a:lstStyle/>
-                    <a:p>
-                      <a:pPr algn="r"/>
-                      <a:r>
-                        <a:rPr sz="1350" b="0" i="0">
-                          <a:solidFill>
-                            <a:srgbClr val="334155"/>
-                          </a:solidFill>
-                          <a:latin typeface="Calibri"/>
-                        </a:rPr>
-                        <a:t>48,0%</a:t>
-                      </a:r>
-                    </a:p>
-                  </a:txBody>
-                  <a:tcPr anchor="ctr" marL="100584" marR="100584" marT="36576" marB="36576">
-                    <a:solidFill>
-                      <a:srgbClr val="FFFFFF"/>
-                    </a:solidFill>
-                  </a:tcPr>
-                </a:tc>
-              </a:tr>
-              <a:tr h="420624">
-                <a:tc>
-                  <a:txBody>
-                    <a:bodyPr wrap="square"/>
-                    <a:lstStyle/>
-                    <a:p>
-                      <a:pPr algn="l"/>
-                      <a:r>
-                        <a:rPr sz="1350" b="0" i="0">
-                          <a:solidFill>
-                            <a:srgbClr val="334155"/>
-                          </a:solidFill>
-                          <a:latin typeface="Calibri"/>
-                        </a:rPr>
-                        <a:t>Tổng, sau tiền xử lý</a:t>
-                      </a:r>
-                    </a:p>
-                  </a:txBody>
-                  <a:tcPr anchor="ctr" marL="100584" marR="100584" marT="36576" marB="36576">
-                    <a:solidFill>
-                      <a:srgbClr val="F8FAFC"/>
-                    </a:solidFill>
-                  </a:tcPr>
-                </a:tc>
-                <a:tc>
-                  <a:txBody>
-                    <a:bodyPr wrap="square"/>
-                    <a:lstStyle/>
-                    <a:p>
-                      <a:pPr algn="r"/>
-                      <a:r>
-                        <a:rPr sz="1350" b="0" i="0">
-                          <a:solidFill>
-                            <a:srgbClr val="334155"/>
-                          </a:solidFill>
-                          <a:latin typeface="Calibri"/>
-                        </a:rPr>
-                        <a:t>19.997</a:t>
-                      </a:r>
-                    </a:p>
-                  </a:txBody>
-                  <a:tcPr anchor="ctr" marL="100584" marR="100584" marT="36576" marB="36576">
-                    <a:solidFill>
-                      <a:srgbClr val="F8FAFC"/>
-                    </a:solidFill>
-                  </a:tcPr>
-                </a:tc>
-                <a:tc>
-                  <a:txBody>
-                    <a:bodyPr wrap="square"/>
-                    <a:lstStyle/>
-                    <a:p>
-                      <a:pPr algn="r"/>
-                      <a:r>
-                        <a:rPr sz="1350" b="0" i="0">
-                          <a:solidFill>
-                            <a:srgbClr val="334155"/>
-                          </a:solidFill>
-                          <a:latin typeface="Calibri"/>
-                        </a:rPr>
-                        <a:t>3 dòng rỗng</a:t>
-                      </a:r>
-                    </a:p>
-                  </a:txBody>
-                  <a:tcPr anchor="ctr" marL="100584" marR="100584" marT="36576" marB="36576">
-                    <a:solidFill>
-                      <a:srgbClr val="F8FAFC"/>
-                    </a:solidFill>
-                  </a:tcPr>
-                </a:tc>
-              </a:tr>
-            </a:tbl>
-          </a:graphicData>
-        </a:graphic>
-      </p:graphicFrame>
-      <p:sp>
-        <p:nvSpPr>
-          <p:cNvPr id="7" name="TextBox 6"/>
+              <a:t>5</a:t>
+            </a:r>
+          </a:p>
+        </p:txBody>
+      </p:sp>
+      <p:sp>
+        <p:nvSpPr>
+          <p:cNvPr id="6" name="TextBox 5"/>
           <p:cNvSpPr txBox="1"/>
           <p:nvPr/>
         </p:nvSpPr>
         <p:spPr>
           <a:xfrm>
-            <a:off x="6263640" y="1874519"/>
-            <a:ext cx="5212080" cy="4343400"/>
+            <a:off x="731520" y="1810512"/>
+            <a:ext cx="10728655" cy="4407407"/>
           </a:xfrm>
           <a:prstGeom prst="rect">
             <a:avLst/>
@@ -12167,22 +12303,31 @@
                 <a:spcPct val="118000"/>
               </a:lnSpc>
               <a:spcAft>
-                <a:spcPts val="1600"/>
+                <a:spcPts val="2000"/>
               </a:spcAft>
               <a:buClr>
-                <a:srgbClr val="0D9488"/>
+                <a:srgbClr val="2DD4BF"/>
               </a:buClr>
               <a:buFont typeface="Arial"/>
               <a:buChar char="•"/>
             </a:pPr>
             <a:r>
-              <a:rPr sz="1550" b="0" i="0">
-                <a:solidFill>
-                  <a:srgbClr val="334155"/>
+              <a:rPr sz="1700" b="1" i="0">
+                <a:solidFill>
+                  <a:srgbClr val="F2F6FB"/>
                 </a:solidFill>
                 <a:latin typeface="Calibri"/>
               </a:rPr>
-              <a:t>Gói ATSH-NLP-20k, dự án ATSH-ABSA (Phạm Xuân Vĩnh Hà, UIT); bình luận về Anh Trai Say Hi mùa 1, tập 1 đến 14</a:t>
+              <a:t>Thứ tự trong mã: </a:t>
+            </a:r>
+            <a:r>
+              <a:rPr sz="1700" b="0" i="0">
+                <a:solidFill>
+                  <a:srgbClr val="C5D2E4"/>
+                </a:solidFill>
+                <a:latin typeface="Calibri"/>
+              </a:rPr>
+              <a:t>chuẩn hóa NFC, bỏ URL, bỏ ký hiệu @ và #, thay dấu câu và emoji bằng khoảng trắng, rút chữ lặp (luônnnn thành luôn), chuẩn hóa teencode, tách từ bằng pyvi, cuối cùng mới hạ chữ thường</a:t>
             </a:r>
           </a:p>
           <a:p>
@@ -12191,22 +12336,67 @@
                 <a:spcPct val="118000"/>
               </a:lnSpc>
               <a:spcAft>
-                <a:spcPts val="1600"/>
+                <a:spcPts val="2000"/>
               </a:spcAft>
               <a:buClr>
-                <a:srgbClr val="0D9488"/>
+                <a:srgbClr val="2DD4BF"/>
               </a:buClr>
               <a:buFont typeface="Arial"/>
               <a:buChar char="•"/>
             </a:pPr>
             <a:r>
-              <a:rPr sz="1550" b="0" i="0">
-                <a:solidFill>
-                  <a:srgbClr val="334155"/>
+              <a:rPr sz="1700" b="1" i="0">
+                <a:solidFill>
+                  <a:srgbClr val="F2F6FB"/>
                 </a:solidFill>
                 <a:latin typeface="Calibri"/>
               </a:rPr>
-              <a:t>Nhãn silver do mô hình ngôn ngữ lớn gán theo đối tượng và khía cạnh rồi gộp; chưa kiểm tay, trung tính nhiễu nhất</a:t>
+              <a:t>Vì sao thứ tự đó: </a:t>
+            </a:r>
+            <a:r>
+              <a:rPr sz="1700" b="0" i="0">
+                <a:solidFill>
+                  <a:srgbClr val="C5D2E4"/>
+                </a:solidFill>
+                <a:latin typeface="Calibri"/>
+              </a:rPr>
+              <a:t>pyvi phân biệt chữ hoa khi ghép tên riêng. </a:t>
+            </a:r>
+            <a:r>
+              <a:rPr sz="1700" b="0" i="1">
+                <a:solidFill>
+                  <a:srgbClr val="5EEAD4"/>
+                </a:solidFill>
+                <a:latin typeface="Calibri"/>
+              </a:rPr>
+              <a:t>Đông Hùng hát</a:t>
+            </a:r>
+            <a:r>
+              <a:rPr sz="1700" b="0" i="0">
+                <a:solidFill>
+                  <a:srgbClr val="C5D2E4"/>
+                </a:solidFill>
+                <a:latin typeface="Calibri"/>
+              </a:rPr>
+              <a:t> cho </a:t>
+            </a:r>
+            <a:r>
+              <a:rPr sz="1700" b="0" i="1">
+                <a:solidFill>
+                  <a:srgbClr val="5EEAD4"/>
+                </a:solidFill>
+                <a:latin typeface="Calibri"/>
+              </a:rPr>
+              <a:t>Đông_Hùng hát</a:t>
+            </a:r>
+            <a:r>
+              <a:rPr sz="1700" b="0" i="0">
+                <a:solidFill>
+                  <a:srgbClr val="C5D2E4"/>
+                </a:solidFill>
+                <a:latin typeface="Calibri"/>
+              </a:rPr>
+              <a:t>; đã hạ chữ thường thì thành ba token rời</a:t>
             </a:r>
           </a:p>
           <a:p>
@@ -12215,22 +12405,40 @@
                 <a:spcPct val="118000"/>
               </a:lnSpc>
               <a:spcAft>
-                <a:spcPts val="1600"/>
+                <a:spcPts val="2000"/>
               </a:spcAft>
               <a:buClr>
-                <a:srgbClr val="0D9488"/>
+                <a:srgbClr val="2DD4BF"/>
               </a:buClr>
               <a:buFont typeface="Arial"/>
               <a:buChar char="•"/>
             </a:pPr>
             <a:r>
-              <a:rPr sz="1550" b="0" i="0">
-                <a:solidFill>
-                  <a:srgbClr val="334155"/>
+              <a:rPr sz="1700" b="0" i="0">
+                <a:solidFill>
+                  <a:srgbClr val="C5D2E4"/>
                 </a:solidFill>
                 <a:latin typeface="Calibri"/>
               </a:rPr>
-              <a:t>Tác giả lấy mẫu lại từ dữ liệu gốc khoảng 88% tích cực; tỉ lệ nhãn không phải tỉ lệ thật trên YouTube</a:t>
+              <a:t>Từ điển teencode chỉ sửa chính tả </a:t>
+            </a:r>
+            <a:r>
+              <a:rPr sz="1700" b="0" i="1">
+                <a:solidFill>
+                  <a:srgbClr val="C5D2E4"/>
+                </a:solidFill>
+                <a:latin typeface="Calibri"/>
+              </a:rPr>
+              <a:t>(ko, hok, khong thành không)</a:t>
+            </a:r>
+            <a:r>
+              <a:rPr sz="1700" b="0" i="0">
+                <a:solidFill>
+                  <a:srgbClr val="C5D2E4"/>
+                </a:solidFill>
+                <a:latin typeface="Calibri"/>
+              </a:rPr>
+              <a:t>, không dịch tiếng lóng sang từ cảm xúc. Bản cũ có ok thành tốt, vcl thành rất: đó là gán nhãn trước khi mô hình học</a:t>
             </a:r>
           </a:p>
           <a:p>
@@ -12239,22 +12447,40 @@
                 <a:spcPct val="118000"/>
               </a:lnSpc>
               <a:spcAft>
-                <a:spcPts val="1600"/>
+                <a:spcPts val="2000"/>
               </a:spcAft>
               <a:buClr>
-                <a:srgbClr val="0D9488"/>
+                <a:srgbClr val="2DD4BF"/>
               </a:buClr>
               <a:buFont typeface="Arial"/>
               <a:buChar char="•"/>
             </a:pPr>
             <a:r>
-              <a:rPr sz="1550" b="0" i="0">
-                <a:solidFill>
-                  <a:srgbClr val="334155"/>
+              <a:rPr sz="1700" b="0" i="0">
+                <a:solidFill>
+                  <a:srgbClr val="C5D2E4"/>
                 </a:solidFill>
                 <a:latin typeface="Calibri"/>
               </a:rPr>
-              <a:t>Một chương trình duy nhất; chỉ dùng cho học tập, không công bố lại</a:t>
+              <a:t>236 từ dừng chỉ dùng cho từ khóa chủ đề, vì </a:t>
+            </a:r>
+            <a:r>
+              <a:rPr sz="1700" b="0" i="1">
+                <a:solidFill>
+                  <a:srgbClr val="5EEAD4"/>
+                </a:solidFill>
+                <a:latin typeface="Calibri"/>
+              </a:rPr>
+              <a:t>không</a:t>
+            </a:r>
+            <a:r>
+              <a:rPr sz="1700" b="0" i="0">
+                <a:solidFill>
+                  <a:srgbClr val="C5D2E4"/>
+                </a:solidFill>
+                <a:latin typeface="Calibri"/>
+              </a:rPr>
+              <a:t> nằm trong danh sách và là đặc trưng mạnh nhất của lớp tiêu cực (+2,93)</a:t>
             </a:r>
           </a:p>
         </p:txBody>
@@ -12267,13 +12493,13 @@
 </p:sld>
 </file>
 
-<file path=ppt/slides/slide5.xml><?xml version="1.0" encoding="utf-8"?>
+<file path=ppt/slides/slide6.xml><?xml version="1.0" encoding="utf-8"?>
 <p:sld xmlns:a="http://schemas.openxmlformats.org/drawingml/2006/main" xmlns:p="http://schemas.openxmlformats.org/presentationml/2006/main" xmlns:r="http://schemas.openxmlformats.org/officeDocument/2006/relationships">
   <p:cSld>
     <p:bg>
       <p:bgPr>
         <a:solidFill>
-          <a:srgbClr val="FAFAF9"/>
+          <a:srgbClr val="0B1220"/>
         </a:solidFill>
         <a:effectLst/>
       </p:bgPr>
@@ -12310,11 +12536,11 @@
             <a:r>
               <a:rPr sz="1050" b="1" i="0" spc="120">
                 <a:solidFill>
-                  <a:srgbClr val="0D9488"/>
+                  <a:srgbClr val="2DD4BF"/>
                 </a:solidFill>
                 <a:latin typeface="Calibri"/>
               </a:rPr>
-              <a:t>BƯỚC 2 · TIỀN XỬ LÝ</a:t>
+              <a:t>BƯỚC 2 · THÍ NGHIỆM</a:t>
             </a:r>
           </a:p>
         </p:txBody>
@@ -12349,11 +12575,11 @@
             <a:r>
               <a:rPr sz="2900" b="1" i="0">
                 <a:solidFill>
-                  <a:srgbClr val="0F172A"/>
+                  <a:srgbClr val="F2F6FB"/>
                 </a:solidFill>
                 <a:latin typeface="Calibri Light"/>
               </a:rPr>
-              <a:t>Tách từ trước, hạ chữ thường sau</a:t>
+              <a:t>Đổi tiền xử lý không đổi điểm cảm xúc, nhưng đổi từ khóa chủ đề</a:t>
             </a:r>
           </a:p>
         </p:txBody>
@@ -12373,7 +12599,7 @@
             <a:avLst/>
           </a:prstGeom>
           <a:solidFill>
-            <a:srgbClr val="0D9488"/>
+            <a:srgbClr val="2DD4BF"/>
           </a:solidFill>
           <a:ln>
             <a:noFill/>
@@ -12428,394 +12654,7 @@
             <a:r>
               <a:rPr sz="1100" b="0" i="0">
                 <a:solidFill>
-                  <a:srgbClr val="94A3B8"/>
-                </a:solidFill>
-                <a:latin typeface="Calibri"/>
-              </a:rPr>
-              <a:t>5</a:t>
-            </a:r>
-          </a:p>
-        </p:txBody>
-      </p:sp>
-      <p:sp>
-        <p:nvSpPr>
-          <p:cNvPr id="6" name="TextBox 5"/>
-          <p:cNvSpPr txBox="1"/>
-          <p:nvPr/>
-        </p:nvSpPr>
-        <p:spPr>
-          <a:xfrm>
-            <a:off x="731520" y="1810512"/>
-            <a:ext cx="10728655" cy="4407407"/>
-          </a:xfrm>
-          <a:prstGeom prst="rect">
-            <a:avLst/>
-          </a:prstGeom>
-          <a:noFill/>
-        </p:spPr>
-        <p:txBody>
-          <a:bodyPr wrap="square" lIns="0" rIns="0" tIns="0" bIns="0">
-            <a:spAutoFit/>
-          </a:bodyPr>
-          <a:lstStyle/>
-          <a:p>
-            <a:pPr marL="219456" indent="-219456">
-              <a:lnSpc>
-                <a:spcPct val="118000"/>
-              </a:lnSpc>
-              <a:spcAft>
-                <a:spcPts val="2000"/>
-              </a:spcAft>
-              <a:buClr>
-                <a:srgbClr val="0D9488"/>
-              </a:buClr>
-              <a:buFont typeface="Arial"/>
-              <a:buChar char="•"/>
-            </a:pPr>
-            <a:r>
-              <a:rPr sz="1700" b="1" i="0">
-                <a:solidFill>
-                  <a:srgbClr val="0F172A"/>
-                </a:solidFill>
-                <a:latin typeface="Calibri"/>
-              </a:rPr>
-              <a:t>Thứ tự trong mã: </a:t>
-            </a:r>
-            <a:r>
-              <a:rPr sz="1700" b="0" i="0">
-                <a:solidFill>
-                  <a:srgbClr val="334155"/>
-                </a:solidFill>
-                <a:latin typeface="Calibri"/>
-              </a:rPr>
-              <a:t>chuẩn hóa NFC, bỏ URL, bỏ ký hiệu @ và #, thay dấu câu và emoji bằng khoảng trắng, rút chữ lặp (luônnnn thành luôn), chuẩn hóa teencode, tách từ bằng pyvi, cuối cùng mới hạ chữ thường</a:t>
-            </a:r>
-          </a:p>
-          <a:p>
-            <a:pPr marL="219456" indent="-219456">
-              <a:lnSpc>
-                <a:spcPct val="118000"/>
-              </a:lnSpc>
-              <a:spcAft>
-                <a:spcPts val="2000"/>
-              </a:spcAft>
-              <a:buClr>
-                <a:srgbClr val="0D9488"/>
-              </a:buClr>
-              <a:buFont typeface="Arial"/>
-              <a:buChar char="•"/>
-            </a:pPr>
-            <a:r>
-              <a:rPr sz="1700" b="1" i="0">
-                <a:solidFill>
-                  <a:srgbClr val="0F172A"/>
-                </a:solidFill>
-                <a:latin typeface="Calibri"/>
-              </a:rPr>
-              <a:t>Vì sao thứ tự đó: </a:t>
-            </a:r>
-            <a:r>
-              <a:rPr sz="1700" b="0" i="0">
-                <a:solidFill>
-                  <a:srgbClr val="334155"/>
-                </a:solidFill>
-                <a:latin typeface="Calibri"/>
-              </a:rPr>
-              <a:t>pyvi phân biệt chữ hoa khi ghép tên riêng. </a:t>
-            </a:r>
-            <a:r>
-              <a:rPr sz="1700" b="0" i="1">
-                <a:solidFill>
-                  <a:srgbClr val="0F766E"/>
-                </a:solidFill>
-                <a:latin typeface="Calibri"/>
-              </a:rPr>
-              <a:t>Đông Hùng hát</a:t>
-            </a:r>
-            <a:r>
-              <a:rPr sz="1700" b="0" i="0">
-                <a:solidFill>
-                  <a:srgbClr val="334155"/>
-                </a:solidFill>
-                <a:latin typeface="Calibri"/>
-              </a:rPr>
-              <a:t> cho </a:t>
-            </a:r>
-            <a:r>
-              <a:rPr sz="1700" b="0" i="1">
-                <a:solidFill>
-                  <a:srgbClr val="0F766E"/>
-                </a:solidFill>
-                <a:latin typeface="Calibri"/>
-              </a:rPr>
-              <a:t>Đông_Hùng hát</a:t>
-            </a:r>
-            <a:r>
-              <a:rPr sz="1700" b="0" i="0">
-                <a:solidFill>
-                  <a:srgbClr val="334155"/>
-                </a:solidFill>
-                <a:latin typeface="Calibri"/>
-              </a:rPr>
-              <a:t>; đã hạ chữ thường thì thành ba token rời</a:t>
-            </a:r>
-          </a:p>
-          <a:p>
-            <a:pPr marL="219456" indent="-219456">
-              <a:lnSpc>
-                <a:spcPct val="118000"/>
-              </a:lnSpc>
-              <a:spcAft>
-                <a:spcPts val="2000"/>
-              </a:spcAft>
-              <a:buClr>
-                <a:srgbClr val="0D9488"/>
-              </a:buClr>
-              <a:buFont typeface="Arial"/>
-              <a:buChar char="•"/>
-            </a:pPr>
-            <a:r>
-              <a:rPr sz="1700" b="0" i="0">
-                <a:solidFill>
-                  <a:srgbClr val="334155"/>
-                </a:solidFill>
-                <a:latin typeface="Calibri"/>
-              </a:rPr>
-              <a:t>Từ điển teencode chỉ sửa chính tả </a:t>
-            </a:r>
-            <a:r>
-              <a:rPr sz="1700" b="0" i="1">
-                <a:solidFill>
-                  <a:srgbClr val="334155"/>
-                </a:solidFill>
-                <a:latin typeface="Calibri"/>
-              </a:rPr>
-              <a:t>(ko, hok, khong thành không)</a:t>
-            </a:r>
-            <a:r>
-              <a:rPr sz="1700" b="0" i="0">
-                <a:solidFill>
-                  <a:srgbClr val="334155"/>
-                </a:solidFill>
-                <a:latin typeface="Calibri"/>
-              </a:rPr>
-              <a:t>, không dịch tiếng lóng sang từ cảm xúc. Bản cũ có ok thành tốt, vcl thành rất: đó là gán nhãn trước khi mô hình học</a:t>
-            </a:r>
-          </a:p>
-          <a:p>
-            <a:pPr marL="219456" indent="-219456">
-              <a:lnSpc>
-                <a:spcPct val="118000"/>
-              </a:lnSpc>
-              <a:spcAft>
-                <a:spcPts val="2000"/>
-              </a:spcAft>
-              <a:buClr>
-                <a:srgbClr val="0D9488"/>
-              </a:buClr>
-              <a:buFont typeface="Arial"/>
-              <a:buChar char="•"/>
-            </a:pPr>
-            <a:r>
-              <a:rPr sz="1700" b="0" i="0">
-                <a:solidFill>
-                  <a:srgbClr val="334155"/>
-                </a:solidFill>
-                <a:latin typeface="Calibri"/>
-              </a:rPr>
-              <a:t>236 từ dừng chỉ dùng cho từ khóa chủ đề, vì </a:t>
-            </a:r>
-            <a:r>
-              <a:rPr sz="1700" b="0" i="1">
-                <a:solidFill>
-                  <a:srgbClr val="0F766E"/>
-                </a:solidFill>
-                <a:latin typeface="Calibri"/>
-              </a:rPr>
-              <a:t>không</a:t>
-            </a:r>
-            <a:r>
-              <a:rPr sz="1700" b="0" i="0">
-                <a:solidFill>
-                  <a:srgbClr val="334155"/>
-                </a:solidFill>
-                <a:latin typeface="Calibri"/>
-              </a:rPr>
-              <a:t> nằm trong danh sách và là đặc trưng mạnh nhất của lớp tiêu cực (+2,93)</a:t>
-            </a:r>
-          </a:p>
-        </p:txBody>
-      </p:sp>
-    </p:spTree>
-  </p:cSld>
-  <p:clrMapOvr>
-    <a:masterClrMapping/>
-  </p:clrMapOvr>
-</p:sld>
-</file>
-
-<file path=ppt/slides/slide6.xml><?xml version="1.0" encoding="utf-8"?>
-<p:sld xmlns:a="http://schemas.openxmlformats.org/drawingml/2006/main" xmlns:p="http://schemas.openxmlformats.org/presentationml/2006/main" xmlns:r="http://schemas.openxmlformats.org/officeDocument/2006/relationships">
-  <p:cSld>
-    <p:bg>
-      <p:bgPr>
-        <a:solidFill>
-          <a:srgbClr val="FAFAF9"/>
-        </a:solidFill>
-        <a:effectLst/>
-      </p:bgPr>
-    </p:bg>
-    <p:spTree>
-      <p:nvGrpSpPr>
-        <p:cNvPr id="1" name=""/>
-        <p:cNvGrpSpPr/>
-        <p:nvPr/>
-      </p:nvGrpSpPr>
-      <p:grpSpPr/>
-      <p:sp>
-        <p:nvSpPr>
-          <p:cNvPr id="2" name="TextBox 1"/>
-          <p:cNvSpPr txBox="1"/>
-          <p:nvPr/>
-        </p:nvSpPr>
-        <p:spPr>
-          <a:xfrm>
-            <a:off x="731520" y="329184"/>
-            <a:ext cx="10728655" cy="237744"/>
-          </a:xfrm>
-          <a:prstGeom prst="rect">
-            <a:avLst/>
-          </a:prstGeom>
-          <a:noFill/>
-        </p:spPr>
-        <p:txBody>
-          <a:bodyPr wrap="square" lIns="0" rIns="0" tIns="0" bIns="0">
-            <a:spAutoFit/>
-          </a:bodyPr>
-          <a:lstStyle/>
-          <a:p>
-            <a:r>
-              <a:rPr sz="1050" b="1" i="0" spc="120">
-                <a:solidFill>
-                  <a:srgbClr val="0D9488"/>
-                </a:solidFill>
-                <a:latin typeface="Calibri"/>
-              </a:rPr>
-              <a:t>BƯỚC 2 · THÍ NGHIỆM</a:t>
-            </a:r>
-          </a:p>
-        </p:txBody>
-      </p:sp>
-      <p:sp>
-        <p:nvSpPr>
-          <p:cNvPr id="3" name="TextBox 2"/>
-          <p:cNvSpPr txBox="1"/>
-          <p:nvPr/>
-        </p:nvSpPr>
-        <p:spPr>
-          <a:xfrm>
-            <a:off x="731520" y="603504"/>
-            <a:ext cx="10728655" cy="868680"/>
-          </a:xfrm>
-          <a:prstGeom prst="rect">
-            <a:avLst/>
-          </a:prstGeom>
-          <a:noFill/>
-        </p:spPr>
-        <p:txBody>
-          <a:bodyPr wrap="square" lIns="0" rIns="0" tIns="0" bIns="0">
-            <a:spAutoFit/>
-          </a:bodyPr>
-          <a:lstStyle/>
-          <a:p>
-            <a:pPr>
-              <a:lnSpc>
-                <a:spcPct val="95000"/>
-              </a:lnSpc>
-            </a:pPr>
-            <a:r>
-              <a:rPr sz="2900" b="1" i="0">
-                <a:solidFill>
-                  <a:srgbClr val="0F172A"/>
-                </a:solidFill>
-                <a:latin typeface="Calibri Light"/>
-              </a:rPr>
-              <a:t>Đổi tiền xử lý không đổi điểm cảm xúc, nhưng đổi từ khóa chủ đề</a:t>
-            </a:r>
-          </a:p>
-        </p:txBody>
-      </p:sp>
-      <p:sp>
-        <p:nvSpPr>
-          <p:cNvPr id="4" name="Rectangle 3"/>
-          <p:cNvSpPr/>
-          <p:nvPr/>
-        </p:nvSpPr>
-        <p:spPr>
-          <a:xfrm>
-            <a:off x="731520" y="1463040"/>
-            <a:ext cx="777240" cy="47548"/>
-          </a:xfrm>
-          <a:prstGeom prst="rect">
-            <a:avLst/>
-          </a:prstGeom>
-          <a:solidFill>
-            <a:srgbClr val="0D9488"/>
-          </a:solidFill>
-          <a:ln>
-            <a:noFill/>
-          </a:ln>
-          <a:effectLst/>
-        </p:spPr>
-        <p:style>
-          <a:lnRef idx="1">
-            <a:schemeClr val="accent1"/>
-          </a:lnRef>
-          <a:fillRef idx="3">
-            <a:schemeClr val="accent1"/>
-          </a:fillRef>
-          <a:effectRef idx="2">
-            <a:schemeClr val="accent1"/>
-          </a:effectRef>
-          <a:fontRef idx="minor">
-            <a:schemeClr val="lt1"/>
-          </a:fontRef>
-        </p:style>
-        <p:txBody>
-          <a:bodyPr rtlCol="0" anchor="ctr"/>
-          <a:lstStyle/>
-          <a:p>
-            <a:pPr algn="ctr"/>
-          </a:p>
-        </p:txBody>
-      </p:sp>
-      <p:sp>
-        <p:nvSpPr>
-          <p:cNvPr id="5" name="TextBox 4"/>
-          <p:cNvSpPr txBox="1"/>
-          <p:nvPr/>
-        </p:nvSpPr>
-        <p:spPr>
-          <a:xfrm>
-            <a:off x="10545775" y="6291072"/>
-            <a:ext cx="914400" cy="274320"/>
-          </a:xfrm>
-          <a:prstGeom prst="rect">
-            <a:avLst/>
-          </a:prstGeom>
-          <a:noFill/>
-        </p:spPr>
-        <p:txBody>
-          <a:bodyPr wrap="square" lIns="0" rIns="0" tIns="0" bIns="0">
-            <a:spAutoFit/>
-          </a:bodyPr>
-          <a:lstStyle/>
-          <a:p>
-            <a:pPr algn="r"/>
-            <a:r>
-              <a:rPr sz="1100" b="0" i="0">
-                <a:solidFill>
-                  <a:srgbClr val="94A3B8"/>
+                  <a:srgbClr val="55688A"/>
                 </a:solidFill>
                 <a:latin typeface="Calibri"/>
               </a:rPr>
@@ -12859,7 +12698,7 @@
                       <a:r>
                         <a:rPr sz="1350" b="1" i="0">
                           <a:solidFill>
-                            <a:srgbClr val="0F766E"/>
+                            <a:srgbClr val="5EEAD4"/>
                           </a:solidFill>
                           <a:latin typeface="Calibri"/>
                         </a:rPr>
@@ -12869,7 +12708,7 @@
                   </a:txBody>
                   <a:tcPr anchor="ctr" marL="100584" marR="100584" marT="36576" marB="36576">
                     <a:solidFill>
-                      <a:srgbClr val="F0FDFA"/>
+                      <a:srgbClr val="12303A"/>
                     </a:solidFill>
                   </a:tcPr>
                 </a:tc>
@@ -12882,7 +12721,7 @@
                       <a:r>
                         <a:rPr sz="1350" b="1" i="0">
                           <a:solidFill>
-                            <a:srgbClr val="0F766E"/>
+                            <a:srgbClr val="5EEAD4"/>
                           </a:solidFill>
                           <a:latin typeface="Calibri"/>
                         </a:rPr>
@@ -12892,7 +12731,7 @@
                   </a:txBody>
                   <a:tcPr anchor="ctr" marL="100584" marR="100584" marT="36576" marB="36576">
                     <a:solidFill>
-                      <a:srgbClr val="F0FDFA"/>
+                      <a:srgbClr val="12303A"/>
                     </a:solidFill>
                   </a:tcPr>
                 </a:tc>
@@ -12905,7 +12744,7 @@
                       <a:r>
                         <a:rPr sz="1350" b="1" i="0">
                           <a:solidFill>
-                            <a:srgbClr val="0F766E"/>
+                            <a:srgbClr val="5EEAD4"/>
                           </a:solidFill>
                           <a:latin typeface="Calibri"/>
                         </a:rPr>
@@ -12915,7 +12754,7 @@
                   </a:txBody>
                   <a:tcPr anchor="ctr" marL="100584" marR="100584" marT="36576" marB="36576">
                     <a:solidFill>
-                      <a:srgbClr val="F0FDFA"/>
+                      <a:srgbClr val="12303A"/>
                     </a:solidFill>
                   </a:tcPr>
                 </a:tc>
@@ -12928,7 +12767,7 @@
                       <a:r>
                         <a:rPr sz="1350" b="1" i="0">
                           <a:solidFill>
-                            <a:srgbClr val="0F766E"/>
+                            <a:srgbClr val="5EEAD4"/>
                           </a:solidFill>
                           <a:latin typeface="Calibri"/>
                         </a:rPr>
@@ -12938,7 +12777,7 @@
                   </a:txBody>
                   <a:tcPr anchor="ctr" marL="100584" marR="100584" marT="36576" marB="36576">
                     <a:solidFill>
-                      <a:srgbClr val="F0FDFA"/>
+                      <a:srgbClr val="12303A"/>
                     </a:solidFill>
                   </a:tcPr>
                 </a:tc>
@@ -12951,7 +12790,7 @@
                       <a:r>
                         <a:rPr sz="1350" b="1" i="0">
                           <a:solidFill>
-                            <a:srgbClr val="0F766E"/>
+                            <a:srgbClr val="5EEAD4"/>
                           </a:solidFill>
                           <a:latin typeface="Calibri"/>
                         </a:rPr>
@@ -12961,7 +12800,7 @@
                   </a:txBody>
                   <a:tcPr anchor="ctr" marL="100584" marR="100584" marT="36576" marB="36576">
                     <a:solidFill>
-                      <a:srgbClr val="F0FDFA"/>
+                      <a:srgbClr val="12303A"/>
                     </a:solidFill>
                   </a:tcPr>
                 </a:tc>
@@ -12976,7 +12815,7 @@
                       <a:r>
                         <a:rPr sz="1350" b="0" i="0">
                           <a:solidFill>
-                            <a:srgbClr val="334155"/>
+                            <a:srgbClr val="C5D2E4"/>
                           </a:solidFill>
                           <a:latin typeface="Calibri"/>
                         </a:rPr>
@@ -12986,7 +12825,7 @@
                   </a:txBody>
                   <a:tcPr anchor="ctr" marL="100584" marR="100584" marT="36576" marB="36576">
                     <a:solidFill>
-                      <a:srgbClr val="FFFFFF"/>
+                      <a:srgbClr val="0E1929"/>
                     </a:solidFill>
                   </a:tcPr>
                 </a:tc>
@@ -12999,7 +12838,7 @@
                       <a:r>
                         <a:rPr sz="1350" b="0" i="0">
                           <a:solidFill>
-                            <a:srgbClr val="334155"/>
+                            <a:srgbClr val="C5D2E4"/>
                           </a:solidFill>
                           <a:latin typeface="Calibri"/>
                         </a:rPr>
@@ -13009,7 +12848,7 @@
                   </a:txBody>
                   <a:tcPr anchor="ctr" marL="100584" marR="100584" marT="36576" marB="36576">
                     <a:solidFill>
-                      <a:srgbClr val="FFFFFF"/>
+                      <a:srgbClr val="0E1929"/>
                     </a:solidFill>
                   </a:tcPr>
                 </a:tc>
@@ -13022,7 +12861,7 @@
                       <a:r>
                         <a:rPr sz="1350" b="0" i="0">
                           <a:solidFill>
-                            <a:srgbClr val="334155"/>
+                            <a:srgbClr val="C5D2E4"/>
                           </a:solidFill>
                           <a:latin typeface="Calibri"/>
                         </a:rPr>
@@ -13032,7 +12871,7 @@
                   </a:txBody>
                   <a:tcPr anchor="ctr" marL="100584" marR="100584" marT="36576" marB="36576">
                     <a:solidFill>
-                      <a:srgbClr val="FFFFFF"/>
+                      <a:srgbClr val="0E1929"/>
                     </a:solidFill>
                   </a:tcPr>
                 </a:tc>
@@ -13045,7 +12884,7 @@
                       <a:r>
                         <a:rPr sz="1350" b="0" i="0">
                           <a:solidFill>
-                            <a:srgbClr val="334155"/>
+                            <a:srgbClr val="C5D2E4"/>
                           </a:solidFill>
                           <a:latin typeface="Calibri"/>
                         </a:rPr>
@@ -13055,7 +12894,7 @@
                   </a:txBody>
                   <a:tcPr anchor="ctr" marL="100584" marR="100584" marT="36576" marB="36576">
                     <a:solidFill>
-                      <a:srgbClr val="FFFFFF"/>
+                      <a:srgbClr val="0E1929"/>
                     </a:solidFill>
                   </a:tcPr>
                 </a:tc>
@@ -13068,7 +12907,7 @@
                       <a:r>
                         <a:rPr sz="1350" b="0" i="0">
                           <a:solidFill>
-                            <a:srgbClr val="334155"/>
+                            <a:srgbClr val="C5D2E4"/>
                           </a:solidFill>
                           <a:latin typeface="Calibri"/>
                         </a:rPr>
@@ -13078,7 +12917,7 @@
                   </a:txBody>
                   <a:tcPr anchor="ctr" marL="100584" marR="100584" marT="36576" marB="36576">
                     <a:solidFill>
-                      <a:srgbClr val="FFFFFF"/>
+                      <a:srgbClr val="0E1929"/>
                     </a:solidFill>
                   </a:tcPr>
                 </a:tc>
@@ -13093,7 +12932,7 @@
                       <a:r>
                         <a:rPr sz="1350" b="0" i="0">
                           <a:solidFill>
-                            <a:srgbClr val="334155"/>
+                            <a:srgbClr val="C5D2E4"/>
                           </a:solidFill>
                           <a:latin typeface="Calibri"/>
                         </a:rPr>
@@ -13103,7 +12942,7 @@
                   </a:txBody>
                   <a:tcPr anchor="ctr" marL="100584" marR="100584" marT="36576" marB="36576">
                     <a:solidFill>
-                      <a:srgbClr val="F8FAFC"/>
+                      <a:srgbClr val="121E30"/>
                     </a:solidFill>
                   </a:tcPr>
                 </a:tc>
@@ -13116,7 +12955,7 @@
                       <a:r>
                         <a:rPr sz="1350" b="0" i="0">
                           <a:solidFill>
-                            <a:srgbClr val="334155"/>
+                            <a:srgbClr val="C5D2E4"/>
                           </a:solidFill>
                           <a:latin typeface="Calibri"/>
                         </a:rPr>
@@ -13126,7 +12965,7 @@
                   </a:txBody>
                   <a:tcPr anchor="ctr" marL="100584" marR="100584" marT="36576" marB="36576">
                     <a:solidFill>
-                      <a:srgbClr val="F8FAFC"/>
+                      <a:srgbClr val="121E30"/>
                     </a:solidFill>
                   </a:tcPr>
                 </a:tc>
@@ -13139,7 +12978,7 @@
                       <a:r>
                         <a:rPr sz="1350" b="0" i="0">
                           <a:solidFill>
-                            <a:srgbClr val="334155"/>
+                            <a:srgbClr val="C5D2E4"/>
                           </a:solidFill>
                           <a:latin typeface="Calibri"/>
                         </a:rPr>
@@ -13149,7 +12988,7 @@
                   </a:txBody>
                   <a:tcPr anchor="ctr" marL="100584" marR="100584" marT="36576" marB="36576">
                     <a:solidFill>
-                      <a:srgbClr val="F8FAFC"/>
+                      <a:srgbClr val="121E30"/>
                     </a:solidFill>
                   </a:tcPr>
                 </a:tc>
@@ -13162,7 +13001,7 @@
                       <a:r>
                         <a:rPr sz="1350" b="0" i="0">
                           <a:solidFill>
-                            <a:srgbClr val="334155"/>
+                            <a:srgbClr val="C5D2E4"/>
                           </a:solidFill>
                           <a:latin typeface="Calibri"/>
                         </a:rPr>
@@ -13172,7 +13011,7 @@
                   </a:txBody>
                   <a:tcPr anchor="ctr" marL="100584" marR="100584" marT="36576" marB="36576">
                     <a:solidFill>
-                      <a:srgbClr val="F8FAFC"/>
+                      <a:srgbClr val="121E30"/>
                     </a:solidFill>
                   </a:tcPr>
                 </a:tc>
@@ -13185,7 +13024,7 @@
                       <a:r>
                         <a:rPr sz="1350" b="0" i="0">
                           <a:solidFill>
-                            <a:srgbClr val="334155"/>
+                            <a:srgbClr val="C5D2E4"/>
                           </a:solidFill>
                           <a:latin typeface="Calibri"/>
                         </a:rPr>
@@ -13195,7 +13034,7 @@
                   </a:txBody>
                   <a:tcPr anchor="ctr" marL="100584" marR="100584" marT="36576" marB="36576">
                     <a:solidFill>
-                      <a:srgbClr val="F8FAFC"/>
+                      <a:srgbClr val="121E30"/>
                     </a:solidFill>
                   </a:tcPr>
                 </a:tc>
@@ -13210,7 +13049,7 @@
                       <a:r>
                         <a:rPr sz="1350" b="0" i="0">
                           <a:solidFill>
-                            <a:srgbClr val="334155"/>
+                            <a:srgbClr val="C5D2E4"/>
                           </a:solidFill>
                           <a:latin typeface="Calibri"/>
                         </a:rPr>
@@ -13220,7 +13059,7 @@
                   </a:txBody>
                   <a:tcPr anchor="ctr" marL="100584" marR="100584" marT="36576" marB="36576">
                     <a:solidFill>
-                      <a:srgbClr val="FFFFFF"/>
+                      <a:srgbClr val="0E1929"/>
                     </a:solidFill>
                   </a:tcPr>
                 </a:tc>
@@ -13233,7 +13072,7 @@
                       <a:r>
                         <a:rPr sz="1350" b="0" i="0">
                           <a:solidFill>
-                            <a:srgbClr val="334155"/>
+                            <a:srgbClr val="C5D2E4"/>
                           </a:solidFill>
                           <a:latin typeface="Calibri"/>
                         </a:rPr>
@@ -13243,7 +13082,7 @@
                   </a:txBody>
                   <a:tcPr anchor="ctr" marL="100584" marR="100584" marT="36576" marB="36576">
                     <a:solidFill>
-                      <a:srgbClr val="FFFFFF"/>
+                      <a:srgbClr val="0E1929"/>
                     </a:solidFill>
                   </a:tcPr>
                 </a:tc>
@@ -13256,7 +13095,7 @@
                       <a:r>
                         <a:rPr sz="1350" b="0" i="0">
                           <a:solidFill>
-                            <a:srgbClr val="334155"/>
+                            <a:srgbClr val="C5D2E4"/>
                           </a:solidFill>
                           <a:latin typeface="Calibri"/>
                         </a:rPr>
@@ -13266,7 +13105,7 @@
                   </a:txBody>
                   <a:tcPr anchor="ctr" marL="100584" marR="100584" marT="36576" marB="36576">
                     <a:solidFill>
-                      <a:srgbClr val="FFFFFF"/>
+                      <a:srgbClr val="0E1929"/>
                     </a:solidFill>
                   </a:tcPr>
                 </a:tc>
@@ -13279,7 +13118,7 @@
                       <a:r>
                         <a:rPr sz="1350" b="0" i="0">
                           <a:solidFill>
-                            <a:srgbClr val="334155"/>
+                            <a:srgbClr val="C5D2E4"/>
                           </a:solidFill>
                           <a:latin typeface="Calibri"/>
                         </a:rPr>
@@ -13289,7 +13128,7 @@
                   </a:txBody>
                   <a:tcPr anchor="ctr" marL="100584" marR="100584" marT="36576" marB="36576">
                     <a:solidFill>
-                      <a:srgbClr val="FFFFFF"/>
+                      <a:srgbClr val="0E1929"/>
                     </a:solidFill>
                   </a:tcPr>
                 </a:tc>
@@ -13302,7 +13141,7 @@
                       <a:r>
                         <a:rPr sz="1350" b="0" i="0">
                           <a:solidFill>
-                            <a:srgbClr val="334155"/>
+                            <a:srgbClr val="C5D2E4"/>
                           </a:solidFill>
                           <a:latin typeface="Calibri"/>
                         </a:rPr>
@@ -13312,7 +13151,7 @@
                   </a:txBody>
                   <a:tcPr anchor="ctr" marL="100584" marR="100584" marT="36576" marB="36576">
                     <a:solidFill>
-                      <a:srgbClr val="FFFFFF"/>
+                      <a:srgbClr val="0E1929"/>
                     </a:solidFill>
                   </a:tcPr>
                 </a:tc>
@@ -13327,7 +13166,7 @@
                       <a:r>
                         <a:rPr sz="1350" b="0" i="0">
                           <a:solidFill>
-                            <a:srgbClr val="334155"/>
+                            <a:srgbClr val="C5D2E4"/>
                           </a:solidFill>
                           <a:latin typeface="Calibri"/>
                         </a:rPr>
@@ -13337,7 +13176,7 @@
                   </a:txBody>
                   <a:tcPr anchor="ctr" marL="100584" marR="100584" marT="36576" marB="36576">
                     <a:solidFill>
-                      <a:srgbClr val="F8FAFC"/>
+                      <a:srgbClr val="121E30"/>
                     </a:solidFill>
                   </a:tcPr>
                 </a:tc>
@@ -13350,7 +13189,7 @@
                       <a:r>
                         <a:rPr sz="1350" b="0" i="0">
                           <a:solidFill>
-                            <a:srgbClr val="334155"/>
+                            <a:srgbClr val="C5D2E4"/>
                           </a:solidFill>
                           <a:latin typeface="Calibri"/>
                         </a:rPr>
@@ -13360,7 +13199,7 @@
                   </a:txBody>
                   <a:tcPr anchor="ctr" marL="100584" marR="100584" marT="36576" marB="36576">
                     <a:solidFill>
-                      <a:srgbClr val="F8FAFC"/>
+                      <a:srgbClr val="121E30"/>
                     </a:solidFill>
                   </a:tcPr>
                 </a:tc>
@@ -13373,7 +13212,7 @@
                       <a:r>
                         <a:rPr sz="1350" b="0" i="0">
                           <a:solidFill>
-                            <a:srgbClr val="334155"/>
+                            <a:srgbClr val="C5D2E4"/>
                           </a:solidFill>
                           <a:latin typeface="Calibri"/>
                         </a:rPr>
@@ -13383,7 +13222,7 @@
                   </a:txBody>
                   <a:tcPr anchor="ctr" marL="100584" marR="100584" marT="36576" marB="36576">
                     <a:solidFill>
-                      <a:srgbClr val="F8FAFC"/>
+                      <a:srgbClr val="121E30"/>
                     </a:solidFill>
                   </a:tcPr>
                 </a:tc>
@@ -13396,7 +13235,7 @@
                       <a:r>
                         <a:rPr sz="1350" b="0" i="0">
                           <a:solidFill>
-                            <a:srgbClr val="334155"/>
+                            <a:srgbClr val="C5D2E4"/>
                           </a:solidFill>
                           <a:latin typeface="Calibri"/>
                         </a:rPr>
@@ -13406,7 +13245,7 @@
                   </a:txBody>
                   <a:tcPr anchor="ctr" marL="100584" marR="100584" marT="36576" marB="36576">
                     <a:solidFill>
-                      <a:srgbClr val="F8FAFC"/>
+                      <a:srgbClr val="121E30"/>
                     </a:solidFill>
                   </a:tcPr>
                 </a:tc>
@@ -13419,7 +13258,7 @@
                       <a:r>
                         <a:rPr sz="1350" b="0" i="0">
                           <a:solidFill>
-                            <a:srgbClr val="334155"/>
+                            <a:srgbClr val="C5D2E4"/>
                           </a:solidFill>
                           <a:latin typeface="Calibri"/>
                         </a:rPr>
@@ -13429,7 +13268,7 @@
                   </a:txBody>
                   <a:tcPr anchor="ctr" marL="100584" marR="100584" marT="36576" marB="36576">
                     <a:solidFill>
-                      <a:srgbClr val="F8FAFC"/>
+                      <a:srgbClr val="121E30"/>
                     </a:solidFill>
                   </a:tcPr>
                 </a:tc>
@@ -13468,7 +13307,7 @@
                 <a:spcPts val="1400"/>
               </a:spcAft>
               <a:buClr>
-                <a:srgbClr val="0D9488"/>
+                <a:srgbClr val="2DD4BF"/>
               </a:buClr>
               <a:buFont typeface="Arial"/>
               <a:buChar char="•"/>
@@ -13476,7 +13315,7 @@
             <a:r>
               <a:rPr sz="1600" b="0" i="0">
                 <a:solidFill>
-                  <a:srgbClr val="334155"/>
+                  <a:srgbClr val="C5D2E4"/>
                 </a:solidFill>
                 <a:latin typeface="Calibri"/>
               </a:rPr>
@@ -13492,7 +13331,7 @@
                 <a:spcPts val="1400"/>
               </a:spcAft>
               <a:buClr>
-                <a:srgbClr val="0D9488"/>
+                <a:srgbClr val="2DD4BF"/>
               </a:buClr>
               <a:buFont typeface="Arial"/>
               <a:buChar char="•"/>
@@ -13500,7 +13339,7 @@
             <a:r>
               <a:rPr sz="1600" b="0" i="0">
                 <a:solidFill>
-                  <a:srgbClr val="334155"/>
+                  <a:srgbClr val="C5D2E4"/>
                 </a:solidFill>
                 <a:latin typeface="Calibri"/>
               </a:rPr>
@@ -13516,7 +13355,7 @@
                 <a:spcPts val="1400"/>
               </a:spcAft>
               <a:buClr>
-                <a:srgbClr val="0D9488"/>
+                <a:srgbClr val="2DD4BF"/>
               </a:buClr>
               <a:buFont typeface="Arial"/>
               <a:buChar char="•"/>
@@ -13524,7 +13363,7 @@
             <a:r>
               <a:rPr sz="1600" b="0" i="0">
                 <a:solidFill>
-                  <a:srgbClr val="334155"/>
+                  <a:srgbClr val="C5D2E4"/>
                 </a:solidFill>
                 <a:latin typeface="Calibri"/>
               </a:rPr>
@@ -13547,7 +13386,7 @@
     <p:bg>
       <p:bgPr>
         <a:solidFill>
-          <a:srgbClr val="FAFAF9"/>
+          <a:srgbClr val="0B1220"/>
         </a:solidFill>
         <a:effectLst/>
       </p:bgPr>
@@ -13584,7 +13423,7 @@
             <a:r>
               <a:rPr sz="1050" b="1" i="0" spc="120">
                 <a:solidFill>
-                  <a:srgbClr val="0D9488"/>
+                  <a:srgbClr val="2DD4BF"/>
                 </a:solidFill>
                 <a:latin typeface="Calibri"/>
               </a:rPr>
@@ -13623,7 +13462,7 @@
             <a:r>
               <a:rPr sz="2900" b="1" i="0">
                 <a:solidFill>
-                  <a:srgbClr val="0F172A"/>
+                  <a:srgbClr val="F2F6FB"/>
                 </a:solidFill>
                 <a:latin typeface="Calibri Light"/>
               </a:rPr>
@@ -13647,7 +13486,7 @@
             <a:avLst/>
           </a:prstGeom>
           <a:solidFill>
-            <a:srgbClr val="0D9488"/>
+            <a:srgbClr val="2DD4BF"/>
           </a:solidFill>
           <a:ln>
             <a:noFill/>
@@ -13702,7 +13541,7 @@
             <a:r>
               <a:rPr sz="1100" b="0" i="0">
                 <a:solidFill>
-                  <a:srgbClr val="94A3B8"/>
+                  <a:srgbClr val="55688A"/>
                 </a:solidFill>
                 <a:latin typeface="Calibri"/>
               </a:rPr>
@@ -13741,7 +13580,7 @@
                 <a:spcPts val="2000"/>
               </a:spcAft>
               <a:buClr>
-                <a:srgbClr val="0D9488"/>
+                <a:srgbClr val="2DD4BF"/>
               </a:buClr>
               <a:buFont typeface="Arial"/>
               <a:buChar char="•"/>
@@ -13749,7 +13588,7 @@
             <a:r>
               <a:rPr sz="1700" b="1" i="0">
                 <a:solidFill>
-                  <a:srgbClr val="0F172A"/>
+                  <a:srgbClr val="F2F6FB"/>
                 </a:solidFill>
                 <a:latin typeface="Calibri"/>
               </a:rPr>
@@ -13758,7 +13597,7 @@
             <a:r>
               <a:rPr sz="1700" b="0" i="0">
                 <a:solidFill>
-                  <a:srgbClr val="334155"/>
+                  <a:srgbClr val="C5D2E4"/>
                 </a:solidFill>
                 <a:latin typeface="Calibri"/>
               </a:rPr>
@@ -13774,7 +13613,7 @@
                 <a:spcPts val="2000"/>
               </a:spcAft>
               <a:buClr>
-                <a:srgbClr val="0D9488"/>
+                <a:srgbClr val="2DD4BF"/>
               </a:buClr>
               <a:buFont typeface="Arial"/>
               <a:buChar char="•"/>
@@ -13782,7 +13621,7 @@
             <a:r>
               <a:rPr sz="1700" b="0" i="0">
                 <a:solidFill>
-                  <a:srgbClr val="334155"/>
+                  <a:srgbClr val="C5D2E4"/>
                 </a:solidFill>
                 <a:latin typeface="Calibri"/>
               </a:rPr>
@@ -13791,7 +13630,7 @@
             <a:r>
               <a:rPr sz="1700" b="0" i="1">
                 <a:solidFill>
-                  <a:srgbClr val="EF4444"/>
+                  <a:srgbClr val="F87171"/>
                 </a:solidFill>
                 <a:latin typeface="Calibri"/>
               </a:rPr>
@@ -13800,7 +13639,7 @@
             <a:r>
               <a:rPr sz="1700" b="0" i="0">
                 <a:solidFill>
-                  <a:srgbClr val="334155"/>
+                  <a:srgbClr val="C5D2E4"/>
                 </a:solidFill>
                 <a:latin typeface="Calibri"/>
               </a:rPr>
@@ -13809,7 +13648,7 @@
             <a:r>
               <a:rPr sz="1700" b="0" i="1">
                 <a:solidFill>
-                  <a:srgbClr val="EF4444"/>
+                  <a:srgbClr val="F87171"/>
                 </a:solidFill>
                 <a:latin typeface="Calibri"/>
               </a:rPr>
@@ -13818,7 +13657,7 @@
             <a:r>
               <a:rPr sz="1700" b="0" i="0">
                 <a:solidFill>
-                  <a:srgbClr val="334155"/>
+                  <a:srgbClr val="C5D2E4"/>
                 </a:solidFill>
                 <a:latin typeface="Calibri"/>
               </a:rPr>
@@ -13827,7 +13666,7 @@
             <a:r>
               <a:rPr sz="1700" b="0" i="1">
                 <a:solidFill>
-                  <a:srgbClr val="64748B"/>
+                  <a:srgbClr val="93A6C0"/>
                 </a:solidFill>
                 <a:latin typeface="Calibri"/>
               </a:rPr>
@@ -13836,7 +13675,7 @@
             <a:r>
               <a:rPr sz="1700" b="0" i="0">
                 <a:solidFill>
-                  <a:srgbClr val="334155"/>
+                  <a:srgbClr val="C5D2E4"/>
                 </a:solidFill>
                 <a:latin typeface="Calibri"/>
               </a:rPr>
@@ -13845,7 +13684,7 @@
             <a:r>
               <a:rPr sz="1700" b="0" i="1">
                 <a:solidFill>
-                  <a:srgbClr val="64748B"/>
+                  <a:srgbClr val="93A6C0"/>
                 </a:solidFill>
                 <a:latin typeface="Calibri"/>
               </a:rPr>
@@ -13854,7 +13693,7 @@
             <a:r>
               <a:rPr sz="1700" b="0" i="0">
                 <a:solidFill>
-                  <a:srgbClr val="334155"/>
+                  <a:srgbClr val="C5D2E4"/>
                 </a:solidFill>
                 <a:latin typeface="Calibri"/>
               </a:rPr>
@@ -13870,7 +13709,7 @@
                 <a:spcPts val="2000"/>
               </a:spcAft>
               <a:buClr>
-                <a:srgbClr val="0D9488"/>
+                <a:srgbClr val="2DD4BF"/>
               </a:buClr>
               <a:buFont typeface="Arial"/>
               <a:buChar char="•"/>
@@ -13878,7 +13717,7 @@
             <a:r>
               <a:rPr sz="1700" b="1" i="0">
                 <a:solidFill>
-                  <a:srgbClr val="0F172A"/>
+                  <a:srgbClr val="F2F6FB"/>
                 </a:solidFill>
                 <a:latin typeface="Calibri"/>
               </a:rPr>
@@ -13887,7 +13726,7 @@
             <a:r>
               <a:rPr sz="1700" b="0" i="0">
                 <a:solidFill>
-                  <a:srgbClr val="334155"/>
+                  <a:srgbClr val="C5D2E4"/>
                 </a:solidFill>
                 <a:latin typeface="Calibri"/>
               </a:rPr>
@@ -13903,7 +13742,7 @@
                 <a:spcPts val="2000"/>
               </a:spcAft>
               <a:buClr>
-                <a:srgbClr val="0D9488"/>
+                <a:srgbClr val="2DD4BF"/>
               </a:buClr>
               <a:buFont typeface="Arial"/>
               <a:buChar char="•"/>
@@ -13911,7 +13750,7 @@
             <a:r>
               <a:rPr sz="1700" b="0" i="0">
                 <a:solidFill>
-                  <a:srgbClr val="334155"/>
+                  <a:srgbClr val="C5D2E4"/>
                 </a:solidFill>
                 <a:latin typeface="Calibri"/>
               </a:rPr>
@@ -13934,7 +13773,7 @@
     <p:bg>
       <p:bgPr>
         <a:solidFill>
-          <a:srgbClr val="FAFAF9"/>
+          <a:srgbClr val="0B1220"/>
         </a:solidFill>
         <a:effectLst/>
       </p:bgPr>
@@ -13946,6 +13785,91 @@
         <p:nvPr/>
       </p:nvGrpSpPr>
       <p:grpSpPr/>
+      <p:pic>
+        <p:nvPicPr>
+          <p:cNvPr id="2" name="Picture 1" descr="evaluation_dark.png"/>
+          <p:cNvPicPr>
+            <a:picLocks noChangeAspect="1"/>
+          </p:cNvPicPr>
+          <p:nvPr/>
+        </p:nvPicPr>
+        <p:blipFill>
+          <a:blip r:embed="rId2"/>
+          <a:stretch>
+            <a:fillRect/>
+          </a:stretch>
+        </p:blipFill>
+        <p:spPr>
+          <a:xfrm>
+            <a:off x="0" y="0"/>
+            <a:ext cx="12191695" cy="6858000"/>
+          </a:xfrm>
+          <a:prstGeom prst="rect">
+            <a:avLst/>
+          </a:prstGeom>
+        </p:spPr>
+      </p:pic>
+      <p:sp>
+        <p:nvSpPr>
+          <p:cNvPr id="3" name="TextBox 2"/>
+          <p:cNvSpPr txBox="1"/>
+          <p:nvPr/>
+        </p:nvSpPr>
+        <p:spPr>
+          <a:xfrm>
+            <a:off x="10545775" y="6291072"/>
+            <a:ext cx="914400" cy="274320"/>
+          </a:xfrm>
+          <a:prstGeom prst="rect">
+            <a:avLst/>
+          </a:prstGeom>
+          <a:noFill/>
+        </p:spPr>
+        <p:txBody>
+          <a:bodyPr wrap="square" lIns="0" rIns="0" tIns="0" bIns="0">
+            <a:spAutoFit/>
+          </a:bodyPr>
+          <a:lstStyle/>
+          <a:p>
+            <a:pPr algn="r"/>
+            <a:r>
+              <a:rPr sz="1100" b="0" i="0">
+                <a:solidFill>
+                  <a:srgbClr val="55688A"/>
+                </a:solidFill>
+                <a:latin typeface="Calibri"/>
+              </a:rPr>
+              <a:t>8</a:t>
+            </a:r>
+          </a:p>
+        </p:txBody>
+      </p:sp>
+    </p:spTree>
+  </p:cSld>
+  <p:clrMapOvr>
+    <a:masterClrMapping/>
+  </p:clrMapOvr>
+</p:sld>
+</file>
+
+<file path=ppt/slides/slide9.xml><?xml version="1.0" encoding="utf-8"?>
+<p:sld xmlns:a="http://schemas.openxmlformats.org/drawingml/2006/main" xmlns:p="http://schemas.openxmlformats.org/presentationml/2006/main" xmlns:r="http://schemas.openxmlformats.org/officeDocument/2006/relationships">
+  <p:cSld>
+    <p:bg>
+      <p:bgPr>
+        <a:solidFill>
+          <a:srgbClr val="0B1220"/>
+        </a:solidFill>
+        <a:effectLst/>
+      </p:bgPr>
+    </p:bg>
+    <p:spTree>
+      <p:nvGrpSpPr>
+        <p:cNvPr id="1" name=""/>
+        <p:cNvGrpSpPr/>
+        <p:nvPr/>
+      </p:nvGrpSpPr>
+      <p:grpSpPr/>
       <p:sp>
         <p:nvSpPr>
           <p:cNvPr id="2" name="TextBox 1"/>
@@ -13971,11 +13895,11 @@
             <a:r>
               <a:rPr sz="1050" b="1" i="0" spc="120">
                 <a:solidFill>
-                  <a:srgbClr val="0D9488"/>
+                  <a:srgbClr val="2DD4BF"/>
                 </a:solidFill>
                 <a:latin typeface="Calibri"/>
               </a:rPr>
-              <a:t>BƯỚC 5 · ĐÁNH GIÁ</a:t>
+              <a:t>BƯỚC 4 · MÔ HÌNH</a:t>
             </a:r>
           </a:p>
         </p:txBody>
@@ -14008,13 +13932,13 @@
               </a:lnSpc>
             </a:pPr>
             <a:r>
-              <a:rPr sz="2800" b="1" i="0">
-                <a:solidFill>
-                  <a:srgbClr val="0F172A"/>
+              <a:rPr sz="2900" b="1" i="0">
+                <a:solidFill>
+                  <a:srgbClr val="F2F6FB"/>
                 </a:solidFill>
                 <a:latin typeface="Calibri Light"/>
               </a:rPr>
-              <a:t>Chọn trên tập huấn luyện, chấm một lần trên tập kiểm tra</a:t>
+              <a:t>Bốn mô hình nền, dò C, chỉ trên tập huấn luyện</a:t>
             </a:r>
           </a:p>
         </p:txBody>
@@ -14034,7 +13958,7 @@
             <a:avLst/>
           </a:prstGeom>
           <a:solidFill>
-            <a:srgbClr val="0D9488"/>
+            <a:srgbClr val="2DD4BF"/>
           </a:solidFill>
           <a:ln>
             <a:noFill/>
@@ -14089,209 +14013,7 @@
             <a:r>
               <a:rPr sz="1100" b="0" i="0">
                 <a:solidFill>
-                  <a:srgbClr val="94A3B8"/>
-                </a:solidFill>
-                <a:latin typeface="Calibri"/>
-              </a:rPr>
-              <a:t>8</a:t>
-            </a:r>
-          </a:p>
-        </p:txBody>
-      </p:sp>
-      <p:pic>
-        <p:nvPicPr>
-          <p:cNvPr id="6" name="Picture 5" descr="evaluation.png"/>
-          <p:cNvPicPr>
-            <a:picLocks noChangeAspect="1"/>
-          </p:cNvPicPr>
-          <p:nvPr/>
-        </p:nvPicPr>
-        <p:blipFill>
-          <a:blip r:embed="rId2"/>
-          <a:stretch>
-            <a:fillRect/>
-          </a:stretch>
-        </p:blipFill>
-        <p:spPr>
-          <a:xfrm>
-            <a:off x="2231136" y="1783080"/>
-            <a:ext cx="7721600" cy="4343400"/>
-          </a:xfrm>
-          <a:prstGeom prst="rect">
-            <a:avLst/>
-          </a:prstGeom>
-        </p:spPr>
-      </p:pic>
-    </p:spTree>
-  </p:cSld>
-  <p:clrMapOvr>
-    <a:masterClrMapping/>
-  </p:clrMapOvr>
-</p:sld>
-</file>
-
-<file path=ppt/slides/slide9.xml><?xml version="1.0" encoding="utf-8"?>
-<p:sld xmlns:a="http://schemas.openxmlformats.org/drawingml/2006/main" xmlns:p="http://schemas.openxmlformats.org/presentationml/2006/main" xmlns:r="http://schemas.openxmlformats.org/officeDocument/2006/relationships">
-  <p:cSld>
-    <p:bg>
-      <p:bgPr>
-        <a:solidFill>
-          <a:srgbClr val="FAFAF9"/>
-        </a:solidFill>
-        <a:effectLst/>
-      </p:bgPr>
-    </p:bg>
-    <p:spTree>
-      <p:nvGrpSpPr>
-        <p:cNvPr id="1" name=""/>
-        <p:cNvGrpSpPr/>
-        <p:nvPr/>
-      </p:nvGrpSpPr>
-      <p:grpSpPr/>
-      <p:sp>
-        <p:nvSpPr>
-          <p:cNvPr id="2" name="TextBox 1"/>
-          <p:cNvSpPr txBox="1"/>
-          <p:nvPr/>
-        </p:nvSpPr>
-        <p:spPr>
-          <a:xfrm>
-            <a:off x="731520" y="329184"/>
-            <a:ext cx="10728655" cy="237744"/>
-          </a:xfrm>
-          <a:prstGeom prst="rect">
-            <a:avLst/>
-          </a:prstGeom>
-          <a:noFill/>
-        </p:spPr>
-        <p:txBody>
-          <a:bodyPr wrap="square" lIns="0" rIns="0" tIns="0" bIns="0">
-            <a:spAutoFit/>
-          </a:bodyPr>
-          <a:lstStyle/>
-          <a:p>
-            <a:r>
-              <a:rPr sz="1050" b="1" i="0" spc="120">
-                <a:solidFill>
-                  <a:srgbClr val="0D9488"/>
-                </a:solidFill>
-                <a:latin typeface="Calibri"/>
-              </a:rPr>
-              <a:t>BƯỚC 4 · MÔ HÌNH</a:t>
-            </a:r>
-          </a:p>
-        </p:txBody>
-      </p:sp>
-      <p:sp>
-        <p:nvSpPr>
-          <p:cNvPr id="3" name="TextBox 2"/>
-          <p:cNvSpPr txBox="1"/>
-          <p:nvPr/>
-        </p:nvSpPr>
-        <p:spPr>
-          <a:xfrm>
-            <a:off x="731520" y="603504"/>
-            <a:ext cx="10728655" cy="868680"/>
-          </a:xfrm>
-          <a:prstGeom prst="rect">
-            <a:avLst/>
-          </a:prstGeom>
-          <a:noFill/>
-        </p:spPr>
-        <p:txBody>
-          <a:bodyPr wrap="square" lIns="0" rIns="0" tIns="0" bIns="0">
-            <a:spAutoFit/>
-          </a:bodyPr>
-          <a:lstStyle/>
-          <a:p>
-            <a:pPr>
-              <a:lnSpc>
-                <a:spcPct val="95000"/>
-              </a:lnSpc>
-            </a:pPr>
-            <a:r>
-              <a:rPr sz="2900" b="1" i="0">
-                <a:solidFill>
-                  <a:srgbClr val="0F172A"/>
-                </a:solidFill>
-                <a:latin typeface="Calibri Light"/>
-              </a:rPr>
-              <a:t>Bốn mô hình nền, dò C, chỉ trên tập huấn luyện</a:t>
-            </a:r>
-          </a:p>
-        </p:txBody>
-      </p:sp>
-      <p:sp>
-        <p:nvSpPr>
-          <p:cNvPr id="4" name="Rectangle 3"/>
-          <p:cNvSpPr/>
-          <p:nvPr/>
-        </p:nvSpPr>
-        <p:spPr>
-          <a:xfrm>
-            <a:off x="731520" y="1463040"/>
-            <a:ext cx="777240" cy="47548"/>
-          </a:xfrm>
-          <a:prstGeom prst="rect">
-            <a:avLst/>
-          </a:prstGeom>
-          <a:solidFill>
-            <a:srgbClr val="0D9488"/>
-          </a:solidFill>
-          <a:ln>
-            <a:noFill/>
-          </a:ln>
-          <a:effectLst/>
-        </p:spPr>
-        <p:style>
-          <a:lnRef idx="1">
-            <a:schemeClr val="accent1"/>
-          </a:lnRef>
-          <a:fillRef idx="3">
-            <a:schemeClr val="accent1"/>
-          </a:fillRef>
-          <a:effectRef idx="2">
-            <a:schemeClr val="accent1"/>
-          </a:effectRef>
-          <a:fontRef idx="minor">
-            <a:schemeClr val="lt1"/>
-          </a:fontRef>
-        </p:style>
-        <p:txBody>
-          <a:bodyPr rtlCol="0" anchor="ctr"/>
-          <a:lstStyle/>
-          <a:p>
-            <a:pPr algn="ctr"/>
-          </a:p>
-        </p:txBody>
-      </p:sp>
-      <p:sp>
-        <p:nvSpPr>
-          <p:cNvPr id="5" name="TextBox 4"/>
-          <p:cNvSpPr txBox="1"/>
-          <p:nvPr/>
-        </p:nvSpPr>
-        <p:spPr>
-          <a:xfrm>
-            <a:off x="10545775" y="6291072"/>
-            <a:ext cx="914400" cy="274320"/>
-          </a:xfrm>
-          <a:prstGeom prst="rect">
-            <a:avLst/>
-          </a:prstGeom>
-          <a:noFill/>
-        </p:spPr>
-        <p:txBody>
-          <a:bodyPr wrap="square" lIns="0" rIns="0" tIns="0" bIns="0">
-            <a:spAutoFit/>
-          </a:bodyPr>
-          <a:lstStyle/>
-          <a:p>
-            <a:pPr algn="r"/>
-            <a:r>
-              <a:rPr sz="1100" b="0" i="0">
-                <a:solidFill>
-                  <a:srgbClr val="94A3B8"/>
+                  <a:srgbClr val="55688A"/>
                 </a:solidFill>
                 <a:latin typeface="Calibri"/>
               </a:rPr>
@@ -14333,7 +14055,7 @@
                       <a:r>
                         <a:rPr sz="1350" b="1" i="0">
                           <a:solidFill>
-                            <a:srgbClr val="0F766E"/>
+                            <a:srgbClr val="5EEAD4"/>
                           </a:solidFill>
                           <a:latin typeface="Calibri"/>
                         </a:rPr>
@@ -14343,7 +14065,7 @@
                   </a:txBody>
                   <a:tcPr anchor="ctr" marL="100584" marR="100584" marT="36576" marB="36576">
                     <a:solidFill>
-                      <a:srgbClr val="F0FDFA"/>
+                      <a:srgbClr val="12303A"/>
                     </a:solidFill>
                   </a:tcPr>
                 </a:tc>
@@ -14356,7 +14078,7 @@
                       <a:r>
                         <a:rPr sz="1350" b="1" i="0">
                           <a:solidFill>
-                            <a:srgbClr val="0F766E"/>
+                            <a:srgbClr val="5EEAD4"/>
                           </a:solidFill>
                           <a:latin typeface="Calibri"/>
                         </a:rPr>
@@ -14366,7 +14088,7 @@
                   </a:txBody>
                   <a:tcPr anchor="ctr" marL="100584" marR="100584" marT="36576" marB="36576">
                     <a:solidFill>
-                      <a:srgbClr val="F0FDFA"/>
+                      <a:srgbClr val="12303A"/>
                     </a:solidFill>
                   </a:tcPr>
                 </a:tc>
@@ -14379,7 +14101,7 @@
                       <a:r>
                         <a:rPr sz="1350" b="1" i="0">
                           <a:solidFill>
-                            <a:srgbClr val="0F766E"/>
+                            <a:srgbClr val="5EEAD4"/>
                           </a:solidFill>
                           <a:latin typeface="Calibri"/>
                         </a:rPr>
@@ -14389,7 +14111,7 @@
                   </a:txBody>
                   <a:tcPr anchor="ctr" marL="100584" marR="100584" marT="36576" marB="36576">
                     <a:solidFill>
-                      <a:srgbClr val="F0FDFA"/>
+                      <a:srgbClr val="12303A"/>
                     </a:solidFill>
                   </a:tcPr>
                 </a:tc>
@@ -14404,7 +14126,7 @@
                       <a:r>
                         <a:rPr sz="1350" b="0" i="0">
                           <a:solidFill>
-                            <a:srgbClr val="334155"/>
+                            <a:srgbClr val="C5D2E4"/>
                           </a:solidFill>
                           <a:latin typeface="Calibri"/>
                         </a:rPr>
@@ -14414,7 +14136,7 @@
                   </a:txBody>
                   <a:tcPr anchor="ctr" marL="100584" marR="100584" marT="36576" marB="36576">
                     <a:solidFill>
-                      <a:srgbClr val="FFFFFF"/>
+                      <a:srgbClr val="0E1929"/>
                     </a:solidFill>
                   </a:tcPr>
                 </a:tc>
@@ -14427,7 +14149,7 @@
                       <a:r>
                         <a:rPr sz="1350" b="0" i="0">
                           <a:solidFill>
-                            <a:srgbClr val="334155"/>
+                            <a:srgbClr val="C5D2E4"/>
                           </a:solidFill>
                           <a:latin typeface="Calibri"/>
                         </a:rPr>
@@ -14437,7 +14159,7 @@
                   </a:txBody>
                   <a:tcPr anchor="ctr" marL="100584" marR="100584" marT="36576" marB="36576">
                     <a:solidFill>
-                      <a:srgbClr val="FFFFFF"/>
+                      <a:srgbClr val="0E1929"/>
                     </a:solidFill>
                   </a:tcPr>
                 </a:tc>
@@ -14450,7 +14172,7 @@
                       <a:r>
                         <a:rPr sz="1350" b="0" i="0">
                           <a:solidFill>
-                            <a:srgbClr val="334155"/>
+                            <a:srgbClr val="C5D2E4"/>
                           </a:solidFill>
                           <a:latin typeface="Calibri"/>
                         </a:rPr>
@@ -14460,7 +14182,7 @@
                   </a:txBody>
                   <a:tcPr anchor="ctr" marL="100584" marR="100584" marT="36576" marB="36576">
                     <a:solidFill>
-                      <a:srgbClr val="FFFFFF"/>
+                      <a:srgbClr val="0E1929"/>
                     </a:solidFill>
                   </a:tcPr>
                 </a:tc>
@@ -14475,7 +14197,7 @@
                       <a:r>
                         <a:rPr sz="1350" b="0" i="0">
                           <a:solidFill>
-                            <a:srgbClr val="334155"/>
+                            <a:srgbClr val="C5D2E4"/>
                           </a:solidFill>
                           <a:latin typeface="Calibri"/>
                         </a:rPr>
@@ -14485,7 +14207,7 @@
                   </a:txBody>
                   <a:tcPr anchor="ctr" marL="100584" marR="100584" marT="36576" marB="36576">
                     <a:solidFill>
-                      <a:srgbClr val="F8FAFC"/>
+                      <a:srgbClr val="121E30"/>
                     </a:solidFill>
                   </a:tcPr>
                 </a:tc>
@@ -14498,7 +14220,7 @@
                       <a:r>
                         <a:rPr sz="1350" b="0" i="0">
                           <a:solidFill>
-                            <a:srgbClr val="334155"/>
+                            <a:srgbClr val="C5D2E4"/>
                           </a:solidFill>
                           <a:latin typeface="Calibri"/>
                         </a:rPr>
@@ -14508,7 +14230,7 @@
                   </a:txBody>
                   <a:tcPr anchor="ctr" marL="100584" marR="100584" marT="36576" marB="36576">
                     <a:solidFill>
-                      <a:srgbClr val="F8FAFC"/>
+                      <a:srgbClr val="121E30"/>
                     </a:solidFill>
                   </a:tcPr>
                 </a:tc>
@@ -14521,7 +14243,7 @@
                       <a:r>
                         <a:rPr sz="1350" b="0" i="0">
                           <a:solidFill>
-                            <a:srgbClr val="334155"/>
+                            <a:srgbClr val="C5D2E4"/>
                           </a:solidFill>
                           <a:latin typeface="Calibri"/>
                         </a:rPr>
@@ -14531,7 +14253,7 @@
                   </a:txBody>
                   <a:tcPr anchor="ctr" marL="100584" marR="100584" marT="36576" marB="36576">
                     <a:solidFill>
-                      <a:srgbClr val="F8FAFC"/>
+                      <a:srgbClr val="121E30"/>
                     </a:solidFill>
                   </a:tcPr>
                 </a:tc>
@@ -14546,7 +14268,7 @@
                       <a:r>
                         <a:rPr sz="1350" b="0" i="0">
                           <a:solidFill>
-                            <a:srgbClr val="334155"/>
+                            <a:srgbClr val="C5D2E4"/>
                           </a:solidFill>
                           <a:latin typeface="Calibri"/>
                         </a:rPr>
@@ -14556,7 +14278,7 @@
                   </a:txBody>
                   <a:tcPr anchor="ctr" marL="100584" marR="100584" marT="36576" marB="36576">
                     <a:solidFill>
-                      <a:srgbClr val="FFFFFF"/>
+                      <a:srgbClr val="0E1929"/>
                     </a:solidFill>
                   </a:tcPr>
                 </a:tc>
@@ -14569,7 +14291,7 @@
                       <a:r>
                         <a:rPr sz="1350" b="0" i="0">
                           <a:solidFill>
-                            <a:srgbClr val="334155"/>
+                            <a:srgbClr val="C5D2E4"/>
                           </a:solidFill>
                           <a:latin typeface="Calibri"/>
                         </a:rPr>
@@ -14579,7 +14301,7 @@
                   </a:txBody>
                   <a:tcPr anchor="ctr" marL="100584" marR="100584" marT="36576" marB="36576">
                     <a:solidFill>
-                      <a:srgbClr val="FFFFFF"/>
+                      <a:srgbClr val="0E1929"/>
                     </a:solidFill>
                   </a:tcPr>
                 </a:tc>
@@ -14592,7 +14314,7 @@
                       <a:r>
                         <a:rPr sz="1350" b="0" i="0">
                           <a:solidFill>
-                            <a:srgbClr val="334155"/>
+                            <a:srgbClr val="C5D2E4"/>
                           </a:solidFill>
                           <a:latin typeface="Calibri"/>
                         </a:rPr>
@@ -14602,7 +14324,7 @@
                   </a:txBody>
                   <a:tcPr anchor="ctr" marL="100584" marR="100584" marT="36576" marB="36576">
                     <a:solidFill>
-                      <a:srgbClr val="FFFFFF"/>
+                      <a:srgbClr val="0E1929"/>
                     </a:solidFill>
                   </a:tcPr>
                 </a:tc>
@@ -14617,7 +14339,7 @@
                       <a:r>
                         <a:rPr sz="1350" b="0" i="0">
                           <a:solidFill>
-                            <a:srgbClr val="334155"/>
+                            <a:srgbClr val="C5D2E4"/>
                           </a:solidFill>
                           <a:latin typeface="Calibri"/>
                         </a:rPr>
@@ -14627,7 +14349,7 @@
                   </a:txBody>
                   <a:tcPr anchor="ctr" marL="100584" marR="100584" marT="36576" marB="36576">
                     <a:solidFill>
-                      <a:srgbClr val="F8FAFC"/>
+                      <a:srgbClr val="121E30"/>
                     </a:solidFill>
                   </a:tcPr>
                 </a:tc>
@@ -14640,7 +14362,7 @@
                       <a:r>
                         <a:rPr sz="1350" b="0" i="0">
                           <a:solidFill>
-                            <a:srgbClr val="334155"/>
+                            <a:srgbClr val="C5D2E4"/>
                           </a:solidFill>
                           <a:latin typeface="Calibri"/>
                         </a:rPr>
@@ -14650,7 +14372,7 @@
                   </a:txBody>
                   <a:tcPr anchor="ctr" marL="100584" marR="100584" marT="36576" marB="36576">
                     <a:solidFill>
-                      <a:srgbClr val="F8FAFC"/>
+                      <a:srgbClr val="121E30"/>
                     </a:solidFill>
                   </a:tcPr>
                 </a:tc>
@@ -14663,7 +14385,7 @@
                       <a:r>
                         <a:rPr sz="1350" b="0" i="0">
                           <a:solidFill>
-                            <a:srgbClr val="334155"/>
+                            <a:srgbClr val="C5D2E4"/>
                           </a:solidFill>
                           <a:latin typeface="Calibri"/>
                         </a:rPr>
@@ -14673,7 +14395,7 @@
                   </a:txBody>
                   <a:tcPr anchor="ctr" marL="100584" marR="100584" marT="36576" marB="36576">
                     <a:solidFill>
-                      <a:srgbClr val="F8FAFC"/>
+                      <a:srgbClr val="121E30"/>
                     </a:solidFill>
                   </a:tcPr>
                 </a:tc>
@@ -14688,7 +14410,7 @@
                       <a:r>
                         <a:rPr sz="1350" b="1" i="0">
                           <a:solidFill>
-                            <a:srgbClr val="0F172A"/>
+                            <a:srgbClr val="F2F6FB"/>
                           </a:solidFill>
                           <a:latin typeface="Calibri"/>
                         </a:rPr>
@@ -14698,7 +14420,7 @@
                   </a:txBody>
                   <a:tcPr anchor="ctr" marL="100584" marR="100584" marT="36576" marB="36576">
                     <a:solidFill>
-                      <a:srgbClr val="F0FDFA"/>
+                      <a:srgbClr val="12303A"/>
                     </a:solidFill>
                   </a:tcPr>
                 </a:tc>
@@ -14711,7 +14433,7 @@
                       <a:r>
                         <a:rPr sz="1350" b="1" i="0">
                           <a:solidFill>
-                            <a:srgbClr val="0F172A"/>
+                            <a:srgbClr val="F2F6FB"/>
                           </a:solidFill>
                           <a:latin typeface="Calibri"/>
                         </a:rPr>
@@ -14721,7 +14443,7 @@
                   </a:txBody>
                   <a:tcPr anchor="ctr" marL="100584" marR="100584" marT="36576" marB="36576">
                     <a:solidFill>
-                      <a:srgbClr val="F0FDFA"/>
+                      <a:srgbClr val="12303A"/>
                     </a:solidFill>
                   </a:tcPr>
                 </a:tc>
@@ -14734,7 +14456,7 @@
                       <a:r>
                         <a:rPr sz="1350" b="1" i="0">
                           <a:solidFill>
-                            <a:srgbClr val="0F172A"/>
+                            <a:srgbClr val="F2F6FB"/>
                           </a:solidFill>
                           <a:latin typeface="Calibri"/>
                         </a:rPr>
@@ -14744,7 +14466,7 @@
                   </a:txBody>
                   <a:tcPr anchor="ctr" marL="100584" marR="100584" marT="36576" marB="36576">
                     <a:solidFill>
-                      <a:srgbClr val="F0FDFA"/>
+                      <a:srgbClr val="12303A"/>
                     </a:solidFill>
                   </a:tcPr>
                 </a:tc>
@@ -14783,7 +14505,7 @@
                 <a:spcPts val="1400"/>
               </a:spcAft>
               <a:buClr>
-                <a:srgbClr val="0D9488"/>
+                <a:srgbClr val="2DD4BF"/>
               </a:buClr>
               <a:buFont typeface="Arial"/>
               <a:buChar char="•"/>
@@ -14791,7 +14513,7 @@
             <a:r>
               <a:rPr sz="1600" b="0" i="0">
                 <a:solidFill>
-                  <a:srgbClr val="334155"/>
+                  <a:srgbClr val="C5D2E4"/>
                 </a:solidFill>
                 <a:latin typeface="Calibri"/>
               </a:rPr>
@@ -14807,7 +14529,7 @@
                 <a:spcPts val="1400"/>
               </a:spcAft>
               <a:buClr>
-                <a:srgbClr val="0D9488"/>
+                <a:srgbClr val="2DD4BF"/>
               </a:buClr>
               <a:buFont typeface="Arial"/>
               <a:buChar char="•"/>
@@ -14815,7 +14537,7 @@
             <a:r>
               <a:rPr sz="1600" b="0" i="0">
                 <a:solidFill>
-                  <a:srgbClr val="334155"/>
+                  <a:srgbClr val="C5D2E4"/>
                 </a:solidFill>
                 <a:latin typeface="Calibri"/>
               </a:rPr>
@@ -14831,7 +14553,7 @@
                 <a:spcPts val="1400"/>
               </a:spcAft>
               <a:buClr>
-                <a:srgbClr val="0D9488"/>
+                <a:srgbClr val="2DD4BF"/>
               </a:buClr>
               <a:buFont typeface="Arial"/>
               <a:buChar char="•"/>
@@ -14839,7 +14561,7 @@
             <a:r>
               <a:rPr sz="1600" b="0" i="0">
                 <a:solidFill>
-                  <a:srgbClr val="334155"/>
+                  <a:srgbClr val="C5D2E4"/>
                 </a:solidFill>
                 <a:latin typeface="Calibri"/>
               </a:rPr>

--- a/report/CS221_slide.pptx
+++ b/report/CS221_slide.pptx
@@ -4711,7 +4711,7 @@
     <p:bg>
       <p:bgPr>
         <a:solidFill>
-          <a:srgbClr val="0B1220"/>
+          <a:srgbClr val="1E293B"/>
         </a:solidFill>
         <a:effectLst/>
       </p:bgPr>
@@ -4738,7 +4738,7 @@
             <a:avLst/>
           </a:prstGeom>
           <a:solidFill>
-            <a:srgbClr val="164E4A"/>
+            <a:srgbClr val="155E59"/>
           </a:solidFill>
           <a:ln>
             <a:noFill/>
@@ -4797,7 +4797,7 @@
             <a:r>
               <a:rPr sz="4000" b="1" i="0">
                 <a:solidFill>
-                  <a:srgbClr val="F2F6FB"/>
+                  <a:srgbClr val="F8FAFC"/>
                 </a:solidFill>
                 <a:latin typeface="Calibri Light"/>
               </a:rPr>
@@ -4915,7 +4915,7 @@
             <a:r>
               <a:rPr sz="1150" b="0" i="0">
                 <a:solidFill>
-                  <a:srgbClr val="93A6C0"/>
+                  <a:srgbClr val="94A3B8"/>
                 </a:solidFill>
                 <a:latin typeface="Calibri"/>
               </a:rPr>
@@ -4931,7 +4931,7 @@
             <a:r>
               <a:rPr sz="1150" b="0" i="0">
                 <a:solidFill>
-                  <a:srgbClr val="93A6C0"/>
+                  <a:srgbClr val="94A3B8"/>
                 </a:solidFill>
                 <a:latin typeface="Calibri"/>
               </a:rPr>
@@ -4947,7 +4947,7 @@
             <a:r>
               <a:rPr sz="1150" b="0" i="0">
                 <a:solidFill>
-                  <a:srgbClr val="93A6C0"/>
+                  <a:srgbClr val="94A3B8"/>
                 </a:solidFill>
                 <a:latin typeface="Calibri"/>
               </a:rPr>
@@ -4963,7 +4963,7 @@
             <a:r>
               <a:rPr sz="1150" b="0" i="0">
                 <a:solidFill>
-                  <a:srgbClr val="93A6C0"/>
+                  <a:srgbClr val="94A3B8"/>
                 </a:solidFill>
                 <a:latin typeface="Calibri"/>
               </a:rPr>
@@ -5002,7 +5002,7 @@
             <a:r>
               <a:rPr sz="1150" b="0" i="0">
                 <a:solidFill>
-                  <a:srgbClr val="93A6C0"/>
+                  <a:srgbClr val="94A3B8"/>
                 </a:solidFill>
                 <a:latin typeface="Calibri"/>
               </a:rPr>
@@ -5018,7 +5018,7 @@
             <a:r>
               <a:rPr sz="1150" b="0" i="0">
                 <a:solidFill>
-                  <a:srgbClr val="93A6C0"/>
+                  <a:srgbClr val="94A3B8"/>
                 </a:solidFill>
                 <a:latin typeface="Calibri"/>
               </a:rPr>
@@ -5034,7 +5034,7 @@
             <a:r>
               <a:rPr sz="1150" b="0" i="0">
                 <a:solidFill>
-                  <a:srgbClr val="93A6C0"/>
+                  <a:srgbClr val="94A3B8"/>
                 </a:solidFill>
                 <a:latin typeface="Calibri"/>
               </a:rPr>
@@ -5057,7 +5057,7 @@
     <p:bg>
       <p:bgPr>
         <a:solidFill>
-          <a:srgbClr val="0B1220"/>
+          <a:srgbClr val="1E293B"/>
         </a:solidFill>
         <a:effectLst/>
       </p:bgPr>
@@ -5133,7 +5133,7 @@
             <a:r>
               <a:rPr sz="2900" b="1" i="0">
                 <a:solidFill>
-                  <a:srgbClr val="F2F6FB"/>
+                  <a:srgbClr val="F8FAFC"/>
                 </a:solidFill>
                 <a:latin typeface="Calibri Light"/>
               </a:rPr>
@@ -5212,7 +5212,7 @@
             <a:r>
               <a:rPr sz="1100" b="0" i="0">
                 <a:solidFill>
-                  <a:srgbClr val="55688A"/>
+                  <a:srgbClr val="8296B0"/>
                 </a:solidFill>
                 <a:latin typeface="Calibri"/>
               </a:rPr>
@@ -5265,7 +5265,7 @@
                   </a:txBody>
                   <a:tcPr anchor="ctr" marL="100584" marR="100584" marT="36576" marB="36576">
                     <a:solidFill>
-                      <a:srgbClr val="12303A"/>
+                      <a:srgbClr val="334155"/>
                     </a:solidFill>
                   </a:tcPr>
                 </a:tc>
@@ -5288,7 +5288,7 @@
                   </a:txBody>
                   <a:tcPr anchor="ctr" marL="100584" marR="100584" marT="36576" marB="36576">
                     <a:solidFill>
-                      <a:srgbClr val="12303A"/>
+                      <a:srgbClr val="334155"/>
                     </a:solidFill>
                   </a:tcPr>
                 </a:tc>
@@ -5311,7 +5311,7 @@
                   </a:txBody>
                   <a:tcPr anchor="ctr" marL="100584" marR="100584" marT="36576" marB="36576">
                     <a:solidFill>
-                      <a:srgbClr val="12303A"/>
+                      <a:srgbClr val="334155"/>
                     </a:solidFill>
                   </a:tcPr>
                 </a:tc>
@@ -5334,7 +5334,7 @@
                   </a:txBody>
                   <a:tcPr anchor="ctr" marL="100584" marR="100584" marT="36576" marB="36576">
                     <a:solidFill>
-                      <a:srgbClr val="12303A"/>
+                      <a:srgbClr val="334155"/>
                     </a:solidFill>
                   </a:tcPr>
                 </a:tc>
@@ -5349,7 +5349,7 @@
                       <a:r>
                         <a:rPr sz="1450" b="0" i="0">
                           <a:solidFill>
-                            <a:srgbClr val="C5D2E4"/>
+                            <a:srgbClr val="CBD5E1"/>
                           </a:solidFill>
                           <a:latin typeface="Calibri"/>
                         </a:rPr>
@@ -5359,7 +5359,7 @@
                   </a:txBody>
                   <a:tcPr anchor="ctr" marL="100584" marR="100584" marT="36576" marB="36576">
                     <a:solidFill>
-                      <a:srgbClr val="0E1929"/>
+                      <a:srgbClr val="243247"/>
                     </a:solidFill>
                   </a:tcPr>
                 </a:tc>
@@ -5372,7 +5372,7 @@
                       <a:r>
                         <a:rPr sz="1450" b="0" i="0">
                           <a:solidFill>
-                            <a:srgbClr val="C5D2E4"/>
+                            <a:srgbClr val="CBD5E1"/>
                           </a:solidFill>
                           <a:latin typeface="Calibri"/>
                         </a:rPr>
@@ -5382,7 +5382,7 @@
                   </a:txBody>
                   <a:tcPr anchor="ctr" marL="100584" marR="100584" marT="36576" marB="36576">
                     <a:solidFill>
-                      <a:srgbClr val="0E1929"/>
+                      <a:srgbClr val="243247"/>
                     </a:solidFill>
                   </a:tcPr>
                 </a:tc>
@@ -5395,7 +5395,7 @@
                       <a:r>
                         <a:rPr sz="1450" b="0" i="0">
                           <a:solidFill>
-                            <a:srgbClr val="C5D2E4"/>
+                            <a:srgbClr val="CBD5E1"/>
                           </a:solidFill>
                           <a:latin typeface="Calibri"/>
                         </a:rPr>
@@ -5405,7 +5405,7 @@
                   </a:txBody>
                   <a:tcPr anchor="ctr" marL="100584" marR="100584" marT="36576" marB="36576">
                     <a:solidFill>
-                      <a:srgbClr val="0E1929"/>
+                      <a:srgbClr val="243247"/>
                     </a:solidFill>
                   </a:tcPr>
                 </a:tc>
@@ -5418,7 +5418,7 @@
                       <a:r>
                         <a:rPr sz="1450" b="0" i="0">
                           <a:solidFill>
-                            <a:srgbClr val="C5D2E4"/>
+                            <a:srgbClr val="CBD5E1"/>
                           </a:solidFill>
                           <a:latin typeface="Calibri"/>
                         </a:rPr>
@@ -5428,7 +5428,7 @@
                   </a:txBody>
                   <a:tcPr anchor="ctr" marL="100584" marR="100584" marT="36576" marB="36576">
                     <a:solidFill>
-                      <a:srgbClr val="0E1929"/>
+                      <a:srgbClr val="243247"/>
                     </a:solidFill>
                   </a:tcPr>
                 </a:tc>
@@ -5443,7 +5443,7 @@
                       <a:r>
                         <a:rPr sz="1450" b="1" i="0">
                           <a:solidFill>
-                            <a:srgbClr val="F2F6FB"/>
+                            <a:srgbClr val="F8FAFC"/>
                           </a:solidFill>
                           <a:latin typeface="Calibri"/>
                         </a:rPr>
@@ -5453,7 +5453,7 @@
                   </a:txBody>
                   <a:tcPr anchor="ctr" marL="100584" marR="100584" marT="36576" marB="36576">
                     <a:solidFill>
-                      <a:srgbClr val="12303A"/>
+                      <a:srgbClr val="334155"/>
                     </a:solidFill>
                   </a:tcPr>
                 </a:tc>
@@ -5466,7 +5466,7 @@
                       <a:r>
                         <a:rPr sz="1450" b="1" i="0">
                           <a:solidFill>
-                            <a:srgbClr val="F2F6FB"/>
+                            <a:srgbClr val="F8FAFC"/>
                           </a:solidFill>
                           <a:latin typeface="Calibri"/>
                         </a:rPr>
@@ -5476,7 +5476,7 @@
                   </a:txBody>
                   <a:tcPr anchor="ctr" marL="100584" marR="100584" marT="36576" marB="36576">
                     <a:solidFill>
-                      <a:srgbClr val="12303A"/>
+                      <a:srgbClr val="334155"/>
                     </a:solidFill>
                   </a:tcPr>
                 </a:tc>
@@ -5489,7 +5489,7 @@
                       <a:r>
                         <a:rPr sz="1450" b="1" i="0">
                           <a:solidFill>
-                            <a:srgbClr val="F2F6FB"/>
+                            <a:srgbClr val="F8FAFC"/>
                           </a:solidFill>
                           <a:latin typeface="Calibri"/>
                         </a:rPr>
@@ -5499,7 +5499,7 @@
                   </a:txBody>
                   <a:tcPr anchor="ctr" marL="100584" marR="100584" marT="36576" marB="36576">
                     <a:solidFill>
-                      <a:srgbClr val="12303A"/>
+                      <a:srgbClr val="334155"/>
                     </a:solidFill>
                   </a:tcPr>
                 </a:tc>
@@ -5512,7 +5512,7 @@
                       <a:r>
                         <a:rPr sz="1450" b="1" i="0">
                           <a:solidFill>
-                            <a:srgbClr val="F2F6FB"/>
+                            <a:srgbClr val="F8FAFC"/>
                           </a:solidFill>
                           <a:latin typeface="Calibri"/>
                         </a:rPr>
@@ -5522,7 +5522,7 @@
                   </a:txBody>
                   <a:tcPr anchor="ctr" marL="100584" marR="100584" marT="36576" marB="36576">
                     <a:solidFill>
-                      <a:srgbClr val="12303A"/>
+                      <a:srgbClr val="334155"/>
                     </a:solidFill>
                   </a:tcPr>
                 </a:tc>
@@ -5537,7 +5537,7 @@
                       <a:r>
                         <a:rPr sz="1450" b="0" i="0">
                           <a:solidFill>
-                            <a:srgbClr val="C5D2E4"/>
+                            <a:srgbClr val="CBD5E1"/>
                           </a:solidFill>
                           <a:latin typeface="Calibri"/>
                         </a:rPr>
@@ -5547,7 +5547,7 @@
                   </a:txBody>
                   <a:tcPr anchor="ctr" marL="100584" marR="100584" marT="36576" marB="36576">
                     <a:solidFill>
-                      <a:srgbClr val="0E1929"/>
+                      <a:srgbClr val="243247"/>
                     </a:solidFill>
                   </a:tcPr>
                 </a:tc>
@@ -5560,7 +5560,7 @@
                       <a:r>
                         <a:rPr sz="1450" b="0" i="0">
                           <a:solidFill>
-                            <a:srgbClr val="C5D2E4"/>
+                            <a:srgbClr val="CBD5E1"/>
                           </a:solidFill>
                           <a:latin typeface="Calibri"/>
                         </a:rPr>
@@ -5570,7 +5570,7 @@
                   </a:txBody>
                   <a:tcPr anchor="ctr" marL="100584" marR="100584" marT="36576" marB="36576">
                     <a:solidFill>
-                      <a:srgbClr val="0E1929"/>
+                      <a:srgbClr val="243247"/>
                     </a:solidFill>
                   </a:tcPr>
                 </a:tc>
@@ -5583,7 +5583,7 @@
                       <a:r>
                         <a:rPr sz="1450" b="0" i="0">
                           <a:solidFill>
-                            <a:srgbClr val="C5D2E4"/>
+                            <a:srgbClr val="CBD5E1"/>
                           </a:solidFill>
                           <a:latin typeface="Calibri"/>
                         </a:rPr>
@@ -5593,7 +5593,7 @@
                   </a:txBody>
                   <a:tcPr anchor="ctr" marL="100584" marR="100584" marT="36576" marB="36576">
                     <a:solidFill>
-                      <a:srgbClr val="0E1929"/>
+                      <a:srgbClr val="243247"/>
                     </a:solidFill>
                   </a:tcPr>
                 </a:tc>
@@ -5606,7 +5606,7 @@
                       <a:r>
                         <a:rPr sz="1450" b="0" i="0">
                           <a:solidFill>
-                            <a:srgbClr val="C5D2E4"/>
+                            <a:srgbClr val="CBD5E1"/>
                           </a:solidFill>
                           <a:latin typeface="Calibri"/>
                         </a:rPr>
@@ -5616,7 +5616,7 @@
                   </a:txBody>
                   <a:tcPr anchor="ctr" marL="100584" marR="100584" marT="36576" marB="36576">
                     <a:solidFill>
-                      <a:srgbClr val="0E1929"/>
+                      <a:srgbClr val="243247"/>
                     </a:solidFill>
                   </a:tcPr>
                 </a:tc>
@@ -5627,7 +5627,7 @@
       </p:graphicFrame>
       <p:pic>
         <p:nvPicPr>
-          <p:cNvPr id="7" name="Picture 6" descr="confusion_dark.png"/>
+          <p:cNvPr id="7" name="Picture 6" descr="confusion_slate.png"/>
           <p:cNvPicPr>
             <a:picLocks noChangeAspect="1"/>
           </p:cNvPicPr>
@@ -5687,7 +5687,7 @@
             <a:r>
               <a:rPr sz="1500" b="0" i="0">
                 <a:solidFill>
-                  <a:srgbClr val="C5D2E4"/>
+                  <a:srgbClr val="CBD5E1"/>
                 </a:solidFill>
                 <a:latin typeface="Calibri"/>
               </a:rPr>
@@ -5711,7 +5711,7 @@
             <a:r>
               <a:rPr sz="1500" b="0" i="0">
                 <a:solidFill>
-                  <a:srgbClr val="C5D2E4"/>
+                  <a:srgbClr val="CBD5E1"/>
                 </a:solidFill>
                 <a:latin typeface="Calibri"/>
               </a:rPr>
@@ -5735,7 +5735,7 @@
             <a:r>
               <a:rPr sz="1500" b="0" i="0">
                 <a:solidFill>
-                  <a:srgbClr val="C5D2E4"/>
+                  <a:srgbClr val="CBD5E1"/>
                 </a:solidFill>
                 <a:latin typeface="Calibri"/>
               </a:rPr>
@@ -5758,7 +5758,7 @@
     <p:bg>
       <p:bgPr>
         <a:solidFill>
-          <a:srgbClr val="0B1220"/>
+          <a:srgbClr val="1E293B"/>
         </a:solidFill>
         <a:effectLst/>
       </p:bgPr>
@@ -5834,7 +5834,7 @@
             <a:r>
               <a:rPr sz="2900" b="1" i="0">
                 <a:solidFill>
-                  <a:srgbClr val="F2F6FB"/>
+                  <a:srgbClr val="F8FAFC"/>
                 </a:solidFill>
                 <a:latin typeface="Calibri Light"/>
               </a:rPr>
@@ -5913,7 +5913,7 @@
             <a:r>
               <a:rPr sz="1100" b="0" i="0">
                 <a:solidFill>
-                  <a:srgbClr val="55688A"/>
+                  <a:srgbClr val="8296B0"/>
                 </a:solidFill>
                 <a:latin typeface="Calibri"/>
               </a:rPr>
@@ -5968,7 +5968,7 @@
                   </a:txBody>
                   <a:tcPr anchor="ctr" marL="100584" marR="100584" marT="36576" marB="36576">
                     <a:solidFill>
-                      <a:srgbClr val="12303A"/>
+                      <a:srgbClr val="334155"/>
                     </a:solidFill>
                   </a:tcPr>
                 </a:tc>
@@ -5991,7 +5991,7 @@
                   </a:txBody>
                   <a:tcPr anchor="ctr" marL="100584" marR="100584" marT="36576" marB="36576">
                     <a:solidFill>
-                      <a:srgbClr val="12303A"/>
+                      <a:srgbClr val="334155"/>
                     </a:solidFill>
                   </a:tcPr>
                 </a:tc>
@@ -6014,7 +6014,7 @@
                   </a:txBody>
                   <a:tcPr anchor="ctr" marL="100584" marR="100584" marT="36576" marB="36576">
                     <a:solidFill>
-                      <a:srgbClr val="12303A"/>
+                      <a:srgbClr val="334155"/>
                     </a:solidFill>
                   </a:tcPr>
                 </a:tc>
@@ -6037,7 +6037,7 @@
                   </a:txBody>
                   <a:tcPr anchor="ctr" marL="100584" marR="100584" marT="36576" marB="36576">
                     <a:solidFill>
-                      <a:srgbClr val="12303A"/>
+                      <a:srgbClr val="334155"/>
                     </a:solidFill>
                   </a:tcPr>
                 </a:tc>
@@ -6060,7 +6060,7 @@
                   </a:txBody>
                   <a:tcPr anchor="ctr" marL="100584" marR="100584" marT="36576" marB="36576">
                     <a:solidFill>
-                      <a:srgbClr val="12303A"/>
+                      <a:srgbClr val="334155"/>
                     </a:solidFill>
                   </a:tcPr>
                 </a:tc>
@@ -6083,7 +6083,7 @@
                   </a:txBody>
                   <a:tcPr anchor="ctr" marL="100584" marR="100584" marT="36576" marB="36576">
                     <a:solidFill>
-                      <a:srgbClr val="12303A"/>
+                      <a:srgbClr val="334155"/>
                     </a:solidFill>
                   </a:tcPr>
                 </a:tc>
@@ -6098,7 +6098,7 @@
                       <a:r>
                         <a:rPr sz="1300" b="0" i="0">
                           <a:solidFill>
-                            <a:srgbClr val="C5D2E4"/>
+                            <a:srgbClr val="CBD5E1"/>
                           </a:solidFill>
                           <a:latin typeface="Calibri"/>
                         </a:rPr>
@@ -6108,7 +6108,7 @@
                   </a:txBody>
                   <a:tcPr anchor="ctr" marL="100584" marR="100584" marT="36576" marB="36576">
                     <a:solidFill>
-                      <a:srgbClr val="0E1929"/>
+                      <a:srgbClr val="243247"/>
                     </a:solidFill>
                   </a:tcPr>
                 </a:tc>
@@ -6121,7 +6121,7 @@
                       <a:r>
                         <a:rPr sz="1300" b="0" i="0">
                           <a:solidFill>
-                            <a:srgbClr val="C5D2E4"/>
+                            <a:srgbClr val="CBD5E1"/>
                           </a:solidFill>
                           <a:latin typeface="Calibri"/>
                         </a:rPr>
@@ -6131,7 +6131,7 @@
                   </a:txBody>
                   <a:tcPr anchor="ctr" marL="100584" marR="100584" marT="36576" marB="36576">
                     <a:solidFill>
-                      <a:srgbClr val="0E1929"/>
+                      <a:srgbClr val="243247"/>
                     </a:solidFill>
                   </a:tcPr>
                 </a:tc>
@@ -6144,7 +6144,7 @@
                       <a:r>
                         <a:rPr sz="1300" b="0" i="0">
                           <a:solidFill>
-                            <a:srgbClr val="C5D2E4"/>
+                            <a:srgbClr val="CBD5E1"/>
                           </a:solidFill>
                           <a:latin typeface="Calibri"/>
                         </a:rPr>
@@ -6154,7 +6154,7 @@
                   </a:txBody>
                   <a:tcPr anchor="ctr" marL="100584" marR="100584" marT="36576" marB="36576">
                     <a:solidFill>
-                      <a:srgbClr val="0E1929"/>
+                      <a:srgbClr val="243247"/>
                     </a:solidFill>
                   </a:tcPr>
                 </a:tc>
@@ -6167,7 +6167,7 @@
                       <a:r>
                         <a:rPr sz="1300" b="0" i="0">
                           <a:solidFill>
-                            <a:srgbClr val="C5D2E4"/>
+                            <a:srgbClr val="CBD5E1"/>
                           </a:solidFill>
                           <a:latin typeface="Calibri"/>
                         </a:rPr>
@@ -6177,7 +6177,7 @@
                   </a:txBody>
                   <a:tcPr anchor="ctr" marL="100584" marR="100584" marT="36576" marB="36576">
                     <a:solidFill>
-                      <a:srgbClr val="0E1929"/>
+                      <a:srgbClr val="243247"/>
                     </a:solidFill>
                   </a:tcPr>
                 </a:tc>
@@ -6190,7 +6190,7 @@
                       <a:r>
                         <a:rPr sz="1300" b="0" i="0">
                           <a:solidFill>
-                            <a:srgbClr val="C5D2E4"/>
+                            <a:srgbClr val="CBD5E1"/>
                           </a:solidFill>
                           <a:latin typeface="Calibri"/>
                         </a:rPr>
@@ -6200,7 +6200,7 @@
                   </a:txBody>
                   <a:tcPr anchor="ctr" marL="100584" marR="100584" marT="36576" marB="36576">
                     <a:solidFill>
-                      <a:srgbClr val="0E1929"/>
+                      <a:srgbClr val="243247"/>
                     </a:solidFill>
                   </a:tcPr>
                 </a:tc>
@@ -6213,7 +6213,7 @@
                       <a:r>
                         <a:rPr sz="1300" b="0" i="0">
                           <a:solidFill>
-                            <a:srgbClr val="C5D2E4"/>
+                            <a:srgbClr val="CBD5E1"/>
                           </a:solidFill>
                           <a:latin typeface="Calibri"/>
                         </a:rPr>
@@ -6223,7 +6223,7 @@
                   </a:txBody>
                   <a:tcPr anchor="ctr" marL="100584" marR="100584" marT="36576" marB="36576">
                     <a:solidFill>
-                      <a:srgbClr val="0E1929"/>
+                      <a:srgbClr val="243247"/>
                     </a:solidFill>
                   </a:tcPr>
                 </a:tc>
@@ -6238,7 +6238,7 @@
                       <a:r>
                         <a:rPr sz="1300" b="0" i="0">
                           <a:solidFill>
-                            <a:srgbClr val="C5D2E4"/>
+                            <a:srgbClr val="CBD5E1"/>
                           </a:solidFill>
                           <a:latin typeface="Calibri"/>
                         </a:rPr>
@@ -6248,7 +6248,7 @@
                   </a:txBody>
                   <a:tcPr anchor="ctr" marL="100584" marR="100584" marT="36576" marB="36576">
                     <a:solidFill>
-                      <a:srgbClr val="121E30"/>
+                      <a:srgbClr val="2B3A50"/>
                     </a:solidFill>
                   </a:tcPr>
                 </a:tc>
@@ -6261,7 +6261,7 @@
                       <a:r>
                         <a:rPr sz="1300" b="0" i="0">
                           <a:solidFill>
-                            <a:srgbClr val="C5D2E4"/>
+                            <a:srgbClr val="CBD5E1"/>
                           </a:solidFill>
                           <a:latin typeface="Calibri"/>
                         </a:rPr>
@@ -6271,7 +6271,7 @@
                   </a:txBody>
                   <a:tcPr anchor="ctr" marL="100584" marR="100584" marT="36576" marB="36576">
                     <a:solidFill>
-                      <a:srgbClr val="121E30"/>
+                      <a:srgbClr val="2B3A50"/>
                     </a:solidFill>
                   </a:tcPr>
                 </a:tc>
@@ -6284,7 +6284,7 @@
                       <a:r>
                         <a:rPr sz="1300" b="0" i="0">
                           <a:solidFill>
-                            <a:srgbClr val="C5D2E4"/>
+                            <a:srgbClr val="CBD5E1"/>
                           </a:solidFill>
                           <a:latin typeface="Calibri"/>
                         </a:rPr>
@@ -6294,7 +6294,7 @@
                   </a:txBody>
                   <a:tcPr anchor="ctr" marL="100584" marR="100584" marT="36576" marB="36576">
                     <a:solidFill>
-                      <a:srgbClr val="121E30"/>
+                      <a:srgbClr val="2B3A50"/>
                     </a:solidFill>
                   </a:tcPr>
                 </a:tc>
@@ -6307,7 +6307,7 @@
                       <a:r>
                         <a:rPr sz="1300" b="0" i="0">
                           <a:solidFill>
-                            <a:srgbClr val="C5D2E4"/>
+                            <a:srgbClr val="CBD5E1"/>
                           </a:solidFill>
                           <a:latin typeface="Calibri"/>
                         </a:rPr>
@@ -6317,7 +6317,7 @@
                   </a:txBody>
                   <a:tcPr anchor="ctr" marL="100584" marR="100584" marT="36576" marB="36576">
                     <a:solidFill>
-                      <a:srgbClr val="121E30"/>
+                      <a:srgbClr val="2B3A50"/>
                     </a:solidFill>
                   </a:tcPr>
                 </a:tc>
@@ -6330,7 +6330,7 @@
                       <a:r>
                         <a:rPr sz="1300" b="0" i="0">
                           <a:solidFill>
-                            <a:srgbClr val="C5D2E4"/>
+                            <a:srgbClr val="CBD5E1"/>
                           </a:solidFill>
                           <a:latin typeface="Calibri"/>
                         </a:rPr>
@@ -6340,7 +6340,7 @@
                   </a:txBody>
                   <a:tcPr anchor="ctr" marL="100584" marR="100584" marT="36576" marB="36576">
                     <a:solidFill>
-                      <a:srgbClr val="121E30"/>
+                      <a:srgbClr val="2B3A50"/>
                     </a:solidFill>
                   </a:tcPr>
                 </a:tc>
@@ -6353,7 +6353,7 @@
                       <a:r>
                         <a:rPr sz="1300" b="0" i="0">
                           <a:solidFill>
-                            <a:srgbClr val="C5D2E4"/>
+                            <a:srgbClr val="CBD5E1"/>
                           </a:solidFill>
                           <a:latin typeface="Calibri"/>
                         </a:rPr>
@@ -6363,7 +6363,7 @@
                   </a:txBody>
                   <a:tcPr anchor="ctr" marL="100584" marR="100584" marT="36576" marB="36576">
                     <a:solidFill>
-                      <a:srgbClr val="121E30"/>
+                      <a:srgbClr val="2B3A50"/>
                     </a:solidFill>
                   </a:tcPr>
                 </a:tc>
@@ -6378,7 +6378,7 @@
                       <a:r>
                         <a:rPr sz="1300" b="1" i="0">
                           <a:solidFill>
-                            <a:srgbClr val="F2F6FB"/>
+                            <a:srgbClr val="F8FAFC"/>
                           </a:solidFill>
                           <a:latin typeface="Calibri"/>
                         </a:rPr>
@@ -6388,7 +6388,7 @@
                   </a:txBody>
                   <a:tcPr anchor="ctr" marL="100584" marR="100584" marT="36576" marB="36576">
                     <a:solidFill>
-                      <a:srgbClr val="12303A"/>
+                      <a:srgbClr val="334155"/>
                     </a:solidFill>
                   </a:tcPr>
                 </a:tc>
@@ -6401,7 +6401,7 @@
                       <a:r>
                         <a:rPr sz="1300" b="1" i="0">
                           <a:solidFill>
-                            <a:srgbClr val="F2F6FB"/>
+                            <a:srgbClr val="F8FAFC"/>
                           </a:solidFill>
                           <a:latin typeface="Calibri"/>
                         </a:rPr>
@@ -6411,7 +6411,7 @@
                   </a:txBody>
                   <a:tcPr anchor="ctr" marL="100584" marR="100584" marT="36576" marB="36576">
                     <a:solidFill>
-                      <a:srgbClr val="12303A"/>
+                      <a:srgbClr val="334155"/>
                     </a:solidFill>
                   </a:tcPr>
                 </a:tc>
@@ -6424,7 +6424,7 @@
                       <a:r>
                         <a:rPr sz="1300" b="1" i="0">
                           <a:solidFill>
-                            <a:srgbClr val="F2F6FB"/>
+                            <a:srgbClr val="F8FAFC"/>
                           </a:solidFill>
                           <a:latin typeface="Calibri"/>
                         </a:rPr>
@@ -6434,7 +6434,7 @@
                   </a:txBody>
                   <a:tcPr anchor="ctr" marL="100584" marR="100584" marT="36576" marB="36576">
                     <a:solidFill>
-                      <a:srgbClr val="12303A"/>
+                      <a:srgbClr val="334155"/>
                     </a:solidFill>
                   </a:tcPr>
                 </a:tc>
@@ -6447,7 +6447,7 @@
                       <a:r>
                         <a:rPr sz="1300" b="1" i="0">
                           <a:solidFill>
-                            <a:srgbClr val="F2F6FB"/>
+                            <a:srgbClr val="F8FAFC"/>
                           </a:solidFill>
                           <a:latin typeface="Calibri"/>
                         </a:rPr>
@@ -6457,7 +6457,7 @@
                   </a:txBody>
                   <a:tcPr anchor="ctr" marL="100584" marR="100584" marT="36576" marB="36576">
                     <a:solidFill>
-                      <a:srgbClr val="12303A"/>
+                      <a:srgbClr val="334155"/>
                     </a:solidFill>
                   </a:tcPr>
                 </a:tc>
@@ -6470,7 +6470,7 @@
                       <a:r>
                         <a:rPr sz="1300" b="1" i="0">
                           <a:solidFill>
-                            <a:srgbClr val="F2F6FB"/>
+                            <a:srgbClr val="F8FAFC"/>
                           </a:solidFill>
                           <a:latin typeface="Calibri"/>
                         </a:rPr>
@@ -6480,7 +6480,7 @@
                   </a:txBody>
                   <a:tcPr anchor="ctr" marL="100584" marR="100584" marT="36576" marB="36576">
                     <a:solidFill>
-                      <a:srgbClr val="12303A"/>
+                      <a:srgbClr val="334155"/>
                     </a:solidFill>
                   </a:tcPr>
                 </a:tc>
@@ -6493,7 +6493,7 @@
                       <a:r>
                         <a:rPr sz="1300" b="1" i="0">
                           <a:solidFill>
-                            <a:srgbClr val="F2F6FB"/>
+                            <a:srgbClr val="F8FAFC"/>
                           </a:solidFill>
                           <a:latin typeface="Calibri"/>
                         </a:rPr>
@@ -6503,7 +6503,7 @@
                   </a:txBody>
                   <a:tcPr anchor="ctr" marL="100584" marR="100584" marT="36576" marB="36576">
                     <a:solidFill>
-                      <a:srgbClr val="12303A"/>
+                      <a:srgbClr val="334155"/>
                     </a:solidFill>
                   </a:tcPr>
                 </a:tc>
@@ -6518,7 +6518,7 @@
                       <a:r>
                         <a:rPr sz="1300" b="0" i="0">
                           <a:solidFill>
-                            <a:srgbClr val="C5D2E4"/>
+                            <a:srgbClr val="CBD5E1"/>
                           </a:solidFill>
                           <a:latin typeface="Calibri"/>
                         </a:rPr>
@@ -6528,7 +6528,7 @@
                   </a:txBody>
                   <a:tcPr anchor="ctr" marL="100584" marR="100584" marT="36576" marB="36576">
                     <a:solidFill>
-                      <a:srgbClr val="121E30"/>
+                      <a:srgbClr val="2B3A50"/>
                     </a:solidFill>
                   </a:tcPr>
                 </a:tc>
@@ -6541,7 +6541,7 @@
                       <a:r>
                         <a:rPr sz="1300" b="0" i="0">
                           <a:solidFill>
-                            <a:srgbClr val="C5D2E4"/>
+                            <a:srgbClr val="CBD5E1"/>
                           </a:solidFill>
                           <a:latin typeface="Calibri"/>
                         </a:rPr>
@@ -6551,7 +6551,7 @@
                   </a:txBody>
                   <a:tcPr anchor="ctr" marL="100584" marR="100584" marT="36576" marB="36576">
                     <a:solidFill>
-                      <a:srgbClr val="121E30"/>
+                      <a:srgbClr val="2B3A50"/>
                     </a:solidFill>
                   </a:tcPr>
                 </a:tc>
@@ -6564,7 +6564,7 @@
                       <a:r>
                         <a:rPr sz="1300" b="0" i="0">
                           <a:solidFill>
-                            <a:srgbClr val="C5D2E4"/>
+                            <a:srgbClr val="CBD5E1"/>
                           </a:solidFill>
                           <a:latin typeface="Calibri"/>
                         </a:rPr>
@@ -6574,7 +6574,7 @@
                   </a:txBody>
                   <a:tcPr anchor="ctr" marL="100584" marR="100584" marT="36576" marB="36576">
                     <a:solidFill>
-                      <a:srgbClr val="121E30"/>
+                      <a:srgbClr val="2B3A50"/>
                     </a:solidFill>
                   </a:tcPr>
                 </a:tc>
@@ -6587,7 +6587,7 @@
                       <a:r>
                         <a:rPr sz="1300" b="0" i="0">
                           <a:solidFill>
-                            <a:srgbClr val="C5D2E4"/>
+                            <a:srgbClr val="CBD5E1"/>
                           </a:solidFill>
                           <a:latin typeface="Calibri"/>
                         </a:rPr>
@@ -6597,7 +6597,7 @@
                   </a:txBody>
                   <a:tcPr anchor="ctr" marL="100584" marR="100584" marT="36576" marB="36576">
                     <a:solidFill>
-                      <a:srgbClr val="121E30"/>
+                      <a:srgbClr val="2B3A50"/>
                     </a:solidFill>
                   </a:tcPr>
                 </a:tc>
@@ -6610,7 +6610,7 @@
                       <a:r>
                         <a:rPr sz="1300" b="0" i="0">
                           <a:solidFill>
-                            <a:srgbClr val="C5D2E4"/>
+                            <a:srgbClr val="CBD5E1"/>
                           </a:solidFill>
                           <a:latin typeface="Calibri"/>
                         </a:rPr>
@@ -6620,7 +6620,7 @@
                   </a:txBody>
                   <a:tcPr anchor="ctr" marL="100584" marR="100584" marT="36576" marB="36576">
                     <a:solidFill>
-                      <a:srgbClr val="121E30"/>
+                      <a:srgbClr val="2B3A50"/>
                     </a:solidFill>
                   </a:tcPr>
                 </a:tc>
@@ -6633,7 +6633,7 @@
                       <a:r>
                         <a:rPr sz="1300" b="0" i="0">
                           <a:solidFill>
-                            <a:srgbClr val="C5D2E4"/>
+                            <a:srgbClr val="CBD5E1"/>
                           </a:solidFill>
                           <a:latin typeface="Calibri"/>
                         </a:rPr>
@@ -6643,7 +6643,7 @@
                   </a:txBody>
                   <a:tcPr anchor="ctr" marL="100584" marR="100584" marT="36576" marB="36576">
                     <a:solidFill>
-                      <a:srgbClr val="121E30"/>
+                      <a:srgbClr val="2B3A50"/>
                     </a:solidFill>
                   </a:tcPr>
                 </a:tc>
@@ -6658,7 +6658,7 @@
                       <a:r>
                         <a:rPr sz="1300" b="0" i="0">
                           <a:solidFill>
-                            <a:srgbClr val="C5D2E4"/>
+                            <a:srgbClr val="CBD5E1"/>
                           </a:solidFill>
                           <a:latin typeface="Calibri"/>
                         </a:rPr>
@@ -6668,7 +6668,7 @@
                   </a:txBody>
                   <a:tcPr anchor="ctr" marL="100584" marR="100584" marT="36576" marB="36576">
                     <a:solidFill>
-                      <a:srgbClr val="0E1929"/>
+                      <a:srgbClr val="243247"/>
                     </a:solidFill>
                   </a:tcPr>
                 </a:tc>
@@ -6681,7 +6681,7 @@
                       <a:r>
                         <a:rPr sz="1300" b="0" i="0">
                           <a:solidFill>
-                            <a:srgbClr val="C5D2E4"/>
+                            <a:srgbClr val="CBD5E1"/>
                           </a:solidFill>
                           <a:latin typeface="Calibri"/>
                         </a:rPr>
@@ -6691,7 +6691,7 @@
                   </a:txBody>
                   <a:tcPr anchor="ctr" marL="100584" marR="100584" marT="36576" marB="36576">
                     <a:solidFill>
-                      <a:srgbClr val="0E1929"/>
+                      <a:srgbClr val="243247"/>
                     </a:solidFill>
                   </a:tcPr>
                 </a:tc>
@@ -6704,7 +6704,7 @@
                       <a:r>
                         <a:rPr sz="1300" b="0" i="0">
                           <a:solidFill>
-                            <a:srgbClr val="C5D2E4"/>
+                            <a:srgbClr val="CBD5E1"/>
                           </a:solidFill>
                           <a:latin typeface="Calibri"/>
                         </a:rPr>
@@ -6714,7 +6714,7 @@
                   </a:txBody>
                   <a:tcPr anchor="ctr" marL="100584" marR="100584" marT="36576" marB="36576">
                     <a:solidFill>
-                      <a:srgbClr val="0E1929"/>
+                      <a:srgbClr val="243247"/>
                     </a:solidFill>
                   </a:tcPr>
                 </a:tc>
@@ -6727,7 +6727,7 @@
                       <a:r>
                         <a:rPr sz="1300" b="0" i="0">
                           <a:solidFill>
-                            <a:srgbClr val="C5D2E4"/>
+                            <a:srgbClr val="CBD5E1"/>
                           </a:solidFill>
                           <a:latin typeface="Calibri"/>
                         </a:rPr>
@@ -6737,7 +6737,7 @@
                   </a:txBody>
                   <a:tcPr anchor="ctr" marL="100584" marR="100584" marT="36576" marB="36576">
                     <a:solidFill>
-                      <a:srgbClr val="0E1929"/>
+                      <a:srgbClr val="243247"/>
                     </a:solidFill>
                   </a:tcPr>
                 </a:tc>
@@ -6750,7 +6750,7 @@
                       <a:r>
                         <a:rPr sz="1300" b="0" i="0">
                           <a:solidFill>
-                            <a:srgbClr val="C5D2E4"/>
+                            <a:srgbClr val="CBD5E1"/>
                           </a:solidFill>
                           <a:latin typeface="Calibri"/>
                         </a:rPr>
@@ -6760,7 +6760,7 @@
                   </a:txBody>
                   <a:tcPr anchor="ctr" marL="100584" marR="100584" marT="36576" marB="36576">
                     <a:solidFill>
-                      <a:srgbClr val="0E1929"/>
+                      <a:srgbClr val="243247"/>
                     </a:solidFill>
                   </a:tcPr>
                 </a:tc>
@@ -6773,7 +6773,7 @@
                       <a:r>
                         <a:rPr sz="1300" b="0" i="0">
                           <a:solidFill>
-                            <a:srgbClr val="C5D2E4"/>
+                            <a:srgbClr val="CBD5E1"/>
                           </a:solidFill>
                           <a:latin typeface="Calibri"/>
                         </a:rPr>
@@ -6783,7 +6783,7 @@
                   </a:txBody>
                   <a:tcPr anchor="ctr" marL="100584" marR="100584" marT="36576" marB="36576">
                     <a:solidFill>
-                      <a:srgbClr val="0E1929"/>
+                      <a:srgbClr val="243247"/>
                     </a:solidFill>
                   </a:tcPr>
                 </a:tc>
@@ -6830,7 +6830,7 @@
             <a:r>
               <a:rPr sz="1550" b="0" i="0">
                 <a:solidFill>
-                  <a:srgbClr val="C5D2E4"/>
+                  <a:srgbClr val="CBD5E1"/>
                 </a:solidFill>
                 <a:latin typeface="Calibri"/>
               </a:rPr>
@@ -6854,7 +6854,7 @@
             <a:r>
               <a:rPr sz="1550" b="0" i="0">
                 <a:solidFill>
-                  <a:srgbClr val="C5D2E4"/>
+                  <a:srgbClr val="CBD5E1"/>
                 </a:solidFill>
                 <a:latin typeface="Calibri"/>
               </a:rPr>
@@ -6878,7 +6878,7 @@
             <a:r>
               <a:rPr sz="1550" b="0" i="0">
                 <a:solidFill>
-                  <a:srgbClr val="C5D2E4"/>
+                  <a:srgbClr val="CBD5E1"/>
                 </a:solidFill>
                 <a:latin typeface="Calibri"/>
               </a:rPr>
@@ -6901,7 +6901,7 @@
     <p:bg>
       <p:bgPr>
         <a:solidFill>
-          <a:srgbClr val="0B1220"/>
+          <a:srgbClr val="1E293B"/>
         </a:solidFill>
         <a:effectLst/>
       </p:bgPr>
@@ -6977,7 +6977,7 @@
             <a:r>
               <a:rPr sz="2900" b="1" i="0">
                 <a:solidFill>
-                  <a:srgbClr val="F2F6FB"/>
+                  <a:srgbClr val="F8FAFC"/>
                 </a:solidFill>
                 <a:latin typeface="Calibri Light"/>
               </a:rPr>
@@ -7056,7 +7056,7 @@
             <a:r>
               <a:rPr sz="1100" b="0" i="0">
                 <a:solidFill>
-                  <a:srgbClr val="55688A"/>
+                  <a:srgbClr val="8296B0"/>
                 </a:solidFill>
                 <a:latin typeface="Calibri"/>
               </a:rPr>
@@ -7089,7 +7089,7 @@
           </a:prstGeom>
           <a:ln w="9525">
             <a:solidFill>
-              <a:srgbClr val="253750"/>
+              <a:srgbClr val="475569"/>
             </a:solidFill>
           </a:ln>
         </p:spPr>
@@ -7132,7 +7132,7 @@
             <a:r>
               <a:rPr sz="1600" b="1" i="0">
                 <a:solidFill>
-                  <a:srgbClr val="F2F6FB"/>
+                  <a:srgbClr val="F8FAFC"/>
                 </a:solidFill>
                 <a:latin typeface="Calibri"/>
               </a:rPr>
@@ -7141,7 +7141,7 @@
             <a:r>
               <a:rPr sz="1600" b="0" i="0">
                 <a:solidFill>
-                  <a:srgbClr val="C5D2E4"/>
+                  <a:srgbClr val="CBD5E1"/>
                 </a:solidFill>
                 <a:latin typeface="Calibri"/>
               </a:rPr>
@@ -7165,7 +7165,7 @@
             <a:r>
               <a:rPr sz="1600" b="1" i="0">
                 <a:solidFill>
-                  <a:srgbClr val="F2F6FB"/>
+                  <a:srgbClr val="F8FAFC"/>
                 </a:solidFill>
                 <a:latin typeface="Calibri"/>
               </a:rPr>
@@ -7174,7 +7174,7 @@
             <a:r>
               <a:rPr sz="1600" b="0" i="0">
                 <a:solidFill>
-                  <a:srgbClr val="C5D2E4"/>
+                  <a:srgbClr val="CBD5E1"/>
                 </a:solidFill>
                 <a:latin typeface="Calibri"/>
               </a:rPr>
@@ -7198,7 +7198,7 @@
             <a:r>
               <a:rPr sz="1600" b="0" i="0">
                 <a:solidFill>
-                  <a:srgbClr val="C5D2E4"/>
+                  <a:srgbClr val="CBD5E1"/>
                 </a:solidFill>
                 <a:latin typeface="Calibri"/>
               </a:rPr>
@@ -7222,7 +7222,7 @@
             <a:r>
               <a:rPr sz="1600" b="0" i="0">
                 <a:solidFill>
-                  <a:srgbClr val="C5D2E4"/>
+                  <a:srgbClr val="CBD5E1"/>
                 </a:solidFill>
                 <a:latin typeface="Calibri"/>
               </a:rPr>
@@ -7245,7 +7245,7 @@
     <p:bg>
       <p:bgPr>
         <a:solidFill>
-          <a:srgbClr val="0B1220"/>
+          <a:srgbClr val="1E293B"/>
         </a:solidFill>
         <a:effectLst/>
       </p:bgPr>
@@ -7321,7 +7321,7 @@
             <a:r>
               <a:rPr sz="2900" b="1" i="0">
                 <a:solidFill>
-                  <a:srgbClr val="F2F6FB"/>
+                  <a:srgbClr val="F8FAFC"/>
                 </a:solidFill>
                 <a:latin typeface="Calibri Light"/>
               </a:rPr>
@@ -7400,7 +7400,7 @@
             <a:r>
               <a:rPr sz="1100" b="0" i="0">
                 <a:solidFill>
-                  <a:srgbClr val="55688A"/>
+                  <a:srgbClr val="8296B0"/>
                 </a:solidFill>
                 <a:latin typeface="Calibri"/>
               </a:rPr>
@@ -7454,7 +7454,7 @@
                   </a:txBody>
                   <a:tcPr anchor="ctr" marL="100584" marR="100584" marT="36576" marB="36576">
                     <a:solidFill>
-                      <a:srgbClr val="12303A"/>
+                      <a:srgbClr val="334155"/>
                     </a:solidFill>
                   </a:tcPr>
                 </a:tc>
@@ -7477,7 +7477,7 @@
                   </a:txBody>
                   <a:tcPr anchor="ctr" marL="100584" marR="100584" marT="36576" marB="36576">
                     <a:solidFill>
-                      <a:srgbClr val="12303A"/>
+                      <a:srgbClr val="334155"/>
                     </a:solidFill>
                   </a:tcPr>
                 </a:tc>
@@ -7500,7 +7500,7 @@
                   </a:txBody>
                   <a:tcPr anchor="ctr" marL="100584" marR="100584" marT="36576" marB="36576">
                     <a:solidFill>
-                      <a:srgbClr val="12303A"/>
+                      <a:srgbClr val="334155"/>
                     </a:solidFill>
                   </a:tcPr>
                 </a:tc>
@@ -7523,7 +7523,7 @@
                   </a:txBody>
                   <a:tcPr anchor="ctr" marL="100584" marR="100584" marT="36576" marB="36576">
                     <a:solidFill>
-                      <a:srgbClr val="12303A"/>
+                      <a:srgbClr val="334155"/>
                     </a:solidFill>
                   </a:tcPr>
                 </a:tc>
@@ -7546,7 +7546,7 @@
                   </a:txBody>
                   <a:tcPr anchor="ctr" marL="100584" marR="100584" marT="36576" marB="36576">
                     <a:solidFill>
-                      <a:srgbClr val="12303A"/>
+                      <a:srgbClr val="334155"/>
                     </a:solidFill>
                   </a:tcPr>
                 </a:tc>
@@ -7561,7 +7561,7 @@
                       <a:r>
                         <a:rPr sz="1400" b="0" i="0">
                           <a:solidFill>
-                            <a:srgbClr val="C5D2E4"/>
+                            <a:srgbClr val="CBD5E1"/>
                           </a:solidFill>
                           <a:latin typeface="Calibri"/>
                         </a:rPr>
@@ -7571,7 +7571,7 @@
                   </a:txBody>
                   <a:tcPr anchor="ctr" marL="100584" marR="100584" marT="36576" marB="36576">
                     <a:solidFill>
-                      <a:srgbClr val="0E1929"/>
+                      <a:srgbClr val="243247"/>
                     </a:solidFill>
                   </a:tcPr>
                 </a:tc>
@@ -7584,7 +7584,7 @@
                       <a:r>
                         <a:rPr sz="1400" b="0" i="0">
                           <a:solidFill>
-                            <a:srgbClr val="C5D2E4"/>
+                            <a:srgbClr val="CBD5E1"/>
                           </a:solidFill>
                           <a:latin typeface="Calibri"/>
                         </a:rPr>
@@ -7594,7 +7594,7 @@
                   </a:txBody>
                   <a:tcPr anchor="ctr" marL="100584" marR="100584" marT="36576" marB="36576">
                     <a:solidFill>
-                      <a:srgbClr val="0E1929"/>
+                      <a:srgbClr val="243247"/>
                     </a:solidFill>
                   </a:tcPr>
                 </a:tc>
@@ -7607,7 +7607,7 @@
                       <a:r>
                         <a:rPr sz="1400" b="0" i="0">
                           <a:solidFill>
-                            <a:srgbClr val="C5D2E4"/>
+                            <a:srgbClr val="CBD5E1"/>
                           </a:solidFill>
                           <a:latin typeface="Calibri"/>
                         </a:rPr>
@@ -7617,7 +7617,7 @@
                   </a:txBody>
                   <a:tcPr anchor="ctr" marL="100584" marR="100584" marT="36576" marB="36576">
                     <a:solidFill>
-                      <a:srgbClr val="0E1929"/>
+                      <a:srgbClr val="243247"/>
                     </a:solidFill>
                   </a:tcPr>
                 </a:tc>
@@ -7630,7 +7630,7 @@
                       <a:r>
                         <a:rPr sz="1400" b="0" i="0">
                           <a:solidFill>
-                            <a:srgbClr val="C5D2E4"/>
+                            <a:srgbClr val="CBD5E1"/>
                           </a:solidFill>
                           <a:latin typeface="Calibri"/>
                         </a:rPr>
@@ -7640,7 +7640,7 @@
                   </a:txBody>
                   <a:tcPr anchor="ctr" marL="100584" marR="100584" marT="36576" marB="36576">
                     <a:solidFill>
-                      <a:srgbClr val="0E1929"/>
+                      <a:srgbClr val="243247"/>
                     </a:solidFill>
                   </a:tcPr>
                 </a:tc>
@@ -7653,7 +7653,7 @@
                       <a:r>
                         <a:rPr sz="1400" b="0" i="0">
                           <a:solidFill>
-                            <a:srgbClr val="C5D2E4"/>
+                            <a:srgbClr val="CBD5E1"/>
                           </a:solidFill>
                           <a:latin typeface="Calibri"/>
                         </a:rPr>
@@ -7663,7 +7663,7 @@
                   </a:txBody>
                   <a:tcPr anchor="ctr" marL="100584" marR="100584" marT="36576" marB="36576">
                     <a:solidFill>
-                      <a:srgbClr val="0E1929"/>
+                      <a:srgbClr val="243247"/>
                     </a:solidFill>
                   </a:tcPr>
                 </a:tc>
@@ -7678,7 +7678,7 @@
                       <a:r>
                         <a:rPr sz="1400" b="0" i="0">
                           <a:solidFill>
-                            <a:srgbClr val="C5D2E4"/>
+                            <a:srgbClr val="CBD5E1"/>
                           </a:solidFill>
                           <a:latin typeface="Calibri"/>
                         </a:rPr>
@@ -7688,7 +7688,7 @@
                   </a:txBody>
                   <a:tcPr anchor="ctr" marL="100584" marR="100584" marT="36576" marB="36576">
                     <a:solidFill>
-                      <a:srgbClr val="121E30"/>
+                      <a:srgbClr val="2B3A50"/>
                     </a:solidFill>
                   </a:tcPr>
                 </a:tc>
@@ -7701,7 +7701,7 @@
                       <a:r>
                         <a:rPr sz="1400" b="0" i="0">
                           <a:solidFill>
-                            <a:srgbClr val="C5D2E4"/>
+                            <a:srgbClr val="CBD5E1"/>
                           </a:solidFill>
                           <a:latin typeface="Calibri"/>
                         </a:rPr>
@@ -7711,7 +7711,7 @@
                   </a:txBody>
                   <a:tcPr anchor="ctr" marL="100584" marR="100584" marT="36576" marB="36576">
                     <a:solidFill>
-                      <a:srgbClr val="121E30"/>
+                      <a:srgbClr val="2B3A50"/>
                     </a:solidFill>
                   </a:tcPr>
                 </a:tc>
@@ -7724,7 +7724,7 @@
                       <a:r>
                         <a:rPr sz="1400" b="0" i="0">
                           <a:solidFill>
-                            <a:srgbClr val="C5D2E4"/>
+                            <a:srgbClr val="CBD5E1"/>
                           </a:solidFill>
                           <a:latin typeface="Calibri"/>
                         </a:rPr>
@@ -7734,7 +7734,7 @@
                   </a:txBody>
                   <a:tcPr anchor="ctr" marL="100584" marR="100584" marT="36576" marB="36576">
                     <a:solidFill>
-                      <a:srgbClr val="121E30"/>
+                      <a:srgbClr val="2B3A50"/>
                     </a:solidFill>
                   </a:tcPr>
                 </a:tc>
@@ -7747,7 +7747,7 @@
                       <a:r>
                         <a:rPr sz="1400" b="0" i="0">
                           <a:solidFill>
-                            <a:srgbClr val="C5D2E4"/>
+                            <a:srgbClr val="CBD5E1"/>
                           </a:solidFill>
                           <a:latin typeface="Calibri"/>
                         </a:rPr>
@@ -7757,7 +7757,7 @@
                   </a:txBody>
                   <a:tcPr anchor="ctr" marL="100584" marR="100584" marT="36576" marB="36576">
                     <a:solidFill>
-                      <a:srgbClr val="121E30"/>
+                      <a:srgbClr val="2B3A50"/>
                     </a:solidFill>
                   </a:tcPr>
                 </a:tc>
@@ -7770,7 +7770,7 @@
                       <a:r>
                         <a:rPr sz="1400" b="0" i="0">
                           <a:solidFill>
-                            <a:srgbClr val="C5D2E4"/>
+                            <a:srgbClr val="CBD5E1"/>
                           </a:solidFill>
                           <a:latin typeface="Calibri"/>
                         </a:rPr>
@@ -7780,7 +7780,7 @@
                   </a:txBody>
                   <a:tcPr anchor="ctr" marL="100584" marR="100584" marT="36576" marB="36576">
                     <a:solidFill>
-                      <a:srgbClr val="121E30"/>
+                      <a:srgbClr val="2B3A50"/>
                     </a:solidFill>
                   </a:tcPr>
                 </a:tc>
@@ -7795,7 +7795,7 @@
                       <a:r>
                         <a:rPr sz="1400" b="0" i="0">
                           <a:solidFill>
-                            <a:srgbClr val="C5D2E4"/>
+                            <a:srgbClr val="CBD5E1"/>
                           </a:solidFill>
                           <a:latin typeface="Calibri"/>
                         </a:rPr>
@@ -7805,7 +7805,7 @@
                   </a:txBody>
                   <a:tcPr anchor="ctr" marL="100584" marR="100584" marT="36576" marB="36576">
                     <a:solidFill>
-                      <a:srgbClr val="0E1929"/>
+                      <a:srgbClr val="243247"/>
                     </a:solidFill>
                   </a:tcPr>
                 </a:tc>
@@ -7818,7 +7818,7 @@
                       <a:r>
                         <a:rPr sz="1400" b="0" i="0">
                           <a:solidFill>
-                            <a:srgbClr val="C5D2E4"/>
+                            <a:srgbClr val="CBD5E1"/>
                           </a:solidFill>
                           <a:latin typeface="Calibri"/>
                         </a:rPr>
@@ -7828,7 +7828,7 @@
                   </a:txBody>
                   <a:tcPr anchor="ctr" marL="100584" marR="100584" marT="36576" marB="36576">
                     <a:solidFill>
-                      <a:srgbClr val="0E1929"/>
+                      <a:srgbClr val="243247"/>
                     </a:solidFill>
                   </a:tcPr>
                 </a:tc>
@@ -7841,7 +7841,7 @@
                       <a:r>
                         <a:rPr sz="1400" b="0" i="0">
                           <a:solidFill>
-                            <a:srgbClr val="C5D2E4"/>
+                            <a:srgbClr val="CBD5E1"/>
                           </a:solidFill>
                           <a:latin typeface="Calibri"/>
                         </a:rPr>
@@ -7851,7 +7851,7 @@
                   </a:txBody>
                   <a:tcPr anchor="ctr" marL="100584" marR="100584" marT="36576" marB="36576">
                     <a:solidFill>
-                      <a:srgbClr val="0E1929"/>
+                      <a:srgbClr val="243247"/>
                     </a:solidFill>
                   </a:tcPr>
                 </a:tc>
@@ -7864,7 +7864,7 @@
                       <a:r>
                         <a:rPr sz="1400" b="0" i="0">
                           <a:solidFill>
-                            <a:srgbClr val="C5D2E4"/>
+                            <a:srgbClr val="CBD5E1"/>
                           </a:solidFill>
                           <a:latin typeface="Calibri"/>
                         </a:rPr>
@@ -7874,7 +7874,7 @@
                   </a:txBody>
                   <a:tcPr anchor="ctr" marL="100584" marR="100584" marT="36576" marB="36576">
                     <a:solidFill>
-                      <a:srgbClr val="0E1929"/>
+                      <a:srgbClr val="243247"/>
                     </a:solidFill>
                   </a:tcPr>
                 </a:tc>
@@ -7887,7 +7887,7 @@
                       <a:r>
                         <a:rPr sz="1400" b="0" i="0">
                           <a:solidFill>
-                            <a:srgbClr val="C5D2E4"/>
+                            <a:srgbClr val="CBD5E1"/>
                           </a:solidFill>
                           <a:latin typeface="Calibri"/>
                         </a:rPr>
@@ -7897,7 +7897,7 @@
                   </a:txBody>
                   <a:tcPr anchor="ctr" marL="100584" marR="100584" marT="36576" marB="36576">
                     <a:solidFill>
-                      <a:srgbClr val="0E1929"/>
+                      <a:srgbClr val="243247"/>
                     </a:solidFill>
                   </a:tcPr>
                 </a:tc>
@@ -7912,7 +7912,7 @@
                       <a:r>
                         <a:rPr sz="1400" b="0" i="0">
                           <a:solidFill>
-                            <a:srgbClr val="C5D2E4"/>
+                            <a:srgbClr val="CBD5E1"/>
                           </a:solidFill>
                           <a:latin typeface="Calibri"/>
                         </a:rPr>
@@ -7922,7 +7922,7 @@
                   </a:txBody>
                   <a:tcPr anchor="ctr" marL="100584" marR="100584" marT="36576" marB="36576">
                     <a:solidFill>
-                      <a:srgbClr val="121E30"/>
+                      <a:srgbClr val="2B3A50"/>
                     </a:solidFill>
                   </a:tcPr>
                 </a:tc>
@@ -7935,7 +7935,7 @@
                       <a:r>
                         <a:rPr sz="1400" b="0" i="0">
                           <a:solidFill>
-                            <a:srgbClr val="C5D2E4"/>
+                            <a:srgbClr val="CBD5E1"/>
                           </a:solidFill>
                           <a:latin typeface="Calibri"/>
                         </a:rPr>
@@ -7945,7 +7945,7 @@
                   </a:txBody>
                   <a:tcPr anchor="ctr" marL="100584" marR="100584" marT="36576" marB="36576">
                     <a:solidFill>
-                      <a:srgbClr val="121E30"/>
+                      <a:srgbClr val="2B3A50"/>
                     </a:solidFill>
                   </a:tcPr>
                 </a:tc>
@@ -7958,7 +7958,7 @@
                       <a:r>
                         <a:rPr sz="1400" b="0" i="0">
                           <a:solidFill>
-                            <a:srgbClr val="C5D2E4"/>
+                            <a:srgbClr val="CBD5E1"/>
                           </a:solidFill>
                           <a:latin typeface="Calibri"/>
                         </a:rPr>
@@ -7968,7 +7968,7 @@
                   </a:txBody>
                   <a:tcPr anchor="ctr" marL="100584" marR="100584" marT="36576" marB="36576">
                     <a:solidFill>
-                      <a:srgbClr val="121E30"/>
+                      <a:srgbClr val="2B3A50"/>
                     </a:solidFill>
                   </a:tcPr>
                 </a:tc>
@@ -7981,7 +7981,7 @@
                       <a:r>
                         <a:rPr sz="1400" b="0" i="0">
                           <a:solidFill>
-                            <a:srgbClr val="C5D2E4"/>
+                            <a:srgbClr val="CBD5E1"/>
                           </a:solidFill>
                           <a:latin typeface="Calibri"/>
                         </a:rPr>
@@ -7991,7 +7991,7 @@
                   </a:txBody>
                   <a:tcPr anchor="ctr" marL="100584" marR="100584" marT="36576" marB="36576">
                     <a:solidFill>
-                      <a:srgbClr val="121E30"/>
+                      <a:srgbClr val="2B3A50"/>
                     </a:solidFill>
                   </a:tcPr>
                 </a:tc>
@@ -8004,7 +8004,7 @@
                       <a:r>
                         <a:rPr sz="1400" b="0" i="0">
                           <a:solidFill>
-                            <a:srgbClr val="C5D2E4"/>
+                            <a:srgbClr val="CBD5E1"/>
                           </a:solidFill>
                           <a:latin typeface="Calibri"/>
                         </a:rPr>
@@ -8014,7 +8014,7 @@
                   </a:txBody>
                   <a:tcPr anchor="ctr" marL="100584" marR="100584" marT="36576" marB="36576">
                     <a:solidFill>
-                      <a:srgbClr val="121E30"/>
+                      <a:srgbClr val="2B3A50"/>
                     </a:solidFill>
                   </a:tcPr>
                 </a:tc>
@@ -8029,7 +8029,7 @@
                       <a:r>
                         <a:rPr sz="1400" b="0" i="0">
                           <a:solidFill>
-                            <a:srgbClr val="C5D2E4"/>
+                            <a:srgbClr val="CBD5E1"/>
                           </a:solidFill>
                           <a:latin typeface="Calibri"/>
                         </a:rPr>
@@ -8039,7 +8039,7 @@
                   </a:txBody>
                   <a:tcPr anchor="ctr" marL="100584" marR="100584" marT="36576" marB="36576">
                     <a:solidFill>
-                      <a:srgbClr val="0E1929"/>
+                      <a:srgbClr val="243247"/>
                     </a:solidFill>
                   </a:tcPr>
                 </a:tc>
@@ -8052,7 +8052,7 @@
                       <a:r>
                         <a:rPr sz="1400" b="0" i="0">
                           <a:solidFill>
-                            <a:srgbClr val="C5D2E4"/>
+                            <a:srgbClr val="CBD5E1"/>
                           </a:solidFill>
                           <a:latin typeface="Calibri"/>
                         </a:rPr>
@@ -8062,7 +8062,7 @@
                   </a:txBody>
                   <a:tcPr anchor="ctr" marL="100584" marR="100584" marT="36576" marB="36576">
                     <a:solidFill>
-                      <a:srgbClr val="0E1929"/>
+                      <a:srgbClr val="243247"/>
                     </a:solidFill>
                   </a:tcPr>
                 </a:tc>
@@ -8075,7 +8075,7 @@
                       <a:r>
                         <a:rPr sz="1400" b="0" i="0">
                           <a:solidFill>
-                            <a:srgbClr val="C5D2E4"/>
+                            <a:srgbClr val="CBD5E1"/>
                           </a:solidFill>
                           <a:latin typeface="Calibri"/>
                         </a:rPr>
@@ -8085,7 +8085,7 @@
                   </a:txBody>
                   <a:tcPr anchor="ctr" marL="100584" marR="100584" marT="36576" marB="36576">
                     <a:solidFill>
-                      <a:srgbClr val="0E1929"/>
+                      <a:srgbClr val="243247"/>
                     </a:solidFill>
                   </a:tcPr>
                 </a:tc>
@@ -8098,7 +8098,7 @@
                       <a:r>
                         <a:rPr sz="1400" b="0" i="0">
                           <a:solidFill>
-                            <a:srgbClr val="C5D2E4"/>
+                            <a:srgbClr val="CBD5E1"/>
                           </a:solidFill>
                           <a:latin typeface="Calibri"/>
                         </a:rPr>
@@ -8108,7 +8108,7 @@
                   </a:txBody>
                   <a:tcPr anchor="ctr" marL="100584" marR="100584" marT="36576" marB="36576">
                     <a:solidFill>
-                      <a:srgbClr val="0E1929"/>
+                      <a:srgbClr val="243247"/>
                     </a:solidFill>
                   </a:tcPr>
                 </a:tc>
@@ -8121,7 +8121,7 @@
                       <a:r>
                         <a:rPr sz="1400" b="0" i="0">
                           <a:solidFill>
-                            <a:srgbClr val="C5D2E4"/>
+                            <a:srgbClr val="CBD5E1"/>
                           </a:solidFill>
                           <a:latin typeface="Calibri"/>
                         </a:rPr>
@@ -8131,7 +8131,7 @@
                   </a:txBody>
                   <a:tcPr anchor="ctr" marL="100584" marR="100584" marT="36576" marB="36576">
                     <a:solidFill>
-                      <a:srgbClr val="0E1929"/>
+                      <a:srgbClr val="243247"/>
                     </a:solidFill>
                   </a:tcPr>
                 </a:tc>
@@ -8146,7 +8146,7 @@
                       <a:r>
                         <a:rPr sz="1400" b="0" i="0">
                           <a:solidFill>
-                            <a:srgbClr val="C5D2E4"/>
+                            <a:srgbClr val="CBD5E1"/>
                           </a:solidFill>
                           <a:latin typeface="Calibri"/>
                         </a:rPr>
@@ -8156,7 +8156,7 @@
                   </a:txBody>
                   <a:tcPr anchor="ctr" marL="100584" marR="100584" marT="36576" marB="36576">
                     <a:solidFill>
-                      <a:srgbClr val="121E30"/>
+                      <a:srgbClr val="2B3A50"/>
                     </a:solidFill>
                   </a:tcPr>
                 </a:tc>
@@ -8169,7 +8169,7 @@
                       <a:r>
                         <a:rPr sz="1400" b="0" i="0">
                           <a:solidFill>
-                            <a:srgbClr val="C5D2E4"/>
+                            <a:srgbClr val="CBD5E1"/>
                           </a:solidFill>
                           <a:latin typeface="Calibri"/>
                         </a:rPr>
@@ -8179,7 +8179,7 @@
                   </a:txBody>
                   <a:tcPr anchor="ctr" marL="100584" marR="100584" marT="36576" marB="36576">
                     <a:solidFill>
-                      <a:srgbClr val="121E30"/>
+                      <a:srgbClr val="2B3A50"/>
                     </a:solidFill>
                   </a:tcPr>
                 </a:tc>
@@ -8192,7 +8192,7 @@
                       <a:r>
                         <a:rPr sz="1400" b="0" i="0">
                           <a:solidFill>
-                            <a:srgbClr val="C5D2E4"/>
+                            <a:srgbClr val="CBD5E1"/>
                           </a:solidFill>
                           <a:latin typeface="Calibri"/>
                         </a:rPr>
@@ -8202,7 +8202,7 @@
                   </a:txBody>
                   <a:tcPr anchor="ctr" marL="100584" marR="100584" marT="36576" marB="36576">
                     <a:solidFill>
-                      <a:srgbClr val="121E30"/>
+                      <a:srgbClr val="2B3A50"/>
                     </a:solidFill>
                   </a:tcPr>
                 </a:tc>
@@ -8215,7 +8215,7 @@
                       <a:r>
                         <a:rPr sz="1400" b="0" i="0">
                           <a:solidFill>
-                            <a:srgbClr val="C5D2E4"/>
+                            <a:srgbClr val="CBD5E1"/>
                           </a:solidFill>
                           <a:latin typeface="Calibri"/>
                         </a:rPr>
@@ -8225,7 +8225,7 @@
                   </a:txBody>
                   <a:tcPr anchor="ctr" marL="100584" marR="100584" marT="36576" marB="36576">
                     <a:solidFill>
-                      <a:srgbClr val="121E30"/>
+                      <a:srgbClr val="2B3A50"/>
                     </a:solidFill>
                   </a:tcPr>
                 </a:tc>
@@ -8238,7 +8238,7 @@
                       <a:r>
                         <a:rPr sz="1400" b="0" i="0">
                           <a:solidFill>
-                            <a:srgbClr val="C5D2E4"/>
+                            <a:srgbClr val="CBD5E1"/>
                           </a:solidFill>
                           <a:latin typeface="Calibri"/>
                         </a:rPr>
@@ -8248,7 +8248,7 @@
                   </a:txBody>
                   <a:tcPr anchor="ctr" marL="100584" marR="100584" marT="36576" marB="36576">
                     <a:solidFill>
-                      <a:srgbClr val="121E30"/>
+                      <a:srgbClr val="2B3A50"/>
                     </a:solidFill>
                   </a:tcPr>
                 </a:tc>
@@ -8263,7 +8263,7 @@
                       <a:r>
                         <a:rPr sz="1400" b="0" i="0">
                           <a:solidFill>
-                            <a:srgbClr val="C5D2E4"/>
+                            <a:srgbClr val="CBD5E1"/>
                           </a:solidFill>
                           <a:latin typeface="Calibri"/>
                         </a:rPr>
@@ -8273,7 +8273,7 @@
                   </a:txBody>
                   <a:tcPr anchor="ctr" marL="100584" marR="100584" marT="36576" marB="36576">
                     <a:solidFill>
-                      <a:srgbClr val="0E1929"/>
+                      <a:srgbClr val="243247"/>
                     </a:solidFill>
                   </a:tcPr>
                 </a:tc>
@@ -8286,7 +8286,7 @@
                       <a:r>
                         <a:rPr sz="1400" b="0" i="0">
                           <a:solidFill>
-                            <a:srgbClr val="C5D2E4"/>
+                            <a:srgbClr val="CBD5E1"/>
                           </a:solidFill>
                           <a:latin typeface="Calibri"/>
                         </a:rPr>
@@ -8296,7 +8296,7 @@
                   </a:txBody>
                   <a:tcPr anchor="ctr" marL="100584" marR="100584" marT="36576" marB="36576">
                     <a:solidFill>
-                      <a:srgbClr val="0E1929"/>
+                      <a:srgbClr val="243247"/>
                     </a:solidFill>
                   </a:tcPr>
                 </a:tc>
@@ -8309,7 +8309,7 @@
                       <a:r>
                         <a:rPr sz="1400" b="0" i="0">
                           <a:solidFill>
-                            <a:srgbClr val="C5D2E4"/>
+                            <a:srgbClr val="CBD5E1"/>
                           </a:solidFill>
                           <a:latin typeface="Calibri"/>
                         </a:rPr>
@@ -8319,7 +8319,7 @@
                   </a:txBody>
                   <a:tcPr anchor="ctr" marL="100584" marR="100584" marT="36576" marB="36576">
                     <a:solidFill>
-                      <a:srgbClr val="0E1929"/>
+                      <a:srgbClr val="243247"/>
                     </a:solidFill>
                   </a:tcPr>
                 </a:tc>
@@ -8332,7 +8332,7 @@
                       <a:r>
                         <a:rPr sz="1400" b="0" i="0">
                           <a:solidFill>
-                            <a:srgbClr val="C5D2E4"/>
+                            <a:srgbClr val="CBD5E1"/>
                           </a:solidFill>
                           <a:latin typeface="Calibri"/>
                         </a:rPr>
@@ -8342,7 +8342,7 @@
                   </a:txBody>
                   <a:tcPr anchor="ctr" marL="100584" marR="100584" marT="36576" marB="36576">
                     <a:solidFill>
-                      <a:srgbClr val="0E1929"/>
+                      <a:srgbClr val="243247"/>
                     </a:solidFill>
                   </a:tcPr>
                 </a:tc>
@@ -8355,7 +8355,7 @@
                       <a:r>
                         <a:rPr sz="1400" b="0" i="0">
                           <a:solidFill>
-                            <a:srgbClr val="C5D2E4"/>
+                            <a:srgbClr val="CBD5E1"/>
                           </a:solidFill>
                           <a:latin typeface="Calibri"/>
                         </a:rPr>
@@ -8365,7 +8365,7 @@
                   </a:txBody>
                   <a:tcPr anchor="ctr" marL="100584" marR="100584" marT="36576" marB="36576">
                     <a:solidFill>
-                      <a:srgbClr val="0E1929"/>
+                      <a:srgbClr val="243247"/>
                     </a:solidFill>
                   </a:tcPr>
                 </a:tc>
@@ -8380,7 +8380,7 @@
                       <a:r>
                         <a:rPr sz="1400" b="0" i="0">
                           <a:solidFill>
-                            <a:srgbClr val="C5D2E4"/>
+                            <a:srgbClr val="CBD5E1"/>
                           </a:solidFill>
                           <a:latin typeface="Calibri"/>
                         </a:rPr>
@@ -8390,7 +8390,7 @@
                   </a:txBody>
                   <a:tcPr anchor="ctr" marL="100584" marR="100584" marT="36576" marB="36576">
                     <a:solidFill>
-                      <a:srgbClr val="121E30"/>
+                      <a:srgbClr val="2B3A50"/>
                     </a:solidFill>
                   </a:tcPr>
                 </a:tc>
@@ -8403,7 +8403,7 @@
                       <a:r>
                         <a:rPr sz="1400" b="0" i="0">
                           <a:solidFill>
-                            <a:srgbClr val="C5D2E4"/>
+                            <a:srgbClr val="CBD5E1"/>
                           </a:solidFill>
                           <a:latin typeface="Calibri"/>
                         </a:rPr>
@@ -8413,7 +8413,7 @@
                   </a:txBody>
                   <a:tcPr anchor="ctr" marL="100584" marR="100584" marT="36576" marB="36576">
                     <a:solidFill>
-                      <a:srgbClr val="121E30"/>
+                      <a:srgbClr val="2B3A50"/>
                     </a:solidFill>
                   </a:tcPr>
                 </a:tc>
@@ -8426,7 +8426,7 @@
                       <a:r>
                         <a:rPr sz="1400" b="0" i="0">
                           <a:solidFill>
-                            <a:srgbClr val="C5D2E4"/>
+                            <a:srgbClr val="CBD5E1"/>
                           </a:solidFill>
                           <a:latin typeface="Calibri"/>
                         </a:rPr>
@@ -8436,7 +8436,7 @@
                   </a:txBody>
                   <a:tcPr anchor="ctr" marL="100584" marR="100584" marT="36576" marB="36576">
                     <a:solidFill>
-                      <a:srgbClr val="121E30"/>
+                      <a:srgbClr val="2B3A50"/>
                     </a:solidFill>
                   </a:tcPr>
                 </a:tc>
@@ -8449,7 +8449,7 @@
                       <a:r>
                         <a:rPr sz="1400" b="0" i="0">
                           <a:solidFill>
-                            <a:srgbClr val="C5D2E4"/>
+                            <a:srgbClr val="CBD5E1"/>
                           </a:solidFill>
                           <a:latin typeface="Calibri"/>
                         </a:rPr>
@@ -8459,7 +8459,7 @@
                   </a:txBody>
                   <a:tcPr anchor="ctr" marL="100584" marR="100584" marT="36576" marB="36576">
                     <a:solidFill>
-                      <a:srgbClr val="121E30"/>
+                      <a:srgbClr val="2B3A50"/>
                     </a:solidFill>
                   </a:tcPr>
                 </a:tc>
@@ -8472,7 +8472,7 @@
                       <a:r>
                         <a:rPr sz="1400" b="0" i="0">
                           <a:solidFill>
-                            <a:srgbClr val="C5D2E4"/>
+                            <a:srgbClr val="CBD5E1"/>
                           </a:solidFill>
                           <a:latin typeface="Calibri"/>
                         </a:rPr>
@@ -8482,7 +8482,7 @@
                   </a:txBody>
                   <a:tcPr anchor="ctr" marL="100584" marR="100584" marT="36576" marB="36576">
                     <a:solidFill>
-                      <a:srgbClr val="121E30"/>
+                      <a:srgbClr val="2B3A50"/>
                     </a:solidFill>
                   </a:tcPr>
                 </a:tc>
@@ -8529,7 +8529,7 @@
             <a:r>
               <a:rPr sz="1550" b="0" i="0">
                 <a:solidFill>
-                  <a:srgbClr val="C5D2E4"/>
+                  <a:srgbClr val="CBD5E1"/>
                 </a:solidFill>
                 <a:latin typeface="Calibri"/>
               </a:rPr>
@@ -8553,7 +8553,7 @@
             <a:r>
               <a:rPr sz="1550" b="0" i="0">
                 <a:solidFill>
-                  <a:srgbClr val="C5D2E4"/>
+                  <a:srgbClr val="CBD5E1"/>
                 </a:solidFill>
                 <a:latin typeface="Calibri"/>
               </a:rPr>
@@ -8577,7 +8577,7 @@
             <a:r>
               <a:rPr sz="1550" b="0" i="0">
                 <a:solidFill>
-                  <a:srgbClr val="C5D2E4"/>
+                  <a:srgbClr val="CBD5E1"/>
                 </a:solidFill>
                 <a:latin typeface="Calibri"/>
               </a:rPr>
@@ -8600,7 +8600,7 @@
     <p:bg>
       <p:bgPr>
         <a:solidFill>
-          <a:srgbClr val="0B1220"/>
+          <a:srgbClr val="1E293B"/>
         </a:solidFill>
         <a:effectLst/>
       </p:bgPr>
@@ -8676,7 +8676,7 @@
             <a:r>
               <a:rPr sz="2900" b="1" i="0">
                 <a:solidFill>
-                  <a:srgbClr val="F2F6FB"/>
+                  <a:srgbClr val="F8FAFC"/>
                 </a:solidFill>
                 <a:latin typeface="Calibri Light"/>
               </a:rPr>
@@ -8755,7 +8755,7 @@
             <a:r>
               <a:rPr sz="1100" b="0" i="0">
                 <a:solidFill>
-                  <a:srgbClr val="55688A"/>
+                  <a:srgbClr val="8296B0"/>
                 </a:solidFill>
                 <a:latin typeface="Calibri"/>
               </a:rPr>
@@ -8802,7 +8802,7 @@
             <a:r>
               <a:rPr sz="1750" b="0" i="0">
                 <a:solidFill>
-                  <a:srgbClr val="C5D2E4"/>
+                  <a:srgbClr val="CBD5E1"/>
                 </a:solidFill>
                 <a:latin typeface="Calibri"/>
               </a:rPr>
@@ -8826,7 +8826,7 @@
             <a:r>
               <a:rPr sz="1750" b="0" i="0">
                 <a:solidFill>
-                  <a:srgbClr val="C5D2E4"/>
+                  <a:srgbClr val="CBD5E1"/>
                 </a:solidFill>
                 <a:latin typeface="Calibri"/>
               </a:rPr>
@@ -8850,7 +8850,7 @@
             <a:r>
               <a:rPr sz="1750" b="0" i="0">
                 <a:solidFill>
-                  <a:srgbClr val="C5D2E4"/>
+                  <a:srgbClr val="CBD5E1"/>
                 </a:solidFill>
                 <a:latin typeface="Calibri"/>
               </a:rPr>
@@ -8874,7 +8874,7 @@
             <a:r>
               <a:rPr sz="1750" b="1" i="0">
                 <a:solidFill>
-                  <a:srgbClr val="F2F6FB"/>
+                  <a:srgbClr val="F8FAFC"/>
                 </a:solidFill>
                 <a:latin typeface="Calibri"/>
               </a:rPr>
@@ -8883,7 +8883,7 @@
             <a:r>
               <a:rPr sz="1750" b="0" i="0">
                 <a:solidFill>
-                  <a:srgbClr val="C5D2E4"/>
+                  <a:srgbClr val="CBD5E1"/>
                 </a:solidFill>
                 <a:latin typeface="Calibri"/>
               </a:rPr>
@@ -8940,7 +8940,7 @@
     <p:bg>
       <p:bgPr>
         <a:solidFill>
-          <a:srgbClr val="0B1220"/>
+          <a:srgbClr val="1E293B"/>
         </a:solidFill>
         <a:effectLst/>
       </p:bgPr>
@@ -8978,7 +8978,7 @@
             <a:r>
               <a:rPr sz="1100" b="0" i="0">
                 <a:solidFill>
-                  <a:srgbClr val="55688A"/>
+                  <a:srgbClr val="8296B0"/>
                 </a:solidFill>
                 <a:latin typeface="Calibri"/>
               </a:rPr>
@@ -9012,7 +9012,7 @@
             <a:r>
               <a:rPr sz="3600" b="1" i="0">
                 <a:solidFill>
-                  <a:srgbClr val="F2F6FB"/>
+                  <a:srgbClr val="F8FAFC"/>
                 </a:solidFill>
                 <a:latin typeface="Calibri Light"/>
               </a:rPr>
@@ -9095,7 +9095,7 @@
             <a:r>
               <a:rPr sz="1600" b="0" i="0">
                 <a:solidFill>
-                  <a:srgbClr val="C5D2E4"/>
+                  <a:srgbClr val="CBD5E1"/>
                 </a:solidFill>
                 <a:latin typeface="Calibri"/>
               </a:rPr>
@@ -9111,7 +9111,7 @@
             <a:r>
               <a:rPr sz="1400" b="0" i="0">
                 <a:solidFill>
-                  <a:srgbClr val="93A6C0"/>
+                  <a:srgbClr val="94A3B8"/>
                 </a:solidFill>
                 <a:latin typeface="Calibri"/>
               </a:rPr>
@@ -9146,7 +9146,7 @@
             <a:r>
               <a:rPr sz="1100" b="0" i="0">
                 <a:solidFill>
-                  <a:srgbClr val="55688A"/>
+                  <a:srgbClr val="8296B0"/>
                 </a:solidFill>
                 <a:latin typeface="Calibri"/>
               </a:rPr>
@@ -9169,7 +9169,7 @@
     <p:bg>
       <p:bgPr>
         <a:solidFill>
-          <a:srgbClr val="0B1220"/>
+          <a:srgbClr val="1E293B"/>
         </a:solidFill>
         <a:effectLst/>
       </p:bgPr>
@@ -9245,7 +9245,7 @@
             <a:r>
               <a:rPr sz="2900" b="1" i="0">
                 <a:solidFill>
-                  <a:srgbClr val="F2F6FB"/>
+                  <a:srgbClr val="F8FAFC"/>
                 </a:solidFill>
                 <a:latin typeface="Calibri Light"/>
               </a:rPr>
@@ -9324,7 +9324,7 @@
             <a:r>
               <a:rPr sz="1100" b="0" i="0">
                 <a:solidFill>
-                  <a:srgbClr val="55688A"/>
+                  <a:srgbClr val="8296B0"/>
                 </a:solidFill>
                 <a:latin typeface="Calibri"/>
               </a:rPr>
@@ -9375,7 +9375,7 @@
             <a:r>
               <a:rPr sz="1400" b="0" i="0">
                 <a:solidFill>
-                  <a:srgbClr val="C5D2E4"/>
+                  <a:srgbClr val="CBD5E1"/>
                 </a:solidFill>
                 <a:latin typeface="Calibri"/>
               </a:rPr>
@@ -9403,7 +9403,7 @@
             <a:r>
               <a:rPr sz="1400" b="0" i="0">
                 <a:solidFill>
-                  <a:srgbClr val="C5D2E4"/>
+                  <a:srgbClr val="CBD5E1"/>
                 </a:solidFill>
                 <a:latin typeface="Calibri"/>
               </a:rPr>
@@ -9431,7 +9431,7 @@
             <a:r>
               <a:rPr sz="1400" b="0" i="0">
                 <a:solidFill>
-                  <a:srgbClr val="C5D2E4"/>
+                  <a:srgbClr val="CBD5E1"/>
                 </a:solidFill>
                 <a:latin typeface="Calibri"/>
               </a:rPr>
@@ -9459,7 +9459,7 @@
             <a:r>
               <a:rPr sz="1400" b="0" i="0">
                 <a:solidFill>
-                  <a:srgbClr val="C5D2E4"/>
+                  <a:srgbClr val="CBD5E1"/>
                 </a:solidFill>
                 <a:latin typeface="Calibri"/>
               </a:rPr>
@@ -9487,7 +9487,7 @@
             <a:r>
               <a:rPr sz="1400" b="0" i="0">
                 <a:solidFill>
-                  <a:srgbClr val="C5D2E4"/>
+                  <a:srgbClr val="CBD5E1"/>
                 </a:solidFill>
                 <a:latin typeface="Calibri"/>
               </a:rPr>
@@ -9515,7 +9515,7 @@
             <a:r>
               <a:rPr sz="1400" b="0" i="0">
                 <a:solidFill>
-                  <a:srgbClr val="C5D2E4"/>
+                  <a:srgbClr val="CBD5E1"/>
                 </a:solidFill>
                 <a:latin typeface="Calibri"/>
               </a:rPr>
@@ -9543,7 +9543,7 @@
             <a:r>
               <a:rPr sz="1400" b="0" i="0">
                 <a:solidFill>
-                  <a:srgbClr val="C5D2E4"/>
+                  <a:srgbClr val="CBD5E1"/>
                 </a:solidFill>
                 <a:latin typeface="Calibri"/>
               </a:rPr>
@@ -9571,7 +9571,7 @@
             <a:r>
               <a:rPr sz="1400" b="0" i="0">
                 <a:solidFill>
-                  <a:srgbClr val="C5D2E4"/>
+                  <a:srgbClr val="CBD5E1"/>
                 </a:solidFill>
                 <a:latin typeface="Calibri"/>
               </a:rPr>
@@ -9594,7 +9594,7 @@
     <p:bg>
       <p:bgPr>
         <a:solidFill>
-          <a:srgbClr val="0B1220"/>
+          <a:srgbClr val="1E293B"/>
         </a:solidFill>
         <a:effectLst/>
       </p:bgPr>
@@ -9670,7 +9670,7 @@
             <a:r>
               <a:rPr sz="2900" b="1" i="0">
                 <a:solidFill>
-                  <a:srgbClr val="F2F6FB"/>
+                  <a:srgbClr val="F8FAFC"/>
                 </a:solidFill>
                 <a:latin typeface="Calibri Light"/>
               </a:rPr>
@@ -9749,7 +9749,7 @@
             <a:r>
               <a:rPr sz="1100" b="0" i="0">
                 <a:solidFill>
-                  <a:srgbClr val="55688A"/>
+                  <a:srgbClr val="8296B0"/>
                 </a:solidFill>
                 <a:latin typeface="Calibri"/>
               </a:rPr>
@@ -9838,7 +9838,7 @@
                   </a:txBody>
                   <a:tcPr anchor="ctr" marL="100584" marR="100584" marT="36576" marB="36576">
                     <a:solidFill>
-                      <a:srgbClr val="12303A"/>
+                      <a:srgbClr val="334155"/>
                     </a:solidFill>
                   </a:tcPr>
                 </a:tc>
@@ -9861,7 +9861,7 @@
                   </a:txBody>
                   <a:tcPr anchor="ctr" marL="100584" marR="100584" marT="36576" marB="36576">
                     <a:solidFill>
-                      <a:srgbClr val="12303A"/>
+                      <a:srgbClr val="334155"/>
                     </a:solidFill>
                   </a:tcPr>
                 </a:tc>
@@ -9884,7 +9884,7 @@
                   </a:txBody>
                   <a:tcPr anchor="ctr" marL="100584" marR="100584" marT="36576" marB="36576">
                     <a:solidFill>
-                      <a:srgbClr val="12303A"/>
+                      <a:srgbClr val="334155"/>
                     </a:solidFill>
                   </a:tcPr>
                 </a:tc>
@@ -9907,7 +9907,7 @@
                   </a:txBody>
                   <a:tcPr anchor="ctr" marL="100584" marR="100584" marT="36576" marB="36576">
                     <a:solidFill>
-                      <a:srgbClr val="12303A"/>
+                      <a:srgbClr val="334155"/>
                     </a:solidFill>
                   </a:tcPr>
                 </a:tc>
@@ -9930,7 +9930,7 @@
                   </a:txBody>
                   <a:tcPr anchor="ctr" marL="100584" marR="100584" marT="36576" marB="36576">
                     <a:solidFill>
-                      <a:srgbClr val="12303A"/>
+                      <a:srgbClr val="334155"/>
                     </a:solidFill>
                   </a:tcPr>
                 </a:tc>
@@ -9953,7 +9953,7 @@
                   </a:txBody>
                   <a:tcPr anchor="ctr" marL="100584" marR="100584" marT="36576" marB="36576">
                     <a:solidFill>
-                      <a:srgbClr val="12303A"/>
+                      <a:srgbClr val="334155"/>
                     </a:solidFill>
                   </a:tcPr>
                 </a:tc>
@@ -9968,7 +9968,7 @@
                       <a:r>
                         <a:rPr sz="1350" b="0" i="0">
                           <a:solidFill>
-                            <a:srgbClr val="C5D2E4"/>
+                            <a:srgbClr val="CBD5E1"/>
                           </a:solidFill>
                           <a:latin typeface="Calibri"/>
                         </a:rPr>
@@ -9978,7 +9978,7 @@
                   </a:txBody>
                   <a:tcPr anchor="ctr" marL="100584" marR="100584" marT="36576" marB="36576">
                     <a:solidFill>
-                      <a:srgbClr val="0E1929"/>
+                      <a:srgbClr val="243247"/>
                     </a:solidFill>
                   </a:tcPr>
                 </a:tc>
@@ -9991,7 +9991,7 @@
                       <a:r>
                         <a:rPr sz="1350" b="0" i="0">
                           <a:solidFill>
-                            <a:srgbClr val="C5D2E4"/>
+                            <a:srgbClr val="CBD5E1"/>
                           </a:solidFill>
                           <a:latin typeface="Calibri"/>
                         </a:rPr>
@@ -10001,7 +10001,7 @@
                   </a:txBody>
                   <a:tcPr anchor="ctr" marL="100584" marR="100584" marT="36576" marB="36576">
                     <a:solidFill>
-                      <a:srgbClr val="0E1929"/>
+                      <a:srgbClr val="243247"/>
                     </a:solidFill>
                   </a:tcPr>
                 </a:tc>
@@ -10014,7 +10014,7 @@
                       <a:r>
                         <a:rPr sz="1350" b="0" i="0">
                           <a:solidFill>
-                            <a:srgbClr val="C5D2E4"/>
+                            <a:srgbClr val="CBD5E1"/>
                           </a:solidFill>
                           <a:latin typeface="Calibri"/>
                         </a:rPr>
@@ -10024,7 +10024,7 @@
                   </a:txBody>
                   <a:tcPr anchor="ctr" marL="100584" marR="100584" marT="36576" marB="36576">
                     <a:solidFill>
-                      <a:srgbClr val="0E1929"/>
+                      <a:srgbClr val="243247"/>
                     </a:solidFill>
                   </a:tcPr>
                 </a:tc>
@@ -10037,7 +10037,7 @@
                       <a:r>
                         <a:rPr sz="1350" b="0" i="0">
                           <a:solidFill>
-                            <a:srgbClr val="C5D2E4"/>
+                            <a:srgbClr val="CBD5E1"/>
                           </a:solidFill>
                           <a:latin typeface="Calibri"/>
                         </a:rPr>
@@ -10047,7 +10047,7 @@
                   </a:txBody>
                   <a:tcPr anchor="ctr" marL="100584" marR="100584" marT="36576" marB="36576">
                     <a:solidFill>
-                      <a:srgbClr val="0E1929"/>
+                      <a:srgbClr val="243247"/>
                     </a:solidFill>
                   </a:tcPr>
                 </a:tc>
@@ -10060,7 +10060,7 @@
                       <a:r>
                         <a:rPr sz="1350" b="0" i="0">
                           <a:solidFill>
-                            <a:srgbClr val="C5D2E4"/>
+                            <a:srgbClr val="CBD5E1"/>
                           </a:solidFill>
                           <a:latin typeface="Calibri"/>
                         </a:rPr>
@@ -10070,7 +10070,7 @@
                   </a:txBody>
                   <a:tcPr anchor="ctr" marL="100584" marR="100584" marT="36576" marB="36576">
                     <a:solidFill>
-                      <a:srgbClr val="0E1929"/>
+                      <a:srgbClr val="243247"/>
                     </a:solidFill>
                   </a:tcPr>
                 </a:tc>
@@ -10083,7 +10083,7 @@
                       <a:r>
                         <a:rPr sz="1350" b="0" i="0">
                           <a:solidFill>
-                            <a:srgbClr val="C5D2E4"/>
+                            <a:srgbClr val="CBD5E1"/>
                           </a:solidFill>
                           <a:latin typeface="Calibri"/>
                         </a:rPr>
@@ -10093,7 +10093,7 @@
                   </a:txBody>
                   <a:tcPr anchor="ctr" marL="100584" marR="100584" marT="36576" marB="36576">
                     <a:solidFill>
-                      <a:srgbClr val="0E1929"/>
+                      <a:srgbClr val="243247"/>
                     </a:solidFill>
                   </a:tcPr>
                 </a:tc>
@@ -10108,7 +10108,7 @@
                       <a:r>
                         <a:rPr sz="1350" b="0" i="0">
                           <a:solidFill>
-                            <a:srgbClr val="C5D2E4"/>
+                            <a:srgbClr val="CBD5E1"/>
                           </a:solidFill>
                           <a:latin typeface="Calibri"/>
                         </a:rPr>
@@ -10118,7 +10118,7 @@
                   </a:txBody>
                   <a:tcPr anchor="ctr" marL="100584" marR="100584" marT="36576" marB="36576">
                     <a:solidFill>
-                      <a:srgbClr val="121E30"/>
+                      <a:srgbClr val="2B3A50"/>
                     </a:solidFill>
                   </a:tcPr>
                 </a:tc>
@@ -10131,7 +10131,7 @@
                       <a:r>
                         <a:rPr sz="1350" b="0" i="0">
                           <a:solidFill>
-                            <a:srgbClr val="C5D2E4"/>
+                            <a:srgbClr val="CBD5E1"/>
                           </a:solidFill>
                           <a:latin typeface="Calibri"/>
                         </a:rPr>
@@ -10141,7 +10141,7 @@
                   </a:txBody>
                   <a:tcPr anchor="ctr" marL="100584" marR="100584" marT="36576" marB="36576">
                     <a:solidFill>
-                      <a:srgbClr val="121E30"/>
+                      <a:srgbClr val="2B3A50"/>
                     </a:solidFill>
                   </a:tcPr>
                 </a:tc>
@@ -10154,7 +10154,7 @@
                       <a:r>
                         <a:rPr sz="1350" b="0" i="0">
                           <a:solidFill>
-                            <a:srgbClr val="C5D2E4"/>
+                            <a:srgbClr val="CBD5E1"/>
                           </a:solidFill>
                           <a:latin typeface="Calibri"/>
                         </a:rPr>
@@ -10164,7 +10164,7 @@
                   </a:txBody>
                   <a:tcPr anchor="ctr" marL="100584" marR="100584" marT="36576" marB="36576">
                     <a:solidFill>
-                      <a:srgbClr val="121E30"/>
+                      <a:srgbClr val="2B3A50"/>
                     </a:solidFill>
                   </a:tcPr>
                 </a:tc>
@@ -10177,7 +10177,7 @@
                       <a:r>
                         <a:rPr sz="1350" b="0" i="0">
                           <a:solidFill>
-                            <a:srgbClr val="C5D2E4"/>
+                            <a:srgbClr val="CBD5E1"/>
                           </a:solidFill>
                           <a:latin typeface="Calibri"/>
                         </a:rPr>
@@ -10187,7 +10187,7 @@
                   </a:txBody>
                   <a:tcPr anchor="ctr" marL="100584" marR="100584" marT="36576" marB="36576">
                     <a:solidFill>
-                      <a:srgbClr val="121E30"/>
+                      <a:srgbClr val="2B3A50"/>
                     </a:solidFill>
                   </a:tcPr>
                 </a:tc>
@@ -10200,7 +10200,7 @@
                       <a:r>
                         <a:rPr sz="1350" b="0" i="0">
                           <a:solidFill>
-                            <a:srgbClr val="C5D2E4"/>
+                            <a:srgbClr val="CBD5E1"/>
                           </a:solidFill>
                           <a:latin typeface="Calibri"/>
                         </a:rPr>
@@ -10210,7 +10210,7 @@
                   </a:txBody>
                   <a:tcPr anchor="ctr" marL="100584" marR="100584" marT="36576" marB="36576">
                     <a:solidFill>
-                      <a:srgbClr val="121E30"/>
+                      <a:srgbClr val="2B3A50"/>
                     </a:solidFill>
                   </a:tcPr>
                 </a:tc>
@@ -10223,7 +10223,7 @@
                       <a:r>
                         <a:rPr sz="1350" b="0" i="0">
                           <a:solidFill>
-                            <a:srgbClr val="C5D2E4"/>
+                            <a:srgbClr val="CBD5E1"/>
                           </a:solidFill>
                           <a:latin typeface="Calibri"/>
                         </a:rPr>
@@ -10233,7 +10233,7 @@
                   </a:txBody>
                   <a:tcPr anchor="ctr" marL="100584" marR="100584" marT="36576" marB="36576">
                     <a:solidFill>
-                      <a:srgbClr val="121E30"/>
+                      <a:srgbClr val="2B3A50"/>
                     </a:solidFill>
                   </a:tcPr>
                 </a:tc>
@@ -10248,7 +10248,7 @@
                       <a:r>
                         <a:rPr sz="1350" b="0" i="0">
                           <a:solidFill>
-                            <a:srgbClr val="C5D2E4"/>
+                            <a:srgbClr val="CBD5E1"/>
                           </a:solidFill>
                           <a:latin typeface="Calibri"/>
                         </a:rPr>
@@ -10258,7 +10258,7 @@
                   </a:txBody>
                   <a:tcPr anchor="ctr" marL="100584" marR="100584" marT="36576" marB="36576">
                     <a:solidFill>
-                      <a:srgbClr val="0E1929"/>
+                      <a:srgbClr val="243247"/>
                     </a:solidFill>
                   </a:tcPr>
                 </a:tc>
@@ -10271,7 +10271,7 @@
                       <a:r>
                         <a:rPr sz="1350" b="0" i="0">
                           <a:solidFill>
-                            <a:srgbClr val="C5D2E4"/>
+                            <a:srgbClr val="CBD5E1"/>
                           </a:solidFill>
                           <a:latin typeface="Calibri"/>
                         </a:rPr>
@@ -10281,7 +10281,7 @@
                   </a:txBody>
                   <a:tcPr anchor="ctr" marL="100584" marR="100584" marT="36576" marB="36576">
                     <a:solidFill>
-                      <a:srgbClr val="0E1929"/>
+                      <a:srgbClr val="243247"/>
                     </a:solidFill>
                   </a:tcPr>
                 </a:tc>
@@ -10294,7 +10294,7 @@
                       <a:r>
                         <a:rPr sz="1350" b="0" i="0">
                           <a:solidFill>
-                            <a:srgbClr val="C5D2E4"/>
+                            <a:srgbClr val="CBD5E1"/>
                           </a:solidFill>
                           <a:latin typeface="Calibri"/>
                         </a:rPr>
@@ -10304,7 +10304,7 @@
                   </a:txBody>
                   <a:tcPr anchor="ctr" marL="100584" marR="100584" marT="36576" marB="36576">
                     <a:solidFill>
-                      <a:srgbClr val="0E1929"/>
+                      <a:srgbClr val="243247"/>
                     </a:solidFill>
                   </a:tcPr>
                 </a:tc>
@@ -10317,7 +10317,7 @@
                       <a:r>
                         <a:rPr sz="1350" b="0" i="0">
                           <a:solidFill>
-                            <a:srgbClr val="C5D2E4"/>
+                            <a:srgbClr val="CBD5E1"/>
                           </a:solidFill>
                           <a:latin typeface="Calibri"/>
                         </a:rPr>
@@ -10327,7 +10327,7 @@
                   </a:txBody>
                   <a:tcPr anchor="ctr" marL="100584" marR="100584" marT="36576" marB="36576">
                     <a:solidFill>
-                      <a:srgbClr val="0E1929"/>
+                      <a:srgbClr val="243247"/>
                     </a:solidFill>
                   </a:tcPr>
                 </a:tc>
@@ -10340,7 +10340,7 @@
                       <a:r>
                         <a:rPr sz="1350" b="0" i="0">
                           <a:solidFill>
-                            <a:srgbClr val="C5D2E4"/>
+                            <a:srgbClr val="CBD5E1"/>
                           </a:solidFill>
                           <a:latin typeface="Calibri"/>
                         </a:rPr>
@@ -10350,7 +10350,7 @@
                   </a:txBody>
                   <a:tcPr anchor="ctr" marL="100584" marR="100584" marT="36576" marB="36576">
                     <a:solidFill>
-                      <a:srgbClr val="0E1929"/>
+                      <a:srgbClr val="243247"/>
                     </a:solidFill>
                   </a:tcPr>
                 </a:tc>
@@ -10363,7 +10363,7 @@
                       <a:r>
                         <a:rPr sz="1350" b="0" i="0">
                           <a:solidFill>
-                            <a:srgbClr val="C5D2E4"/>
+                            <a:srgbClr val="CBD5E1"/>
                           </a:solidFill>
                           <a:latin typeface="Calibri"/>
                         </a:rPr>
@@ -10373,7 +10373,7 @@
                   </a:txBody>
                   <a:tcPr anchor="ctr" marL="100584" marR="100584" marT="36576" marB="36576">
                     <a:solidFill>
-                      <a:srgbClr val="0E1929"/>
+                      <a:srgbClr val="243247"/>
                     </a:solidFill>
                   </a:tcPr>
                 </a:tc>
@@ -10388,7 +10388,7 @@
                       <a:r>
                         <a:rPr sz="1350" b="1" i="0">
                           <a:solidFill>
-                            <a:srgbClr val="F2F6FB"/>
+                            <a:srgbClr val="F8FAFC"/>
                           </a:solidFill>
                           <a:latin typeface="Calibri"/>
                         </a:rPr>
@@ -10398,7 +10398,7 @@
                   </a:txBody>
                   <a:tcPr anchor="ctr" marL="100584" marR="100584" marT="36576" marB="36576">
                     <a:solidFill>
-                      <a:srgbClr val="12303A"/>
+                      <a:srgbClr val="334155"/>
                     </a:solidFill>
                   </a:tcPr>
                 </a:tc>
@@ -10411,7 +10411,7 @@
                       <a:r>
                         <a:rPr sz="1350" b="1" i="0">
                           <a:solidFill>
-                            <a:srgbClr val="F2F6FB"/>
+                            <a:srgbClr val="F8FAFC"/>
                           </a:solidFill>
                           <a:latin typeface="Calibri"/>
                         </a:rPr>
@@ -10421,7 +10421,7 @@
                   </a:txBody>
                   <a:tcPr anchor="ctr" marL="100584" marR="100584" marT="36576" marB="36576">
                     <a:solidFill>
-                      <a:srgbClr val="12303A"/>
+                      <a:srgbClr val="334155"/>
                     </a:solidFill>
                   </a:tcPr>
                 </a:tc>
@@ -10434,7 +10434,7 @@
                       <a:r>
                         <a:rPr sz="1350" b="1" i="0">
                           <a:solidFill>
-                            <a:srgbClr val="F2F6FB"/>
+                            <a:srgbClr val="F8FAFC"/>
                           </a:solidFill>
                           <a:latin typeface="Calibri"/>
                         </a:rPr>
@@ -10444,7 +10444,7 @@
                   </a:txBody>
                   <a:tcPr anchor="ctr" marL="100584" marR="100584" marT="36576" marB="36576">
                     <a:solidFill>
-                      <a:srgbClr val="12303A"/>
+                      <a:srgbClr val="334155"/>
                     </a:solidFill>
                   </a:tcPr>
                 </a:tc>
@@ -10457,7 +10457,7 @@
                       <a:r>
                         <a:rPr sz="1350" b="1" i="0">
                           <a:solidFill>
-                            <a:srgbClr val="F2F6FB"/>
+                            <a:srgbClr val="F8FAFC"/>
                           </a:solidFill>
                           <a:latin typeface="Calibri"/>
                         </a:rPr>
@@ -10467,7 +10467,7 @@
                   </a:txBody>
                   <a:tcPr anchor="ctr" marL="100584" marR="100584" marT="36576" marB="36576">
                     <a:solidFill>
-                      <a:srgbClr val="12303A"/>
+                      <a:srgbClr val="334155"/>
                     </a:solidFill>
                   </a:tcPr>
                 </a:tc>
@@ -10480,7 +10480,7 @@
                       <a:r>
                         <a:rPr sz="1350" b="1" i="0">
                           <a:solidFill>
-                            <a:srgbClr val="F2F6FB"/>
+                            <a:srgbClr val="F8FAFC"/>
                           </a:solidFill>
                           <a:latin typeface="Calibri"/>
                         </a:rPr>
@@ -10490,7 +10490,7 @@
                   </a:txBody>
                   <a:tcPr anchor="ctr" marL="100584" marR="100584" marT="36576" marB="36576">
                     <a:solidFill>
-                      <a:srgbClr val="12303A"/>
+                      <a:srgbClr val="334155"/>
                     </a:solidFill>
                   </a:tcPr>
                 </a:tc>
@@ -10503,7 +10503,7 @@
                       <a:r>
                         <a:rPr sz="1350" b="1" i="0">
                           <a:solidFill>
-                            <a:srgbClr val="F2F6FB"/>
+                            <a:srgbClr val="F8FAFC"/>
                           </a:solidFill>
                           <a:latin typeface="Calibri"/>
                         </a:rPr>
@@ -10513,7 +10513,7 @@
                   </a:txBody>
                   <a:tcPr anchor="ctr" marL="100584" marR="100584" marT="36576" marB="36576">
                     <a:solidFill>
-                      <a:srgbClr val="12303A"/>
+                      <a:srgbClr val="334155"/>
                     </a:solidFill>
                   </a:tcPr>
                 </a:tc>
@@ -10560,7 +10560,7 @@
             <a:r>
               <a:rPr sz="1500" b="0" i="0">
                 <a:solidFill>
-                  <a:srgbClr val="C5D2E4"/>
+                  <a:srgbClr val="CBD5E1"/>
                 </a:solidFill>
                 <a:latin typeface="Calibri"/>
               </a:rPr>
@@ -10584,7 +10584,7 @@
             <a:r>
               <a:rPr sz="1500" b="0" i="0">
                 <a:solidFill>
-                  <a:srgbClr val="C5D2E4"/>
+                  <a:srgbClr val="CBD5E1"/>
                 </a:solidFill>
                 <a:latin typeface="Calibri"/>
               </a:rPr>
@@ -10608,7 +10608,7 @@
             <a:r>
               <a:rPr sz="1500" b="0" i="0">
                 <a:solidFill>
-                  <a:srgbClr val="C5D2E4"/>
+                  <a:srgbClr val="CBD5E1"/>
                 </a:solidFill>
                 <a:latin typeface="Calibri"/>
               </a:rPr>
@@ -10631,7 +10631,7 @@
     <p:bg>
       <p:bgPr>
         <a:solidFill>
-          <a:srgbClr val="0B1220"/>
+          <a:srgbClr val="1E293B"/>
         </a:solidFill>
         <a:effectLst/>
       </p:bgPr>
@@ -10707,7 +10707,7 @@
             <a:r>
               <a:rPr sz="2800" b="1" i="0">
                 <a:solidFill>
-                  <a:srgbClr val="F2F6FB"/>
+                  <a:srgbClr val="F8FAFC"/>
                 </a:solidFill>
                 <a:latin typeface="Calibri Light"/>
               </a:rPr>
@@ -10786,7 +10786,7 @@
             <a:r>
               <a:rPr sz="1100" b="0" i="0">
                 <a:solidFill>
-                  <a:srgbClr val="55688A"/>
+                  <a:srgbClr val="8296B0"/>
                 </a:solidFill>
                 <a:latin typeface="Calibri"/>
               </a:rPr>
@@ -10833,7 +10833,7 @@
             <a:r>
               <a:rPr sz="1650" b="0" i="0">
                 <a:solidFill>
-                  <a:srgbClr val="C5D2E4"/>
+                  <a:srgbClr val="CBD5E1"/>
                 </a:solidFill>
                 <a:latin typeface="Calibri"/>
               </a:rPr>
@@ -10851,7 +10851,7 @@
             <a:r>
               <a:rPr sz="1650" b="0" i="0">
                 <a:solidFill>
-                  <a:srgbClr val="C5D2E4"/>
+                  <a:srgbClr val="CBD5E1"/>
                 </a:solidFill>
                 <a:latin typeface="Calibri"/>
               </a:rPr>
@@ -10869,7 +10869,7 @@
             <a:r>
               <a:rPr sz="1650" b="0" i="0">
                 <a:solidFill>
-                  <a:srgbClr val="C5D2E4"/>
+                  <a:srgbClr val="CBD5E1"/>
                 </a:solidFill>
                 <a:latin typeface="Calibri"/>
               </a:rPr>
@@ -10887,7 +10887,7 @@
             <a:r>
               <a:rPr sz="1650" b="0" i="0">
                 <a:solidFill>
-                  <a:srgbClr val="C5D2E4"/>
+                  <a:srgbClr val="CBD5E1"/>
                 </a:solidFill>
                 <a:latin typeface="Calibri"/>
               </a:rPr>
@@ -10920,7 +10920,7 @@
             <a:r>
               <a:rPr sz="1650" b="0" i="0">
                 <a:solidFill>
-                  <a:srgbClr val="C5D2E4"/>
+                  <a:srgbClr val="CBD5E1"/>
                 </a:solidFill>
                 <a:latin typeface="Calibri"/>
               </a:rPr>
@@ -10944,7 +10944,7 @@
             <a:r>
               <a:rPr sz="1650" b="0" i="0">
                 <a:solidFill>
-                  <a:srgbClr val="C5D2E4"/>
+                  <a:srgbClr val="CBD5E1"/>
                 </a:solidFill>
                 <a:latin typeface="Calibri"/>
               </a:rPr>
@@ -10968,7 +10968,7 @@
             <a:r>
               <a:rPr sz="1650" b="0" i="0">
                 <a:solidFill>
-                  <a:srgbClr val="C5D2E4"/>
+                  <a:srgbClr val="CBD5E1"/>
                 </a:solidFill>
                 <a:latin typeface="Calibri"/>
               </a:rPr>
@@ -10991,7 +10991,7 @@
     <p:bg>
       <p:bgPr>
         <a:solidFill>
-          <a:srgbClr val="0B1220"/>
+          <a:srgbClr val="1E293B"/>
         </a:solidFill>
         <a:effectLst/>
       </p:bgPr>
@@ -11067,7 +11067,7 @@
             <a:r>
               <a:rPr sz="2900" b="1" i="0">
                 <a:solidFill>
-                  <a:srgbClr val="F2F6FB"/>
+                  <a:srgbClr val="F8FAFC"/>
                 </a:solidFill>
                 <a:latin typeface="Calibri Light"/>
               </a:rPr>
@@ -11146,7 +11146,7 @@
             <a:r>
               <a:rPr sz="1100" b="0" i="0">
                 <a:solidFill>
-                  <a:srgbClr val="55688A"/>
+                  <a:srgbClr val="8296B0"/>
                 </a:solidFill>
                 <a:latin typeface="Calibri"/>
               </a:rPr>
@@ -11193,7 +11193,7 @@
             <a:r>
               <a:rPr sz="1800" b="1" i="0">
                 <a:solidFill>
-                  <a:srgbClr val="F2F6FB"/>
+                  <a:srgbClr val="F8FAFC"/>
                 </a:solidFill>
                 <a:latin typeface="Calibri"/>
               </a:rPr>
@@ -11202,7 +11202,7 @@
             <a:r>
               <a:rPr sz="1800" b="0" i="0">
                 <a:solidFill>
-                  <a:srgbClr val="C5D2E4"/>
+                  <a:srgbClr val="CBD5E1"/>
                 </a:solidFill>
                 <a:latin typeface="Calibri"/>
               </a:rPr>
@@ -11226,7 +11226,7 @@
             <a:r>
               <a:rPr sz="1800" b="1" i="0">
                 <a:solidFill>
-                  <a:srgbClr val="F2F6FB"/>
+                  <a:srgbClr val="F8FAFC"/>
                 </a:solidFill>
                 <a:latin typeface="Calibri"/>
               </a:rPr>
@@ -11235,7 +11235,7 @@
             <a:r>
               <a:rPr sz="1800" b="0" i="0">
                 <a:solidFill>
-                  <a:srgbClr val="C5D2E4"/>
+                  <a:srgbClr val="CBD5E1"/>
                 </a:solidFill>
                 <a:latin typeface="Calibri"/>
               </a:rPr>
@@ -11259,7 +11259,7 @@
             <a:r>
               <a:rPr sz="1800" b="1" i="0">
                 <a:solidFill>
-                  <a:srgbClr val="F2F6FB"/>
+                  <a:srgbClr val="F8FAFC"/>
                 </a:solidFill>
                 <a:latin typeface="Calibri"/>
               </a:rPr>
@@ -11268,7 +11268,7 @@
             <a:r>
               <a:rPr sz="1800" b="0" i="0">
                 <a:solidFill>
-                  <a:srgbClr val="C5D2E4"/>
+                  <a:srgbClr val="CBD5E1"/>
                 </a:solidFill>
                 <a:latin typeface="Calibri"/>
               </a:rPr>
@@ -11292,7 +11292,7 @@
             <a:r>
               <a:rPr sz="1800" b="1" i="0">
                 <a:solidFill>
-                  <a:srgbClr val="F2F6FB"/>
+                  <a:srgbClr val="F8FAFC"/>
                 </a:solidFill>
                 <a:latin typeface="Calibri"/>
               </a:rPr>
@@ -11301,7 +11301,7 @@
             <a:r>
               <a:rPr sz="1800" b="0" i="0">
                 <a:solidFill>
-                  <a:srgbClr val="C5D2E4"/>
+                  <a:srgbClr val="CBD5E1"/>
                 </a:solidFill>
                 <a:latin typeface="Calibri"/>
               </a:rPr>
@@ -11325,7 +11325,7 @@
             <a:r>
               <a:rPr sz="1800" b="0" i="0">
                 <a:solidFill>
-                  <a:srgbClr val="C5D2E4"/>
+                  <a:srgbClr val="CBD5E1"/>
                 </a:solidFill>
                 <a:latin typeface="Calibri"/>
               </a:rPr>
@@ -11348,7 +11348,7 @@
     <p:bg>
       <p:bgPr>
         <a:solidFill>
-          <a:srgbClr val="0B1220"/>
+          <a:srgbClr val="1E293B"/>
         </a:solidFill>
         <a:effectLst/>
       </p:bgPr>
@@ -11410,7 +11410,7 @@
             <a:r>
               <a:rPr sz="1100" b="0" i="0">
                 <a:solidFill>
-                  <a:srgbClr val="55688A"/>
+                  <a:srgbClr val="8296B0"/>
                 </a:solidFill>
                 <a:latin typeface="Calibri"/>
               </a:rPr>
@@ -11433,7 +11433,7 @@
     <p:bg>
       <p:bgPr>
         <a:solidFill>
-          <a:srgbClr val="0B1220"/>
+          <a:srgbClr val="1E293B"/>
         </a:solidFill>
         <a:effectLst/>
       </p:bgPr>
@@ -11509,7 +11509,7 @@
             <a:r>
               <a:rPr sz="2900" b="1" i="0">
                 <a:solidFill>
-                  <a:srgbClr val="F2F6FB"/>
+                  <a:srgbClr val="F8FAFC"/>
                 </a:solidFill>
                 <a:latin typeface="Calibri Light"/>
               </a:rPr>
@@ -11588,7 +11588,7 @@
             <a:r>
               <a:rPr sz="1100" b="0" i="0">
                 <a:solidFill>
-                  <a:srgbClr val="55688A"/>
+                  <a:srgbClr val="8296B0"/>
                 </a:solidFill>
                 <a:latin typeface="Calibri"/>
               </a:rPr>
@@ -11640,7 +11640,7 @@
                   </a:txBody>
                   <a:tcPr anchor="ctr" marL="100584" marR="100584" marT="36576" marB="36576">
                     <a:solidFill>
-                      <a:srgbClr val="12303A"/>
+                      <a:srgbClr val="334155"/>
                     </a:solidFill>
                   </a:tcPr>
                 </a:tc>
@@ -11663,7 +11663,7 @@
                   </a:txBody>
                   <a:tcPr anchor="ctr" marL="100584" marR="100584" marT="36576" marB="36576">
                     <a:solidFill>
-                      <a:srgbClr val="12303A"/>
+                      <a:srgbClr val="334155"/>
                     </a:solidFill>
                   </a:tcPr>
                 </a:tc>
@@ -11686,7 +11686,7 @@
                   </a:txBody>
                   <a:tcPr anchor="ctr" marL="100584" marR="100584" marT="36576" marB="36576">
                     <a:solidFill>
-                      <a:srgbClr val="12303A"/>
+                      <a:srgbClr val="334155"/>
                     </a:solidFill>
                   </a:tcPr>
                 </a:tc>
@@ -11701,7 +11701,7 @@
                       <a:r>
                         <a:rPr sz="1500" b="0" i="0">
                           <a:solidFill>
-                            <a:srgbClr val="C5D2E4"/>
+                            <a:srgbClr val="CBD5E1"/>
                           </a:solidFill>
                           <a:latin typeface="Calibri"/>
                         </a:rPr>
@@ -11711,7 +11711,7 @@
                   </a:txBody>
                   <a:tcPr anchor="ctr" marL="100584" marR="100584" marT="36576" marB="36576">
                     <a:solidFill>
-                      <a:srgbClr val="0E1929"/>
+                      <a:srgbClr val="243247"/>
                     </a:solidFill>
                   </a:tcPr>
                 </a:tc>
@@ -11724,7 +11724,7 @@
                       <a:r>
                         <a:rPr sz="1500" b="0" i="0">
                           <a:solidFill>
-                            <a:srgbClr val="C5D2E4"/>
+                            <a:srgbClr val="CBD5E1"/>
                           </a:solidFill>
                           <a:latin typeface="Calibri"/>
                         </a:rPr>
@@ -11734,7 +11734,7 @@
                   </a:txBody>
                   <a:tcPr anchor="ctr" marL="100584" marR="100584" marT="36576" marB="36576">
                     <a:solidFill>
-                      <a:srgbClr val="0E1929"/>
+                      <a:srgbClr val="243247"/>
                     </a:solidFill>
                   </a:tcPr>
                 </a:tc>
@@ -11747,7 +11747,7 @@
                       <a:r>
                         <a:rPr sz="1500" b="0" i="0">
                           <a:solidFill>
-                            <a:srgbClr val="C5D2E4"/>
+                            <a:srgbClr val="CBD5E1"/>
                           </a:solidFill>
                           <a:latin typeface="Calibri"/>
                         </a:rPr>
@@ -11757,7 +11757,7 @@
                   </a:txBody>
                   <a:tcPr anchor="ctr" marL="100584" marR="100584" marT="36576" marB="36576">
                     <a:solidFill>
-                      <a:srgbClr val="0E1929"/>
+                      <a:srgbClr val="243247"/>
                     </a:solidFill>
                   </a:tcPr>
                 </a:tc>
@@ -11772,7 +11772,7 @@
                       <a:r>
                         <a:rPr sz="1500" b="0" i="0">
                           <a:solidFill>
-                            <a:srgbClr val="C5D2E4"/>
+                            <a:srgbClr val="CBD5E1"/>
                           </a:solidFill>
                           <a:latin typeface="Calibri"/>
                         </a:rPr>
@@ -11782,7 +11782,7 @@
                   </a:txBody>
                   <a:tcPr anchor="ctr" marL="100584" marR="100584" marT="36576" marB="36576">
                     <a:solidFill>
-                      <a:srgbClr val="121E30"/>
+                      <a:srgbClr val="2B3A50"/>
                     </a:solidFill>
                   </a:tcPr>
                 </a:tc>
@@ -11795,7 +11795,7 @@
                       <a:r>
                         <a:rPr sz="1500" b="0" i="0">
                           <a:solidFill>
-                            <a:srgbClr val="C5D2E4"/>
+                            <a:srgbClr val="CBD5E1"/>
                           </a:solidFill>
                           <a:latin typeface="Calibri"/>
                         </a:rPr>
@@ -11805,7 +11805,7 @@
                   </a:txBody>
                   <a:tcPr anchor="ctr" marL="100584" marR="100584" marT="36576" marB="36576">
                     <a:solidFill>
-                      <a:srgbClr val="121E30"/>
+                      <a:srgbClr val="2B3A50"/>
                     </a:solidFill>
                   </a:tcPr>
                 </a:tc>
@@ -11818,7 +11818,7 @@
                       <a:r>
                         <a:rPr sz="1500" b="0" i="0">
                           <a:solidFill>
-                            <a:srgbClr val="C5D2E4"/>
+                            <a:srgbClr val="CBD5E1"/>
                           </a:solidFill>
                           <a:latin typeface="Calibri"/>
                         </a:rPr>
@@ -11828,7 +11828,7 @@
                   </a:txBody>
                   <a:tcPr anchor="ctr" marL="100584" marR="100584" marT="36576" marB="36576">
                     <a:solidFill>
-                      <a:srgbClr val="121E30"/>
+                      <a:srgbClr val="2B3A50"/>
                     </a:solidFill>
                   </a:tcPr>
                 </a:tc>
@@ -11843,7 +11843,7 @@
                       <a:r>
                         <a:rPr sz="1500" b="0" i="0">
                           <a:solidFill>
-                            <a:srgbClr val="C5D2E4"/>
+                            <a:srgbClr val="CBD5E1"/>
                           </a:solidFill>
                           <a:latin typeface="Calibri"/>
                         </a:rPr>
@@ -11853,7 +11853,7 @@
                   </a:txBody>
                   <a:tcPr anchor="ctr" marL="100584" marR="100584" marT="36576" marB="36576">
                     <a:solidFill>
-                      <a:srgbClr val="0E1929"/>
+                      <a:srgbClr val="243247"/>
                     </a:solidFill>
                   </a:tcPr>
                 </a:tc>
@@ -11866,7 +11866,7 @@
                       <a:r>
                         <a:rPr sz="1500" b="0" i="0">
                           <a:solidFill>
-                            <a:srgbClr val="C5D2E4"/>
+                            <a:srgbClr val="CBD5E1"/>
                           </a:solidFill>
                           <a:latin typeface="Calibri"/>
                         </a:rPr>
@@ -11876,7 +11876,7 @@
                   </a:txBody>
                   <a:tcPr anchor="ctr" marL="100584" marR="100584" marT="36576" marB="36576">
                     <a:solidFill>
-                      <a:srgbClr val="0E1929"/>
+                      <a:srgbClr val="243247"/>
                     </a:solidFill>
                   </a:tcPr>
                 </a:tc>
@@ -11889,7 +11889,7 @@
                       <a:r>
                         <a:rPr sz="1500" b="0" i="0">
                           <a:solidFill>
-                            <a:srgbClr val="C5D2E4"/>
+                            <a:srgbClr val="CBD5E1"/>
                           </a:solidFill>
                           <a:latin typeface="Calibri"/>
                         </a:rPr>
@@ -11899,7 +11899,7 @@
                   </a:txBody>
                   <a:tcPr anchor="ctr" marL="100584" marR="100584" marT="36576" marB="36576">
                     <a:solidFill>
-                      <a:srgbClr val="0E1929"/>
+                      <a:srgbClr val="243247"/>
                     </a:solidFill>
                   </a:tcPr>
                 </a:tc>
@@ -11914,7 +11914,7 @@
                       <a:r>
                         <a:rPr sz="1500" b="0" i="0">
                           <a:solidFill>
-                            <a:srgbClr val="C5D2E4"/>
+                            <a:srgbClr val="CBD5E1"/>
                           </a:solidFill>
                           <a:latin typeface="Calibri"/>
                         </a:rPr>
@@ -11924,7 +11924,7 @@
                   </a:txBody>
                   <a:tcPr anchor="ctr" marL="100584" marR="100584" marT="36576" marB="36576">
                     <a:solidFill>
-                      <a:srgbClr val="121E30"/>
+                      <a:srgbClr val="2B3A50"/>
                     </a:solidFill>
                   </a:tcPr>
                 </a:tc>
@@ -11937,7 +11937,7 @@
                       <a:r>
                         <a:rPr sz="1500" b="0" i="0">
                           <a:solidFill>
-                            <a:srgbClr val="C5D2E4"/>
+                            <a:srgbClr val="CBD5E1"/>
                           </a:solidFill>
                           <a:latin typeface="Calibri"/>
                         </a:rPr>
@@ -11947,7 +11947,7 @@
                   </a:txBody>
                   <a:tcPr anchor="ctr" marL="100584" marR="100584" marT="36576" marB="36576">
                     <a:solidFill>
-                      <a:srgbClr val="121E30"/>
+                      <a:srgbClr val="2B3A50"/>
                     </a:solidFill>
                   </a:tcPr>
                 </a:tc>
@@ -11960,7 +11960,7 @@
                       <a:r>
                         <a:rPr sz="1500" b="0" i="0">
                           <a:solidFill>
-                            <a:srgbClr val="C5D2E4"/>
+                            <a:srgbClr val="CBD5E1"/>
                           </a:solidFill>
                           <a:latin typeface="Calibri"/>
                         </a:rPr>
@@ -11970,7 +11970,7 @@
                   </a:txBody>
                   <a:tcPr anchor="ctr" marL="100584" marR="100584" marT="36576" marB="36576">
                     <a:solidFill>
-                      <a:srgbClr val="121E30"/>
+                      <a:srgbClr val="2B3A50"/>
                     </a:solidFill>
                   </a:tcPr>
                 </a:tc>
@@ -12017,7 +12017,7 @@
             <a:r>
               <a:rPr sz="1750" b="0" i="0">
                 <a:solidFill>
-                  <a:srgbClr val="C5D2E4"/>
+                  <a:srgbClr val="CBD5E1"/>
                 </a:solidFill>
                 <a:latin typeface="Calibri"/>
               </a:rPr>
@@ -12041,7 +12041,7 @@
             <a:r>
               <a:rPr sz="1750" b="0" i="0">
                 <a:solidFill>
-                  <a:srgbClr val="C5D2E4"/>
+                  <a:srgbClr val="CBD5E1"/>
                 </a:solidFill>
                 <a:latin typeface="Calibri"/>
               </a:rPr>
@@ -12065,7 +12065,7 @@
             <a:r>
               <a:rPr sz="1750" b="0" i="0">
                 <a:solidFill>
-                  <a:srgbClr val="C5D2E4"/>
+                  <a:srgbClr val="CBD5E1"/>
                 </a:solidFill>
                 <a:latin typeface="Calibri"/>
               </a:rPr>
@@ -12089,7 +12089,7 @@
             <a:r>
               <a:rPr sz="1750" b="0" i="0">
                 <a:solidFill>
-                  <a:srgbClr val="C5D2E4"/>
+                  <a:srgbClr val="CBD5E1"/>
                 </a:solidFill>
                 <a:latin typeface="Calibri"/>
               </a:rPr>
@@ -12112,7 +12112,7 @@
     <p:bg>
       <p:bgPr>
         <a:solidFill>
-          <a:srgbClr val="0B1220"/>
+          <a:srgbClr val="1E293B"/>
         </a:solidFill>
         <a:effectLst/>
       </p:bgPr>
@@ -12188,7 +12188,7 @@
             <a:r>
               <a:rPr sz="2900" b="1" i="0">
                 <a:solidFill>
-                  <a:srgbClr val="F2F6FB"/>
+                  <a:srgbClr val="F8FAFC"/>
                 </a:solidFill>
                 <a:latin typeface="Calibri Light"/>
               </a:rPr>
@@ -12267,7 +12267,7 @@
             <a:r>
               <a:rPr sz="1100" b="0" i="0">
                 <a:solidFill>
-                  <a:srgbClr val="55688A"/>
+                  <a:srgbClr val="8296B0"/>
                 </a:solidFill>
                 <a:latin typeface="Calibri"/>
               </a:rPr>
@@ -12314,7 +12314,7 @@
             <a:r>
               <a:rPr sz="1700" b="1" i="0">
                 <a:solidFill>
-                  <a:srgbClr val="F2F6FB"/>
+                  <a:srgbClr val="F8FAFC"/>
                 </a:solidFill>
                 <a:latin typeface="Calibri"/>
               </a:rPr>
@@ -12323,7 +12323,7 @@
             <a:r>
               <a:rPr sz="1700" b="0" i="0">
                 <a:solidFill>
-                  <a:srgbClr val="C5D2E4"/>
+                  <a:srgbClr val="CBD5E1"/>
                 </a:solidFill>
                 <a:latin typeface="Calibri"/>
               </a:rPr>
@@ -12347,7 +12347,7 @@
             <a:r>
               <a:rPr sz="1700" b="1" i="0">
                 <a:solidFill>
-                  <a:srgbClr val="F2F6FB"/>
+                  <a:srgbClr val="F8FAFC"/>
                 </a:solidFill>
                 <a:latin typeface="Calibri"/>
               </a:rPr>
@@ -12356,7 +12356,7 @@
             <a:r>
               <a:rPr sz="1700" b="0" i="0">
                 <a:solidFill>
-                  <a:srgbClr val="C5D2E4"/>
+                  <a:srgbClr val="CBD5E1"/>
                 </a:solidFill>
                 <a:latin typeface="Calibri"/>
               </a:rPr>
@@ -12374,7 +12374,7 @@
             <a:r>
               <a:rPr sz="1700" b="0" i="0">
                 <a:solidFill>
-                  <a:srgbClr val="C5D2E4"/>
+                  <a:srgbClr val="CBD5E1"/>
                 </a:solidFill>
                 <a:latin typeface="Calibri"/>
               </a:rPr>
@@ -12392,7 +12392,7 @@
             <a:r>
               <a:rPr sz="1700" b="0" i="0">
                 <a:solidFill>
-                  <a:srgbClr val="C5D2E4"/>
+                  <a:srgbClr val="CBD5E1"/>
                 </a:solidFill>
                 <a:latin typeface="Calibri"/>
               </a:rPr>
@@ -12416,7 +12416,7 @@
             <a:r>
               <a:rPr sz="1700" b="0" i="0">
                 <a:solidFill>
-                  <a:srgbClr val="C5D2E4"/>
+                  <a:srgbClr val="CBD5E1"/>
                 </a:solidFill>
                 <a:latin typeface="Calibri"/>
               </a:rPr>
@@ -12425,7 +12425,7 @@
             <a:r>
               <a:rPr sz="1700" b="0" i="1">
                 <a:solidFill>
-                  <a:srgbClr val="C5D2E4"/>
+                  <a:srgbClr val="CBD5E1"/>
                 </a:solidFill>
                 <a:latin typeface="Calibri"/>
               </a:rPr>
@@ -12434,7 +12434,7 @@
             <a:r>
               <a:rPr sz="1700" b="0" i="0">
                 <a:solidFill>
-                  <a:srgbClr val="C5D2E4"/>
+                  <a:srgbClr val="CBD5E1"/>
                 </a:solidFill>
                 <a:latin typeface="Calibri"/>
               </a:rPr>
@@ -12458,7 +12458,7 @@
             <a:r>
               <a:rPr sz="1700" b="0" i="0">
                 <a:solidFill>
-                  <a:srgbClr val="C5D2E4"/>
+                  <a:srgbClr val="CBD5E1"/>
                 </a:solidFill>
                 <a:latin typeface="Calibri"/>
               </a:rPr>
@@ -12476,7 +12476,7 @@
             <a:r>
               <a:rPr sz="1700" b="0" i="0">
                 <a:solidFill>
-                  <a:srgbClr val="C5D2E4"/>
+                  <a:srgbClr val="CBD5E1"/>
                 </a:solidFill>
                 <a:latin typeface="Calibri"/>
               </a:rPr>
@@ -12499,7 +12499,7 @@
     <p:bg>
       <p:bgPr>
         <a:solidFill>
-          <a:srgbClr val="0B1220"/>
+          <a:srgbClr val="1E293B"/>
         </a:solidFill>
         <a:effectLst/>
       </p:bgPr>
@@ -12575,7 +12575,7 @@
             <a:r>
               <a:rPr sz="2900" b="1" i="0">
                 <a:solidFill>
-                  <a:srgbClr val="F2F6FB"/>
+                  <a:srgbClr val="F8FAFC"/>
                 </a:solidFill>
                 <a:latin typeface="Calibri Light"/>
               </a:rPr>
@@ -12654,7 +12654,7 @@
             <a:r>
               <a:rPr sz="1100" b="0" i="0">
                 <a:solidFill>
-                  <a:srgbClr val="55688A"/>
+                  <a:srgbClr val="8296B0"/>
                 </a:solidFill>
                 <a:latin typeface="Calibri"/>
               </a:rPr>
@@ -12708,7 +12708,7 @@
                   </a:txBody>
                   <a:tcPr anchor="ctr" marL="100584" marR="100584" marT="36576" marB="36576">
                     <a:solidFill>
-                      <a:srgbClr val="12303A"/>
+                      <a:srgbClr val="334155"/>
                     </a:solidFill>
                   </a:tcPr>
                 </a:tc>
@@ -12731,7 +12731,7 @@
                   </a:txBody>
                   <a:tcPr anchor="ctr" marL="100584" marR="100584" marT="36576" marB="36576">
                     <a:solidFill>
-                      <a:srgbClr val="12303A"/>
+                      <a:srgbClr val="334155"/>
                     </a:solidFill>
                   </a:tcPr>
                 </a:tc>
@@ -12754,7 +12754,7 @@
                   </a:txBody>
                   <a:tcPr anchor="ctr" marL="100584" marR="100584" marT="36576" marB="36576">
                     <a:solidFill>
-                      <a:srgbClr val="12303A"/>
+                      <a:srgbClr val="334155"/>
                     </a:solidFill>
                   </a:tcPr>
                 </a:tc>
@@ -12777,7 +12777,7 @@
                   </a:txBody>
                   <a:tcPr anchor="ctr" marL="100584" marR="100584" marT="36576" marB="36576">
                     <a:solidFill>
-                      <a:srgbClr val="12303A"/>
+                      <a:srgbClr val="334155"/>
                     </a:solidFill>
                   </a:tcPr>
                 </a:tc>
@@ -12800,7 +12800,7 @@
                   </a:txBody>
                   <a:tcPr anchor="ctr" marL="100584" marR="100584" marT="36576" marB="36576">
                     <a:solidFill>
-                      <a:srgbClr val="12303A"/>
+                      <a:srgbClr val="334155"/>
                     </a:solidFill>
                   </a:tcPr>
                 </a:tc>
@@ -12815,7 +12815,7 @@
                       <a:r>
                         <a:rPr sz="1350" b="0" i="0">
                           <a:solidFill>
-                            <a:srgbClr val="C5D2E4"/>
+                            <a:srgbClr val="CBD5E1"/>
                           </a:solidFill>
                           <a:latin typeface="Calibri"/>
                         </a:rPr>
@@ -12825,7 +12825,7 @@
                   </a:txBody>
                   <a:tcPr anchor="ctr" marL="100584" marR="100584" marT="36576" marB="36576">
                     <a:solidFill>
-                      <a:srgbClr val="0E1929"/>
+                      <a:srgbClr val="243247"/>
                     </a:solidFill>
                   </a:tcPr>
                 </a:tc>
@@ -12838,7 +12838,7 @@
                       <a:r>
                         <a:rPr sz="1350" b="0" i="0">
                           <a:solidFill>
-                            <a:srgbClr val="C5D2E4"/>
+                            <a:srgbClr val="CBD5E1"/>
                           </a:solidFill>
                           <a:latin typeface="Calibri"/>
                         </a:rPr>
@@ -12848,7 +12848,7 @@
                   </a:txBody>
                   <a:tcPr anchor="ctr" marL="100584" marR="100584" marT="36576" marB="36576">
                     <a:solidFill>
-                      <a:srgbClr val="0E1929"/>
+                      <a:srgbClr val="243247"/>
                     </a:solidFill>
                   </a:tcPr>
                 </a:tc>
@@ -12861,7 +12861,7 @@
                       <a:r>
                         <a:rPr sz="1350" b="0" i="0">
                           <a:solidFill>
-                            <a:srgbClr val="C5D2E4"/>
+                            <a:srgbClr val="CBD5E1"/>
                           </a:solidFill>
                           <a:latin typeface="Calibri"/>
                         </a:rPr>
@@ -12871,7 +12871,7 @@
                   </a:txBody>
                   <a:tcPr anchor="ctr" marL="100584" marR="100584" marT="36576" marB="36576">
                     <a:solidFill>
-                      <a:srgbClr val="0E1929"/>
+                      <a:srgbClr val="243247"/>
                     </a:solidFill>
                   </a:tcPr>
                 </a:tc>
@@ -12884,7 +12884,7 @@
                       <a:r>
                         <a:rPr sz="1350" b="0" i="0">
                           <a:solidFill>
-                            <a:srgbClr val="C5D2E4"/>
+                            <a:srgbClr val="CBD5E1"/>
                           </a:solidFill>
                           <a:latin typeface="Calibri"/>
                         </a:rPr>
@@ -12894,7 +12894,7 @@
                   </a:txBody>
                   <a:tcPr anchor="ctr" marL="100584" marR="100584" marT="36576" marB="36576">
                     <a:solidFill>
-                      <a:srgbClr val="0E1929"/>
+                      <a:srgbClr val="243247"/>
                     </a:solidFill>
                   </a:tcPr>
                 </a:tc>
@@ -12907,7 +12907,7 @@
                       <a:r>
                         <a:rPr sz="1350" b="0" i="0">
                           <a:solidFill>
-                            <a:srgbClr val="C5D2E4"/>
+                            <a:srgbClr val="CBD5E1"/>
                           </a:solidFill>
                           <a:latin typeface="Calibri"/>
                         </a:rPr>
@@ -12917,7 +12917,7 @@
                   </a:txBody>
                   <a:tcPr anchor="ctr" marL="100584" marR="100584" marT="36576" marB="36576">
                     <a:solidFill>
-                      <a:srgbClr val="0E1929"/>
+                      <a:srgbClr val="243247"/>
                     </a:solidFill>
                   </a:tcPr>
                 </a:tc>
@@ -12932,7 +12932,7 @@
                       <a:r>
                         <a:rPr sz="1350" b="0" i="0">
                           <a:solidFill>
-                            <a:srgbClr val="C5D2E4"/>
+                            <a:srgbClr val="CBD5E1"/>
                           </a:solidFill>
                           <a:latin typeface="Calibri"/>
                         </a:rPr>
@@ -12942,7 +12942,7 @@
                   </a:txBody>
                   <a:tcPr anchor="ctr" marL="100584" marR="100584" marT="36576" marB="36576">
                     <a:solidFill>
-                      <a:srgbClr val="121E30"/>
+                      <a:srgbClr val="2B3A50"/>
                     </a:solidFill>
                   </a:tcPr>
                 </a:tc>
@@ -12955,7 +12955,7 @@
                       <a:r>
                         <a:rPr sz="1350" b="0" i="0">
                           <a:solidFill>
-                            <a:srgbClr val="C5D2E4"/>
+                            <a:srgbClr val="CBD5E1"/>
                           </a:solidFill>
                           <a:latin typeface="Calibri"/>
                         </a:rPr>
@@ -12965,7 +12965,7 @@
                   </a:txBody>
                   <a:tcPr anchor="ctr" marL="100584" marR="100584" marT="36576" marB="36576">
                     <a:solidFill>
-                      <a:srgbClr val="121E30"/>
+                      <a:srgbClr val="2B3A50"/>
                     </a:solidFill>
                   </a:tcPr>
                 </a:tc>
@@ -12978,7 +12978,7 @@
                       <a:r>
                         <a:rPr sz="1350" b="0" i="0">
                           <a:solidFill>
-                            <a:srgbClr val="C5D2E4"/>
+                            <a:srgbClr val="CBD5E1"/>
                           </a:solidFill>
                           <a:latin typeface="Calibri"/>
                         </a:rPr>
@@ -12988,7 +12988,7 @@
                   </a:txBody>
                   <a:tcPr anchor="ctr" marL="100584" marR="100584" marT="36576" marB="36576">
                     <a:solidFill>
-                      <a:srgbClr val="121E30"/>
+                      <a:srgbClr val="2B3A50"/>
                     </a:solidFill>
                   </a:tcPr>
                 </a:tc>
@@ -13001,7 +13001,7 @@
                       <a:r>
                         <a:rPr sz="1350" b="0" i="0">
                           <a:solidFill>
-                            <a:srgbClr val="C5D2E4"/>
+                            <a:srgbClr val="CBD5E1"/>
                           </a:solidFill>
                           <a:latin typeface="Calibri"/>
                         </a:rPr>
@@ -13011,7 +13011,7 @@
                   </a:txBody>
                   <a:tcPr anchor="ctr" marL="100584" marR="100584" marT="36576" marB="36576">
                     <a:solidFill>
-                      <a:srgbClr val="121E30"/>
+                      <a:srgbClr val="2B3A50"/>
                     </a:solidFill>
                   </a:tcPr>
                 </a:tc>
@@ -13024,7 +13024,7 @@
                       <a:r>
                         <a:rPr sz="1350" b="0" i="0">
                           <a:solidFill>
-                            <a:srgbClr val="C5D2E4"/>
+                            <a:srgbClr val="CBD5E1"/>
                           </a:solidFill>
                           <a:latin typeface="Calibri"/>
                         </a:rPr>
@@ -13034,7 +13034,7 @@
                   </a:txBody>
                   <a:tcPr anchor="ctr" marL="100584" marR="100584" marT="36576" marB="36576">
                     <a:solidFill>
-                      <a:srgbClr val="121E30"/>
+                      <a:srgbClr val="2B3A50"/>
                     </a:solidFill>
                   </a:tcPr>
                 </a:tc>
@@ -13049,7 +13049,7 @@
                       <a:r>
                         <a:rPr sz="1350" b="0" i="0">
                           <a:solidFill>
-                            <a:srgbClr val="C5D2E4"/>
+                            <a:srgbClr val="CBD5E1"/>
                           </a:solidFill>
                           <a:latin typeface="Calibri"/>
                         </a:rPr>
@@ -13059,7 +13059,7 @@
                   </a:txBody>
                   <a:tcPr anchor="ctr" marL="100584" marR="100584" marT="36576" marB="36576">
                     <a:solidFill>
-                      <a:srgbClr val="0E1929"/>
+                      <a:srgbClr val="243247"/>
                     </a:solidFill>
                   </a:tcPr>
                 </a:tc>
@@ -13072,7 +13072,7 @@
                       <a:r>
                         <a:rPr sz="1350" b="0" i="0">
                           <a:solidFill>
-                            <a:srgbClr val="C5D2E4"/>
+                            <a:srgbClr val="CBD5E1"/>
                           </a:solidFill>
                           <a:latin typeface="Calibri"/>
                         </a:rPr>
@@ -13082,7 +13082,7 @@
                   </a:txBody>
                   <a:tcPr anchor="ctr" marL="100584" marR="100584" marT="36576" marB="36576">
                     <a:solidFill>
-                      <a:srgbClr val="0E1929"/>
+                      <a:srgbClr val="243247"/>
                     </a:solidFill>
                   </a:tcPr>
                 </a:tc>
@@ -13095,7 +13095,7 @@
                       <a:r>
                         <a:rPr sz="1350" b="0" i="0">
                           <a:solidFill>
-                            <a:srgbClr val="C5D2E4"/>
+                            <a:srgbClr val="CBD5E1"/>
                           </a:solidFill>
                           <a:latin typeface="Calibri"/>
                         </a:rPr>
@@ -13105,7 +13105,7 @@
                   </a:txBody>
                   <a:tcPr anchor="ctr" marL="100584" marR="100584" marT="36576" marB="36576">
                     <a:solidFill>
-                      <a:srgbClr val="0E1929"/>
+                      <a:srgbClr val="243247"/>
                     </a:solidFill>
                   </a:tcPr>
                 </a:tc>
@@ -13118,7 +13118,7 @@
                       <a:r>
                         <a:rPr sz="1350" b="0" i="0">
                           <a:solidFill>
-                            <a:srgbClr val="C5D2E4"/>
+                            <a:srgbClr val="CBD5E1"/>
                           </a:solidFill>
                           <a:latin typeface="Calibri"/>
                         </a:rPr>
@@ -13128,7 +13128,7 @@
                   </a:txBody>
                   <a:tcPr anchor="ctr" marL="100584" marR="100584" marT="36576" marB="36576">
                     <a:solidFill>
-                      <a:srgbClr val="0E1929"/>
+                      <a:srgbClr val="243247"/>
                     </a:solidFill>
                   </a:tcPr>
                 </a:tc>
@@ -13141,7 +13141,7 @@
                       <a:r>
                         <a:rPr sz="1350" b="0" i="0">
                           <a:solidFill>
-                            <a:srgbClr val="C5D2E4"/>
+                            <a:srgbClr val="CBD5E1"/>
                           </a:solidFill>
                           <a:latin typeface="Calibri"/>
                         </a:rPr>
@@ -13151,7 +13151,7 @@
                   </a:txBody>
                   <a:tcPr anchor="ctr" marL="100584" marR="100584" marT="36576" marB="36576">
                     <a:solidFill>
-                      <a:srgbClr val="0E1929"/>
+                      <a:srgbClr val="243247"/>
                     </a:solidFill>
                   </a:tcPr>
                 </a:tc>
@@ -13166,7 +13166,7 @@
                       <a:r>
                         <a:rPr sz="1350" b="0" i="0">
                           <a:solidFill>
-                            <a:srgbClr val="C5D2E4"/>
+                            <a:srgbClr val="CBD5E1"/>
                           </a:solidFill>
                           <a:latin typeface="Calibri"/>
                         </a:rPr>
@@ -13176,7 +13176,7 @@
                   </a:txBody>
                   <a:tcPr anchor="ctr" marL="100584" marR="100584" marT="36576" marB="36576">
                     <a:solidFill>
-                      <a:srgbClr val="121E30"/>
+                      <a:srgbClr val="2B3A50"/>
                     </a:solidFill>
                   </a:tcPr>
                 </a:tc>
@@ -13189,7 +13189,7 @@
                       <a:r>
                         <a:rPr sz="1350" b="0" i="0">
                           <a:solidFill>
-                            <a:srgbClr val="C5D2E4"/>
+                            <a:srgbClr val="CBD5E1"/>
                           </a:solidFill>
                           <a:latin typeface="Calibri"/>
                         </a:rPr>
@@ -13199,7 +13199,7 @@
                   </a:txBody>
                   <a:tcPr anchor="ctr" marL="100584" marR="100584" marT="36576" marB="36576">
                     <a:solidFill>
-                      <a:srgbClr val="121E30"/>
+                      <a:srgbClr val="2B3A50"/>
                     </a:solidFill>
                   </a:tcPr>
                 </a:tc>
@@ -13212,7 +13212,7 @@
                       <a:r>
                         <a:rPr sz="1350" b="0" i="0">
                           <a:solidFill>
-                            <a:srgbClr val="C5D2E4"/>
+                            <a:srgbClr val="CBD5E1"/>
                           </a:solidFill>
                           <a:latin typeface="Calibri"/>
                         </a:rPr>
@@ -13222,7 +13222,7 @@
                   </a:txBody>
                   <a:tcPr anchor="ctr" marL="100584" marR="100584" marT="36576" marB="36576">
                     <a:solidFill>
-                      <a:srgbClr val="121E30"/>
+                      <a:srgbClr val="2B3A50"/>
                     </a:solidFill>
                   </a:tcPr>
                 </a:tc>
@@ -13235,7 +13235,7 @@
                       <a:r>
                         <a:rPr sz="1350" b="0" i="0">
                           <a:solidFill>
-                            <a:srgbClr val="C5D2E4"/>
+                            <a:srgbClr val="CBD5E1"/>
                           </a:solidFill>
                           <a:latin typeface="Calibri"/>
                         </a:rPr>
@@ -13245,7 +13245,7 @@
                   </a:txBody>
                   <a:tcPr anchor="ctr" marL="100584" marR="100584" marT="36576" marB="36576">
                     <a:solidFill>
-                      <a:srgbClr val="121E30"/>
+                      <a:srgbClr val="2B3A50"/>
                     </a:solidFill>
                   </a:tcPr>
                 </a:tc>
@@ -13258,7 +13258,7 @@
                       <a:r>
                         <a:rPr sz="1350" b="0" i="0">
                           <a:solidFill>
-                            <a:srgbClr val="C5D2E4"/>
+                            <a:srgbClr val="CBD5E1"/>
                           </a:solidFill>
                           <a:latin typeface="Calibri"/>
                         </a:rPr>
@@ -13268,7 +13268,7 @@
                   </a:txBody>
                   <a:tcPr anchor="ctr" marL="100584" marR="100584" marT="36576" marB="36576">
                     <a:solidFill>
-                      <a:srgbClr val="121E30"/>
+                      <a:srgbClr val="2B3A50"/>
                     </a:solidFill>
                   </a:tcPr>
                 </a:tc>
@@ -13315,7 +13315,7 @@
             <a:r>
               <a:rPr sz="1600" b="0" i="0">
                 <a:solidFill>
-                  <a:srgbClr val="C5D2E4"/>
+                  <a:srgbClr val="CBD5E1"/>
                 </a:solidFill>
                 <a:latin typeface="Calibri"/>
               </a:rPr>
@@ -13339,7 +13339,7 @@
             <a:r>
               <a:rPr sz="1600" b="0" i="0">
                 <a:solidFill>
-                  <a:srgbClr val="C5D2E4"/>
+                  <a:srgbClr val="CBD5E1"/>
                 </a:solidFill>
                 <a:latin typeface="Calibri"/>
               </a:rPr>
@@ -13363,7 +13363,7 @@
             <a:r>
               <a:rPr sz="1600" b="0" i="0">
                 <a:solidFill>
-                  <a:srgbClr val="C5D2E4"/>
+                  <a:srgbClr val="CBD5E1"/>
                 </a:solidFill>
                 <a:latin typeface="Calibri"/>
               </a:rPr>
@@ -13386,7 +13386,7 @@
     <p:bg>
       <p:bgPr>
         <a:solidFill>
-          <a:srgbClr val="0B1220"/>
+          <a:srgbClr val="1E293B"/>
         </a:solidFill>
         <a:effectLst/>
       </p:bgPr>
@@ -13462,7 +13462,7 @@
             <a:r>
               <a:rPr sz="2900" b="1" i="0">
                 <a:solidFill>
-                  <a:srgbClr val="F2F6FB"/>
+                  <a:srgbClr val="F8FAFC"/>
                 </a:solidFill>
                 <a:latin typeface="Calibri Light"/>
               </a:rPr>
@@ -13541,7 +13541,7 @@
             <a:r>
               <a:rPr sz="1100" b="0" i="0">
                 <a:solidFill>
-                  <a:srgbClr val="55688A"/>
+                  <a:srgbClr val="8296B0"/>
                 </a:solidFill>
                 <a:latin typeface="Calibri"/>
               </a:rPr>
@@ -13588,7 +13588,7 @@
             <a:r>
               <a:rPr sz="1700" b="1" i="0">
                 <a:solidFill>
-                  <a:srgbClr val="F2F6FB"/>
+                  <a:srgbClr val="F8FAFC"/>
                 </a:solidFill>
                 <a:latin typeface="Calibri"/>
               </a:rPr>
@@ -13597,7 +13597,7 @@
             <a:r>
               <a:rPr sz="1700" b="0" i="0">
                 <a:solidFill>
-                  <a:srgbClr val="C5D2E4"/>
+                  <a:srgbClr val="CBD5E1"/>
                 </a:solidFill>
                 <a:latin typeface="Calibri"/>
               </a:rPr>
@@ -13621,7 +13621,7 @@
             <a:r>
               <a:rPr sz="1700" b="0" i="0">
                 <a:solidFill>
-                  <a:srgbClr val="C5D2E4"/>
+                  <a:srgbClr val="CBD5E1"/>
                 </a:solidFill>
                 <a:latin typeface="Calibri"/>
               </a:rPr>
@@ -13639,7 +13639,7 @@
             <a:r>
               <a:rPr sz="1700" b="0" i="0">
                 <a:solidFill>
-                  <a:srgbClr val="C5D2E4"/>
+                  <a:srgbClr val="CBD5E1"/>
                 </a:solidFill>
                 <a:latin typeface="Calibri"/>
               </a:rPr>
@@ -13657,7 +13657,7 @@
             <a:r>
               <a:rPr sz="1700" b="0" i="0">
                 <a:solidFill>
-                  <a:srgbClr val="C5D2E4"/>
+                  <a:srgbClr val="CBD5E1"/>
                 </a:solidFill>
                 <a:latin typeface="Calibri"/>
               </a:rPr>
@@ -13666,7 +13666,7 @@
             <a:r>
               <a:rPr sz="1700" b="0" i="1">
                 <a:solidFill>
-                  <a:srgbClr val="93A6C0"/>
+                  <a:srgbClr val="94A3B8"/>
                 </a:solidFill>
                 <a:latin typeface="Calibri"/>
               </a:rPr>
@@ -13675,7 +13675,7 @@
             <a:r>
               <a:rPr sz="1700" b="0" i="0">
                 <a:solidFill>
-                  <a:srgbClr val="C5D2E4"/>
+                  <a:srgbClr val="CBD5E1"/>
                 </a:solidFill>
                 <a:latin typeface="Calibri"/>
               </a:rPr>
@@ -13684,7 +13684,7 @@
             <a:r>
               <a:rPr sz="1700" b="0" i="1">
                 <a:solidFill>
-                  <a:srgbClr val="93A6C0"/>
+                  <a:srgbClr val="94A3B8"/>
                 </a:solidFill>
                 <a:latin typeface="Calibri"/>
               </a:rPr>
@@ -13693,7 +13693,7 @@
             <a:r>
               <a:rPr sz="1700" b="0" i="0">
                 <a:solidFill>
-                  <a:srgbClr val="C5D2E4"/>
+                  <a:srgbClr val="CBD5E1"/>
                 </a:solidFill>
                 <a:latin typeface="Calibri"/>
               </a:rPr>
@@ -13717,7 +13717,7 @@
             <a:r>
               <a:rPr sz="1700" b="1" i="0">
                 <a:solidFill>
-                  <a:srgbClr val="F2F6FB"/>
+                  <a:srgbClr val="F8FAFC"/>
                 </a:solidFill>
                 <a:latin typeface="Calibri"/>
               </a:rPr>
@@ -13726,7 +13726,7 @@
             <a:r>
               <a:rPr sz="1700" b="0" i="0">
                 <a:solidFill>
-                  <a:srgbClr val="C5D2E4"/>
+                  <a:srgbClr val="CBD5E1"/>
                 </a:solidFill>
                 <a:latin typeface="Calibri"/>
               </a:rPr>
@@ -13750,7 +13750,7 @@
             <a:r>
               <a:rPr sz="1700" b="0" i="0">
                 <a:solidFill>
-                  <a:srgbClr val="C5D2E4"/>
+                  <a:srgbClr val="CBD5E1"/>
                 </a:solidFill>
                 <a:latin typeface="Calibri"/>
               </a:rPr>
@@ -13773,7 +13773,7 @@
     <p:bg>
       <p:bgPr>
         <a:solidFill>
-          <a:srgbClr val="0B1220"/>
+          <a:srgbClr val="1E293B"/>
         </a:solidFill>
         <a:effectLst/>
       </p:bgPr>
@@ -13835,7 +13835,7 @@
             <a:r>
               <a:rPr sz="1100" b="0" i="0">
                 <a:solidFill>
-                  <a:srgbClr val="55688A"/>
+                  <a:srgbClr val="8296B0"/>
                 </a:solidFill>
                 <a:latin typeface="Calibri"/>
               </a:rPr>
@@ -13858,7 +13858,7 @@
     <p:bg>
       <p:bgPr>
         <a:solidFill>
-          <a:srgbClr val="0B1220"/>
+          <a:srgbClr val="1E293B"/>
         </a:solidFill>
         <a:effectLst/>
       </p:bgPr>
@@ -13934,7 +13934,7 @@
             <a:r>
               <a:rPr sz="2900" b="1" i="0">
                 <a:solidFill>
-                  <a:srgbClr val="F2F6FB"/>
+                  <a:srgbClr val="F8FAFC"/>
                 </a:solidFill>
                 <a:latin typeface="Calibri Light"/>
               </a:rPr>
@@ -14013,7 +14013,7 @@
             <a:r>
               <a:rPr sz="1100" b="0" i="0">
                 <a:solidFill>
-                  <a:srgbClr val="55688A"/>
+                  <a:srgbClr val="8296B0"/>
                 </a:solidFill>
                 <a:latin typeface="Calibri"/>
               </a:rPr>
@@ -14065,7 +14065,7 @@
                   </a:txBody>
                   <a:tcPr anchor="ctr" marL="100584" marR="100584" marT="36576" marB="36576">
                     <a:solidFill>
-                      <a:srgbClr val="12303A"/>
+                      <a:srgbClr val="334155"/>
                     </a:solidFill>
                   </a:tcPr>
                 </a:tc>
@@ -14088,7 +14088,7 @@
                   </a:txBody>
                   <a:tcPr anchor="ctr" marL="100584" marR="100584" marT="36576" marB="36576">
                     <a:solidFill>
-                      <a:srgbClr val="12303A"/>
+                      <a:srgbClr val="334155"/>
                     </a:solidFill>
                   </a:tcPr>
                 </a:tc>
@@ -14111,7 +14111,7 @@
                   </a:txBody>
                   <a:tcPr anchor="ctr" marL="100584" marR="100584" marT="36576" marB="36576">
                     <a:solidFill>
-                      <a:srgbClr val="12303A"/>
+                      <a:srgbClr val="334155"/>
                     </a:solidFill>
                   </a:tcPr>
                 </a:tc>
@@ -14126,7 +14126,7 @@
                       <a:r>
                         <a:rPr sz="1350" b="0" i="0">
                           <a:solidFill>
-                            <a:srgbClr val="C5D2E4"/>
+                            <a:srgbClr val="CBD5E1"/>
                           </a:solidFill>
                           <a:latin typeface="Calibri"/>
                         </a:rPr>
@@ -14136,7 +14136,7 @@
                   </a:txBody>
                   <a:tcPr anchor="ctr" marL="100584" marR="100584" marT="36576" marB="36576">
                     <a:solidFill>
-                      <a:srgbClr val="0E1929"/>
+                      <a:srgbClr val="243247"/>
                     </a:solidFill>
                   </a:tcPr>
                 </a:tc>
@@ -14149,7 +14149,7 @@
                       <a:r>
                         <a:rPr sz="1350" b="0" i="0">
                           <a:solidFill>
-                            <a:srgbClr val="C5D2E4"/>
+                            <a:srgbClr val="CBD5E1"/>
                           </a:solidFill>
                           <a:latin typeface="Calibri"/>
                         </a:rPr>
@@ -14159,7 +14159,7 @@
                   </a:txBody>
                   <a:tcPr anchor="ctr" marL="100584" marR="100584" marT="36576" marB="36576">
                     <a:solidFill>
-                      <a:srgbClr val="0E1929"/>
+                      <a:srgbClr val="243247"/>
                     </a:solidFill>
                   </a:tcPr>
                 </a:tc>
@@ -14172,7 +14172,7 @@
                       <a:r>
                         <a:rPr sz="1350" b="0" i="0">
                           <a:solidFill>
-                            <a:srgbClr val="C5D2E4"/>
+                            <a:srgbClr val="CBD5E1"/>
                           </a:solidFill>
                           <a:latin typeface="Calibri"/>
                         </a:rPr>
@@ -14182,7 +14182,7 @@
                   </a:txBody>
                   <a:tcPr anchor="ctr" marL="100584" marR="100584" marT="36576" marB="36576">
                     <a:solidFill>
-                      <a:srgbClr val="0E1929"/>
+                      <a:srgbClr val="243247"/>
                     </a:solidFill>
                   </a:tcPr>
                 </a:tc>
@@ -14197,7 +14197,7 @@
                       <a:r>
                         <a:rPr sz="1350" b="0" i="0">
                           <a:solidFill>
-                            <a:srgbClr val="C5D2E4"/>
+                            <a:srgbClr val="CBD5E1"/>
                           </a:solidFill>
                           <a:latin typeface="Calibri"/>
                         </a:rPr>
@@ -14207,7 +14207,7 @@
                   </a:txBody>
                   <a:tcPr anchor="ctr" marL="100584" marR="100584" marT="36576" marB="36576">
                     <a:solidFill>
-                      <a:srgbClr val="121E30"/>
+                      <a:srgbClr val="2B3A50"/>
                     </a:solidFill>
                   </a:tcPr>
                 </a:tc>
@@ -14220,7 +14220,7 @@
                       <a:r>
                         <a:rPr sz="1350" b="0" i="0">
                           <a:solidFill>
-                            <a:srgbClr val="C5D2E4"/>
+                            <a:srgbClr val="CBD5E1"/>
                           </a:solidFill>
                           <a:latin typeface="Calibri"/>
                         </a:rPr>
@@ -14230,7 +14230,7 @@
                   </a:txBody>
                   <a:tcPr anchor="ctr" marL="100584" marR="100584" marT="36576" marB="36576">
                     <a:solidFill>
-                      <a:srgbClr val="121E30"/>
+                      <a:srgbClr val="2B3A50"/>
                     </a:solidFill>
                   </a:tcPr>
                 </a:tc>
@@ -14243,7 +14243,7 @@
                       <a:r>
                         <a:rPr sz="1350" b="0" i="0">
                           <a:solidFill>
-                            <a:srgbClr val="C5D2E4"/>
+                            <a:srgbClr val="CBD5E1"/>
                           </a:solidFill>
                           <a:latin typeface="Calibri"/>
                         </a:rPr>
@@ -14253,7 +14253,7 @@
                   </a:txBody>
                   <a:tcPr anchor="ctr" marL="100584" marR="100584" marT="36576" marB="36576">
                     <a:solidFill>
-                      <a:srgbClr val="121E30"/>
+                      <a:srgbClr val="2B3A50"/>
                     </a:solidFill>
                   </a:tcPr>
                 </a:tc>
@@ -14268,7 +14268,7 @@
                       <a:r>
                         <a:rPr sz="1350" b="0" i="0">
                           <a:solidFill>
-                            <a:srgbClr val="C5D2E4"/>
+                            <a:srgbClr val="CBD5E1"/>
                           </a:solidFill>
                           <a:latin typeface="Calibri"/>
                         </a:rPr>
@@ -14278,7 +14278,7 @@
                   </a:txBody>
                   <a:tcPr anchor="ctr" marL="100584" marR="100584" marT="36576" marB="36576">
                     <a:solidFill>
-                      <a:srgbClr val="0E1929"/>
+                      <a:srgbClr val="243247"/>
                     </a:solidFill>
                   </a:tcPr>
                 </a:tc>
@@ -14291,7 +14291,7 @@
                       <a:r>
                         <a:rPr sz="1350" b="0" i="0">
                           <a:solidFill>
-                            <a:srgbClr val="C5D2E4"/>
+                            <a:srgbClr val="CBD5E1"/>
                           </a:solidFill>
                           <a:latin typeface="Calibri"/>
                         </a:rPr>
@@ -14301,7 +14301,7 @@
                   </a:txBody>
                   <a:tcPr anchor="ctr" marL="100584" marR="100584" marT="36576" marB="36576">
                     <a:solidFill>
-                      <a:srgbClr val="0E1929"/>
+                      <a:srgbClr val="243247"/>
                     </a:solidFill>
                   </a:tcPr>
                 </a:tc>
@@ -14314,7 +14314,7 @@
                       <a:r>
                         <a:rPr sz="1350" b="0" i="0">
                           <a:solidFill>
-                            <a:srgbClr val="C5D2E4"/>
+                            <a:srgbClr val="CBD5E1"/>
                           </a:solidFill>
                           <a:latin typeface="Calibri"/>
                         </a:rPr>
@@ -14324,7 +14324,7 @@
                   </a:txBody>
                   <a:tcPr anchor="ctr" marL="100584" marR="100584" marT="36576" marB="36576">
                     <a:solidFill>
-                      <a:srgbClr val="0E1929"/>
+                      <a:srgbClr val="243247"/>
                     </a:solidFill>
                   </a:tcPr>
                 </a:tc>
@@ -14339,7 +14339,7 @@
                       <a:r>
                         <a:rPr sz="1350" b="0" i="0">
                           <a:solidFill>
-                            <a:srgbClr val="C5D2E4"/>
+                            <a:srgbClr val="CBD5E1"/>
                           </a:solidFill>
                           <a:latin typeface="Calibri"/>
                         </a:rPr>
@@ -14349,7 +14349,7 @@
                   </a:txBody>
                   <a:tcPr anchor="ctr" marL="100584" marR="100584" marT="36576" marB="36576">
                     <a:solidFill>
-                      <a:srgbClr val="121E30"/>
+                      <a:srgbClr val="2B3A50"/>
                     </a:solidFill>
                   </a:tcPr>
                 </a:tc>
@@ -14362,7 +14362,7 @@
                       <a:r>
                         <a:rPr sz="1350" b="0" i="0">
                           <a:solidFill>
-                            <a:srgbClr val="C5D2E4"/>
+                            <a:srgbClr val="CBD5E1"/>
                           </a:solidFill>
                           <a:latin typeface="Calibri"/>
                         </a:rPr>
@@ -14372,7 +14372,7 @@
                   </a:txBody>
                   <a:tcPr anchor="ctr" marL="100584" marR="100584" marT="36576" marB="36576">
                     <a:solidFill>
-                      <a:srgbClr val="121E30"/>
+                      <a:srgbClr val="2B3A50"/>
                     </a:solidFill>
                   </a:tcPr>
                 </a:tc>
@@ -14385,7 +14385,7 @@
                       <a:r>
                         <a:rPr sz="1350" b="0" i="0">
                           <a:solidFill>
-                            <a:srgbClr val="C5D2E4"/>
+                            <a:srgbClr val="CBD5E1"/>
                           </a:solidFill>
                           <a:latin typeface="Calibri"/>
                         </a:rPr>
@@ -14395,7 +14395,7 @@
                   </a:txBody>
                   <a:tcPr anchor="ctr" marL="100584" marR="100584" marT="36576" marB="36576">
                     <a:solidFill>
-                      <a:srgbClr val="121E30"/>
+                      <a:srgbClr val="2B3A50"/>
                     </a:solidFill>
                   </a:tcPr>
                 </a:tc>
@@ -14410,7 +14410,7 @@
                       <a:r>
                         <a:rPr sz="1350" b="1" i="0">
                           <a:solidFill>
-                            <a:srgbClr val="F2F6FB"/>
+                            <a:srgbClr val="F8FAFC"/>
                           </a:solidFill>
                           <a:latin typeface="Calibri"/>
                         </a:rPr>
@@ -14420,7 +14420,7 @@
                   </a:txBody>
                   <a:tcPr anchor="ctr" marL="100584" marR="100584" marT="36576" marB="36576">
                     <a:solidFill>
-                      <a:srgbClr val="12303A"/>
+                      <a:srgbClr val="334155"/>
                     </a:solidFill>
                   </a:tcPr>
                 </a:tc>
@@ -14433,7 +14433,7 @@
                       <a:r>
                         <a:rPr sz="1350" b="1" i="0">
                           <a:solidFill>
-                            <a:srgbClr val="F2F6FB"/>
+                            <a:srgbClr val="F8FAFC"/>
                           </a:solidFill>
                           <a:latin typeface="Calibri"/>
                         </a:rPr>
@@ -14443,7 +14443,7 @@
                   </a:txBody>
                   <a:tcPr anchor="ctr" marL="100584" marR="100584" marT="36576" marB="36576">
                     <a:solidFill>
-                      <a:srgbClr val="12303A"/>
+                      <a:srgbClr val="334155"/>
                     </a:solidFill>
                   </a:tcPr>
                 </a:tc>
@@ -14456,7 +14456,7 @@
                       <a:r>
                         <a:rPr sz="1350" b="1" i="0">
                           <a:solidFill>
-                            <a:srgbClr val="F2F6FB"/>
+                            <a:srgbClr val="F8FAFC"/>
                           </a:solidFill>
                           <a:latin typeface="Calibri"/>
                         </a:rPr>
@@ -14466,7 +14466,7 @@
                   </a:txBody>
                   <a:tcPr anchor="ctr" marL="100584" marR="100584" marT="36576" marB="36576">
                     <a:solidFill>
-                      <a:srgbClr val="12303A"/>
+                      <a:srgbClr val="334155"/>
                     </a:solidFill>
                   </a:tcPr>
                 </a:tc>
@@ -14513,7 +14513,7 @@
             <a:r>
               <a:rPr sz="1600" b="0" i="0">
                 <a:solidFill>
-                  <a:srgbClr val="C5D2E4"/>
+                  <a:srgbClr val="CBD5E1"/>
                 </a:solidFill>
                 <a:latin typeface="Calibri"/>
               </a:rPr>
@@ -14537,7 +14537,7 @@
             <a:r>
               <a:rPr sz="1600" b="0" i="0">
                 <a:solidFill>
-                  <a:srgbClr val="C5D2E4"/>
+                  <a:srgbClr val="CBD5E1"/>
                 </a:solidFill>
                 <a:latin typeface="Calibri"/>
               </a:rPr>
@@ -14561,7 +14561,7 @@
             <a:r>
               <a:rPr sz="1600" b="0" i="0">
                 <a:solidFill>
-                  <a:srgbClr val="C5D2E4"/>
+                  <a:srgbClr val="CBD5E1"/>
                 </a:solidFill>
                 <a:latin typeface="Calibri"/>
               </a:rPr>

--- a/report/CS221_slide.pptx
+++ b/report/CS221_slide.pptx
@@ -11362,7 +11362,7 @@
       <p:grpSpPr/>
       <p:pic>
         <p:nvPicPr>
-          <p:cNvPr id="2" name="Picture 1" descr="pipeline_dark.png"/>
+          <p:cNvPr id="2" name="Picture 1" descr="pipeline_slate.png"/>
           <p:cNvPicPr>
             <a:picLocks noChangeAspect="1"/>
           </p:cNvPicPr>
@@ -13787,7 +13787,7 @@
       <p:grpSpPr/>
       <p:pic>
         <p:nvPicPr>
-          <p:cNvPr id="2" name="Picture 1" descr="evaluation_dark.png"/>
+          <p:cNvPr id="2" name="Picture 1" descr="evaluation_slate.png"/>
           <p:cNvPicPr>
             <a:picLocks noChangeAspect="1"/>
           </p:cNvPicPr>
